--- a/Programacion II/Clases/Clase 11 - Revision de codigo cruzada/Presentacion.pptx
+++ b/Programacion II/Clases/Clase 11 - Revision de codigo cruzada/Presentacion.pptx
@@ -18,6 +18,13 @@
     <p:sldId id="266" r:id="rId17"/>
     <p:sldId id="267" r:id="rId18"/>
     <p:sldId id="268" r:id="rId19"/>
+    <p:sldId id="269" r:id="rId20"/>
+    <p:sldId id="270" r:id="rId21"/>
+    <p:sldId id="271" r:id="rId22"/>
+    <p:sldId id="272" r:id="rId23"/>
+    <p:sldId id="273" r:id="rId24"/>
+    <p:sldId id="274" r:id="rId25"/>
+    <p:sldId id="275" r:id="rId26"/>
   </p:sldIdLst>
   <p:sldSz cx="12191695" cy="6858000" type="screen4x3"/>
   <p:notesSz cx="6858000" cy="9144000"/>
@@ -3618,154 +3625,21 @@
                 </a:solidFill>
                 <a:latin typeface="Calibri"/>
               </a:rPr>
-              <a:t>Antes de entregar — autochequeo</a:t>
-            </a:r>
-          </a:p>
-        </p:txBody>
-      </p:sp>
-      <p:sp>
-        <p:nvSpPr>
-          <p:cNvPr id="5" name="Rounded Rectangle 4"/>
-          <p:cNvSpPr/>
-          <p:nvPr/>
-        </p:nvSpPr>
-        <p:spPr>
-          <a:xfrm>
-            <a:off x="457200" y="1261872"/>
-            <a:ext cx="11277295" cy="566928"/>
-          </a:xfrm>
-          <a:prstGeom prst="roundRect">
-            <a:avLst>
-              <a:gd name="adj" fmla="val 12000"/>
-            </a:avLst>
-          </a:prstGeom>
-          <a:solidFill>
-            <a:srgbClr val="F2F2F2"/>
-          </a:solidFill>
-          <a:ln>
-            <a:noFill/>
-          </a:ln>
-        </p:spPr>
-        <p:style>
-          <a:lnRef idx="1">
-            <a:schemeClr val="accent1"/>
-          </a:lnRef>
-          <a:fillRef idx="3">
-            <a:schemeClr val="accent1"/>
-          </a:fillRef>
-          <a:effectRef idx="2">
-            <a:schemeClr val="accent1"/>
-          </a:effectRef>
-          <a:fontRef idx="minor">
-            <a:schemeClr val="lt1"/>
-          </a:fontRef>
-        </p:style>
-        <p:txBody>
-          <a:bodyPr rtlCol="0" anchor="ctr"/>
-          <a:lstStyle/>
-          <a:p>
-            <a:pPr algn="ctr"/>
-          </a:p>
-        </p:txBody>
-      </p:sp>
-      <p:sp>
-        <p:nvSpPr>
-          <p:cNvPr id="6" name="Rectangle 5"/>
-          <p:cNvSpPr/>
-          <p:nvPr/>
-        </p:nvSpPr>
-        <p:spPr>
-          <a:xfrm>
-            <a:off x="640080" y="1408175"/>
-            <a:ext cx="274320" cy="274320"/>
-          </a:xfrm>
-          <a:prstGeom prst="rect">
-            <a:avLst/>
-          </a:prstGeom>
-          <a:solidFill>
-            <a:srgbClr val="FFFFFF"/>
-          </a:solidFill>
-          <a:ln>
-            <a:solidFill>
-              <a:srgbClr val="333333"/>
-            </a:solidFill>
-          </a:ln>
-        </p:spPr>
-        <p:style>
-          <a:lnRef idx="1">
-            <a:schemeClr val="accent1"/>
-          </a:lnRef>
-          <a:fillRef idx="3">
-            <a:schemeClr val="accent1"/>
-          </a:fillRef>
-          <a:effectRef idx="2">
-            <a:schemeClr val="accent1"/>
-          </a:effectRef>
-          <a:fontRef idx="minor">
-            <a:schemeClr val="lt1"/>
-          </a:fontRef>
-        </p:style>
-        <p:txBody>
-          <a:bodyPr rtlCol="0" anchor="ctr"/>
-          <a:lstStyle/>
-          <a:p>
-            <a:pPr algn="ctr"/>
-          </a:p>
-        </p:txBody>
-      </p:sp>
-      <p:sp>
-        <p:nvSpPr>
-          <p:cNvPr id="7" name="Rectangle 6"/>
-          <p:cNvSpPr/>
-          <p:nvPr/>
-        </p:nvSpPr>
-        <p:spPr>
-          <a:xfrm>
-            <a:off x="640080" y="1408175"/>
-            <a:ext cx="73152" cy="274320"/>
-          </a:xfrm>
-          <a:prstGeom prst="rect">
-            <a:avLst/>
-          </a:prstGeom>
-          <a:solidFill>
-            <a:srgbClr val="269CCB"/>
-          </a:solidFill>
-          <a:ln>
-            <a:noFill/>
-          </a:ln>
-        </p:spPr>
-        <p:style>
-          <a:lnRef idx="1">
-            <a:schemeClr val="accent1"/>
-          </a:lnRef>
-          <a:fillRef idx="3">
-            <a:schemeClr val="accent1"/>
-          </a:fillRef>
-          <a:effectRef idx="2">
-            <a:schemeClr val="accent1"/>
-          </a:effectRef>
-          <a:fontRef idx="minor">
-            <a:schemeClr val="lt1"/>
-          </a:fontRef>
-        </p:style>
-        <p:txBody>
-          <a:bodyPr rtlCol="0" anchor="ctr"/>
-          <a:lstStyle/>
-          <a:p>
-            <a:pPr algn="ctr"/>
-          </a:p>
-        </p:txBody>
-      </p:sp>
-      <p:sp>
-        <p:nvSpPr>
-          <p:cNvPr id="8" name="TextBox 7"/>
+              <a:t>El checklist es lo que impide que la revisión se vuelva una... (2/2)</a:t>
+            </a:r>
+          </a:p>
+        </p:txBody>
+      </p:sp>
+      <p:sp>
+        <p:nvSpPr>
+          <p:cNvPr id="5" name="TextBox 4"/>
           <p:cNvSpPr txBox="1"/>
           <p:nvPr/>
         </p:nvSpPr>
         <p:spPr>
           <a:xfrm>
-            <a:off x="1097280" y="1353312"/>
-            <a:ext cx="10362895" cy="402336"/>
+            <a:off x="457200" y="1170432"/>
+            <a:ext cx="11277295" cy="5230368"/>
           </a:xfrm>
           <a:prstGeom prst="rect">
             <a:avLst/>
@@ -3773,354 +3647,111 @@
           <a:noFill/>
         </p:spPr>
         <p:txBody>
-          <a:bodyPr wrap="square" anchor="ctr"/>
-          <a:lstStyle/>
-          <a:p>
-            <a:r>
-              <a:rPr sz="1500" b="0" i="0">
+          <a:bodyPr wrap="square">
+            <a:spAutoFit/>
+          </a:bodyPr>
+          <a:lstStyle/>
+          <a:p>
+            <a:pPr>
+              <a:spcAft>
+                <a:spcPts val="800"/>
+              </a:spcAft>
+            </a:pPr>
+            <a:r>
+              <a:rPr sz="2000" b="0" i="0">
                 <a:solidFill>
                   <a:srgbClr val="333333"/>
                 </a:solidFill>
                 <a:latin typeface="Calibri"/>
               </a:rPr>
-              <a:t>¿Su informe le sirve al otro estudiante para trabajar esta misma tarde, o solo le dice que algo está mal sin decirle dónde ni qué hacer?</a:t>
-            </a:r>
-          </a:p>
-        </p:txBody>
-      </p:sp>
-      <p:sp>
-        <p:nvSpPr>
-          <p:cNvPr id="9" name="Rounded Rectangle 8"/>
-          <p:cNvSpPr/>
-          <p:nvPr/>
-        </p:nvSpPr>
-        <p:spPr>
-          <a:xfrm>
-            <a:off x="457200" y="1938528"/>
-            <a:ext cx="11277295" cy="566928"/>
-          </a:xfrm>
-          <a:prstGeom prst="roundRect">
-            <a:avLst>
-              <a:gd name="adj" fmla="val 12000"/>
-            </a:avLst>
-          </a:prstGeom>
-          <a:solidFill>
-            <a:srgbClr val="F2F2F2"/>
-          </a:solidFill>
-          <a:ln>
-            <a:noFill/>
-          </a:ln>
-        </p:spPr>
-        <p:style>
-          <a:lnRef idx="1">
-            <a:schemeClr val="accent1"/>
-          </a:lnRef>
-          <a:fillRef idx="3">
-            <a:schemeClr val="accent1"/>
-          </a:fillRef>
-          <a:effectRef idx="2">
-            <a:schemeClr val="accent1"/>
-          </a:effectRef>
-          <a:fontRef idx="minor">
-            <a:schemeClr val="lt1"/>
-          </a:fontRef>
-        </p:style>
-        <p:txBody>
-          <a:bodyPr rtlCol="0" anchor="ctr"/>
-          <a:lstStyle/>
-          <a:p>
-            <a:pPr algn="ctr"/>
-          </a:p>
-        </p:txBody>
-      </p:sp>
-      <p:sp>
-        <p:nvSpPr>
-          <p:cNvPr id="10" name="Rectangle 9"/>
-          <p:cNvSpPr/>
-          <p:nvPr/>
-        </p:nvSpPr>
-        <p:spPr>
-          <a:xfrm>
-            <a:off x="640080" y="2084832"/>
-            <a:ext cx="274320" cy="274320"/>
-          </a:xfrm>
-          <a:prstGeom prst="rect">
-            <a:avLst/>
-          </a:prstGeom>
-          <a:solidFill>
-            <a:srgbClr val="FFFFFF"/>
-          </a:solidFill>
-          <a:ln>
-            <a:solidFill>
-              <a:srgbClr val="333333"/>
-            </a:solidFill>
-          </a:ln>
-        </p:spPr>
-        <p:style>
-          <a:lnRef idx="1">
-            <a:schemeClr val="accent1"/>
-          </a:lnRef>
-          <a:fillRef idx="3">
-            <a:schemeClr val="accent1"/>
-          </a:fillRef>
-          <a:effectRef idx="2">
-            <a:schemeClr val="accent1"/>
-          </a:effectRef>
-          <a:fontRef idx="minor">
-            <a:schemeClr val="lt1"/>
-          </a:fontRef>
-        </p:style>
-        <p:txBody>
-          <a:bodyPr rtlCol="0" anchor="ctr"/>
-          <a:lstStyle/>
-          <a:p>
-            <a:pPr algn="ctr"/>
-          </a:p>
-        </p:txBody>
-      </p:sp>
-      <p:sp>
-        <p:nvSpPr>
-          <p:cNvPr id="11" name="Rectangle 10"/>
-          <p:cNvSpPr/>
-          <p:nvPr/>
-        </p:nvSpPr>
-        <p:spPr>
-          <a:xfrm>
-            <a:off x="640080" y="2084832"/>
-            <a:ext cx="73152" cy="274320"/>
-          </a:xfrm>
-          <a:prstGeom prst="rect">
-            <a:avLst/>
-          </a:prstGeom>
-          <a:solidFill>
-            <a:srgbClr val="269CCB"/>
-          </a:solidFill>
-          <a:ln>
-            <a:noFill/>
-          </a:ln>
-        </p:spPr>
-        <p:style>
-          <a:lnRef idx="1">
-            <a:schemeClr val="accent1"/>
-          </a:lnRef>
-          <a:fillRef idx="3">
-            <a:schemeClr val="accent1"/>
-          </a:fillRef>
-          <a:effectRef idx="2">
-            <a:schemeClr val="accent1"/>
-          </a:effectRef>
-          <a:fontRef idx="minor">
-            <a:schemeClr val="lt1"/>
-          </a:fontRef>
-        </p:style>
-        <p:txBody>
-          <a:bodyPr rtlCol="0" anchor="ctr"/>
-          <a:lstStyle/>
-          <a:p>
-            <a:pPr algn="ctr"/>
-          </a:p>
-        </p:txBody>
-      </p:sp>
-      <p:sp>
-        <p:nvSpPr>
-          <p:cNvPr id="12" name="TextBox 11"/>
-          <p:cNvSpPr txBox="1"/>
-          <p:nvPr/>
-        </p:nvSpPr>
-        <p:spPr>
-          <a:xfrm>
-            <a:off x="1097280" y="2029968"/>
-            <a:ext cx="10362895" cy="402336"/>
-          </a:xfrm>
-          <a:prstGeom prst="rect">
-            <a:avLst/>
-          </a:prstGeom>
-          <a:noFill/>
-        </p:spPr>
-        <p:txBody>
-          <a:bodyPr wrap="square" anchor="ctr"/>
-          <a:lstStyle/>
-          <a:p>
-            <a:r>
-              <a:rPr sz="1500" b="0" i="0">
+              <a:t>–   ¿hay algún catch vacío?</a:t>
+            </a:r>
+          </a:p>
+          <a:p>
+            <a:pPr>
+              <a:spcAft>
+                <a:spcPts val="800"/>
+              </a:spcAft>
+            </a:pPr>
+            <a:r>
+              <a:rPr sz="2000" b="0" i="0">
                 <a:solidFill>
                   <a:srgbClr val="333333"/>
                 </a:solidFill>
                 <a:latin typeface="Calibri"/>
               </a:rPr>
-              <a:t>Si tuviera que borrar todos sus comentarios menos uno, ¿cuál dejaría, y por qué ese es más importante que los otros cuatro?</a:t>
-            </a:r>
-          </a:p>
-        </p:txBody>
-      </p:sp>
-      <p:sp>
-        <p:nvSpPr>
-          <p:cNvPr id="13" name="Rounded Rectangle 12"/>
-          <p:cNvSpPr/>
-          <p:nvPr/>
-        </p:nvSpPr>
-        <p:spPr>
-          <a:xfrm>
-            <a:off x="457200" y="2615184"/>
-            <a:ext cx="11277295" cy="566928"/>
-          </a:xfrm>
-          <a:prstGeom prst="roundRect">
-            <a:avLst>
-              <a:gd name="adj" fmla="val 12000"/>
-            </a:avLst>
-          </a:prstGeom>
-          <a:solidFill>
-            <a:srgbClr val="F2F2F2"/>
-          </a:solidFill>
-          <a:ln>
-            <a:noFill/>
-          </a:ln>
-        </p:spPr>
-        <p:style>
-          <a:lnRef idx="1">
-            <a:schemeClr val="accent1"/>
-          </a:lnRef>
-          <a:fillRef idx="3">
-            <a:schemeClr val="accent1"/>
-          </a:fillRef>
-          <a:effectRef idx="2">
-            <a:schemeClr val="accent1"/>
-          </a:effectRef>
-          <a:fontRef idx="minor">
-            <a:schemeClr val="lt1"/>
-          </a:fontRef>
-        </p:style>
-        <p:txBody>
-          <a:bodyPr rtlCol="0" anchor="ctr"/>
-          <a:lstStyle/>
-          <a:p>
-            <a:pPr algn="ctr"/>
-          </a:p>
-        </p:txBody>
-      </p:sp>
-      <p:sp>
-        <p:nvSpPr>
-          <p:cNvPr id="14" name="Rectangle 13"/>
-          <p:cNvSpPr/>
-          <p:nvPr/>
-        </p:nvSpPr>
-        <p:spPr>
-          <a:xfrm>
-            <a:off x="640080" y="2761488"/>
-            <a:ext cx="274320" cy="274320"/>
-          </a:xfrm>
-          <a:prstGeom prst="rect">
-            <a:avLst/>
-          </a:prstGeom>
-          <a:solidFill>
-            <a:srgbClr val="FFFFFF"/>
-          </a:solidFill>
-          <a:ln>
-            <a:solidFill>
-              <a:srgbClr val="333333"/>
-            </a:solidFill>
-          </a:ln>
-        </p:spPr>
-        <p:style>
-          <a:lnRef idx="1">
-            <a:schemeClr val="accent1"/>
-          </a:lnRef>
-          <a:fillRef idx="3">
-            <a:schemeClr val="accent1"/>
-          </a:fillRef>
-          <a:effectRef idx="2">
-            <a:schemeClr val="accent1"/>
-          </a:effectRef>
-          <a:fontRef idx="minor">
-            <a:schemeClr val="lt1"/>
-          </a:fontRef>
-        </p:style>
-        <p:txBody>
-          <a:bodyPr rtlCol="0" anchor="ctr"/>
-          <a:lstStyle/>
-          <a:p>
-            <a:pPr algn="ctr"/>
-          </a:p>
-        </p:txBody>
-      </p:sp>
-      <p:sp>
-        <p:nvSpPr>
-          <p:cNvPr id="15" name="Rectangle 14"/>
-          <p:cNvSpPr/>
-          <p:nvPr/>
-        </p:nvSpPr>
-        <p:spPr>
-          <a:xfrm>
-            <a:off x="640080" y="2761488"/>
-            <a:ext cx="73152" cy="274320"/>
-          </a:xfrm>
-          <a:prstGeom prst="rect">
-            <a:avLst/>
-          </a:prstGeom>
-          <a:solidFill>
-            <a:srgbClr val="269CCB"/>
-          </a:solidFill>
-          <a:ln>
-            <a:noFill/>
-          </a:ln>
-        </p:spPr>
-        <p:style>
-          <a:lnRef idx="1">
-            <a:schemeClr val="accent1"/>
-          </a:lnRef>
-          <a:fillRef idx="3">
-            <a:schemeClr val="accent1"/>
-          </a:fillRef>
-          <a:effectRef idx="2">
-            <a:schemeClr val="accent1"/>
-          </a:effectRef>
-          <a:fontRef idx="minor">
-            <a:schemeClr val="lt1"/>
-          </a:fontRef>
-        </p:style>
-        <p:txBody>
-          <a:bodyPr rtlCol="0" anchor="ctr"/>
-          <a:lstStyle/>
-          <a:p>
-            <a:pPr algn="ctr"/>
-          </a:p>
-        </p:txBody>
-      </p:sp>
-      <p:sp>
-        <p:nvSpPr>
-          <p:cNvPr id="16" name="TextBox 15"/>
-          <p:cNvSpPr txBox="1"/>
-          <p:nvPr/>
-        </p:nvSpPr>
-        <p:spPr>
-          <a:xfrm>
-            <a:off x="1097280" y="2706624"/>
-            <a:ext cx="10362895" cy="402336"/>
-          </a:xfrm>
-          <a:prstGeom prst="rect">
-            <a:avLst/>
-          </a:prstGeom>
-          <a:noFill/>
-        </p:spPr>
-        <p:txBody>
-          <a:bodyPr wrap="square" anchor="ctr"/>
-          <a:lstStyle/>
-          <a:p>
-            <a:r>
-              <a:rPr sz="1500" b="0" i="0">
+              <a:t>–   ¿algún método pasa de cincuenta líneas?</a:t>
+            </a:r>
+          </a:p>
+          <a:p>
+            <a:pPr>
+              <a:spcAft>
+                <a:spcPts val="800"/>
+              </a:spcAft>
+            </a:pPr>
+            <a:r>
+              <a:rPr sz="2000" b="0" i="0">
                 <a:solidFill>
                   <a:srgbClr val="333333"/>
                 </a:solidFill>
                 <a:latin typeface="Calibri"/>
               </a:rPr>
-              <a:t>¿Cuántos de sus hallazgos los comprobó ejecutando y cuántos los está suponiendo por haber leído el código?</a:t>
-            </a:r>
-          </a:p>
-        </p:txBody>
-      </p:sp>
-      <p:sp>
-        <p:nvSpPr>
-          <p:cNvPr id="17" name="TextBox 16"/>
+              <a:t>–   ¿hay bloques duplicados?</a:t>
+            </a:r>
+          </a:p>
+          <a:p>
+            <a:pPr>
+              <a:spcAft>
+                <a:spcPts val="800"/>
+              </a:spcAft>
+            </a:pPr>
+            <a:r>
+              <a:rPr sz="2000" b="0" i="0">
+                <a:solidFill>
+                  <a:srgbClr val="333333"/>
+                </a:solidFill>
+                <a:latin typeface="Calibri"/>
+              </a:rPr>
+              <a:t>–   Cada ítem se marca cumple, no cumple o no aplica, y el 'no cumple' obliga a escribir la evidencia archivo:línea.</a:t>
+            </a:r>
+          </a:p>
+          <a:p>
+            <a:pPr>
+              <a:spcAft>
+                <a:spcPts val="800"/>
+              </a:spcAft>
+            </a:pPr>
+            <a:r>
+              <a:rPr sz="2000" b="0" i="0">
+                <a:solidFill>
+                  <a:srgbClr val="333333"/>
+                </a:solidFill>
+                <a:latin typeface="Calibri"/>
+              </a:rPr>
+              <a:t>–   Esto tiene tres efectos: hace comparables las revisiones entre unos y otros, evita que el revisor se quede solo con lo que le llamó la atención, y le da al autor del proyecto una lista de trabajo en vez de una sensación.</a:t>
+            </a:r>
+          </a:p>
+          <a:p>
+            <a:pPr>
+              <a:spcAft>
+                <a:spcPts val="800"/>
+              </a:spcAft>
+            </a:pPr>
+            <a:r>
+              <a:rPr sz="2000" b="0" i="0">
+                <a:solidFill>
+                  <a:srgbClr val="333333"/>
+                </a:solidFill>
+                <a:latin typeface="Calibri"/>
+              </a:rPr>
+              <a:t>–   El checklist no reemplaza el criterio; lo ordena, que es distinto.</a:t>
+            </a:r>
+          </a:p>
+        </p:txBody>
+      </p:sp>
+      <p:sp>
+        <p:nvSpPr>
+          <p:cNvPr id="6" name="TextBox 5"/>
           <p:cNvSpPr txBox="1"/>
           <p:nvPr/>
         </p:nvSpPr>
@@ -4294,7 +3925,7 @@
                 </a:solidFill>
                 <a:latin typeface="Calibri"/>
               </a:rPr>
-              <a:t>Criterios de exito / entregable</a:t>
+              <a:t>Recibir la crítica también se practica, y es la mitad difícil</a:t>
             </a:r>
           </a:p>
         </p:txBody>
@@ -4333,25 +3964,7 @@
                 </a:solidFill>
                 <a:latin typeface="Calibri"/>
               </a:rPr>
-              <a:t>–   </a:t>
-            </a:r>
-            <a:r>
-              <a:rPr sz="2000" b="1" i="0">
-                <a:solidFill>
-                  <a:srgbClr val="333333"/>
-                </a:solidFill>
-                <a:latin typeface="Calibri"/>
-              </a:rPr>
-              <a:t>Entregable:</a:t>
-            </a:r>
-            <a:r>
-              <a:rPr sz="2000" b="0" i="0">
-                <a:solidFill>
-                  <a:srgbClr val="333333"/>
-                </a:solidFill>
-                <a:latin typeface="Calibri"/>
-              </a:rPr>
-              <a:t> Informe de revisión de una página sobre el proyecto asignado (el de otro estudiante; si el docente autorizó equipos, el de otro equipo): checklist diligenciado con evidencia archivo:línea y cinco hallazgos priorizados con formato Evidencia + Impacto + Sugerencia, subido a la plataforma del curso.</a:t>
+              <a:t>–   Recibir la crítica también se practica, y es la mitad difícil.</a:t>
             </a:r>
           </a:p>
           <a:p>
@@ -4367,25 +3980,7 @@
                 </a:solidFill>
                 <a:latin typeface="Calibri"/>
               </a:rPr>
-              <a:t>–   </a:t>
-            </a:r>
-            <a:r>
-              <a:rPr sz="2000" b="1" i="0">
-                <a:solidFill>
-                  <a:srgbClr val="333333"/>
-                </a:solidFill>
-                <a:latin typeface="Calibri"/>
-              </a:rPr>
-              <a:t>Exito:</a:t>
-            </a:r>
-            <a:r>
-              <a:rPr sz="2000" b="0" i="0">
-                <a:solidFill>
-                  <a:srgbClr val="333333"/>
-                </a:solidFill>
-                <a:latin typeface="Calibri"/>
-              </a:rPr>
-              <a:t> El informe demuestra que el proyecto fue ejecutado: incluye el resultado de los cuatro casos borde con el mensaje o la excepción textual observada.</a:t>
+              <a:t>–   La reacción natural del autor es defenderse en caliente y explicar por qué lo hizo así; el protocolo de clase es otro: escuchar completo, pedir aclaración si el hallazgo no se entiende</a:t>
             </a:r>
           </a:p>
           <a:p>
@@ -4401,25 +3996,7 @@
                 </a:solidFill>
                 <a:latin typeface="Calibri"/>
               </a:rPr>
-              <a:t>–   </a:t>
-            </a:r>
-            <a:r>
-              <a:rPr sz="2000" b="1" i="0">
-                <a:solidFill>
-                  <a:srgbClr val="333333"/>
-                </a:solidFill>
-                <a:latin typeface="Calibri"/>
-              </a:rPr>
-              <a:t>Exito:</a:t>
-            </a:r>
-            <a:r>
-              <a:rPr sz="2000" b="0" i="0">
-                <a:solidFill>
-                  <a:srgbClr val="333333"/>
-                </a:solidFill>
-                <a:latin typeface="Calibri"/>
-              </a:rPr>
-              <a:t> El checklist está completo y todo ítem marcado 'no cumple' trae evidencia localizable en formato archivo:línea o pasos para reproducir.</a:t>
+              <a:t>–   Y luego decidir con una de tres respuestas escritas: acepto y corrijo (con responsable y fecha), justifico por qué se queda como está, o difiero para después de la entrega.</a:t>
             </a:r>
           </a:p>
           <a:p>
@@ -4435,25 +4012,7 @@
                 </a:solidFill>
                 <a:latin typeface="Calibri"/>
               </a:rPr>
-              <a:t>–   </a:t>
-            </a:r>
-            <a:r>
-              <a:rPr sz="2000" b="1" i="0">
-                <a:solidFill>
-                  <a:srgbClr val="333333"/>
-                </a:solidFill>
-                <a:latin typeface="Calibri"/>
-              </a:rPr>
-              <a:t>Exito:</a:t>
-            </a:r>
-            <a:r>
-              <a:rPr sz="2000" b="0" i="0">
-                <a:solidFill>
-                  <a:srgbClr val="333333"/>
-                </a:solidFill>
-                <a:latin typeface="Calibri"/>
-              </a:rPr>
-              <a:t> Los cinco hallazgos están priorizados y redactados con Evidencia + Impacto + Sugerencia; ninguno se refiere a la persona ni al esfuerzo que puso el otro estudiante.</a:t>
+              <a:t>–   Todo eso queda en el plan de corrección y es lo que el docente revisa.</a:t>
             </a:r>
           </a:p>
           <a:p>
@@ -4469,25 +4028,7 @@
                 </a:solidFill>
                 <a:latin typeface="Calibri"/>
               </a:rPr>
-              <a:t>–   </a:t>
-            </a:r>
-            <a:r>
-              <a:rPr sz="2000" b="1" i="0">
-                <a:solidFill>
-                  <a:srgbClr val="333333"/>
-                </a:solidFill>
-                <a:latin typeface="Calibri"/>
-              </a:rPr>
-              <a:t>Exito:</a:t>
-            </a:r>
-            <a:r>
-              <a:rPr sz="2000" b="0" i="0">
-                <a:solidFill>
-                  <a:srgbClr val="333333"/>
-                </a:solidFill>
-                <a:latin typeface="Calibri"/>
-              </a:rPr>
-              <a:t> El autor del proyecto entrega su plan de corrección con las tres decisiones posibles (acepto, justifico, difiero) y un responsable por línea.</a:t>
+              <a:t>–   Del lado del revisor también hay deberes: verificar antes de acusar, porque un hallazgo falso como 'esto no compila' cuando en realidad faltaba abrir el proyecto correcto quema la credibilidad de todo el informe.</a:t>
             </a:r>
           </a:p>
           <a:p>
@@ -4503,25 +4044,23 @@
                 </a:solidFill>
                 <a:latin typeface="Calibri"/>
               </a:rPr>
-              <a:t>–   </a:t>
-            </a:r>
-            <a:r>
-              <a:rPr sz="2000" b="1" i="0">
+              <a:t>–   Hay tres antipatrones que van a aparecer y conviene nombrarlos de una vez: la revisión de sello, que aprueba en dos minutos sin haber ejecutado nada; la revisión de gusto personal</a:t>
+            </a:r>
+          </a:p>
+          <a:p>
+            <a:pPr>
+              <a:spcAft>
+                <a:spcPts val="800"/>
+              </a:spcAft>
+            </a:pPr>
+            <a:r>
+              <a:rPr sz="2000" b="0" i="0">
                 <a:solidFill>
                   <a:srgbClr val="333333"/>
                 </a:solidFill>
                 <a:latin typeface="Calibri"/>
               </a:rPr>
-              <a:t>Entrega en la plataforma del curso</a:t>
-            </a:r>
-            <a:r>
-              <a:rPr sz="2000" b="0" i="0">
-                <a:solidFill>
-                  <a:srgbClr val="333333"/>
-                </a:solidFill>
-                <a:latin typeface="Calibri"/>
-              </a:rPr>
-              <a:t> — en la fecha que indique el docente.</a:t>
+              <a:t>–   Que solo señala estilo e indentación; y la revisión que rediseña el proyecto ajeno, donde el revisor propone rehacer VetCare con su propia arquitectura en vez de señalar problemas concretos del que tiene enfrente.</a:t>
             </a:r>
           </a:p>
         </p:txBody>
@@ -4702,7 +4241,7 @@
                 </a:solidFill>
                 <a:latin typeface="Calibri"/>
               </a:rPr>
-              <a:t>Para el PI esta semana</a:t>
+              <a:t>Un método real de VetCare y sus seis hallazgos</a:t>
             </a:r>
           </a:p>
         </p:txBody>
@@ -4716,7 +4255,7 @@
         <p:spPr>
           <a:xfrm>
             <a:off x="457200" y="1261872"/>
-            <a:ext cx="11277295" cy="1051560"/>
+            <a:ext cx="11277295" cy="4773168"/>
           </a:xfrm>
           <a:prstGeom prst="roundRect">
             <a:avLst>
@@ -4724,7 +4263,7 @@
             </a:avLst>
           </a:prstGeom>
           <a:solidFill>
-            <a:srgbClr val="E8F4FA"/>
+            <a:srgbClr val="1E2A38"/>
           </a:solidFill>
           <a:ln>
             <a:noFill/>
@@ -4761,13 +4300,13 @@
         <p:spPr>
           <a:xfrm>
             <a:off x="457200" y="1261872"/>
-            <a:ext cx="128016" cy="1051560"/>
+            <a:ext cx="11277295" cy="320040"/>
           </a:xfrm>
           <a:prstGeom prst="rect">
             <a:avLst/>
           </a:prstGeom>
           <a:solidFill>
-            <a:srgbClr val="269CCB"/>
+            <a:srgbClr val="095292"/>
           </a:solidFill>
           <a:ln>
             <a:noFill/>
@@ -4803,8 +4342,40 @@
         </p:nvSpPr>
         <p:spPr>
           <a:xfrm>
-            <a:off x="777240" y="1399031"/>
-            <a:ext cx="10774375" cy="822959"/>
+            <a:off x="685800" y="1307592"/>
+            <a:ext cx="10820095" cy="256032"/>
+          </a:xfrm>
+          <a:prstGeom prst="rect">
+            <a:avLst/>
+          </a:prstGeom>
+          <a:noFill/>
+        </p:spPr>
+        <p:txBody>
+          <a:bodyPr wrap="square" anchor="ctr"/>
+          <a:lstStyle/>
+          <a:p>
+            <a:r>
+              <a:rPr sz="1000" b="1" i="0">
+                <a:solidFill>
+                  <a:srgbClr val="269CCB"/>
+                </a:solidFill>
+                <a:latin typeface="Calibri"/>
+              </a:rPr>
+              <a:t>● ● ●</a:t>
+            </a:r>
+          </a:p>
+        </p:txBody>
+      </p:sp>
+      <p:sp>
+        <p:nvSpPr>
+          <p:cNvPr id="8" name="TextBox 7"/>
+          <p:cNvSpPr txBox="1"/>
+          <p:nvPr/>
+        </p:nvSpPr>
+        <p:spPr>
+          <a:xfrm>
+            <a:off x="777240" y="1719072"/>
+            <a:ext cx="10637215" cy="4133087"/>
           </a:xfrm>
           <a:prstGeom prst="rect">
             <a:avLst/>
@@ -4817,132 +4388,225 @@
           </a:bodyPr>
           <a:lstStyle/>
           <a:p>
-            <a:r>
-              <a:rPr sz="1200" b="1" i="0">
-                <a:solidFill>
-                  <a:srgbClr val="269CCB"/>
-                </a:solidFill>
-                <a:latin typeface="Calibri"/>
-              </a:rPr>
-              <a:t>Info</a:t>
-            </a:r>
-          </a:p>
-          <a:p>
             <a:pPr>
-              <a:spcBef>
+              <a:spcAft>
                 <a:spcPts val="400"/>
-              </a:spcBef>
+              </a:spcAft>
             </a:pPr>
             <a:r>
               <a:rPr sz="1400" b="0" i="0">
                 <a:solidFill>
-                  <a:srgbClr val="333333"/>
-                </a:solidFill>
-                <a:latin typeface="Calibri"/>
-              </a:rPr>
-              <a:t>Hito: Cada estudiante recibe un informe externo con hallazgos priorizados y deja escrito su plan de corrección de VetCare antes de la integración final.</a:t>
-            </a:r>
-          </a:p>
-        </p:txBody>
-      </p:sp>
-      <p:sp>
-        <p:nvSpPr>
-          <p:cNvPr id="8" name="Rounded Rectangle 7"/>
-          <p:cNvSpPr/>
-          <p:nvPr/>
-        </p:nvSpPr>
-        <p:spPr>
-          <a:xfrm>
-            <a:off x="457200" y="2478024"/>
-            <a:ext cx="11277295" cy="1051560"/>
-          </a:xfrm>
-          <a:prstGeom prst="roundRect">
-            <a:avLst>
-              <a:gd name="adj" fmla="val 12000"/>
-            </a:avLst>
-          </a:prstGeom>
-          <a:solidFill>
-            <a:srgbClr val="FFF8E1"/>
-          </a:solidFill>
-          <a:ln>
-            <a:noFill/>
-          </a:ln>
-        </p:spPr>
-        <p:style>
-          <a:lnRef idx="1">
-            <a:schemeClr val="accent1"/>
-          </a:lnRef>
-          <a:fillRef idx="3">
-            <a:schemeClr val="accent1"/>
-          </a:fillRef>
-          <a:effectRef idx="2">
-            <a:schemeClr val="accent1"/>
-          </a:effectRef>
-          <a:fontRef idx="minor">
-            <a:schemeClr val="lt1"/>
-          </a:fontRef>
-        </p:style>
-        <p:txBody>
-          <a:bodyPr rtlCol="0" anchor="ctr"/>
-          <a:lstStyle/>
-          <a:p>
-            <a:pPr algn="ctr"/>
-          </a:p>
-        </p:txBody>
-      </p:sp>
-      <p:sp>
-        <p:nvSpPr>
-          <p:cNvPr id="9" name="Rectangle 8"/>
-          <p:cNvSpPr/>
-          <p:nvPr/>
-        </p:nvSpPr>
-        <p:spPr>
-          <a:xfrm>
-            <a:off x="457200" y="2478024"/>
-            <a:ext cx="128016" cy="1051560"/>
-          </a:xfrm>
-          <a:prstGeom prst="rect">
-            <a:avLst/>
-          </a:prstGeom>
-          <a:solidFill>
-            <a:srgbClr val="FFD000"/>
-          </a:solidFill>
-          <a:ln>
-            <a:noFill/>
-          </a:ln>
-        </p:spPr>
-        <p:style>
-          <a:lnRef idx="1">
-            <a:schemeClr val="accent1"/>
-          </a:lnRef>
-          <a:fillRef idx="3">
-            <a:schemeClr val="accent1"/>
-          </a:fillRef>
-          <a:effectRef idx="2">
-            <a:schemeClr val="accent1"/>
-          </a:effectRef>
-          <a:fontRef idx="minor">
-            <a:schemeClr val="lt1"/>
-          </a:fontRef>
-        </p:style>
-        <p:txBody>
-          <a:bodyPr rtlCol="0" anchor="ctr"/>
-          <a:lstStyle/>
-          <a:p>
-            <a:pPr algn="ctr"/>
-          </a:p>
-        </p:txBody>
-      </p:sp>
-      <p:sp>
-        <p:nvSpPr>
-          <p:cNvPr id="10" name="TextBox 9"/>
+                  <a:srgbClr val="FFFFFF"/>
+                </a:solidFill>
+                <a:latin typeface="Calibri"/>
+              </a:rPr>
+              <a:t>public static void proceso(String a, String b, String c, String d, String e) { // 1. nombre y parametros sin significado</a:t>
+            </a:r>
+          </a:p>
+          <a:p>
+            <a:pPr>
+              <a:spcAft>
+                <a:spcPts val="400"/>
+              </a:spcAft>
+            </a:pPr>
+            <a:r>
+              <a:rPr sz="1400" b="0" i="0">
+                <a:solidFill>
+                  <a:srgbClr val="FFFFFF"/>
+                </a:solidFill>
+                <a:latin typeface="Calibri"/>
+              </a:rPr>
+              <a:t>    int x = 0;</a:t>
+            </a:r>
+          </a:p>
+          <a:p>
+            <a:pPr>
+              <a:spcAft>
+                <a:spcPts val="400"/>
+              </a:spcAft>
+            </a:pPr>
+            <a:r>
+              <a:rPr sz="1400" b="0" i="0">
+                <a:solidFill>
+                  <a:srgbClr val="FFFFFF"/>
+                </a:solidFill>
+                <a:latin typeface="Calibri"/>
+              </a:rPr>
+              <a:t>    try {</a:t>
+            </a:r>
+          </a:p>
+          <a:p>
+            <a:pPr>
+              <a:spcAft>
+                <a:spcPts val="400"/>
+              </a:spcAft>
+            </a:pPr>
+            <a:r>
+              <a:rPr sz="1400" b="0" i="0">
+                <a:solidFill>
+                  <a:srgbClr val="FFFFFF"/>
+                </a:solidFill>
+                <a:latin typeface="Calibri"/>
+              </a:rPr>
+              <a:t>        x = Integer.parseInt(d);</a:t>
+            </a:r>
+          </a:p>
+          <a:p>
+            <a:pPr>
+              <a:spcAft>
+                <a:spcPts val="400"/>
+              </a:spcAft>
+            </a:pPr>
+            <a:r>
+              <a:rPr sz="1400" b="0" i="0">
+                <a:solidFill>
+                  <a:srgbClr val="FFFFFF"/>
+                </a:solidFill>
+                <a:latin typeface="Calibri"/>
+              </a:rPr>
+              <a:t>    } catch (Exception ex) {            // 2. catch vacio: la edad "dos" se vuelve 0 en silencio</a:t>
+            </a:r>
+          </a:p>
+          <a:p>
+            <a:pPr>
+              <a:spcAft>
+                <a:spcPts val="400"/>
+              </a:spcAft>
+            </a:pPr>
+            <a:r>
+              <a:rPr sz="1400" b="0" i="0">
+                <a:solidFill>
+                  <a:srgbClr val="FFFFFF"/>
+                </a:solidFill>
+                <a:latin typeface="Calibri"/>
+              </a:rPr>
+              <a:t>    }</a:t>
+            </a:r>
+          </a:p>
+          <a:p>
+            <a:pPr>
+              <a:spcAft>
+                <a:spcPts val="400"/>
+              </a:spcAft>
+            </a:pPr>
+            <a:r>
+              <a:rPr sz="1400" b="0" i="0">
+                <a:solidFill>
+                  <a:srgbClr val="FFFFFF"/>
+                </a:solidFill>
+                <a:latin typeface="Calibri"/>
+              </a:rPr>
+              <a:t>    if (x &gt; 25) {                       // 3. numero magico: por que 25? y la edad -3 pasa derecho</a:t>
+            </a:r>
+          </a:p>
+          <a:p>
+            <a:pPr>
+              <a:spcAft>
+                <a:spcPts val="400"/>
+              </a:spcAft>
+            </a:pPr>
+            <a:r>
+              <a:rPr sz="1400" b="0" i="0">
+                <a:solidFill>
+                  <a:srgbClr val="FFFFFF"/>
+                </a:solidFill>
+                <a:latin typeface="Calibri"/>
+              </a:rPr>
+              <a:t>        System.out.println("edad rara"); // 4. el aviso muere en consola: la ventana no se entera</a:t>
+            </a:r>
+          </a:p>
+          <a:p>
+            <a:pPr>
+              <a:spcAft>
+                <a:spcPts val="400"/>
+              </a:spcAft>
+            </a:pPr>
+            <a:r>
+              <a:rPr sz="1400" b="0" i="0">
+                <a:solidFill>
+                  <a:srgbClr val="FFFFFF"/>
+                </a:solidFill>
+                <a:latin typeface="Calibri"/>
+              </a:rPr>
+              <a:t>    }</a:t>
+            </a:r>
+          </a:p>
+          <a:p>
+            <a:pPr>
+              <a:spcAft>
+                <a:spcPts val="400"/>
+              </a:spcAft>
+            </a:pPr>
+            <a:r>
+              <a:rPr sz="1400" b="0" i="0">
+                <a:solidFill>
+                  <a:srgbClr val="FFFFFF"/>
+                </a:solidFill>
+                <a:latin typeface="Calibri"/>
+              </a:rPr>
+              <a:t>    String[] v = new String[5];         // 5. arreglo de String en vez de la clase Mascota</a:t>
+            </a:r>
+          </a:p>
+          <a:p>
+            <a:pPr>
+              <a:spcAft>
+                <a:spcPts val="400"/>
+              </a:spcAft>
+            </a:pPr>
+            <a:r>
+              <a:rPr sz="1400" b="0" i="0">
+                <a:solidFill>
+                  <a:srgbClr val="FFFFFF"/>
+                </a:solidFill>
+                <a:latin typeface="Calibri"/>
+              </a:rPr>
+              <a:t>    v[0] = a; v[1] = b; v[2] = c; v[3] = String.valueOf(x); v[4] = e;</a:t>
+            </a:r>
+          </a:p>
+          <a:p>
+            <a:pPr>
+              <a:spcAft>
+                <a:spcPts val="400"/>
+              </a:spcAft>
+            </a:pPr>
+            <a:r>
+              <a:rPr sz="1400" b="0" i="0">
+                <a:solidFill>
+                  <a:srgbClr val="FFFFFF"/>
+                </a:solidFill>
+                <a:latin typeface="Calibri"/>
+              </a:rPr>
+              <a:t>    datos.add(v);                       // 6. 'datos' es public static: cualquiera lo modifica</a:t>
+            </a:r>
+          </a:p>
+          <a:p>
+            <a:pPr>
+              <a:spcAft>
+                <a:spcPts val="400"/>
+              </a:spcAft>
+            </a:pPr>
+            <a:r>
+              <a:rPr sz="1400" b="0" i="0">
+                <a:solidFill>
+                  <a:srgbClr val="FFFFFF"/>
+                </a:solidFill>
+                <a:latin typeface="Calibri"/>
+              </a:rPr>
+              <a:t>}</a:t>
+            </a:r>
+          </a:p>
+        </p:txBody>
+      </p:sp>
+      <p:sp>
+        <p:nvSpPr>
+          <p:cNvPr id="9" name="TextBox 8"/>
           <p:cNvSpPr txBox="1"/>
           <p:nvPr/>
         </p:nvSpPr>
         <p:spPr>
           <a:xfrm>
-            <a:off x="777240" y="2615184"/>
-            <a:ext cx="10774375" cy="822959"/>
+            <a:off x="457200" y="6080760"/>
+            <a:ext cx="11277295" cy="320040"/>
           </a:xfrm>
           <a:prstGeom prst="rect">
             <a:avLst/>
@@ -4955,175 +4619,22 @@
           </a:bodyPr>
           <a:lstStyle/>
           <a:p>
-            <a:r>
-              <a:rPr sz="1200" b="1" i="0">
-                <a:solidFill>
-                  <a:srgbClr val="FFD000"/>
-                </a:solidFill>
-                <a:latin typeface="Calibri"/>
-              </a:rPr>
-              <a:t>Aclaración</a:t>
-            </a:r>
-          </a:p>
-          <a:p>
-            <a:pPr>
-              <a:spcBef>
-                <a:spcPts val="400"/>
-              </a:spcBef>
-            </a:pPr>
-            <a:r>
-              <a:rPr sz="1400" b="0" i="0">
-                <a:solidFill>
-                  <a:srgbClr val="333333"/>
-                </a:solidFill>
-                <a:latin typeface="Calibri"/>
-              </a:rPr>
-              <a:t>Enunciado completo: Clases/Proyecto Integrador/ (VetCare).</a:t>
-            </a:r>
-          </a:p>
-        </p:txBody>
-      </p:sp>
-      <p:sp>
-        <p:nvSpPr>
-          <p:cNvPr id="11" name="Rounded Rectangle 10"/>
-          <p:cNvSpPr/>
-          <p:nvPr/>
-        </p:nvSpPr>
-        <p:spPr>
-          <a:xfrm>
-            <a:off x="457200" y="3694176"/>
-            <a:ext cx="11277295" cy="1051560"/>
-          </a:xfrm>
-          <a:prstGeom prst="roundRect">
-            <a:avLst>
-              <a:gd name="adj" fmla="val 12000"/>
-            </a:avLst>
-          </a:prstGeom>
-          <a:solidFill>
-            <a:srgbClr val="FBE4E4"/>
-          </a:solidFill>
-          <a:ln>
-            <a:noFill/>
-          </a:ln>
-        </p:spPr>
-        <p:style>
-          <a:lnRef idx="1">
-            <a:schemeClr val="accent1"/>
-          </a:lnRef>
-          <a:fillRef idx="3">
-            <a:schemeClr val="accent1"/>
-          </a:fillRef>
-          <a:effectRef idx="2">
-            <a:schemeClr val="accent1"/>
-          </a:effectRef>
-          <a:fontRef idx="minor">
-            <a:schemeClr val="lt1"/>
-          </a:fontRef>
-        </p:style>
-        <p:txBody>
-          <a:bodyPr rtlCol="0" anchor="ctr"/>
-          <a:lstStyle/>
-          <a:p>
             <a:pPr algn="ctr"/>
-          </a:p>
-        </p:txBody>
-      </p:sp>
-      <p:sp>
-        <p:nvSpPr>
-          <p:cNvPr id="12" name="Rectangle 11"/>
-          <p:cNvSpPr/>
-          <p:nvPr/>
-        </p:nvSpPr>
-        <p:spPr>
-          <a:xfrm>
-            <a:off x="457200" y="3694176"/>
-            <a:ext cx="128016" cy="1051560"/>
-          </a:xfrm>
-          <a:prstGeom prst="rect">
-            <a:avLst/>
-          </a:prstGeom>
-          <a:solidFill>
-            <a:srgbClr val="A02030"/>
-          </a:solidFill>
-          <a:ln>
-            <a:noFill/>
-          </a:ln>
-        </p:spPr>
-        <p:style>
-          <a:lnRef idx="1">
-            <a:schemeClr val="accent1"/>
-          </a:lnRef>
-          <a:fillRef idx="3">
-            <a:schemeClr val="accent1"/>
-          </a:fillRef>
-          <a:effectRef idx="2">
-            <a:schemeClr val="accent1"/>
-          </a:effectRef>
-          <a:fontRef idx="minor">
-            <a:schemeClr val="lt1"/>
-          </a:fontRef>
-        </p:style>
-        <p:txBody>
-          <a:bodyPr rtlCol="0" anchor="ctr"/>
-          <a:lstStyle/>
-          <a:p>
-            <a:pPr algn="ctr"/>
-          </a:p>
-        </p:txBody>
-      </p:sp>
-      <p:sp>
-        <p:nvSpPr>
-          <p:cNvPr id="13" name="TextBox 12"/>
-          <p:cNvSpPr txBox="1"/>
-          <p:nvPr/>
-        </p:nvSpPr>
-        <p:spPr>
-          <a:xfrm>
-            <a:off x="777240" y="3831336"/>
-            <a:ext cx="10774375" cy="822959"/>
-          </a:xfrm>
-          <a:prstGeom prst="rect">
-            <a:avLst/>
-          </a:prstGeom>
-          <a:noFill/>
-        </p:spPr>
-        <p:txBody>
-          <a:bodyPr wrap="square">
-            <a:spAutoFit/>
-          </a:bodyPr>
-          <a:lstStyle/>
-          <a:p>
-            <a:r>
-              <a:rPr sz="1200" b="1" i="0">
-                <a:solidFill>
-                  <a:srgbClr val="A02030"/>
-                </a:solidFill>
-                <a:latin typeface="Calibri"/>
-              </a:rPr>
-              <a:t>Atención</a:t>
-            </a:r>
-          </a:p>
-          <a:p>
-            <a:pPr>
-              <a:spcBef>
-                <a:spcPts val="400"/>
-              </a:spcBef>
-            </a:pPr>
-            <a:r>
-              <a:rPr sz="1400" b="0" i="0">
-                <a:solidFill>
-                  <a:srgbClr val="333333"/>
-                </a:solidFill>
-                <a:latin typeface="Calibri"/>
-              </a:rPr>
-              <a:t>Entrega del taller, si el docente lo asigna · en la fecha que indique el docente.</a:t>
-            </a:r>
-          </a:p>
-        </p:txBody>
-      </p:sp>
-      <p:sp>
-        <p:nvSpPr>
-          <p:cNvPr id="14" name="TextBox 13"/>
+            <a:r>
+              <a:rPr sz="1200" b="0" i="1">
+                <a:solidFill>
+                  <a:srgbClr val="666666"/>
+                </a:solidFill>
+                <a:latin typeface="Calibri"/>
+              </a:rPr>
+              <a:t>El código compila y corre; la revisión no busca errores del compilador, busca lo que va a doler en el mostrador de la clínica.</a:t>
+            </a:r>
+          </a:p>
+        </p:txBody>
+      </p:sp>
+      <p:sp>
+        <p:nvSpPr>
+          <p:cNvPr id="10" name="TextBox 9"/>
           <p:cNvSpPr txBox="1"/>
           <p:nvPr/>
         </p:nvSpPr>
@@ -5191,7 +4702,1983 @@
         <p:spPr>
           <a:xfrm>
             <a:off x="0" y="0"/>
-            <a:ext cx="12191695" cy="164592"/>
+            <a:ext cx="12191695" cy="960120"/>
+          </a:xfrm>
+          <a:prstGeom prst="rect">
+            <a:avLst/>
+          </a:prstGeom>
+          <a:solidFill>
+            <a:srgbClr val="095292"/>
+          </a:solidFill>
+          <a:ln>
+            <a:noFill/>
+          </a:ln>
+        </p:spPr>
+        <p:style>
+          <a:lnRef idx="1">
+            <a:schemeClr val="accent1"/>
+          </a:lnRef>
+          <a:fillRef idx="3">
+            <a:schemeClr val="accent1"/>
+          </a:fillRef>
+          <a:effectRef idx="2">
+            <a:schemeClr val="accent1"/>
+          </a:effectRef>
+          <a:fontRef idx="minor">
+            <a:schemeClr val="lt1"/>
+          </a:fontRef>
+        </p:style>
+        <p:txBody>
+          <a:bodyPr rtlCol="0" anchor="ctr"/>
+          <a:lstStyle/>
+          <a:p>
+            <a:pPr algn="ctr"/>
+          </a:p>
+        </p:txBody>
+      </p:sp>
+      <p:sp>
+        <p:nvSpPr>
+          <p:cNvPr id="3" name="Rectangle 2"/>
+          <p:cNvSpPr/>
+          <p:nvPr/>
+        </p:nvSpPr>
+        <p:spPr>
+          <a:xfrm>
+            <a:off x="0" y="960120"/>
+            <a:ext cx="12191695" cy="41148"/>
+          </a:xfrm>
+          <a:prstGeom prst="rect">
+            <a:avLst/>
+          </a:prstGeom>
+          <a:solidFill>
+            <a:srgbClr val="FFD000"/>
+          </a:solidFill>
+          <a:ln>
+            <a:noFill/>
+          </a:ln>
+        </p:spPr>
+        <p:style>
+          <a:lnRef idx="1">
+            <a:schemeClr val="accent1"/>
+          </a:lnRef>
+          <a:fillRef idx="3">
+            <a:schemeClr val="accent1"/>
+          </a:fillRef>
+          <a:effectRef idx="2">
+            <a:schemeClr val="accent1"/>
+          </a:effectRef>
+          <a:fontRef idx="minor">
+            <a:schemeClr val="lt1"/>
+          </a:fontRef>
+        </p:style>
+        <p:txBody>
+          <a:bodyPr rtlCol="0" anchor="ctr"/>
+          <a:lstStyle/>
+          <a:p>
+            <a:pPr algn="ctr"/>
+          </a:p>
+        </p:txBody>
+      </p:sp>
+      <p:sp>
+        <p:nvSpPr>
+          <p:cNvPr id="4" name="TextBox 3"/>
+          <p:cNvSpPr txBox="1"/>
+          <p:nvPr/>
+        </p:nvSpPr>
+        <p:spPr>
+          <a:xfrm>
+            <a:off x="457200" y="164592"/>
+            <a:ext cx="11277295" cy="502920"/>
+          </a:xfrm>
+          <a:prstGeom prst="rect">
+            <a:avLst/>
+          </a:prstGeom>
+          <a:noFill/>
+        </p:spPr>
+        <p:txBody>
+          <a:bodyPr wrap="square">
+            <a:spAutoFit/>
+          </a:bodyPr>
+          <a:lstStyle/>
+          <a:p>
+            <a:r>
+              <a:rPr sz="2600" b="1" i="0">
+                <a:solidFill>
+                  <a:srgbClr val="FFFFFF"/>
+                </a:solidFill>
+                <a:latin typeface="Calibri"/>
+              </a:rPr>
+              <a:t>Demo del dia</a:t>
+            </a:r>
+          </a:p>
+        </p:txBody>
+      </p:sp>
+      <p:sp>
+        <p:nvSpPr>
+          <p:cNvPr id="5" name="TextBox 4"/>
+          <p:cNvSpPr txBox="1"/>
+          <p:nvPr/>
+        </p:nvSpPr>
+        <p:spPr>
+          <a:xfrm>
+            <a:off x="457200" y="1170432"/>
+            <a:ext cx="11277295" cy="5230368"/>
+          </a:xfrm>
+          <a:prstGeom prst="rect">
+            <a:avLst/>
+          </a:prstGeom>
+          <a:noFill/>
+        </p:spPr>
+        <p:txBody>
+          <a:bodyPr wrap="square">
+            <a:spAutoFit/>
+          </a:bodyPr>
+          <a:lstStyle/>
+          <a:p>
+            <a:pPr>
+              <a:spcAft>
+                <a:spcPts val="800"/>
+              </a:spcAft>
+            </a:pPr>
+            <a:r>
+              <a:rPr sz="2000" b="0" i="0">
+                <a:solidFill>
+                  <a:srgbClr val="333333"/>
+                </a:solidFill>
+                <a:latin typeface="Calibri"/>
+              </a:rPr>
+              <a:t>–   </a:t>
+            </a:r>
+            <a:r>
+              <a:rPr sz="2000" b="1" i="0">
+                <a:solidFill>
+                  <a:srgbClr val="333333"/>
+                </a:solidFill>
+                <a:latin typeface="Calibri"/>
+              </a:rPr>
+              <a:t>Herramienta:</a:t>
+            </a:r>
+            <a:r>
+              <a:rPr sz="2000" b="0" i="0">
+                <a:solidFill>
+                  <a:srgbClr val="333333"/>
+                </a:solidFill>
+                <a:latin typeface="Calibri"/>
+              </a:rPr>
+              <a:t> Visual Studio Code (Java)</a:t>
+            </a:r>
+          </a:p>
+          <a:p>
+            <a:pPr>
+              <a:spcAft>
+                <a:spcPts val="800"/>
+              </a:spcAft>
+            </a:pPr>
+            <a:r>
+              <a:rPr sz="2000" b="0" i="0">
+                <a:solidFill>
+                  <a:srgbClr val="333333"/>
+                </a:solidFill>
+                <a:latin typeface="Calibri"/>
+              </a:rPr>
+              <a:t>–   </a:t>
+            </a:r>
+            <a:r>
+              <a:rPr sz="2000" b="1" i="0">
+                <a:solidFill>
+                  <a:srgbClr val="333333"/>
+                </a:solidFill>
+                <a:latin typeface="Calibri"/>
+              </a:rPr>
+              <a:t>Demo:</a:t>
+            </a:r>
+            <a:r>
+              <a:rPr sz="2000" b="0" i="0">
+                <a:solidFill>
+                  <a:srgbClr val="333333"/>
+                </a:solidFill>
+                <a:latin typeface="Calibri"/>
+              </a:rPr>
+              <a:t> El docente proyecta VetCareParaRevisar.java, lo ejecuta en vivo, aplica el checklist delante del grupo y reescribe dos comentarios mal formulados del tipo 'este código es un desastre' en retroalimentación accionable.</a:t>
+            </a:r>
+          </a:p>
+          <a:p>
+            <a:pPr>
+              <a:spcAft>
+                <a:spcPts val="800"/>
+              </a:spcAft>
+            </a:pPr>
+            <a:r>
+              <a:rPr sz="2000" b="0" i="0">
+                <a:solidFill>
+                  <a:srgbClr val="333333"/>
+                </a:solidFill>
+                <a:latin typeface="Calibri"/>
+              </a:rPr>
+              <a:t>–   Mismo dominio VetCare — no otro ejemplo.</a:t>
+            </a:r>
+          </a:p>
+        </p:txBody>
+      </p:sp>
+      <p:sp>
+        <p:nvSpPr>
+          <p:cNvPr id="6" name="TextBox 5"/>
+          <p:cNvSpPr txBox="1"/>
+          <p:nvPr/>
+        </p:nvSpPr>
+        <p:spPr>
+          <a:xfrm>
+            <a:off x="11185855" y="6473952"/>
+            <a:ext cx="640080" cy="274320"/>
+          </a:xfrm>
+          <a:prstGeom prst="rect">
+            <a:avLst/>
+          </a:prstGeom>
+          <a:noFill/>
+        </p:spPr>
+        <p:txBody>
+          <a:bodyPr wrap="square">
+            <a:spAutoFit/>
+          </a:bodyPr>
+          <a:lstStyle/>
+          <a:p>
+            <a:pPr algn="r"/>
+            <a:r>
+              <a:rPr sz="1100" b="0" i="0">
+                <a:solidFill>
+                  <a:srgbClr val="666666"/>
+                </a:solidFill>
+                <a:latin typeface="Calibri"/>
+              </a:rPr>
+              <a:t>13</a:t>
+            </a:r>
+          </a:p>
+        </p:txBody>
+      </p:sp>
+    </p:spTree>
+  </p:cSld>
+  <p:clrMapOvr>
+    <a:masterClrMapping/>
+  </p:clrMapOvr>
+</p:sld>
+</file>
+
+<file path=ppt/slides/slide14.xml><?xml version="1.0" encoding="utf-8"?>
+<p:sld xmlns:a="http://schemas.openxmlformats.org/drawingml/2006/main" xmlns:p="http://schemas.openxmlformats.org/presentationml/2006/main" xmlns:r="http://schemas.openxmlformats.org/officeDocument/2006/relationships">
+  <p:cSld>
+    <p:bg>
+      <p:bgPr>
+        <a:solidFill>
+          <a:srgbClr val="FFFFFF"/>
+        </a:solidFill>
+        <a:effectLst/>
+      </p:bgPr>
+    </p:bg>
+    <p:spTree>
+      <p:nvGrpSpPr>
+        <p:cNvPr id="1" name=""/>
+        <p:cNvGrpSpPr/>
+        <p:nvPr/>
+      </p:nvGrpSpPr>
+      <p:grpSpPr/>
+      <p:sp>
+        <p:nvSpPr>
+          <p:cNvPr id="2" name="Rectangle 1"/>
+          <p:cNvSpPr/>
+          <p:nvPr/>
+        </p:nvSpPr>
+        <p:spPr>
+          <a:xfrm>
+            <a:off x="0" y="0"/>
+            <a:ext cx="12191695" cy="960120"/>
+          </a:xfrm>
+          <a:prstGeom prst="rect">
+            <a:avLst/>
+          </a:prstGeom>
+          <a:solidFill>
+            <a:srgbClr val="095292"/>
+          </a:solidFill>
+          <a:ln>
+            <a:noFill/>
+          </a:ln>
+        </p:spPr>
+        <p:style>
+          <a:lnRef idx="1">
+            <a:schemeClr val="accent1"/>
+          </a:lnRef>
+          <a:fillRef idx="3">
+            <a:schemeClr val="accent1"/>
+          </a:fillRef>
+          <a:effectRef idx="2">
+            <a:schemeClr val="accent1"/>
+          </a:effectRef>
+          <a:fontRef idx="minor">
+            <a:schemeClr val="lt1"/>
+          </a:fontRef>
+        </p:style>
+        <p:txBody>
+          <a:bodyPr rtlCol="0" anchor="ctr"/>
+          <a:lstStyle/>
+          <a:p>
+            <a:pPr algn="ctr"/>
+          </a:p>
+        </p:txBody>
+      </p:sp>
+      <p:sp>
+        <p:nvSpPr>
+          <p:cNvPr id="3" name="Rectangle 2"/>
+          <p:cNvSpPr/>
+          <p:nvPr/>
+        </p:nvSpPr>
+        <p:spPr>
+          <a:xfrm>
+            <a:off x="0" y="960120"/>
+            <a:ext cx="12191695" cy="41148"/>
+          </a:xfrm>
+          <a:prstGeom prst="rect">
+            <a:avLst/>
+          </a:prstGeom>
+          <a:solidFill>
+            <a:srgbClr val="FFD000"/>
+          </a:solidFill>
+          <a:ln>
+            <a:noFill/>
+          </a:ln>
+        </p:spPr>
+        <p:style>
+          <a:lnRef idx="1">
+            <a:schemeClr val="accent1"/>
+          </a:lnRef>
+          <a:fillRef idx="3">
+            <a:schemeClr val="accent1"/>
+          </a:fillRef>
+          <a:effectRef idx="2">
+            <a:schemeClr val="accent1"/>
+          </a:effectRef>
+          <a:fontRef idx="minor">
+            <a:schemeClr val="lt1"/>
+          </a:fontRef>
+        </p:style>
+        <p:txBody>
+          <a:bodyPr rtlCol="0" anchor="ctr"/>
+          <a:lstStyle/>
+          <a:p>
+            <a:pPr algn="ctr"/>
+          </a:p>
+        </p:txBody>
+      </p:sp>
+      <p:sp>
+        <p:nvSpPr>
+          <p:cNvPr id="4" name="TextBox 3"/>
+          <p:cNvSpPr txBox="1"/>
+          <p:nvPr/>
+        </p:nvSpPr>
+        <p:spPr>
+          <a:xfrm>
+            <a:off x="457200" y="164592"/>
+            <a:ext cx="11277295" cy="502920"/>
+          </a:xfrm>
+          <a:prstGeom prst="rect">
+            <a:avLst/>
+          </a:prstGeom>
+          <a:noFill/>
+        </p:spPr>
+        <p:txBody>
+          <a:bodyPr wrap="square">
+            <a:spAutoFit/>
+          </a:bodyPr>
+          <a:lstStyle/>
+          <a:p>
+            <a:r>
+              <a:rPr sz="2600" b="1" i="0">
+                <a:solidFill>
+                  <a:srgbClr val="FFFFFF"/>
+                </a:solidFill>
+                <a:latin typeface="Calibri"/>
+              </a:rPr>
+              <a:t>Taller PI — por que importa</a:t>
+            </a:r>
+          </a:p>
+        </p:txBody>
+      </p:sp>
+      <p:sp>
+        <p:nvSpPr>
+          <p:cNvPr id="5" name="TextBox 4"/>
+          <p:cNvSpPr txBox="1"/>
+          <p:nvPr/>
+        </p:nvSpPr>
+        <p:spPr>
+          <a:xfrm>
+            <a:off x="457200" y="1170432"/>
+            <a:ext cx="11277295" cy="5230368"/>
+          </a:xfrm>
+          <a:prstGeom prst="rect">
+            <a:avLst/>
+          </a:prstGeom>
+          <a:noFill/>
+        </p:spPr>
+        <p:txBody>
+          <a:bodyPr wrap="square">
+            <a:spAutoFit/>
+          </a:bodyPr>
+          <a:lstStyle/>
+          <a:p>
+            <a:pPr>
+              <a:spcAft>
+                <a:spcPts val="800"/>
+              </a:spcAft>
+            </a:pPr>
+            <a:r>
+              <a:rPr sz="2000" b="0" i="0">
+                <a:solidFill>
+                  <a:srgbClr val="333333"/>
+                </a:solidFill>
+                <a:latin typeface="Calibri"/>
+              </a:rPr>
+              <a:t>–   </a:t>
+            </a:r>
+            <a:r>
+              <a:rPr sz="2000" b="1" i="0">
+                <a:solidFill>
+                  <a:srgbClr val="333333"/>
+                </a:solidFill>
+                <a:latin typeface="Calibri"/>
+              </a:rPr>
+              <a:t>Por que importa al PI:</a:t>
+            </a:r>
+            <a:r>
+              <a:rPr sz="2000" b="0" i="0">
+                <a:solidFill>
+                  <a:srgbClr val="333333"/>
+                </a:solidFill>
+                <a:latin typeface="Calibri"/>
+              </a:rPr>
+              <a:t> la semana entrante se integran los módulos, y un defecto que entra a la integración cuesta el triple de encontrar; esta revisión es el filtro que deja entrar solo código que otro humano ya leyó.</a:t>
+            </a:r>
+          </a:p>
+          <a:p>
+            <a:pPr>
+              <a:spcAft>
+                <a:spcPts val="800"/>
+              </a:spcAft>
+            </a:pPr>
+            <a:r>
+              <a:rPr sz="2000" b="0" i="0">
+                <a:solidFill>
+                  <a:srgbClr val="333333"/>
+                </a:solidFill>
+                <a:latin typeface="Calibri"/>
+              </a:rPr>
+              <a:t>–   El informe que reciba cada uno es la lista de tareas real con la que va a llegar a la entrega final: deja de adivinar qué le falta a VetCare porque alguien externo se lo escribió con evidencia.</a:t>
+            </a:r>
+          </a:p>
+          <a:p>
+            <a:pPr>
+              <a:spcAft>
+                <a:spcPts val="800"/>
+              </a:spcAft>
+            </a:pPr>
+            <a:r>
+              <a:rPr sz="2000" b="0" i="0">
+                <a:solidFill>
+                  <a:srgbClr val="333333"/>
+                </a:solidFill>
+                <a:latin typeface="Calibri"/>
+              </a:rPr>
+              <a:t>–   Saber dar y recibir retroalimentación técnica es exactamente lo que se le va a exigir en el primer empleo, donde nadie mezcla código sin la aprobación de otro.</a:t>
+            </a:r>
+          </a:p>
+        </p:txBody>
+      </p:sp>
+      <p:sp>
+        <p:nvSpPr>
+          <p:cNvPr id="6" name="TextBox 5"/>
+          <p:cNvSpPr txBox="1"/>
+          <p:nvPr/>
+        </p:nvSpPr>
+        <p:spPr>
+          <a:xfrm>
+            <a:off x="11185855" y="6473952"/>
+            <a:ext cx="640080" cy="274320"/>
+          </a:xfrm>
+          <a:prstGeom prst="rect">
+            <a:avLst/>
+          </a:prstGeom>
+          <a:noFill/>
+        </p:spPr>
+        <p:txBody>
+          <a:bodyPr wrap="square">
+            <a:spAutoFit/>
+          </a:bodyPr>
+          <a:lstStyle/>
+          <a:p>
+            <a:pPr algn="r"/>
+            <a:r>
+              <a:rPr sz="1100" b="0" i="0">
+                <a:solidFill>
+                  <a:srgbClr val="666666"/>
+                </a:solidFill>
+                <a:latin typeface="Calibri"/>
+              </a:rPr>
+              <a:t>14</a:t>
+            </a:r>
+          </a:p>
+        </p:txBody>
+      </p:sp>
+    </p:spTree>
+  </p:cSld>
+  <p:clrMapOvr>
+    <a:masterClrMapping/>
+  </p:clrMapOvr>
+</p:sld>
+</file>
+
+<file path=ppt/slides/slide15.xml><?xml version="1.0" encoding="utf-8"?>
+<p:sld xmlns:a="http://schemas.openxmlformats.org/drawingml/2006/main" xmlns:p="http://schemas.openxmlformats.org/presentationml/2006/main" xmlns:r="http://schemas.openxmlformats.org/officeDocument/2006/relationships">
+  <p:cSld>
+    <p:bg>
+      <p:bgPr>
+        <a:solidFill>
+          <a:srgbClr val="FFFFFF"/>
+        </a:solidFill>
+        <a:effectLst/>
+      </p:bgPr>
+    </p:bg>
+    <p:spTree>
+      <p:nvGrpSpPr>
+        <p:cNvPr id="1" name=""/>
+        <p:cNvGrpSpPr/>
+        <p:nvPr/>
+      </p:nvGrpSpPr>
+      <p:grpSpPr/>
+      <p:sp>
+        <p:nvSpPr>
+          <p:cNvPr id="2" name="Rectangle 1"/>
+          <p:cNvSpPr/>
+          <p:nvPr/>
+        </p:nvSpPr>
+        <p:spPr>
+          <a:xfrm>
+            <a:off x="0" y="0"/>
+            <a:ext cx="12191695" cy="960120"/>
+          </a:xfrm>
+          <a:prstGeom prst="rect">
+            <a:avLst/>
+          </a:prstGeom>
+          <a:solidFill>
+            <a:srgbClr val="095292"/>
+          </a:solidFill>
+          <a:ln>
+            <a:noFill/>
+          </a:ln>
+        </p:spPr>
+        <p:style>
+          <a:lnRef idx="1">
+            <a:schemeClr val="accent1"/>
+          </a:lnRef>
+          <a:fillRef idx="3">
+            <a:schemeClr val="accent1"/>
+          </a:fillRef>
+          <a:effectRef idx="2">
+            <a:schemeClr val="accent1"/>
+          </a:effectRef>
+          <a:fontRef idx="minor">
+            <a:schemeClr val="lt1"/>
+          </a:fontRef>
+        </p:style>
+        <p:txBody>
+          <a:bodyPr rtlCol="0" anchor="ctr"/>
+          <a:lstStyle/>
+          <a:p>
+            <a:pPr algn="ctr"/>
+          </a:p>
+        </p:txBody>
+      </p:sp>
+      <p:sp>
+        <p:nvSpPr>
+          <p:cNvPr id="3" name="Rectangle 2"/>
+          <p:cNvSpPr/>
+          <p:nvPr/>
+        </p:nvSpPr>
+        <p:spPr>
+          <a:xfrm>
+            <a:off x="0" y="960120"/>
+            <a:ext cx="12191695" cy="41148"/>
+          </a:xfrm>
+          <a:prstGeom prst="rect">
+            <a:avLst/>
+          </a:prstGeom>
+          <a:solidFill>
+            <a:srgbClr val="FFD000"/>
+          </a:solidFill>
+          <a:ln>
+            <a:noFill/>
+          </a:ln>
+        </p:spPr>
+        <p:style>
+          <a:lnRef idx="1">
+            <a:schemeClr val="accent1"/>
+          </a:lnRef>
+          <a:fillRef idx="3">
+            <a:schemeClr val="accent1"/>
+          </a:fillRef>
+          <a:effectRef idx="2">
+            <a:schemeClr val="accent1"/>
+          </a:effectRef>
+          <a:fontRef idx="minor">
+            <a:schemeClr val="lt1"/>
+          </a:fontRef>
+        </p:style>
+        <p:txBody>
+          <a:bodyPr rtlCol="0" anchor="ctr"/>
+          <a:lstStyle/>
+          <a:p>
+            <a:pPr algn="ctr"/>
+          </a:p>
+        </p:txBody>
+      </p:sp>
+      <p:sp>
+        <p:nvSpPr>
+          <p:cNvPr id="4" name="TextBox 3"/>
+          <p:cNvSpPr txBox="1"/>
+          <p:nvPr/>
+        </p:nvSpPr>
+        <p:spPr>
+          <a:xfrm>
+            <a:off x="457200" y="164592"/>
+            <a:ext cx="11277295" cy="502920"/>
+          </a:xfrm>
+          <a:prstGeom prst="rect">
+            <a:avLst/>
+          </a:prstGeom>
+          <a:noFill/>
+        </p:spPr>
+        <p:txBody>
+          <a:bodyPr wrap="square">
+            <a:spAutoFit/>
+          </a:bodyPr>
+          <a:lstStyle/>
+          <a:p>
+            <a:r>
+              <a:rPr sz="2600" b="1" i="0">
+                <a:solidFill>
+                  <a:srgbClr val="FFFFFF"/>
+                </a:solidFill>
+                <a:latin typeface="Calibri"/>
+              </a:rPr>
+              <a:t>Taller PI — punto de partida</a:t>
+            </a:r>
+          </a:p>
+        </p:txBody>
+      </p:sp>
+      <p:sp>
+        <p:nvSpPr>
+          <p:cNvPr id="5" name="TextBox 4"/>
+          <p:cNvSpPr txBox="1"/>
+          <p:nvPr/>
+        </p:nvSpPr>
+        <p:spPr>
+          <a:xfrm>
+            <a:off x="457200" y="1170432"/>
+            <a:ext cx="11277295" cy="5230368"/>
+          </a:xfrm>
+          <a:prstGeom prst="rect">
+            <a:avLst/>
+          </a:prstGeom>
+          <a:noFill/>
+        </p:spPr>
+        <p:txBody>
+          <a:bodyPr wrap="square">
+            <a:spAutoFit/>
+          </a:bodyPr>
+          <a:lstStyle/>
+          <a:p>
+            <a:pPr>
+              <a:spcAft>
+                <a:spcPts val="800"/>
+              </a:spcAft>
+            </a:pPr>
+            <a:r>
+              <a:rPr sz="2000" b="0" i="0">
+                <a:solidFill>
+                  <a:srgbClr val="333333"/>
+                </a:solidFill>
+                <a:latin typeface="Calibri"/>
+              </a:rPr>
+              <a:t>–   Cada estudiante llega con su versión de VetCare hasta la clase 9: dominio, colección, ventana Swing y persistencia en .csv, en distinto grado de avance.</a:t>
+            </a:r>
+          </a:p>
+          <a:p>
+            <a:pPr>
+              <a:spcAft>
+                <a:spcPts val="800"/>
+              </a:spcAft>
+            </a:pPr>
+            <a:r>
+              <a:rPr sz="2000" b="0" i="0">
+                <a:solidFill>
+                  <a:srgbClr val="333333"/>
+                </a:solidFill>
+                <a:latin typeface="Calibri"/>
+              </a:rPr>
+              <a:t>–   El docente proyecta el archivo VetCareParaRevisar.java, que compila y arranca pero termina con una excepción en tiempo de ejecución y contiene al menos siete hallazgos sembrados a propósito.</a:t>
+            </a:r>
+          </a:p>
+          <a:p>
+            <a:pPr>
+              <a:spcAft>
+                <a:spcPts val="800"/>
+              </a:spcAft>
+            </a:pPr>
+            <a:r>
+              <a:rPr sz="2000" b="0" i="0">
+                <a:solidFill>
+                  <a:srgbClr val="333333"/>
+                </a:solidFill>
+                <a:latin typeface="Calibri"/>
+              </a:rPr>
+              <a:t>–   Los estudiantes se cruzan en cadena (el 1 revisa al 2, el 2 al 3 y así hasta cerrar el círculo) y nadie revisa a quien lo está revisando (si el docente autorizó equipos, la cadena se arma entre equipos).</a:t>
+            </a:r>
+          </a:p>
+        </p:txBody>
+      </p:sp>
+      <p:sp>
+        <p:nvSpPr>
+          <p:cNvPr id="6" name="TextBox 5"/>
+          <p:cNvSpPr txBox="1"/>
+          <p:nvPr/>
+        </p:nvSpPr>
+        <p:spPr>
+          <a:xfrm>
+            <a:off x="11185855" y="6473952"/>
+            <a:ext cx="640080" cy="274320"/>
+          </a:xfrm>
+          <a:prstGeom prst="rect">
+            <a:avLst/>
+          </a:prstGeom>
+          <a:noFill/>
+        </p:spPr>
+        <p:txBody>
+          <a:bodyPr wrap="square">
+            <a:spAutoFit/>
+          </a:bodyPr>
+          <a:lstStyle/>
+          <a:p>
+            <a:pPr algn="r"/>
+            <a:r>
+              <a:rPr sz="1100" b="0" i="0">
+                <a:solidFill>
+                  <a:srgbClr val="666666"/>
+                </a:solidFill>
+                <a:latin typeface="Calibri"/>
+              </a:rPr>
+              <a:t>15</a:t>
+            </a:r>
+          </a:p>
+        </p:txBody>
+      </p:sp>
+    </p:spTree>
+  </p:cSld>
+  <p:clrMapOvr>
+    <a:masterClrMapping/>
+  </p:clrMapOvr>
+</p:sld>
+</file>
+
+<file path=ppt/slides/slide16.xml><?xml version="1.0" encoding="utf-8"?>
+<p:sld xmlns:a="http://schemas.openxmlformats.org/drawingml/2006/main" xmlns:p="http://schemas.openxmlformats.org/presentationml/2006/main" xmlns:r="http://schemas.openxmlformats.org/officeDocument/2006/relationships">
+  <p:cSld>
+    <p:bg>
+      <p:bgPr>
+        <a:solidFill>
+          <a:srgbClr val="FFFFFF"/>
+        </a:solidFill>
+        <a:effectLst/>
+      </p:bgPr>
+    </p:bg>
+    <p:spTree>
+      <p:nvGrpSpPr>
+        <p:cNvPr id="1" name=""/>
+        <p:cNvGrpSpPr/>
+        <p:nvPr/>
+      </p:nvGrpSpPr>
+      <p:grpSpPr/>
+      <p:sp>
+        <p:nvSpPr>
+          <p:cNvPr id="2" name="Rectangle 1"/>
+          <p:cNvSpPr/>
+          <p:nvPr/>
+        </p:nvSpPr>
+        <p:spPr>
+          <a:xfrm>
+            <a:off x="0" y="0"/>
+            <a:ext cx="12191695" cy="960120"/>
+          </a:xfrm>
+          <a:prstGeom prst="rect">
+            <a:avLst/>
+          </a:prstGeom>
+          <a:solidFill>
+            <a:srgbClr val="095292"/>
+          </a:solidFill>
+          <a:ln>
+            <a:noFill/>
+          </a:ln>
+        </p:spPr>
+        <p:style>
+          <a:lnRef idx="1">
+            <a:schemeClr val="accent1"/>
+          </a:lnRef>
+          <a:fillRef idx="3">
+            <a:schemeClr val="accent1"/>
+          </a:fillRef>
+          <a:effectRef idx="2">
+            <a:schemeClr val="accent1"/>
+          </a:effectRef>
+          <a:fontRef idx="minor">
+            <a:schemeClr val="lt1"/>
+          </a:fontRef>
+        </p:style>
+        <p:txBody>
+          <a:bodyPr rtlCol="0" anchor="ctr"/>
+          <a:lstStyle/>
+          <a:p>
+            <a:pPr algn="ctr"/>
+          </a:p>
+        </p:txBody>
+      </p:sp>
+      <p:sp>
+        <p:nvSpPr>
+          <p:cNvPr id="3" name="Rectangle 2"/>
+          <p:cNvSpPr/>
+          <p:nvPr/>
+        </p:nvSpPr>
+        <p:spPr>
+          <a:xfrm>
+            <a:off x="0" y="960120"/>
+            <a:ext cx="12191695" cy="41148"/>
+          </a:xfrm>
+          <a:prstGeom prst="rect">
+            <a:avLst/>
+          </a:prstGeom>
+          <a:solidFill>
+            <a:srgbClr val="FFD000"/>
+          </a:solidFill>
+          <a:ln>
+            <a:noFill/>
+          </a:ln>
+        </p:spPr>
+        <p:style>
+          <a:lnRef idx="1">
+            <a:schemeClr val="accent1"/>
+          </a:lnRef>
+          <a:fillRef idx="3">
+            <a:schemeClr val="accent1"/>
+          </a:fillRef>
+          <a:effectRef idx="2">
+            <a:schemeClr val="accent1"/>
+          </a:effectRef>
+          <a:fontRef idx="minor">
+            <a:schemeClr val="lt1"/>
+          </a:fontRef>
+        </p:style>
+        <p:txBody>
+          <a:bodyPr rtlCol="0" anchor="ctr"/>
+          <a:lstStyle/>
+          <a:p>
+            <a:pPr algn="ctr"/>
+          </a:p>
+        </p:txBody>
+      </p:sp>
+      <p:sp>
+        <p:nvSpPr>
+          <p:cNvPr id="4" name="TextBox 3"/>
+          <p:cNvSpPr txBox="1"/>
+          <p:nvPr/>
+        </p:nvSpPr>
+        <p:spPr>
+          <a:xfrm>
+            <a:off x="457200" y="164592"/>
+            <a:ext cx="11277295" cy="502920"/>
+          </a:xfrm>
+          <a:prstGeom prst="rect">
+            <a:avLst/>
+          </a:prstGeom>
+          <a:noFill/>
+        </p:spPr>
+        <p:txBody>
+          <a:bodyPr wrap="square">
+            <a:spAutoFit/>
+          </a:bodyPr>
+          <a:lstStyle/>
+          <a:p>
+            <a:r>
+              <a:rPr sz="2600" b="1" i="0">
+                <a:solidFill>
+                  <a:srgbClr val="FFFFFF"/>
+                </a:solidFill>
+                <a:latin typeface="Calibri"/>
+              </a:rPr>
+              <a:t>Taller PI — pasos guiados</a:t>
+            </a:r>
+          </a:p>
+        </p:txBody>
+      </p:sp>
+      <p:sp>
+        <p:nvSpPr>
+          <p:cNvPr id="5" name="Rounded Rectangle 4"/>
+          <p:cNvSpPr/>
+          <p:nvPr/>
+        </p:nvSpPr>
+        <p:spPr>
+          <a:xfrm>
+            <a:off x="457200" y="1234440"/>
+            <a:ext cx="11277295" cy="950976"/>
+          </a:xfrm>
+          <a:prstGeom prst="roundRect">
+            <a:avLst>
+              <a:gd name="adj" fmla="val 12000"/>
+            </a:avLst>
+          </a:prstGeom>
+          <a:solidFill>
+            <a:srgbClr val="F2F2F2"/>
+          </a:solidFill>
+          <a:ln>
+            <a:noFill/>
+          </a:ln>
+        </p:spPr>
+        <p:style>
+          <a:lnRef idx="1">
+            <a:schemeClr val="accent1"/>
+          </a:lnRef>
+          <a:fillRef idx="3">
+            <a:schemeClr val="accent1"/>
+          </a:fillRef>
+          <a:effectRef idx="2">
+            <a:schemeClr val="accent1"/>
+          </a:effectRef>
+          <a:fontRef idx="minor">
+            <a:schemeClr val="lt1"/>
+          </a:fontRef>
+        </p:style>
+        <p:txBody>
+          <a:bodyPr rtlCol="0" anchor="ctr"/>
+          <a:lstStyle/>
+          <a:p>
+            <a:pPr algn="ctr"/>
+          </a:p>
+        </p:txBody>
+      </p:sp>
+      <p:sp>
+        <p:nvSpPr>
+          <p:cNvPr id="6" name="Rounded Rectangle 5"/>
+          <p:cNvSpPr/>
+          <p:nvPr/>
+        </p:nvSpPr>
+        <p:spPr>
+          <a:xfrm>
+            <a:off x="594360" y="1490472"/>
+            <a:ext cx="438912" cy="438912"/>
+          </a:xfrm>
+          <a:prstGeom prst="roundRect">
+            <a:avLst>
+              <a:gd name="adj" fmla="val 12000"/>
+            </a:avLst>
+          </a:prstGeom>
+          <a:solidFill>
+            <a:srgbClr val="095292"/>
+          </a:solidFill>
+          <a:ln>
+            <a:noFill/>
+          </a:ln>
+        </p:spPr>
+        <p:style>
+          <a:lnRef idx="1">
+            <a:schemeClr val="accent1"/>
+          </a:lnRef>
+          <a:fillRef idx="3">
+            <a:schemeClr val="accent1"/>
+          </a:fillRef>
+          <a:effectRef idx="2">
+            <a:schemeClr val="accent1"/>
+          </a:effectRef>
+          <a:fontRef idx="minor">
+            <a:schemeClr val="lt1"/>
+          </a:fontRef>
+        </p:style>
+        <p:txBody>
+          <a:bodyPr rtlCol="0" anchor="ctr"/>
+          <a:lstStyle/>
+          <a:p>
+            <a:pPr algn="ctr"/>
+          </a:p>
+        </p:txBody>
+      </p:sp>
+      <p:sp>
+        <p:nvSpPr>
+          <p:cNvPr id="7" name="TextBox 6"/>
+          <p:cNvSpPr txBox="1"/>
+          <p:nvPr/>
+        </p:nvSpPr>
+        <p:spPr>
+          <a:xfrm>
+            <a:off x="594360" y="1490472"/>
+            <a:ext cx="438912" cy="438912"/>
+          </a:xfrm>
+          <a:prstGeom prst="rect">
+            <a:avLst/>
+          </a:prstGeom>
+          <a:noFill/>
+        </p:spPr>
+        <p:txBody>
+          <a:bodyPr wrap="square" anchor="ctr"/>
+          <a:lstStyle/>
+          <a:p>
+            <a:pPr algn="ctr"/>
+            <a:r>
+              <a:rPr sz="1600" b="1" i="0">
+                <a:solidFill>
+                  <a:srgbClr val="FFFFFF"/>
+                </a:solidFill>
+                <a:latin typeface="Calibri"/>
+              </a:rPr>
+              <a:t>1</a:t>
+            </a:r>
+          </a:p>
+        </p:txBody>
+      </p:sp>
+      <p:sp>
+        <p:nvSpPr>
+          <p:cNvPr id="8" name="TextBox 7"/>
+          <p:cNvSpPr txBox="1"/>
+          <p:nvPr/>
+        </p:nvSpPr>
+        <p:spPr>
+          <a:xfrm>
+            <a:off x="1188720" y="1325880"/>
+            <a:ext cx="10271455" cy="786384"/>
+          </a:xfrm>
+          <a:prstGeom prst="rect">
+            <a:avLst/>
+          </a:prstGeom>
+          <a:noFill/>
+        </p:spPr>
+        <p:txBody>
+          <a:bodyPr wrap="square" anchor="ctr"/>
+          <a:lstStyle/>
+          <a:p>
+            <a:r>
+              <a:rPr sz="1400" b="1" i="0">
+                <a:solidFill>
+                  <a:srgbClr val="095292"/>
+                </a:solidFill>
+                <a:latin typeface="Calibri"/>
+              </a:rPr>
+              <a:t>Intercambien proyectos: cada estudiante entrega su carpeta comprimida más un archivo de tres líneas con las instrucciones de ejecución, y recibe el proyecto de otro compañero (si el docente autorizó equipos, el de otro equipo; la revisión funciona igual); lo primero es abrirlo en VS Code y ejecutarlo, anotando si arrancó y, si no, el mensaje de error exacto copiado tal cual.</a:t>
+            </a:r>
+          </a:p>
+        </p:txBody>
+      </p:sp>
+      <p:sp>
+        <p:nvSpPr>
+          <p:cNvPr id="9" name="Rounded Rectangle 8"/>
+          <p:cNvSpPr/>
+          <p:nvPr/>
+        </p:nvSpPr>
+        <p:spPr>
+          <a:xfrm>
+            <a:off x="457200" y="2276856"/>
+            <a:ext cx="11277295" cy="950976"/>
+          </a:xfrm>
+          <a:prstGeom prst="roundRect">
+            <a:avLst>
+              <a:gd name="adj" fmla="val 12000"/>
+            </a:avLst>
+          </a:prstGeom>
+          <a:solidFill>
+            <a:srgbClr val="E8F4FA"/>
+          </a:solidFill>
+          <a:ln>
+            <a:noFill/>
+          </a:ln>
+        </p:spPr>
+        <p:style>
+          <a:lnRef idx="1">
+            <a:schemeClr val="accent1"/>
+          </a:lnRef>
+          <a:fillRef idx="3">
+            <a:schemeClr val="accent1"/>
+          </a:fillRef>
+          <a:effectRef idx="2">
+            <a:schemeClr val="accent1"/>
+          </a:effectRef>
+          <a:fontRef idx="minor">
+            <a:schemeClr val="lt1"/>
+          </a:fontRef>
+        </p:style>
+        <p:txBody>
+          <a:bodyPr rtlCol="0" anchor="ctr"/>
+          <a:lstStyle/>
+          <a:p>
+            <a:pPr algn="ctr"/>
+          </a:p>
+        </p:txBody>
+      </p:sp>
+      <p:sp>
+        <p:nvSpPr>
+          <p:cNvPr id="10" name="Rounded Rectangle 9"/>
+          <p:cNvSpPr/>
+          <p:nvPr/>
+        </p:nvSpPr>
+        <p:spPr>
+          <a:xfrm>
+            <a:off x="594360" y="2532888"/>
+            <a:ext cx="438912" cy="438912"/>
+          </a:xfrm>
+          <a:prstGeom prst="roundRect">
+            <a:avLst>
+              <a:gd name="adj" fmla="val 12000"/>
+            </a:avLst>
+          </a:prstGeom>
+          <a:solidFill>
+            <a:srgbClr val="095292"/>
+          </a:solidFill>
+          <a:ln>
+            <a:noFill/>
+          </a:ln>
+        </p:spPr>
+        <p:style>
+          <a:lnRef idx="1">
+            <a:schemeClr val="accent1"/>
+          </a:lnRef>
+          <a:fillRef idx="3">
+            <a:schemeClr val="accent1"/>
+          </a:fillRef>
+          <a:effectRef idx="2">
+            <a:schemeClr val="accent1"/>
+          </a:effectRef>
+          <a:fontRef idx="minor">
+            <a:schemeClr val="lt1"/>
+          </a:fontRef>
+        </p:style>
+        <p:txBody>
+          <a:bodyPr rtlCol="0" anchor="ctr"/>
+          <a:lstStyle/>
+          <a:p>
+            <a:pPr algn="ctr"/>
+          </a:p>
+        </p:txBody>
+      </p:sp>
+      <p:sp>
+        <p:nvSpPr>
+          <p:cNvPr id="11" name="TextBox 10"/>
+          <p:cNvSpPr txBox="1"/>
+          <p:nvPr/>
+        </p:nvSpPr>
+        <p:spPr>
+          <a:xfrm>
+            <a:off x="594360" y="2532888"/>
+            <a:ext cx="438912" cy="438912"/>
+          </a:xfrm>
+          <a:prstGeom prst="rect">
+            <a:avLst/>
+          </a:prstGeom>
+          <a:noFill/>
+        </p:spPr>
+        <p:txBody>
+          <a:bodyPr wrap="square" anchor="ctr"/>
+          <a:lstStyle/>
+          <a:p>
+            <a:pPr algn="ctr"/>
+            <a:r>
+              <a:rPr sz="1600" b="1" i="0">
+                <a:solidFill>
+                  <a:srgbClr val="FFFFFF"/>
+                </a:solidFill>
+                <a:latin typeface="Calibri"/>
+              </a:rPr>
+              <a:t>2</a:t>
+            </a:r>
+          </a:p>
+        </p:txBody>
+      </p:sp>
+      <p:sp>
+        <p:nvSpPr>
+          <p:cNvPr id="12" name="TextBox 11"/>
+          <p:cNvSpPr txBox="1"/>
+          <p:nvPr/>
+        </p:nvSpPr>
+        <p:spPr>
+          <a:xfrm>
+            <a:off x="1188720" y="2368296"/>
+            <a:ext cx="10271455" cy="786384"/>
+          </a:xfrm>
+          <a:prstGeom prst="rect">
+            <a:avLst/>
+          </a:prstGeom>
+          <a:noFill/>
+        </p:spPr>
+        <p:txBody>
+          <a:bodyPr wrap="square" anchor="ctr"/>
+          <a:lstStyle/>
+          <a:p>
+            <a:r>
+              <a:rPr sz="1400" b="1" i="0">
+                <a:solidFill>
+                  <a:srgbClr val="095292"/>
+                </a:solidFill>
+                <a:latin typeface="Calibri"/>
+              </a:rPr>
+              <a:t>Recorran el proyecto recibido con el checklist de doce ítems (clase de dominio, encapsulamiento, colección, interfaz gráfica, try-catch en fronteras, persistencia, catch vacío, métodos largos, duplicación, nombres, números mágicos, validación de casos borde) marcando cumple / no cumple / no aplica y escribiendo la evidencia archivo:línea en cada 'no cumple'.</a:t>
+            </a:r>
+          </a:p>
+        </p:txBody>
+      </p:sp>
+      <p:sp>
+        <p:nvSpPr>
+          <p:cNvPr id="13" name="Rounded Rectangle 12"/>
+          <p:cNvSpPr/>
+          <p:nvPr/>
+        </p:nvSpPr>
+        <p:spPr>
+          <a:xfrm>
+            <a:off x="457200" y="3319272"/>
+            <a:ext cx="11277295" cy="950976"/>
+          </a:xfrm>
+          <a:prstGeom prst="roundRect">
+            <a:avLst>
+              <a:gd name="adj" fmla="val 12000"/>
+            </a:avLst>
+          </a:prstGeom>
+          <a:solidFill>
+            <a:srgbClr val="F2F2F2"/>
+          </a:solidFill>
+          <a:ln>
+            <a:noFill/>
+          </a:ln>
+        </p:spPr>
+        <p:style>
+          <a:lnRef idx="1">
+            <a:schemeClr val="accent1"/>
+          </a:lnRef>
+          <a:fillRef idx="3">
+            <a:schemeClr val="accent1"/>
+          </a:fillRef>
+          <a:effectRef idx="2">
+            <a:schemeClr val="accent1"/>
+          </a:effectRef>
+          <a:fontRef idx="minor">
+            <a:schemeClr val="lt1"/>
+          </a:fontRef>
+        </p:style>
+        <p:txBody>
+          <a:bodyPr rtlCol="0" anchor="ctr"/>
+          <a:lstStyle/>
+          <a:p>
+            <a:pPr algn="ctr"/>
+          </a:p>
+        </p:txBody>
+      </p:sp>
+      <p:sp>
+        <p:nvSpPr>
+          <p:cNvPr id="14" name="Rounded Rectangle 13"/>
+          <p:cNvSpPr/>
+          <p:nvPr/>
+        </p:nvSpPr>
+        <p:spPr>
+          <a:xfrm>
+            <a:off x="594360" y="3575304"/>
+            <a:ext cx="438912" cy="438912"/>
+          </a:xfrm>
+          <a:prstGeom prst="roundRect">
+            <a:avLst>
+              <a:gd name="adj" fmla="val 12000"/>
+            </a:avLst>
+          </a:prstGeom>
+          <a:solidFill>
+            <a:srgbClr val="095292"/>
+          </a:solidFill>
+          <a:ln>
+            <a:noFill/>
+          </a:ln>
+        </p:spPr>
+        <p:style>
+          <a:lnRef idx="1">
+            <a:schemeClr val="accent1"/>
+          </a:lnRef>
+          <a:fillRef idx="3">
+            <a:schemeClr val="accent1"/>
+          </a:fillRef>
+          <a:effectRef idx="2">
+            <a:schemeClr val="accent1"/>
+          </a:effectRef>
+          <a:fontRef idx="minor">
+            <a:schemeClr val="lt1"/>
+          </a:fontRef>
+        </p:style>
+        <p:txBody>
+          <a:bodyPr rtlCol="0" anchor="ctr"/>
+          <a:lstStyle/>
+          <a:p>
+            <a:pPr algn="ctr"/>
+          </a:p>
+        </p:txBody>
+      </p:sp>
+      <p:sp>
+        <p:nvSpPr>
+          <p:cNvPr id="15" name="TextBox 14"/>
+          <p:cNvSpPr txBox="1"/>
+          <p:nvPr/>
+        </p:nvSpPr>
+        <p:spPr>
+          <a:xfrm>
+            <a:off x="594360" y="3575304"/>
+            <a:ext cx="438912" cy="438912"/>
+          </a:xfrm>
+          <a:prstGeom prst="rect">
+            <a:avLst/>
+          </a:prstGeom>
+          <a:noFill/>
+        </p:spPr>
+        <p:txBody>
+          <a:bodyPr wrap="square" anchor="ctr"/>
+          <a:lstStyle/>
+          <a:p>
+            <a:pPr algn="ctr"/>
+            <a:r>
+              <a:rPr sz="1600" b="1" i="0">
+                <a:solidFill>
+                  <a:srgbClr val="FFFFFF"/>
+                </a:solidFill>
+                <a:latin typeface="Calibri"/>
+              </a:rPr>
+              <a:t>3</a:t>
+            </a:r>
+          </a:p>
+        </p:txBody>
+      </p:sp>
+      <p:sp>
+        <p:nvSpPr>
+          <p:cNvPr id="16" name="TextBox 15"/>
+          <p:cNvSpPr txBox="1"/>
+          <p:nvPr/>
+        </p:nvSpPr>
+        <p:spPr>
+          <a:xfrm>
+            <a:off x="1188720" y="3410712"/>
+            <a:ext cx="10271455" cy="786384"/>
+          </a:xfrm>
+          <a:prstGeom prst="rect">
+            <a:avLst/>
+          </a:prstGeom>
+          <a:noFill/>
+        </p:spPr>
+        <p:txBody>
+          <a:bodyPr wrap="square" anchor="ctr"/>
+          <a:lstStyle/>
+          <a:p>
+            <a:r>
+              <a:rPr sz="1500" b="1" i="0">
+                <a:solidFill>
+                  <a:srgbClr val="095292"/>
+                </a:solidFill>
+                <a:latin typeface="Calibri"/>
+              </a:rPr>
+              <a:t>Provoquen a propósito los cuatro casos borde de VetCare (edad con letras, campos vacíos, buscar un ID inexistente, borrar o dañar una línea de mascotas.csv) y registren qué hizo la aplicación en cada uno, con el texto del mensaje o de la excepción.</a:t>
+            </a:r>
+          </a:p>
+        </p:txBody>
+      </p:sp>
+      <p:sp>
+        <p:nvSpPr>
+          <p:cNvPr id="17" name="Rounded Rectangle 16"/>
+          <p:cNvSpPr/>
+          <p:nvPr/>
+        </p:nvSpPr>
+        <p:spPr>
+          <a:xfrm>
+            <a:off x="457200" y="4361688"/>
+            <a:ext cx="11277295" cy="950976"/>
+          </a:xfrm>
+          <a:prstGeom prst="roundRect">
+            <a:avLst>
+              <a:gd name="adj" fmla="val 12000"/>
+            </a:avLst>
+          </a:prstGeom>
+          <a:solidFill>
+            <a:srgbClr val="E8F4FA"/>
+          </a:solidFill>
+          <a:ln>
+            <a:noFill/>
+          </a:ln>
+        </p:spPr>
+        <p:style>
+          <a:lnRef idx="1">
+            <a:schemeClr val="accent1"/>
+          </a:lnRef>
+          <a:fillRef idx="3">
+            <a:schemeClr val="accent1"/>
+          </a:fillRef>
+          <a:effectRef idx="2">
+            <a:schemeClr val="accent1"/>
+          </a:effectRef>
+          <a:fontRef idx="minor">
+            <a:schemeClr val="lt1"/>
+          </a:fontRef>
+        </p:style>
+        <p:txBody>
+          <a:bodyPr rtlCol="0" anchor="ctr"/>
+          <a:lstStyle/>
+          <a:p>
+            <a:pPr algn="ctr"/>
+          </a:p>
+        </p:txBody>
+      </p:sp>
+      <p:sp>
+        <p:nvSpPr>
+          <p:cNvPr id="18" name="Rounded Rectangle 17"/>
+          <p:cNvSpPr/>
+          <p:nvPr/>
+        </p:nvSpPr>
+        <p:spPr>
+          <a:xfrm>
+            <a:off x="594360" y="4617720"/>
+            <a:ext cx="438912" cy="438912"/>
+          </a:xfrm>
+          <a:prstGeom prst="roundRect">
+            <a:avLst>
+              <a:gd name="adj" fmla="val 12000"/>
+            </a:avLst>
+          </a:prstGeom>
+          <a:solidFill>
+            <a:srgbClr val="095292"/>
+          </a:solidFill>
+          <a:ln>
+            <a:noFill/>
+          </a:ln>
+        </p:spPr>
+        <p:style>
+          <a:lnRef idx="1">
+            <a:schemeClr val="accent1"/>
+          </a:lnRef>
+          <a:fillRef idx="3">
+            <a:schemeClr val="accent1"/>
+          </a:fillRef>
+          <a:effectRef idx="2">
+            <a:schemeClr val="accent1"/>
+          </a:effectRef>
+          <a:fontRef idx="minor">
+            <a:schemeClr val="lt1"/>
+          </a:fontRef>
+        </p:style>
+        <p:txBody>
+          <a:bodyPr rtlCol="0" anchor="ctr"/>
+          <a:lstStyle/>
+          <a:p>
+            <a:pPr algn="ctr"/>
+          </a:p>
+        </p:txBody>
+      </p:sp>
+      <p:sp>
+        <p:nvSpPr>
+          <p:cNvPr id="19" name="TextBox 18"/>
+          <p:cNvSpPr txBox="1"/>
+          <p:nvPr/>
+        </p:nvSpPr>
+        <p:spPr>
+          <a:xfrm>
+            <a:off x="594360" y="4617720"/>
+            <a:ext cx="438912" cy="438912"/>
+          </a:xfrm>
+          <a:prstGeom prst="rect">
+            <a:avLst/>
+          </a:prstGeom>
+          <a:noFill/>
+        </p:spPr>
+        <p:txBody>
+          <a:bodyPr wrap="square" anchor="ctr"/>
+          <a:lstStyle/>
+          <a:p>
+            <a:pPr algn="ctr"/>
+            <a:r>
+              <a:rPr sz="1600" b="1" i="0">
+                <a:solidFill>
+                  <a:srgbClr val="FFFFFF"/>
+                </a:solidFill>
+                <a:latin typeface="Calibri"/>
+              </a:rPr>
+              <a:t>4</a:t>
+            </a:r>
+          </a:p>
+        </p:txBody>
+      </p:sp>
+      <p:sp>
+        <p:nvSpPr>
+          <p:cNvPr id="20" name="TextBox 19"/>
+          <p:cNvSpPr txBox="1"/>
+          <p:nvPr/>
+        </p:nvSpPr>
+        <p:spPr>
+          <a:xfrm>
+            <a:off x="1188720" y="4453128"/>
+            <a:ext cx="10271455" cy="786384"/>
+          </a:xfrm>
+          <a:prstGeom prst="rect">
+            <a:avLst/>
+          </a:prstGeom>
+          <a:noFill/>
+        </p:spPr>
+        <p:txBody>
+          <a:bodyPr wrap="square" anchor="ctr"/>
+          <a:lstStyle/>
+          <a:p>
+            <a:r>
+              <a:rPr sz="1500" b="1" i="0">
+                <a:solidFill>
+                  <a:srgbClr val="095292"/>
+                </a:solidFill>
+                <a:latin typeface="Calibri"/>
+              </a:rPr>
+              <a:t>Redacten cinco hallazgos priorizados como bloqueante, mayor o menor, cada uno con el formato Evidencia + Impacto + Sugerencia, todos referidos al código y ninguno a la persona; incluyan al menos un bloqueante si existe.</a:t>
+            </a:r>
+          </a:p>
+        </p:txBody>
+      </p:sp>
+      <p:sp>
+        <p:nvSpPr>
+          <p:cNvPr id="21" name="Rounded Rectangle 20"/>
+          <p:cNvSpPr/>
+          <p:nvPr/>
+        </p:nvSpPr>
+        <p:spPr>
+          <a:xfrm>
+            <a:off x="457200" y="5404104"/>
+            <a:ext cx="11277295" cy="950976"/>
+          </a:xfrm>
+          <a:prstGeom prst="roundRect">
+            <a:avLst>
+              <a:gd name="adj" fmla="val 12000"/>
+            </a:avLst>
+          </a:prstGeom>
+          <a:solidFill>
+            <a:srgbClr val="F2F2F2"/>
+          </a:solidFill>
+          <a:ln>
+            <a:noFill/>
+          </a:ln>
+        </p:spPr>
+        <p:style>
+          <a:lnRef idx="1">
+            <a:schemeClr val="accent1"/>
+          </a:lnRef>
+          <a:fillRef idx="3">
+            <a:schemeClr val="accent1"/>
+          </a:fillRef>
+          <a:effectRef idx="2">
+            <a:schemeClr val="accent1"/>
+          </a:effectRef>
+          <a:fontRef idx="minor">
+            <a:schemeClr val="lt1"/>
+          </a:fontRef>
+        </p:style>
+        <p:txBody>
+          <a:bodyPr rtlCol="0" anchor="ctr"/>
+          <a:lstStyle/>
+          <a:p>
+            <a:pPr algn="ctr"/>
+          </a:p>
+        </p:txBody>
+      </p:sp>
+      <p:sp>
+        <p:nvSpPr>
+          <p:cNvPr id="22" name="Rounded Rectangle 21"/>
+          <p:cNvSpPr/>
+          <p:nvPr/>
+        </p:nvSpPr>
+        <p:spPr>
+          <a:xfrm>
+            <a:off x="594360" y="5660136"/>
+            <a:ext cx="438912" cy="438912"/>
+          </a:xfrm>
+          <a:prstGeom prst="roundRect">
+            <a:avLst>
+              <a:gd name="adj" fmla="val 12000"/>
+            </a:avLst>
+          </a:prstGeom>
+          <a:solidFill>
+            <a:srgbClr val="095292"/>
+          </a:solidFill>
+          <a:ln>
+            <a:noFill/>
+          </a:ln>
+        </p:spPr>
+        <p:style>
+          <a:lnRef idx="1">
+            <a:schemeClr val="accent1"/>
+          </a:lnRef>
+          <a:fillRef idx="3">
+            <a:schemeClr val="accent1"/>
+          </a:fillRef>
+          <a:effectRef idx="2">
+            <a:schemeClr val="accent1"/>
+          </a:effectRef>
+          <a:fontRef idx="minor">
+            <a:schemeClr val="lt1"/>
+          </a:fontRef>
+        </p:style>
+        <p:txBody>
+          <a:bodyPr rtlCol="0" anchor="ctr"/>
+          <a:lstStyle/>
+          <a:p>
+            <a:pPr algn="ctr"/>
+          </a:p>
+        </p:txBody>
+      </p:sp>
+      <p:sp>
+        <p:nvSpPr>
+          <p:cNvPr id="23" name="TextBox 22"/>
+          <p:cNvSpPr txBox="1"/>
+          <p:nvPr/>
+        </p:nvSpPr>
+        <p:spPr>
+          <a:xfrm>
+            <a:off x="594360" y="5660136"/>
+            <a:ext cx="438912" cy="438912"/>
+          </a:xfrm>
+          <a:prstGeom prst="rect">
+            <a:avLst/>
+          </a:prstGeom>
+          <a:noFill/>
+        </p:spPr>
+        <p:txBody>
+          <a:bodyPr wrap="square" anchor="ctr"/>
+          <a:lstStyle/>
+          <a:p>
+            <a:pPr algn="ctr"/>
+            <a:r>
+              <a:rPr sz="1600" b="1" i="0">
+                <a:solidFill>
+                  <a:srgbClr val="FFFFFF"/>
+                </a:solidFill>
+                <a:latin typeface="Calibri"/>
+              </a:rPr>
+              <a:t>5</a:t>
+            </a:r>
+          </a:p>
+        </p:txBody>
+      </p:sp>
+      <p:sp>
+        <p:nvSpPr>
+          <p:cNvPr id="24" name="TextBox 23"/>
+          <p:cNvSpPr txBox="1"/>
+          <p:nvPr/>
+        </p:nvSpPr>
+        <p:spPr>
+          <a:xfrm>
+            <a:off x="1188720" y="5495544"/>
+            <a:ext cx="10271455" cy="786384"/>
+          </a:xfrm>
+          <a:prstGeom prst="rect">
+            <a:avLst/>
+          </a:prstGeom>
+          <a:noFill/>
+        </p:spPr>
+        <p:txBody>
+          <a:bodyPr wrap="square" anchor="ctr"/>
+          <a:lstStyle/>
+          <a:p>
+            <a:r>
+              <a:rPr sz="1500" b="1" i="0">
+                <a:solidFill>
+                  <a:srgbClr val="095292"/>
+                </a:solidFill>
+                <a:latin typeface="Calibri"/>
+              </a:rPr>
+              <a:t>Hagan la devolución cruzada de ocho minutos por proyecto revisado y cierren con el plan de corrección escrito por su autor: qué acepta y corrige, qué justifica y deja igual, y qué difiere, con responsable en cada línea.</a:t>
+            </a:r>
+          </a:p>
+        </p:txBody>
+      </p:sp>
+      <p:sp>
+        <p:nvSpPr>
+          <p:cNvPr id="25" name="TextBox 24"/>
+          <p:cNvSpPr txBox="1"/>
+          <p:nvPr/>
+        </p:nvSpPr>
+        <p:spPr>
+          <a:xfrm>
+            <a:off x="11185855" y="6473952"/>
+            <a:ext cx="640080" cy="274320"/>
+          </a:xfrm>
+          <a:prstGeom prst="rect">
+            <a:avLst/>
+          </a:prstGeom>
+          <a:noFill/>
+        </p:spPr>
+        <p:txBody>
+          <a:bodyPr wrap="square">
+            <a:spAutoFit/>
+          </a:bodyPr>
+          <a:lstStyle/>
+          <a:p>
+            <a:pPr algn="r"/>
+            <a:r>
+              <a:rPr sz="1100" b="0" i="0">
+                <a:solidFill>
+                  <a:srgbClr val="666666"/>
+                </a:solidFill>
+                <a:latin typeface="Calibri"/>
+              </a:rPr>
+              <a:t>16</a:t>
+            </a:r>
+          </a:p>
+        </p:txBody>
+      </p:sp>
+    </p:spTree>
+  </p:cSld>
+  <p:clrMapOvr>
+    <a:masterClrMapping/>
+  </p:clrMapOvr>
+</p:sld>
+</file>
+
+<file path=ppt/slides/slide17.xml><?xml version="1.0" encoding="utf-8"?>
+<p:sld xmlns:a="http://schemas.openxmlformats.org/drawingml/2006/main" xmlns:p="http://schemas.openxmlformats.org/presentationml/2006/main" xmlns:r="http://schemas.openxmlformats.org/officeDocument/2006/relationships">
+  <p:cSld>
+    <p:bg>
+      <p:bgPr>
+        <a:solidFill>
+          <a:srgbClr val="FFFFFF"/>
+        </a:solidFill>
+        <a:effectLst/>
+      </p:bgPr>
+    </p:bg>
+    <p:spTree>
+      <p:nvGrpSpPr>
+        <p:cNvPr id="1" name=""/>
+        <p:cNvGrpSpPr/>
+        <p:nvPr/>
+      </p:nvGrpSpPr>
+      <p:grpSpPr/>
+      <p:sp>
+        <p:nvSpPr>
+          <p:cNvPr id="2" name="Rectangle 1"/>
+          <p:cNvSpPr/>
+          <p:nvPr/>
+        </p:nvSpPr>
+        <p:spPr>
+          <a:xfrm>
+            <a:off x="0" y="0"/>
+            <a:ext cx="12191695" cy="960120"/>
+          </a:xfrm>
+          <a:prstGeom prst="rect">
+            <a:avLst/>
+          </a:prstGeom>
+          <a:solidFill>
+            <a:srgbClr val="095292"/>
+          </a:solidFill>
+          <a:ln>
+            <a:noFill/>
+          </a:ln>
+        </p:spPr>
+        <p:style>
+          <a:lnRef idx="1">
+            <a:schemeClr val="accent1"/>
+          </a:lnRef>
+          <a:fillRef idx="3">
+            <a:schemeClr val="accent1"/>
+          </a:fillRef>
+          <a:effectRef idx="2">
+            <a:schemeClr val="accent1"/>
+          </a:effectRef>
+          <a:fontRef idx="minor">
+            <a:schemeClr val="lt1"/>
+          </a:fontRef>
+        </p:style>
+        <p:txBody>
+          <a:bodyPr rtlCol="0" anchor="ctr"/>
+          <a:lstStyle/>
+          <a:p>
+            <a:pPr algn="ctr"/>
+          </a:p>
+        </p:txBody>
+      </p:sp>
+      <p:sp>
+        <p:nvSpPr>
+          <p:cNvPr id="3" name="Rectangle 2"/>
+          <p:cNvSpPr/>
+          <p:nvPr/>
+        </p:nvSpPr>
+        <p:spPr>
+          <a:xfrm>
+            <a:off x="0" y="960120"/>
+            <a:ext cx="12191695" cy="41148"/>
+          </a:xfrm>
+          <a:prstGeom prst="rect">
+            <a:avLst/>
+          </a:prstGeom>
+          <a:solidFill>
+            <a:srgbClr val="FFD000"/>
+          </a:solidFill>
+          <a:ln>
+            <a:noFill/>
+          </a:ln>
+        </p:spPr>
+        <p:style>
+          <a:lnRef idx="1">
+            <a:schemeClr val="accent1"/>
+          </a:lnRef>
+          <a:fillRef idx="3">
+            <a:schemeClr val="accent1"/>
+          </a:fillRef>
+          <a:effectRef idx="2">
+            <a:schemeClr val="accent1"/>
+          </a:effectRef>
+          <a:fontRef idx="minor">
+            <a:schemeClr val="lt1"/>
+          </a:fontRef>
+        </p:style>
+        <p:txBody>
+          <a:bodyPr rtlCol="0" anchor="ctr"/>
+          <a:lstStyle/>
+          <a:p>
+            <a:pPr algn="ctr"/>
+          </a:p>
+        </p:txBody>
+      </p:sp>
+      <p:sp>
+        <p:nvSpPr>
+          <p:cNvPr id="4" name="TextBox 3"/>
+          <p:cNvSpPr txBox="1"/>
+          <p:nvPr/>
+        </p:nvSpPr>
+        <p:spPr>
+          <a:xfrm>
+            <a:off x="457200" y="164592"/>
+            <a:ext cx="11277295" cy="502920"/>
+          </a:xfrm>
+          <a:prstGeom prst="rect">
+            <a:avLst/>
+          </a:prstGeom>
+          <a:noFill/>
+        </p:spPr>
+        <p:txBody>
+          <a:bodyPr wrap="square">
+            <a:spAutoFit/>
+          </a:bodyPr>
+          <a:lstStyle/>
+          <a:p>
+            <a:r>
+              <a:rPr sz="2600" b="1" i="0">
+                <a:solidFill>
+                  <a:srgbClr val="FFFFFF"/>
+                </a:solidFill>
+                <a:latin typeface="Calibri"/>
+              </a:rPr>
+              <a:t>Antes de entregar — autochequeo</a:t>
+            </a:r>
+          </a:p>
+        </p:txBody>
+      </p:sp>
+      <p:sp>
+        <p:nvSpPr>
+          <p:cNvPr id="5" name="Rounded Rectangle 4"/>
+          <p:cNvSpPr/>
+          <p:nvPr/>
+        </p:nvSpPr>
+        <p:spPr>
+          <a:xfrm>
+            <a:off x="457200" y="1261872"/>
+            <a:ext cx="11277295" cy="566928"/>
+          </a:xfrm>
+          <a:prstGeom prst="roundRect">
+            <a:avLst>
+              <a:gd name="adj" fmla="val 12000"/>
+            </a:avLst>
+          </a:prstGeom>
+          <a:solidFill>
+            <a:srgbClr val="F2F2F2"/>
+          </a:solidFill>
+          <a:ln>
+            <a:noFill/>
+          </a:ln>
+        </p:spPr>
+        <p:style>
+          <a:lnRef idx="1">
+            <a:schemeClr val="accent1"/>
+          </a:lnRef>
+          <a:fillRef idx="3">
+            <a:schemeClr val="accent1"/>
+          </a:fillRef>
+          <a:effectRef idx="2">
+            <a:schemeClr val="accent1"/>
+          </a:effectRef>
+          <a:fontRef idx="minor">
+            <a:schemeClr val="lt1"/>
+          </a:fontRef>
+        </p:style>
+        <p:txBody>
+          <a:bodyPr rtlCol="0" anchor="ctr"/>
+          <a:lstStyle/>
+          <a:p>
+            <a:pPr algn="ctr"/>
+          </a:p>
+        </p:txBody>
+      </p:sp>
+      <p:sp>
+        <p:nvSpPr>
+          <p:cNvPr id="6" name="Rectangle 5"/>
+          <p:cNvSpPr/>
+          <p:nvPr/>
+        </p:nvSpPr>
+        <p:spPr>
+          <a:xfrm>
+            <a:off x="640080" y="1408175"/>
+            <a:ext cx="274320" cy="274320"/>
+          </a:xfrm>
+          <a:prstGeom prst="rect">
+            <a:avLst/>
+          </a:prstGeom>
+          <a:solidFill>
+            <a:srgbClr val="FFFFFF"/>
+          </a:solidFill>
+          <a:ln>
+            <a:solidFill>
+              <a:srgbClr val="333333"/>
+            </a:solidFill>
+          </a:ln>
+        </p:spPr>
+        <p:style>
+          <a:lnRef idx="1">
+            <a:schemeClr val="accent1"/>
+          </a:lnRef>
+          <a:fillRef idx="3">
+            <a:schemeClr val="accent1"/>
+          </a:fillRef>
+          <a:effectRef idx="2">
+            <a:schemeClr val="accent1"/>
+          </a:effectRef>
+          <a:fontRef idx="minor">
+            <a:schemeClr val="lt1"/>
+          </a:fontRef>
+        </p:style>
+        <p:txBody>
+          <a:bodyPr rtlCol="0" anchor="ctr"/>
+          <a:lstStyle/>
+          <a:p>
+            <a:pPr algn="ctr"/>
+          </a:p>
+        </p:txBody>
+      </p:sp>
+      <p:sp>
+        <p:nvSpPr>
+          <p:cNvPr id="7" name="Rectangle 6"/>
+          <p:cNvSpPr/>
+          <p:nvPr/>
+        </p:nvSpPr>
+        <p:spPr>
+          <a:xfrm>
+            <a:off x="640080" y="1408175"/>
+            <a:ext cx="73152" cy="274320"/>
           </a:xfrm>
           <a:prstGeom prst="rect">
             <a:avLst/>
@@ -5225,40 +6712,16 @@
           </a:p>
         </p:txBody>
       </p:sp>
-      <p:pic>
-        <p:nvPicPr>
-          <p:cNvPr id="3" name="Picture 2" descr="logo_uniajc_color.png"/>
-          <p:cNvPicPr>
-            <a:picLocks noChangeAspect="1"/>
-          </p:cNvPicPr>
-          <p:nvPr/>
-        </p:nvPicPr>
-        <p:blipFill>
-          <a:blip r:embed="rId2"/>
-          <a:stretch>
-            <a:fillRect/>
-          </a:stretch>
-        </p:blipFill>
-        <p:spPr>
-          <a:xfrm>
-            <a:off x="10271455" y="5998464"/>
-            <a:ext cx="1463040" cy="643233"/>
-          </a:xfrm>
-          <a:prstGeom prst="rect">
-            <a:avLst/>
-          </a:prstGeom>
-        </p:spPr>
-      </p:pic>
-      <p:sp>
-        <p:nvSpPr>
-          <p:cNvPr id="4" name="TextBox 3"/>
+      <p:sp>
+        <p:nvSpPr>
+          <p:cNvPr id="8" name="TextBox 7"/>
           <p:cNvSpPr txBox="1"/>
           <p:nvPr/>
         </p:nvSpPr>
         <p:spPr>
           <a:xfrm>
-            <a:off x="457200" y="1737360"/>
-            <a:ext cx="11277295" cy="1097280"/>
+            <a:off x="1097280" y="1353312"/>
+            <a:ext cx="10362895" cy="402336"/>
           </a:xfrm>
           <a:prstGeom prst="rect">
             <a:avLst/>
@@ -5269,29 +6732,358 @@
           <a:bodyPr wrap="square" anchor="ctr"/>
           <a:lstStyle/>
           <a:p>
+            <a:r>
+              <a:rPr sz="1500" b="0" i="0">
+                <a:solidFill>
+                  <a:srgbClr val="333333"/>
+                </a:solidFill>
+                <a:latin typeface="Calibri"/>
+              </a:rPr>
+              <a:t>¿Su informe le sirve al otro estudiante para trabajar esta misma tarde, o solo le dice que algo está mal sin decirle dónde ni qué hacer?</a:t>
+            </a:r>
+          </a:p>
+        </p:txBody>
+      </p:sp>
+      <p:sp>
+        <p:nvSpPr>
+          <p:cNvPr id="9" name="Rounded Rectangle 8"/>
+          <p:cNvSpPr/>
+          <p:nvPr/>
+        </p:nvSpPr>
+        <p:spPr>
+          <a:xfrm>
+            <a:off x="457200" y="1938528"/>
+            <a:ext cx="11277295" cy="566928"/>
+          </a:xfrm>
+          <a:prstGeom prst="roundRect">
+            <a:avLst>
+              <a:gd name="adj" fmla="val 12000"/>
+            </a:avLst>
+          </a:prstGeom>
+          <a:solidFill>
+            <a:srgbClr val="F2F2F2"/>
+          </a:solidFill>
+          <a:ln>
+            <a:noFill/>
+          </a:ln>
+        </p:spPr>
+        <p:style>
+          <a:lnRef idx="1">
+            <a:schemeClr val="accent1"/>
+          </a:lnRef>
+          <a:fillRef idx="3">
+            <a:schemeClr val="accent1"/>
+          </a:fillRef>
+          <a:effectRef idx="2">
+            <a:schemeClr val="accent1"/>
+          </a:effectRef>
+          <a:fontRef idx="minor">
+            <a:schemeClr val="lt1"/>
+          </a:fontRef>
+        </p:style>
+        <p:txBody>
+          <a:bodyPr rtlCol="0" anchor="ctr"/>
+          <a:lstStyle/>
+          <a:p>
             <a:pPr algn="ctr"/>
-            <a:r>
-              <a:rPr sz="3400" b="1" i="0">
-                <a:solidFill>
-                  <a:srgbClr val="095292"/>
-                </a:solidFill>
-                <a:latin typeface="Calibri"/>
-              </a:rPr>
-              <a:t>Clase 11 · VetCare avanza</a:t>
-            </a:r>
-          </a:p>
-        </p:txBody>
-      </p:sp>
-      <p:sp>
-        <p:nvSpPr>
-          <p:cNvPr id="5" name="TextBox 4"/>
+          </a:p>
+        </p:txBody>
+      </p:sp>
+      <p:sp>
+        <p:nvSpPr>
+          <p:cNvPr id="10" name="Rectangle 9"/>
+          <p:cNvSpPr/>
+          <p:nvPr/>
+        </p:nvSpPr>
+        <p:spPr>
+          <a:xfrm>
+            <a:off x="640080" y="2084832"/>
+            <a:ext cx="274320" cy="274320"/>
+          </a:xfrm>
+          <a:prstGeom prst="rect">
+            <a:avLst/>
+          </a:prstGeom>
+          <a:solidFill>
+            <a:srgbClr val="FFFFFF"/>
+          </a:solidFill>
+          <a:ln>
+            <a:solidFill>
+              <a:srgbClr val="333333"/>
+            </a:solidFill>
+          </a:ln>
+        </p:spPr>
+        <p:style>
+          <a:lnRef idx="1">
+            <a:schemeClr val="accent1"/>
+          </a:lnRef>
+          <a:fillRef idx="3">
+            <a:schemeClr val="accent1"/>
+          </a:fillRef>
+          <a:effectRef idx="2">
+            <a:schemeClr val="accent1"/>
+          </a:effectRef>
+          <a:fontRef idx="minor">
+            <a:schemeClr val="lt1"/>
+          </a:fontRef>
+        </p:style>
+        <p:txBody>
+          <a:bodyPr rtlCol="0" anchor="ctr"/>
+          <a:lstStyle/>
+          <a:p>
+            <a:pPr algn="ctr"/>
+          </a:p>
+        </p:txBody>
+      </p:sp>
+      <p:sp>
+        <p:nvSpPr>
+          <p:cNvPr id="11" name="Rectangle 10"/>
+          <p:cNvSpPr/>
+          <p:nvPr/>
+        </p:nvSpPr>
+        <p:spPr>
+          <a:xfrm>
+            <a:off x="640080" y="2084832"/>
+            <a:ext cx="73152" cy="274320"/>
+          </a:xfrm>
+          <a:prstGeom prst="rect">
+            <a:avLst/>
+          </a:prstGeom>
+          <a:solidFill>
+            <a:srgbClr val="269CCB"/>
+          </a:solidFill>
+          <a:ln>
+            <a:noFill/>
+          </a:ln>
+        </p:spPr>
+        <p:style>
+          <a:lnRef idx="1">
+            <a:schemeClr val="accent1"/>
+          </a:lnRef>
+          <a:fillRef idx="3">
+            <a:schemeClr val="accent1"/>
+          </a:fillRef>
+          <a:effectRef idx="2">
+            <a:schemeClr val="accent1"/>
+          </a:effectRef>
+          <a:fontRef idx="minor">
+            <a:schemeClr val="lt1"/>
+          </a:fontRef>
+        </p:style>
+        <p:txBody>
+          <a:bodyPr rtlCol="0" anchor="ctr"/>
+          <a:lstStyle/>
+          <a:p>
+            <a:pPr algn="ctr"/>
+          </a:p>
+        </p:txBody>
+      </p:sp>
+      <p:sp>
+        <p:nvSpPr>
+          <p:cNvPr id="12" name="TextBox 11"/>
           <p:cNvSpPr txBox="1"/>
           <p:nvPr/>
         </p:nvSpPr>
         <p:spPr>
           <a:xfrm>
-            <a:off x="457200" y="3017520"/>
-            <a:ext cx="11277295" cy="1645920"/>
+            <a:off x="1097280" y="2029968"/>
+            <a:ext cx="10362895" cy="402336"/>
+          </a:xfrm>
+          <a:prstGeom prst="rect">
+            <a:avLst/>
+          </a:prstGeom>
+          <a:noFill/>
+        </p:spPr>
+        <p:txBody>
+          <a:bodyPr wrap="square" anchor="ctr"/>
+          <a:lstStyle/>
+          <a:p>
+            <a:r>
+              <a:rPr sz="1500" b="0" i="0">
+                <a:solidFill>
+                  <a:srgbClr val="333333"/>
+                </a:solidFill>
+                <a:latin typeface="Calibri"/>
+              </a:rPr>
+              <a:t>Si tuviera que borrar todos sus comentarios menos uno, ¿cuál dejaría, y por qué ese es más importante que los otros cuatro?</a:t>
+            </a:r>
+          </a:p>
+        </p:txBody>
+      </p:sp>
+      <p:sp>
+        <p:nvSpPr>
+          <p:cNvPr id="13" name="Rounded Rectangle 12"/>
+          <p:cNvSpPr/>
+          <p:nvPr/>
+        </p:nvSpPr>
+        <p:spPr>
+          <a:xfrm>
+            <a:off x="457200" y="2615184"/>
+            <a:ext cx="11277295" cy="566928"/>
+          </a:xfrm>
+          <a:prstGeom prst="roundRect">
+            <a:avLst>
+              <a:gd name="adj" fmla="val 12000"/>
+            </a:avLst>
+          </a:prstGeom>
+          <a:solidFill>
+            <a:srgbClr val="F2F2F2"/>
+          </a:solidFill>
+          <a:ln>
+            <a:noFill/>
+          </a:ln>
+        </p:spPr>
+        <p:style>
+          <a:lnRef idx="1">
+            <a:schemeClr val="accent1"/>
+          </a:lnRef>
+          <a:fillRef idx="3">
+            <a:schemeClr val="accent1"/>
+          </a:fillRef>
+          <a:effectRef idx="2">
+            <a:schemeClr val="accent1"/>
+          </a:effectRef>
+          <a:fontRef idx="minor">
+            <a:schemeClr val="lt1"/>
+          </a:fontRef>
+        </p:style>
+        <p:txBody>
+          <a:bodyPr rtlCol="0" anchor="ctr"/>
+          <a:lstStyle/>
+          <a:p>
+            <a:pPr algn="ctr"/>
+          </a:p>
+        </p:txBody>
+      </p:sp>
+      <p:sp>
+        <p:nvSpPr>
+          <p:cNvPr id="14" name="Rectangle 13"/>
+          <p:cNvSpPr/>
+          <p:nvPr/>
+        </p:nvSpPr>
+        <p:spPr>
+          <a:xfrm>
+            <a:off x="640080" y="2761488"/>
+            <a:ext cx="274320" cy="274320"/>
+          </a:xfrm>
+          <a:prstGeom prst="rect">
+            <a:avLst/>
+          </a:prstGeom>
+          <a:solidFill>
+            <a:srgbClr val="FFFFFF"/>
+          </a:solidFill>
+          <a:ln>
+            <a:solidFill>
+              <a:srgbClr val="333333"/>
+            </a:solidFill>
+          </a:ln>
+        </p:spPr>
+        <p:style>
+          <a:lnRef idx="1">
+            <a:schemeClr val="accent1"/>
+          </a:lnRef>
+          <a:fillRef idx="3">
+            <a:schemeClr val="accent1"/>
+          </a:fillRef>
+          <a:effectRef idx="2">
+            <a:schemeClr val="accent1"/>
+          </a:effectRef>
+          <a:fontRef idx="minor">
+            <a:schemeClr val="lt1"/>
+          </a:fontRef>
+        </p:style>
+        <p:txBody>
+          <a:bodyPr rtlCol="0" anchor="ctr"/>
+          <a:lstStyle/>
+          <a:p>
+            <a:pPr algn="ctr"/>
+          </a:p>
+        </p:txBody>
+      </p:sp>
+      <p:sp>
+        <p:nvSpPr>
+          <p:cNvPr id="15" name="Rectangle 14"/>
+          <p:cNvSpPr/>
+          <p:nvPr/>
+        </p:nvSpPr>
+        <p:spPr>
+          <a:xfrm>
+            <a:off x="640080" y="2761488"/>
+            <a:ext cx="73152" cy="274320"/>
+          </a:xfrm>
+          <a:prstGeom prst="rect">
+            <a:avLst/>
+          </a:prstGeom>
+          <a:solidFill>
+            <a:srgbClr val="269CCB"/>
+          </a:solidFill>
+          <a:ln>
+            <a:noFill/>
+          </a:ln>
+        </p:spPr>
+        <p:style>
+          <a:lnRef idx="1">
+            <a:schemeClr val="accent1"/>
+          </a:lnRef>
+          <a:fillRef idx="3">
+            <a:schemeClr val="accent1"/>
+          </a:fillRef>
+          <a:effectRef idx="2">
+            <a:schemeClr val="accent1"/>
+          </a:effectRef>
+          <a:fontRef idx="minor">
+            <a:schemeClr val="lt1"/>
+          </a:fontRef>
+        </p:style>
+        <p:txBody>
+          <a:bodyPr rtlCol="0" anchor="ctr"/>
+          <a:lstStyle/>
+          <a:p>
+            <a:pPr algn="ctr"/>
+          </a:p>
+        </p:txBody>
+      </p:sp>
+      <p:sp>
+        <p:nvSpPr>
+          <p:cNvPr id="16" name="TextBox 15"/>
+          <p:cNvSpPr txBox="1"/>
+          <p:nvPr/>
+        </p:nvSpPr>
+        <p:spPr>
+          <a:xfrm>
+            <a:off x="1097280" y="2706624"/>
+            <a:ext cx="10362895" cy="402336"/>
+          </a:xfrm>
+          <a:prstGeom prst="rect">
+            <a:avLst/>
+          </a:prstGeom>
+          <a:noFill/>
+        </p:spPr>
+        <p:txBody>
+          <a:bodyPr wrap="square" anchor="ctr"/>
+          <a:lstStyle/>
+          <a:p>
+            <a:r>
+              <a:rPr sz="1500" b="0" i="0">
+                <a:solidFill>
+                  <a:srgbClr val="333333"/>
+                </a:solidFill>
+                <a:latin typeface="Calibri"/>
+              </a:rPr>
+              <a:t>¿Cuántos de sus hallazgos los comprobó ejecutando y cuántos los está suponiendo por haber leído el código?</a:t>
+            </a:r>
+          </a:p>
+        </p:txBody>
+      </p:sp>
+      <p:sp>
+        <p:nvSpPr>
+          <p:cNvPr id="17" name="TextBox 16"/>
+          <p:cNvSpPr txBox="1"/>
+          <p:nvPr/>
+        </p:nvSpPr>
+        <p:spPr>
+          <a:xfrm>
+            <a:off x="11185855" y="6473952"/>
+            <a:ext cx="640080" cy="274320"/>
           </a:xfrm>
           <a:prstGeom prst="rect">
             <a:avLst/>
@@ -5304,65 +7096,141 @@
           </a:bodyPr>
           <a:lstStyle/>
           <a:p>
-            <a:pPr algn="ctr">
-              <a:spcAft>
-                <a:spcPts val="600"/>
-              </a:spcAft>
-            </a:pPr>
-            <a:r>
-              <a:rPr sz="1600" b="0" i="0">
-                <a:solidFill>
-                  <a:srgbClr val="333333"/>
-                </a:solidFill>
-                <a:latin typeface="Calibri"/>
-              </a:rPr>
-              <a:t>Cada estudiante recibe un informe externo con hallazgos priorizados y deja escrito su plan de corrección de VetCare antes de la integración final.</a:t>
-            </a:r>
-          </a:p>
-          <a:p>
-            <a:pPr algn="ctr">
-              <a:spcAft>
-                <a:spcPts val="600"/>
-              </a:spcAft>
-            </a:pPr>
-            <a:r>
-              <a:rPr sz="1600" b="0" i="0">
-                <a:solidFill>
-                  <a:srgbClr val="333333"/>
-                </a:solidFill>
-                <a:latin typeface="Calibri"/>
-              </a:rPr>
-              <a:t>Entregable: Informe de revisión de una página sobre el proyecto asignado (el de otro estudiante; si el docente autorizó equipos, el de otro equipo): checklist diligenciado con evidencia archivo:línea y cinco hallazgos priorizados con formato Evidencia + Impacto + Sugerencia, subido a la plataforma del curso.</a:t>
-            </a:r>
-          </a:p>
-          <a:p>
-            <a:pPr algn="ctr">
-              <a:spcAft>
-                <a:spcPts val="600"/>
-              </a:spcAft>
-            </a:pPr>
-            <a:r>
-              <a:rPr sz="1600" b="0" i="0">
-                <a:solidFill>
-                  <a:srgbClr val="333333"/>
-                </a:solidFill>
-                <a:latin typeface="Calibri"/>
-              </a:rPr>
-              <a:t>Siguiente clase: continuamos el hilo del PI</a:t>
-            </a:r>
-          </a:p>
-        </p:txBody>
-      </p:sp>
-      <p:sp>
-        <p:nvSpPr>
-          <p:cNvPr id="6" name="TextBox 5"/>
+            <a:pPr algn="r"/>
+            <a:r>
+              <a:rPr sz="1100" b="0" i="0">
+                <a:solidFill>
+                  <a:srgbClr val="666666"/>
+                </a:solidFill>
+                <a:latin typeface="Calibri"/>
+              </a:rPr>
+              <a:t>17</a:t>
+            </a:r>
+          </a:p>
+        </p:txBody>
+      </p:sp>
+    </p:spTree>
+  </p:cSld>
+  <p:clrMapOvr>
+    <a:masterClrMapping/>
+  </p:clrMapOvr>
+</p:sld>
+</file>
+
+<file path=ppt/slides/slide18.xml><?xml version="1.0" encoding="utf-8"?>
+<p:sld xmlns:a="http://schemas.openxmlformats.org/drawingml/2006/main" xmlns:p="http://schemas.openxmlformats.org/presentationml/2006/main" xmlns:r="http://schemas.openxmlformats.org/officeDocument/2006/relationships">
+  <p:cSld>
+    <p:bg>
+      <p:bgPr>
+        <a:solidFill>
+          <a:srgbClr val="FFFFFF"/>
+        </a:solidFill>
+        <a:effectLst/>
+      </p:bgPr>
+    </p:bg>
+    <p:spTree>
+      <p:nvGrpSpPr>
+        <p:cNvPr id="1" name=""/>
+        <p:cNvGrpSpPr/>
+        <p:nvPr/>
+      </p:nvGrpSpPr>
+      <p:grpSpPr/>
+      <p:sp>
+        <p:nvSpPr>
+          <p:cNvPr id="2" name="Rectangle 1"/>
+          <p:cNvSpPr/>
+          <p:nvPr/>
+        </p:nvSpPr>
+        <p:spPr>
+          <a:xfrm>
+            <a:off x="0" y="0"/>
+            <a:ext cx="12191695" cy="960120"/>
+          </a:xfrm>
+          <a:prstGeom prst="rect">
+            <a:avLst/>
+          </a:prstGeom>
+          <a:solidFill>
+            <a:srgbClr val="095292"/>
+          </a:solidFill>
+          <a:ln>
+            <a:noFill/>
+          </a:ln>
+        </p:spPr>
+        <p:style>
+          <a:lnRef idx="1">
+            <a:schemeClr val="accent1"/>
+          </a:lnRef>
+          <a:fillRef idx="3">
+            <a:schemeClr val="accent1"/>
+          </a:fillRef>
+          <a:effectRef idx="2">
+            <a:schemeClr val="accent1"/>
+          </a:effectRef>
+          <a:fontRef idx="minor">
+            <a:schemeClr val="lt1"/>
+          </a:fontRef>
+        </p:style>
+        <p:txBody>
+          <a:bodyPr rtlCol="0" anchor="ctr"/>
+          <a:lstStyle/>
+          <a:p>
+            <a:pPr algn="ctr"/>
+          </a:p>
+        </p:txBody>
+      </p:sp>
+      <p:sp>
+        <p:nvSpPr>
+          <p:cNvPr id="3" name="Rectangle 2"/>
+          <p:cNvSpPr/>
+          <p:nvPr/>
+        </p:nvSpPr>
+        <p:spPr>
+          <a:xfrm>
+            <a:off x="0" y="960120"/>
+            <a:ext cx="12191695" cy="41148"/>
+          </a:xfrm>
+          <a:prstGeom prst="rect">
+            <a:avLst/>
+          </a:prstGeom>
+          <a:solidFill>
+            <a:srgbClr val="FFD000"/>
+          </a:solidFill>
+          <a:ln>
+            <a:noFill/>
+          </a:ln>
+        </p:spPr>
+        <p:style>
+          <a:lnRef idx="1">
+            <a:schemeClr val="accent1"/>
+          </a:lnRef>
+          <a:fillRef idx="3">
+            <a:schemeClr val="accent1"/>
+          </a:fillRef>
+          <a:effectRef idx="2">
+            <a:schemeClr val="accent1"/>
+          </a:effectRef>
+          <a:fontRef idx="minor">
+            <a:schemeClr val="lt1"/>
+          </a:fontRef>
+        </p:style>
+        <p:txBody>
+          <a:bodyPr rtlCol="0" anchor="ctr"/>
+          <a:lstStyle/>
+          <a:p>
+            <a:pPr algn="ctr"/>
+          </a:p>
+        </p:txBody>
+      </p:sp>
+      <p:sp>
+        <p:nvSpPr>
+          <p:cNvPr id="4" name="TextBox 3"/>
           <p:cNvSpPr txBox="1"/>
           <p:nvPr/>
         </p:nvSpPr>
         <p:spPr>
           <a:xfrm>
-            <a:off x="457200" y="4754880"/>
-            <a:ext cx="11277295" cy="640080"/>
+            <a:off x="457200" y="164592"/>
+            <a:ext cx="11277295" cy="502920"/>
           </a:xfrm>
           <a:prstGeom prst="rect">
             <a:avLst/>
@@ -5375,15 +7243,871 @@
           </a:bodyPr>
           <a:lstStyle/>
           <a:p>
+            <a:r>
+              <a:rPr sz="2600" b="1" i="0">
+                <a:solidFill>
+                  <a:srgbClr val="FFFFFF"/>
+                </a:solidFill>
+                <a:latin typeface="Calibri"/>
+              </a:rPr>
+              <a:t>Criterios de exito / entregable</a:t>
+            </a:r>
+          </a:p>
+        </p:txBody>
+      </p:sp>
+      <p:sp>
+        <p:nvSpPr>
+          <p:cNvPr id="5" name="TextBox 4"/>
+          <p:cNvSpPr txBox="1"/>
+          <p:nvPr/>
+        </p:nvSpPr>
+        <p:spPr>
+          <a:xfrm>
+            <a:off x="457200" y="1170432"/>
+            <a:ext cx="11277295" cy="5230368"/>
+          </a:xfrm>
+          <a:prstGeom prst="rect">
+            <a:avLst/>
+          </a:prstGeom>
+          <a:noFill/>
+        </p:spPr>
+        <p:txBody>
+          <a:bodyPr wrap="square">
+            <a:spAutoFit/>
+          </a:bodyPr>
+          <a:lstStyle/>
+          <a:p>
+            <a:pPr>
+              <a:spcAft>
+                <a:spcPts val="800"/>
+              </a:spcAft>
+            </a:pPr>
+            <a:r>
+              <a:rPr sz="2000" b="0" i="0">
+                <a:solidFill>
+                  <a:srgbClr val="333333"/>
+                </a:solidFill>
+                <a:latin typeface="Calibri"/>
+              </a:rPr>
+              <a:t>–   </a:t>
+            </a:r>
+            <a:r>
+              <a:rPr sz="2000" b="1" i="0">
+                <a:solidFill>
+                  <a:srgbClr val="333333"/>
+                </a:solidFill>
+                <a:latin typeface="Calibri"/>
+              </a:rPr>
+              <a:t>Entregable:</a:t>
+            </a:r>
+            <a:r>
+              <a:rPr sz="2000" b="0" i="0">
+                <a:solidFill>
+                  <a:srgbClr val="333333"/>
+                </a:solidFill>
+                <a:latin typeface="Calibri"/>
+              </a:rPr>
+              <a:t> Informe de revisión de una página sobre el proyecto asignado (el de otro estudiante; si el docente autorizó equipos, el de otro equipo): checklist diligenciado con evidencia archivo:línea y cinco hallazgos priorizados con formato Evidencia + Impacto + Sugerencia, subido a la plataforma del curso.</a:t>
+            </a:r>
+          </a:p>
+          <a:p>
+            <a:pPr>
+              <a:spcAft>
+                <a:spcPts val="800"/>
+              </a:spcAft>
+            </a:pPr>
+            <a:r>
+              <a:rPr sz="2000" b="0" i="0">
+                <a:solidFill>
+                  <a:srgbClr val="333333"/>
+                </a:solidFill>
+                <a:latin typeface="Calibri"/>
+              </a:rPr>
+              <a:t>–   </a:t>
+            </a:r>
+            <a:r>
+              <a:rPr sz="2000" b="1" i="0">
+                <a:solidFill>
+                  <a:srgbClr val="333333"/>
+                </a:solidFill>
+                <a:latin typeface="Calibri"/>
+              </a:rPr>
+              <a:t>Exito:</a:t>
+            </a:r>
+            <a:r>
+              <a:rPr sz="2000" b="0" i="0">
+                <a:solidFill>
+                  <a:srgbClr val="333333"/>
+                </a:solidFill>
+                <a:latin typeface="Calibri"/>
+              </a:rPr>
+              <a:t> El informe demuestra que el proyecto fue ejecutado: incluye el resultado de los cuatro casos borde con el mensaje o la excepción textual observada.</a:t>
+            </a:r>
+          </a:p>
+          <a:p>
+            <a:pPr>
+              <a:spcAft>
+                <a:spcPts val="800"/>
+              </a:spcAft>
+            </a:pPr>
+            <a:r>
+              <a:rPr sz="2000" b="0" i="0">
+                <a:solidFill>
+                  <a:srgbClr val="333333"/>
+                </a:solidFill>
+                <a:latin typeface="Calibri"/>
+              </a:rPr>
+              <a:t>–   </a:t>
+            </a:r>
+            <a:r>
+              <a:rPr sz="2000" b="1" i="0">
+                <a:solidFill>
+                  <a:srgbClr val="333333"/>
+                </a:solidFill>
+                <a:latin typeface="Calibri"/>
+              </a:rPr>
+              <a:t>Exito:</a:t>
+            </a:r>
+            <a:r>
+              <a:rPr sz="2000" b="0" i="0">
+                <a:solidFill>
+                  <a:srgbClr val="333333"/>
+                </a:solidFill>
+                <a:latin typeface="Calibri"/>
+              </a:rPr>
+              <a:t> El checklist está completo y todo ítem marcado 'no cumple' trae evidencia localizable en formato archivo:línea o pasos para reproducir.</a:t>
+            </a:r>
+          </a:p>
+          <a:p>
+            <a:pPr>
+              <a:spcAft>
+                <a:spcPts val="800"/>
+              </a:spcAft>
+            </a:pPr>
+            <a:r>
+              <a:rPr sz="2000" b="0" i="0">
+                <a:solidFill>
+                  <a:srgbClr val="333333"/>
+                </a:solidFill>
+                <a:latin typeface="Calibri"/>
+              </a:rPr>
+              <a:t>–   </a:t>
+            </a:r>
+            <a:r>
+              <a:rPr sz="2000" b="1" i="0">
+                <a:solidFill>
+                  <a:srgbClr val="333333"/>
+                </a:solidFill>
+                <a:latin typeface="Calibri"/>
+              </a:rPr>
+              <a:t>Exito:</a:t>
+            </a:r>
+            <a:r>
+              <a:rPr sz="2000" b="0" i="0">
+                <a:solidFill>
+                  <a:srgbClr val="333333"/>
+                </a:solidFill>
+                <a:latin typeface="Calibri"/>
+              </a:rPr>
+              <a:t> Los cinco hallazgos están priorizados y redactados con Evidencia + Impacto + Sugerencia; ninguno se refiere a la persona ni al esfuerzo que puso el otro estudiante.</a:t>
+            </a:r>
+          </a:p>
+          <a:p>
+            <a:pPr>
+              <a:spcAft>
+                <a:spcPts val="800"/>
+              </a:spcAft>
+            </a:pPr>
+            <a:r>
+              <a:rPr sz="2000" b="0" i="0">
+                <a:solidFill>
+                  <a:srgbClr val="333333"/>
+                </a:solidFill>
+                <a:latin typeface="Calibri"/>
+              </a:rPr>
+              <a:t>–   </a:t>
+            </a:r>
+            <a:r>
+              <a:rPr sz="2000" b="1" i="0">
+                <a:solidFill>
+                  <a:srgbClr val="333333"/>
+                </a:solidFill>
+                <a:latin typeface="Calibri"/>
+              </a:rPr>
+              <a:t>Exito:</a:t>
+            </a:r>
+            <a:r>
+              <a:rPr sz="2000" b="0" i="0">
+                <a:solidFill>
+                  <a:srgbClr val="333333"/>
+                </a:solidFill>
+                <a:latin typeface="Calibri"/>
+              </a:rPr>
+              <a:t> El autor del proyecto entrega su plan de corrección con las tres decisiones posibles (acepto, justifico, difiero) y un responsable por línea.</a:t>
+            </a:r>
+          </a:p>
+          <a:p>
+            <a:pPr>
+              <a:spcAft>
+                <a:spcPts val="800"/>
+              </a:spcAft>
+            </a:pPr>
+            <a:r>
+              <a:rPr sz="2000" b="0" i="0">
+                <a:solidFill>
+                  <a:srgbClr val="333333"/>
+                </a:solidFill>
+                <a:latin typeface="Calibri"/>
+              </a:rPr>
+              <a:t>–   </a:t>
+            </a:r>
+            <a:r>
+              <a:rPr sz="2000" b="1" i="0">
+                <a:solidFill>
+                  <a:srgbClr val="333333"/>
+                </a:solidFill>
+                <a:latin typeface="Calibri"/>
+              </a:rPr>
+              <a:t>Entrega en la plataforma del curso</a:t>
+            </a:r>
+            <a:r>
+              <a:rPr sz="2000" b="0" i="0">
+                <a:solidFill>
+                  <a:srgbClr val="333333"/>
+                </a:solidFill>
+                <a:latin typeface="Calibri"/>
+              </a:rPr>
+              <a:t> — en la fecha que indique el docente.</a:t>
+            </a:r>
+          </a:p>
+        </p:txBody>
+      </p:sp>
+      <p:sp>
+        <p:nvSpPr>
+          <p:cNvPr id="6" name="TextBox 5"/>
+          <p:cNvSpPr txBox="1"/>
+          <p:nvPr/>
+        </p:nvSpPr>
+        <p:spPr>
+          <a:xfrm>
+            <a:off x="11185855" y="6473952"/>
+            <a:ext cx="640080" cy="274320"/>
+          </a:xfrm>
+          <a:prstGeom prst="rect">
+            <a:avLst/>
+          </a:prstGeom>
+          <a:noFill/>
+        </p:spPr>
+        <p:txBody>
+          <a:bodyPr wrap="square">
+            <a:spAutoFit/>
+          </a:bodyPr>
+          <a:lstStyle/>
+          <a:p>
+            <a:pPr algn="r"/>
+            <a:r>
+              <a:rPr sz="1100" b="0" i="0">
+                <a:solidFill>
+                  <a:srgbClr val="666666"/>
+                </a:solidFill>
+                <a:latin typeface="Calibri"/>
+              </a:rPr>
+              <a:t>18</a:t>
+            </a:r>
+          </a:p>
+        </p:txBody>
+      </p:sp>
+    </p:spTree>
+  </p:cSld>
+  <p:clrMapOvr>
+    <a:masterClrMapping/>
+  </p:clrMapOvr>
+</p:sld>
+</file>
+
+<file path=ppt/slides/slide19.xml><?xml version="1.0" encoding="utf-8"?>
+<p:sld xmlns:a="http://schemas.openxmlformats.org/drawingml/2006/main" xmlns:p="http://schemas.openxmlformats.org/presentationml/2006/main" xmlns:r="http://schemas.openxmlformats.org/officeDocument/2006/relationships">
+  <p:cSld>
+    <p:bg>
+      <p:bgPr>
+        <a:solidFill>
+          <a:srgbClr val="FFFFFF"/>
+        </a:solidFill>
+        <a:effectLst/>
+      </p:bgPr>
+    </p:bg>
+    <p:spTree>
+      <p:nvGrpSpPr>
+        <p:cNvPr id="1" name=""/>
+        <p:cNvGrpSpPr/>
+        <p:nvPr/>
+      </p:nvGrpSpPr>
+      <p:grpSpPr/>
+      <p:sp>
+        <p:nvSpPr>
+          <p:cNvPr id="2" name="Rectangle 1"/>
+          <p:cNvSpPr/>
+          <p:nvPr/>
+        </p:nvSpPr>
+        <p:spPr>
+          <a:xfrm>
+            <a:off x="0" y="0"/>
+            <a:ext cx="12191695" cy="960120"/>
+          </a:xfrm>
+          <a:prstGeom prst="rect">
+            <a:avLst/>
+          </a:prstGeom>
+          <a:solidFill>
+            <a:srgbClr val="095292"/>
+          </a:solidFill>
+          <a:ln>
+            <a:noFill/>
+          </a:ln>
+        </p:spPr>
+        <p:style>
+          <a:lnRef idx="1">
+            <a:schemeClr val="accent1"/>
+          </a:lnRef>
+          <a:fillRef idx="3">
+            <a:schemeClr val="accent1"/>
+          </a:fillRef>
+          <a:effectRef idx="2">
+            <a:schemeClr val="accent1"/>
+          </a:effectRef>
+          <a:fontRef idx="minor">
+            <a:schemeClr val="lt1"/>
+          </a:fontRef>
+        </p:style>
+        <p:txBody>
+          <a:bodyPr rtlCol="0" anchor="ctr"/>
+          <a:lstStyle/>
+          <a:p>
             <a:pPr algn="ctr"/>
-            <a:r>
-              <a:rPr sz="2000" b="1" i="0">
+          </a:p>
+        </p:txBody>
+      </p:sp>
+      <p:sp>
+        <p:nvSpPr>
+          <p:cNvPr id="3" name="Rectangle 2"/>
+          <p:cNvSpPr/>
+          <p:nvPr/>
+        </p:nvSpPr>
+        <p:spPr>
+          <a:xfrm>
+            <a:off x="0" y="960120"/>
+            <a:ext cx="12191695" cy="41148"/>
+          </a:xfrm>
+          <a:prstGeom prst="rect">
+            <a:avLst/>
+          </a:prstGeom>
+          <a:solidFill>
+            <a:srgbClr val="FFD000"/>
+          </a:solidFill>
+          <a:ln>
+            <a:noFill/>
+          </a:ln>
+        </p:spPr>
+        <p:style>
+          <a:lnRef idx="1">
+            <a:schemeClr val="accent1"/>
+          </a:lnRef>
+          <a:fillRef idx="3">
+            <a:schemeClr val="accent1"/>
+          </a:fillRef>
+          <a:effectRef idx="2">
+            <a:schemeClr val="accent1"/>
+          </a:effectRef>
+          <a:fontRef idx="minor">
+            <a:schemeClr val="lt1"/>
+          </a:fontRef>
+        </p:style>
+        <p:txBody>
+          <a:bodyPr rtlCol="0" anchor="ctr"/>
+          <a:lstStyle/>
+          <a:p>
+            <a:pPr algn="ctr"/>
+          </a:p>
+        </p:txBody>
+      </p:sp>
+      <p:sp>
+        <p:nvSpPr>
+          <p:cNvPr id="4" name="TextBox 3"/>
+          <p:cNvSpPr txBox="1"/>
+          <p:nvPr/>
+        </p:nvSpPr>
+        <p:spPr>
+          <a:xfrm>
+            <a:off x="457200" y="164592"/>
+            <a:ext cx="11277295" cy="502920"/>
+          </a:xfrm>
+          <a:prstGeom prst="rect">
+            <a:avLst/>
+          </a:prstGeom>
+          <a:noFill/>
+        </p:spPr>
+        <p:txBody>
+          <a:bodyPr wrap="square">
+            <a:spAutoFit/>
+          </a:bodyPr>
+          <a:lstStyle/>
+          <a:p>
+            <a:r>
+              <a:rPr sz="2600" b="1" i="0">
+                <a:solidFill>
+                  <a:srgbClr val="FFFFFF"/>
+                </a:solidFill>
+                <a:latin typeface="Calibri"/>
+              </a:rPr>
+              <a:t>Para el PI esta semana</a:t>
+            </a:r>
+          </a:p>
+        </p:txBody>
+      </p:sp>
+      <p:sp>
+        <p:nvSpPr>
+          <p:cNvPr id="5" name="Rounded Rectangle 4"/>
+          <p:cNvSpPr/>
+          <p:nvPr/>
+        </p:nvSpPr>
+        <p:spPr>
+          <a:xfrm>
+            <a:off x="457200" y="1261872"/>
+            <a:ext cx="11277295" cy="1051560"/>
+          </a:xfrm>
+          <a:prstGeom prst="roundRect">
+            <a:avLst>
+              <a:gd name="adj" fmla="val 12000"/>
+            </a:avLst>
+          </a:prstGeom>
+          <a:solidFill>
+            <a:srgbClr val="E8F4FA"/>
+          </a:solidFill>
+          <a:ln>
+            <a:noFill/>
+          </a:ln>
+        </p:spPr>
+        <p:style>
+          <a:lnRef idx="1">
+            <a:schemeClr val="accent1"/>
+          </a:lnRef>
+          <a:fillRef idx="3">
+            <a:schemeClr val="accent1"/>
+          </a:fillRef>
+          <a:effectRef idx="2">
+            <a:schemeClr val="accent1"/>
+          </a:effectRef>
+          <a:fontRef idx="minor">
+            <a:schemeClr val="lt1"/>
+          </a:fontRef>
+        </p:style>
+        <p:txBody>
+          <a:bodyPr rtlCol="0" anchor="ctr"/>
+          <a:lstStyle/>
+          <a:p>
+            <a:pPr algn="ctr"/>
+          </a:p>
+        </p:txBody>
+      </p:sp>
+      <p:sp>
+        <p:nvSpPr>
+          <p:cNvPr id="6" name="Rectangle 5"/>
+          <p:cNvSpPr/>
+          <p:nvPr/>
+        </p:nvSpPr>
+        <p:spPr>
+          <a:xfrm>
+            <a:off x="457200" y="1261872"/>
+            <a:ext cx="128016" cy="1051560"/>
+          </a:xfrm>
+          <a:prstGeom prst="rect">
+            <a:avLst/>
+          </a:prstGeom>
+          <a:solidFill>
+            <a:srgbClr val="269CCB"/>
+          </a:solidFill>
+          <a:ln>
+            <a:noFill/>
+          </a:ln>
+        </p:spPr>
+        <p:style>
+          <a:lnRef idx="1">
+            <a:schemeClr val="accent1"/>
+          </a:lnRef>
+          <a:fillRef idx="3">
+            <a:schemeClr val="accent1"/>
+          </a:fillRef>
+          <a:effectRef idx="2">
+            <a:schemeClr val="accent1"/>
+          </a:effectRef>
+          <a:fontRef idx="minor">
+            <a:schemeClr val="lt1"/>
+          </a:fontRef>
+        </p:style>
+        <p:txBody>
+          <a:bodyPr rtlCol="0" anchor="ctr"/>
+          <a:lstStyle/>
+          <a:p>
+            <a:pPr algn="ctr"/>
+          </a:p>
+        </p:txBody>
+      </p:sp>
+      <p:sp>
+        <p:nvSpPr>
+          <p:cNvPr id="7" name="TextBox 6"/>
+          <p:cNvSpPr txBox="1"/>
+          <p:nvPr/>
+        </p:nvSpPr>
+        <p:spPr>
+          <a:xfrm>
+            <a:off x="777240" y="1399031"/>
+            <a:ext cx="10774375" cy="822959"/>
+          </a:xfrm>
+          <a:prstGeom prst="rect">
+            <a:avLst/>
+          </a:prstGeom>
+          <a:noFill/>
+        </p:spPr>
+        <p:txBody>
+          <a:bodyPr wrap="square">
+            <a:spAutoFit/>
+          </a:bodyPr>
+          <a:lstStyle/>
+          <a:p>
+            <a:r>
+              <a:rPr sz="1200" b="1" i="0">
                 <a:solidFill>
                   <a:srgbClr val="269CCB"/>
                 </a:solidFill>
                 <a:latin typeface="Calibri"/>
               </a:rPr>
-              <a:t>Teoria al servicio del proyecto</a:t>
+              <a:t>Info</a:t>
+            </a:r>
+          </a:p>
+          <a:p>
+            <a:pPr>
+              <a:spcBef>
+                <a:spcPts val="400"/>
+              </a:spcBef>
+            </a:pPr>
+            <a:r>
+              <a:rPr sz="1400" b="0" i="0">
+                <a:solidFill>
+                  <a:srgbClr val="333333"/>
+                </a:solidFill>
+                <a:latin typeface="Calibri"/>
+              </a:rPr>
+              <a:t>Hito: Cada estudiante recibe un informe externo con hallazgos priorizados y deja escrito su plan de corrección de VetCare antes de la integración final.</a:t>
+            </a:r>
+          </a:p>
+        </p:txBody>
+      </p:sp>
+      <p:sp>
+        <p:nvSpPr>
+          <p:cNvPr id="8" name="Rounded Rectangle 7"/>
+          <p:cNvSpPr/>
+          <p:nvPr/>
+        </p:nvSpPr>
+        <p:spPr>
+          <a:xfrm>
+            <a:off x="457200" y="2478024"/>
+            <a:ext cx="11277295" cy="1051560"/>
+          </a:xfrm>
+          <a:prstGeom prst="roundRect">
+            <a:avLst>
+              <a:gd name="adj" fmla="val 12000"/>
+            </a:avLst>
+          </a:prstGeom>
+          <a:solidFill>
+            <a:srgbClr val="FFF8E1"/>
+          </a:solidFill>
+          <a:ln>
+            <a:noFill/>
+          </a:ln>
+        </p:spPr>
+        <p:style>
+          <a:lnRef idx="1">
+            <a:schemeClr val="accent1"/>
+          </a:lnRef>
+          <a:fillRef idx="3">
+            <a:schemeClr val="accent1"/>
+          </a:fillRef>
+          <a:effectRef idx="2">
+            <a:schemeClr val="accent1"/>
+          </a:effectRef>
+          <a:fontRef idx="minor">
+            <a:schemeClr val="lt1"/>
+          </a:fontRef>
+        </p:style>
+        <p:txBody>
+          <a:bodyPr rtlCol="0" anchor="ctr"/>
+          <a:lstStyle/>
+          <a:p>
+            <a:pPr algn="ctr"/>
+          </a:p>
+        </p:txBody>
+      </p:sp>
+      <p:sp>
+        <p:nvSpPr>
+          <p:cNvPr id="9" name="Rectangle 8"/>
+          <p:cNvSpPr/>
+          <p:nvPr/>
+        </p:nvSpPr>
+        <p:spPr>
+          <a:xfrm>
+            <a:off x="457200" y="2478024"/>
+            <a:ext cx="128016" cy="1051560"/>
+          </a:xfrm>
+          <a:prstGeom prst="rect">
+            <a:avLst/>
+          </a:prstGeom>
+          <a:solidFill>
+            <a:srgbClr val="FFD000"/>
+          </a:solidFill>
+          <a:ln>
+            <a:noFill/>
+          </a:ln>
+        </p:spPr>
+        <p:style>
+          <a:lnRef idx="1">
+            <a:schemeClr val="accent1"/>
+          </a:lnRef>
+          <a:fillRef idx="3">
+            <a:schemeClr val="accent1"/>
+          </a:fillRef>
+          <a:effectRef idx="2">
+            <a:schemeClr val="accent1"/>
+          </a:effectRef>
+          <a:fontRef idx="minor">
+            <a:schemeClr val="lt1"/>
+          </a:fontRef>
+        </p:style>
+        <p:txBody>
+          <a:bodyPr rtlCol="0" anchor="ctr"/>
+          <a:lstStyle/>
+          <a:p>
+            <a:pPr algn="ctr"/>
+          </a:p>
+        </p:txBody>
+      </p:sp>
+      <p:sp>
+        <p:nvSpPr>
+          <p:cNvPr id="10" name="TextBox 9"/>
+          <p:cNvSpPr txBox="1"/>
+          <p:nvPr/>
+        </p:nvSpPr>
+        <p:spPr>
+          <a:xfrm>
+            <a:off x="777240" y="2615184"/>
+            <a:ext cx="10774375" cy="822959"/>
+          </a:xfrm>
+          <a:prstGeom prst="rect">
+            <a:avLst/>
+          </a:prstGeom>
+          <a:noFill/>
+        </p:spPr>
+        <p:txBody>
+          <a:bodyPr wrap="square">
+            <a:spAutoFit/>
+          </a:bodyPr>
+          <a:lstStyle/>
+          <a:p>
+            <a:r>
+              <a:rPr sz="1200" b="1" i="0">
+                <a:solidFill>
+                  <a:srgbClr val="FFD000"/>
+                </a:solidFill>
+                <a:latin typeface="Calibri"/>
+              </a:rPr>
+              <a:t>Aclaración</a:t>
+            </a:r>
+          </a:p>
+          <a:p>
+            <a:pPr>
+              <a:spcBef>
+                <a:spcPts val="400"/>
+              </a:spcBef>
+            </a:pPr>
+            <a:r>
+              <a:rPr sz="1400" b="0" i="0">
+                <a:solidFill>
+                  <a:srgbClr val="333333"/>
+                </a:solidFill>
+                <a:latin typeface="Calibri"/>
+              </a:rPr>
+              <a:t>Enunciado completo: Clases/Proyecto Integrador/ (VetCare).</a:t>
+            </a:r>
+          </a:p>
+        </p:txBody>
+      </p:sp>
+      <p:sp>
+        <p:nvSpPr>
+          <p:cNvPr id="11" name="Rounded Rectangle 10"/>
+          <p:cNvSpPr/>
+          <p:nvPr/>
+        </p:nvSpPr>
+        <p:spPr>
+          <a:xfrm>
+            <a:off x="457200" y="3694176"/>
+            <a:ext cx="11277295" cy="1051560"/>
+          </a:xfrm>
+          <a:prstGeom prst="roundRect">
+            <a:avLst>
+              <a:gd name="adj" fmla="val 12000"/>
+            </a:avLst>
+          </a:prstGeom>
+          <a:solidFill>
+            <a:srgbClr val="FBE4E4"/>
+          </a:solidFill>
+          <a:ln>
+            <a:noFill/>
+          </a:ln>
+        </p:spPr>
+        <p:style>
+          <a:lnRef idx="1">
+            <a:schemeClr val="accent1"/>
+          </a:lnRef>
+          <a:fillRef idx="3">
+            <a:schemeClr val="accent1"/>
+          </a:fillRef>
+          <a:effectRef idx="2">
+            <a:schemeClr val="accent1"/>
+          </a:effectRef>
+          <a:fontRef idx="minor">
+            <a:schemeClr val="lt1"/>
+          </a:fontRef>
+        </p:style>
+        <p:txBody>
+          <a:bodyPr rtlCol="0" anchor="ctr"/>
+          <a:lstStyle/>
+          <a:p>
+            <a:pPr algn="ctr"/>
+          </a:p>
+        </p:txBody>
+      </p:sp>
+      <p:sp>
+        <p:nvSpPr>
+          <p:cNvPr id="12" name="Rectangle 11"/>
+          <p:cNvSpPr/>
+          <p:nvPr/>
+        </p:nvSpPr>
+        <p:spPr>
+          <a:xfrm>
+            <a:off x="457200" y="3694176"/>
+            <a:ext cx="128016" cy="1051560"/>
+          </a:xfrm>
+          <a:prstGeom prst="rect">
+            <a:avLst/>
+          </a:prstGeom>
+          <a:solidFill>
+            <a:srgbClr val="A02030"/>
+          </a:solidFill>
+          <a:ln>
+            <a:noFill/>
+          </a:ln>
+        </p:spPr>
+        <p:style>
+          <a:lnRef idx="1">
+            <a:schemeClr val="accent1"/>
+          </a:lnRef>
+          <a:fillRef idx="3">
+            <a:schemeClr val="accent1"/>
+          </a:fillRef>
+          <a:effectRef idx="2">
+            <a:schemeClr val="accent1"/>
+          </a:effectRef>
+          <a:fontRef idx="minor">
+            <a:schemeClr val="lt1"/>
+          </a:fontRef>
+        </p:style>
+        <p:txBody>
+          <a:bodyPr rtlCol="0" anchor="ctr"/>
+          <a:lstStyle/>
+          <a:p>
+            <a:pPr algn="ctr"/>
+          </a:p>
+        </p:txBody>
+      </p:sp>
+      <p:sp>
+        <p:nvSpPr>
+          <p:cNvPr id="13" name="TextBox 12"/>
+          <p:cNvSpPr txBox="1"/>
+          <p:nvPr/>
+        </p:nvSpPr>
+        <p:spPr>
+          <a:xfrm>
+            <a:off x="777240" y="3831336"/>
+            <a:ext cx="10774375" cy="822959"/>
+          </a:xfrm>
+          <a:prstGeom prst="rect">
+            <a:avLst/>
+          </a:prstGeom>
+          <a:noFill/>
+        </p:spPr>
+        <p:txBody>
+          <a:bodyPr wrap="square">
+            <a:spAutoFit/>
+          </a:bodyPr>
+          <a:lstStyle/>
+          <a:p>
+            <a:r>
+              <a:rPr sz="1200" b="1" i="0">
+                <a:solidFill>
+                  <a:srgbClr val="A02030"/>
+                </a:solidFill>
+                <a:latin typeface="Calibri"/>
+              </a:rPr>
+              <a:t>Atención</a:t>
+            </a:r>
+          </a:p>
+          <a:p>
+            <a:pPr>
+              <a:spcBef>
+                <a:spcPts val="400"/>
+              </a:spcBef>
+            </a:pPr>
+            <a:r>
+              <a:rPr sz="1400" b="0" i="0">
+                <a:solidFill>
+                  <a:srgbClr val="333333"/>
+                </a:solidFill>
+                <a:latin typeface="Calibri"/>
+              </a:rPr>
+              <a:t>Entrega del taller, si el docente lo asigna · en la fecha que indique el docente.</a:t>
+            </a:r>
+          </a:p>
+        </p:txBody>
+      </p:sp>
+      <p:sp>
+        <p:nvSpPr>
+          <p:cNvPr id="14" name="TextBox 13"/>
+          <p:cNvSpPr txBox="1"/>
+          <p:nvPr/>
+        </p:nvSpPr>
+        <p:spPr>
+          <a:xfrm>
+            <a:off x="11185855" y="6473952"/>
+            <a:ext cx="640080" cy="274320"/>
+          </a:xfrm>
+          <a:prstGeom prst="rect">
+            <a:avLst/>
+          </a:prstGeom>
+          <a:noFill/>
+        </p:spPr>
+        <p:txBody>
+          <a:bodyPr wrap="square">
+            <a:spAutoFit/>
+          </a:bodyPr>
+          <a:lstStyle/>
+          <a:p>
+            <a:pPr algn="r"/>
+            <a:r>
+              <a:rPr sz="1100" b="0" i="0">
+                <a:solidFill>
+                  <a:srgbClr val="666666"/>
+                </a:solidFill>
+                <a:latin typeface="Calibri"/>
+              </a:rPr>
+              <a:t>19</a:t>
             </a:r>
           </a:p>
         </p:txBody>
@@ -5727,6 +8451,238 @@
 </p:sld>
 </file>
 
+<file path=ppt/slides/slide20.xml><?xml version="1.0" encoding="utf-8"?>
+<p:sld xmlns:a="http://schemas.openxmlformats.org/drawingml/2006/main" xmlns:p="http://schemas.openxmlformats.org/presentationml/2006/main" xmlns:r="http://schemas.openxmlformats.org/officeDocument/2006/relationships">
+  <p:cSld>
+    <p:bg>
+      <p:bgPr>
+        <a:solidFill>
+          <a:srgbClr val="FFFFFF"/>
+        </a:solidFill>
+        <a:effectLst/>
+      </p:bgPr>
+    </p:bg>
+    <p:spTree>
+      <p:nvGrpSpPr>
+        <p:cNvPr id="1" name=""/>
+        <p:cNvGrpSpPr/>
+        <p:nvPr/>
+      </p:nvGrpSpPr>
+      <p:grpSpPr/>
+      <p:sp>
+        <p:nvSpPr>
+          <p:cNvPr id="2" name="Rectangle 1"/>
+          <p:cNvSpPr/>
+          <p:nvPr/>
+        </p:nvSpPr>
+        <p:spPr>
+          <a:xfrm>
+            <a:off x="0" y="0"/>
+            <a:ext cx="12191695" cy="164592"/>
+          </a:xfrm>
+          <a:prstGeom prst="rect">
+            <a:avLst/>
+          </a:prstGeom>
+          <a:solidFill>
+            <a:srgbClr val="269CCB"/>
+          </a:solidFill>
+          <a:ln>
+            <a:noFill/>
+          </a:ln>
+        </p:spPr>
+        <p:style>
+          <a:lnRef idx="1">
+            <a:schemeClr val="accent1"/>
+          </a:lnRef>
+          <a:fillRef idx="3">
+            <a:schemeClr val="accent1"/>
+          </a:fillRef>
+          <a:effectRef idx="2">
+            <a:schemeClr val="accent1"/>
+          </a:effectRef>
+          <a:fontRef idx="minor">
+            <a:schemeClr val="lt1"/>
+          </a:fontRef>
+        </p:style>
+        <p:txBody>
+          <a:bodyPr rtlCol="0" anchor="ctr"/>
+          <a:lstStyle/>
+          <a:p>
+            <a:pPr algn="ctr"/>
+          </a:p>
+        </p:txBody>
+      </p:sp>
+      <p:pic>
+        <p:nvPicPr>
+          <p:cNvPr id="3" name="Picture 2" descr="logo_uniajc_color.png"/>
+          <p:cNvPicPr>
+            <a:picLocks noChangeAspect="1"/>
+          </p:cNvPicPr>
+          <p:nvPr/>
+        </p:nvPicPr>
+        <p:blipFill>
+          <a:blip r:embed="rId2"/>
+          <a:stretch>
+            <a:fillRect/>
+          </a:stretch>
+        </p:blipFill>
+        <p:spPr>
+          <a:xfrm>
+            <a:off x="10271455" y="5998464"/>
+            <a:ext cx="1463040" cy="643233"/>
+          </a:xfrm>
+          <a:prstGeom prst="rect">
+            <a:avLst/>
+          </a:prstGeom>
+        </p:spPr>
+      </p:pic>
+      <p:sp>
+        <p:nvSpPr>
+          <p:cNvPr id="4" name="TextBox 3"/>
+          <p:cNvSpPr txBox="1"/>
+          <p:nvPr/>
+        </p:nvSpPr>
+        <p:spPr>
+          <a:xfrm>
+            <a:off x="457200" y="1737360"/>
+            <a:ext cx="11277295" cy="1097280"/>
+          </a:xfrm>
+          <a:prstGeom prst="rect">
+            <a:avLst/>
+          </a:prstGeom>
+          <a:noFill/>
+        </p:spPr>
+        <p:txBody>
+          <a:bodyPr wrap="square" anchor="ctr"/>
+          <a:lstStyle/>
+          <a:p>
+            <a:pPr algn="ctr"/>
+            <a:r>
+              <a:rPr sz="3400" b="1" i="0">
+                <a:solidFill>
+                  <a:srgbClr val="095292"/>
+                </a:solidFill>
+                <a:latin typeface="Calibri"/>
+              </a:rPr>
+              <a:t>Clase 11 · VetCare avanza</a:t>
+            </a:r>
+          </a:p>
+        </p:txBody>
+      </p:sp>
+      <p:sp>
+        <p:nvSpPr>
+          <p:cNvPr id="5" name="TextBox 4"/>
+          <p:cNvSpPr txBox="1"/>
+          <p:nvPr/>
+        </p:nvSpPr>
+        <p:spPr>
+          <a:xfrm>
+            <a:off x="457200" y="3017520"/>
+            <a:ext cx="11277295" cy="1645920"/>
+          </a:xfrm>
+          <a:prstGeom prst="rect">
+            <a:avLst/>
+          </a:prstGeom>
+          <a:noFill/>
+        </p:spPr>
+        <p:txBody>
+          <a:bodyPr wrap="square">
+            <a:spAutoFit/>
+          </a:bodyPr>
+          <a:lstStyle/>
+          <a:p>
+            <a:pPr algn="ctr">
+              <a:spcAft>
+                <a:spcPts val="600"/>
+              </a:spcAft>
+            </a:pPr>
+            <a:r>
+              <a:rPr sz="1600" b="0" i="0">
+                <a:solidFill>
+                  <a:srgbClr val="333333"/>
+                </a:solidFill>
+                <a:latin typeface="Calibri"/>
+              </a:rPr>
+              <a:t>Cada estudiante recibe un informe externo con hallazgos priorizados y deja escrito su plan de corrección de VetCare antes de la integración final.</a:t>
+            </a:r>
+          </a:p>
+          <a:p>
+            <a:pPr algn="ctr">
+              <a:spcAft>
+                <a:spcPts val="600"/>
+              </a:spcAft>
+            </a:pPr>
+            <a:r>
+              <a:rPr sz="1600" b="0" i="0">
+                <a:solidFill>
+                  <a:srgbClr val="333333"/>
+                </a:solidFill>
+                <a:latin typeface="Calibri"/>
+              </a:rPr>
+              <a:t>Entregable: Informe de revisión de una página sobre el proyecto asignado (el de otro estudiante; si el docente autorizó equipos, el de otro equipo): checklist diligenciado con evidencia archivo:línea y cinco hallazgos priorizados con formato Evidencia + Impacto + Sugerencia, subido a la plataforma del curso.</a:t>
+            </a:r>
+          </a:p>
+          <a:p>
+            <a:pPr algn="ctr">
+              <a:spcAft>
+                <a:spcPts val="600"/>
+              </a:spcAft>
+            </a:pPr>
+            <a:r>
+              <a:rPr sz="1600" b="0" i="0">
+                <a:solidFill>
+                  <a:srgbClr val="333333"/>
+                </a:solidFill>
+                <a:latin typeface="Calibri"/>
+              </a:rPr>
+              <a:t>Siguiente clase: continuamos el hilo del PI</a:t>
+            </a:r>
+          </a:p>
+        </p:txBody>
+      </p:sp>
+      <p:sp>
+        <p:nvSpPr>
+          <p:cNvPr id="6" name="TextBox 5"/>
+          <p:cNvSpPr txBox="1"/>
+          <p:nvPr/>
+        </p:nvSpPr>
+        <p:spPr>
+          <a:xfrm>
+            <a:off x="457200" y="4754880"/>
+            <a:ext cx="11277295" cy="640080"/>
+          </a:xfrm>
+          <a:prstGeom prst="rect">
+            <a:avLst/>
+          </a:prstGeom>
+          <a:noFill/>
+        </p:spPr>
+        <p:txBody>
+          <a:bodyPr wrap="square">
+            <a:spAutoFit/>
+          </a:bodyPr>
+          <a:lstStyle/>
+          <a:p>
+            <a:pPr algn="ctr"/>
+            <a:r>
+              <a:rPr sz="2000" b="1" i="0">
+                <a:solidFill>
+                  <a:srgbClr val="269CCB"/>
+                </a:solidFill>
+                <a:latin typeface="Calibri"/>
+              </a:rPr>
+              <a:t>Teoria al servicio del proyecto</a:t>
+            </a:r>
+          </a:p>
+        </p:txBody>
+      </p:sp>
+    </p:spTree>
+  </p:cSld>
+  <p:clrMapOvr>
+    <a:masterClrMapping/>
+  </p:clrMapOvr>
+</p:sld>
+</file>
+
 <file path=ppt/slides/slide3.xml><?xml version="1.0" encoding="utf-8"?>
 <p:sld xmlns:a="http://schemas.openxmlformats.org/drawingml/2006/main" xmlns:p="http://schemas.openxmlformats.org/presentationml/2006/main" xmlns:r="http://schemas.openxmlformats.org/officeDocument/2006/relationships">
   <p:cSld>
@@ -6712,7 +9668,7 @@
                 </a:solidFill>
                 <a:latin typeface="Calibri"/>
               </a:rPr>
-              <a:t>Teoria Core</a:t>
+              <a:t>Una revisión de código es la lectura sistemática del código de otra...</a:t>
             </a:r>
           </a:p>
         </p:txBody>
@@ -6751,7 +9707,7 @@
                 </a:solidFill>
                 <a:latin typeface="Calibri"/>
               </a:rPr>
-              <a:t>–   Una revisión de código es la lectura sistemática del código de otra persona con el fin de encontrar problemas…</a:t>
+              <a:t>–   Una revisión de código es la lectura sistemática del código de otra persona con el fin de encontrar problemas antes de que lleguen al usuario, y de paso repartir conocimiento en el equipo.</a:t>
             </a:r>
           </a:p>
           <a:p>
@@ -6767,7 +9723,7 @@
                 </a:solidFill>
                 <a:latin typeface="Calibri"/>
               </a:rPr>
-              <a:t>–   Revisar no es leer de arriba a abajo a ver qué salta: se revisa por capas y en orden de importancia, porque el…</a:t>
+              <a:t>–   En la industria esto no es opcional: nadie mezcla su trabajo al proyecto sin que alguien más lo apruebe, y esa aprobación deja rastro escrito.</a:t>
             </a:r>
           </a:p>
           <a:p>
@@ -6783,7 +9739,7 @@
                 </a:solidFill>
                 <a:latin typeface="Calibri"/>
               </a:rPr>
-              <a:t>–   La retroalimentación útil tiene una estructura, y esa estructura se enseña con plantilla porque a punta de buena…</a:t>
+              <a:t>–   No es ninguna de las dos.</a:t>
             </a:r>
           </a:p>
           <a:p>
@@ -6799,7 +9755,7 @@
                 </a:solidFill>
                 <a:latin typeface="Calibri"/>
               </a:rPr>
-              <a:t>–   El checklist es lo que impide que la revisión se vuelva una conversación de gustos</a:t>
+              <a:t>–   Es un control de calidad barato: encontrar hoy que buscarPorId devuelve null y nadie lo valida cuesta diez minutos</a:t>
             </a:r>
           </a:p>
           <a:p>
@@ -6815,7 +9771,39 @@
                 </a:solidFill>
                 <a:latin typeface="Calibri"/>
               </a:rPr>
-              <a:t>–   Recibir la crítica también se practica, y es la mitad difícil</a:t>
+              <a:t>–   Encontrarlo el día de la sustentación, con la ventana de VetCare congelada y la clínica Huellitas sin poder mostrar el expediente de Firulais, cuesta la nota y la credibilidad.</a:t>
+            </a:r>
+          </a:p>
+          <a:p>
+            <a:pPr>
+              <a:spcAft>
+                <a:spcPts val="800"/>
+              </a:spcAft>
+            </a:pPr>
+            <a:r>
+              <a:rPr sz="2000" b="0" i="0">
+                <a:solidFill>
+                  <a:srgbClr val="333333"/>
+                </a:solidFill>
+                <a:latin typeface="Calibri"/>
+              </a:rPr>
+              <a:t>–   Además la revisión enseña: quien lee el proyecto ajeno descubre una forma distinta de organizar el repositorio o de validar la edad, y se la lleva para el suyo.</a:t>
+            </a:r>
+          </a:p>
+          <a:p>
+            <a:pPr>
+              <a:spcAft>
+                <a:spcPts val="800"/>
+              </a:spcAft>
+            </a:pPr>
+            <a:r>
+              <a:rPr sz="2000" b="0" i="0">
+                <a:solidFill>
+                  <a:srgbClr val="333333"/>
+                </a:solidFill>
+                <a:latin typeface="Calibri"/>
+              </a:rPr>
+              <a:t>–   Hoy no hay tema técnico nuevo; hoy se entrena criterio, que es la habilidad que separa a alguien que escribe código de alguien que responde por él.</a:t>
             </a:r>
           </a:p>
         </p:txBody>
@@ -6996,141 +9984,21 @@
                 </a:solidFill>
                 <a:latin typeface="Calibri"/>
               </a:rPr>
-              <a:t>Un método real de VetCare y sus seis hallazgos</a:t>
-            </a:r>
-          </a:p>
-        </p:txBody>
-      </p:sp>
-      <p:sp>
-        <p:nvSpPr>
-          <p:cNvPr id="5" name="Rounded Rectangle 4"/>
-          <p:cNvSpPr/>
-          <p:nvPr/>
-        </p:nvSpPr>
-        <p:spPr>
-          <a:xfrm>
-            <a:off x="457200" y="1261872"/>
-            <a:ext cx="11277295" cy="4773168"/>
-          </a:xfrm>
-          <a:prstGeom prst="roundRect">
-            <a:avLst>
-              <a:gd name="adj" fmla="val 12000"/>
-            </a:avLst>
-          </a:prstGeom>
-          <a:solidFill>
-            <a:srgbClr val="1E2A38"/>
-          </a:solidFill>
-          <a:ln>
-            <a:noFill/>
-          </a:ln>
-        </p:spPr>
-        <p:style>
-          <a:lnRef idx="1">
-            <a:schemeClr val="accent1"/>
-          </a:lnRef>
-          <a:fillRef idx="3">
-            <a:schemeClr val="accent1"/>
-          </a:fillRef>
-          <a:effectRef idx="2">
-            <a:schemeClr val="accent1"/>
-          </a:effectRef>
-          <a:fontRef idx="minor">
-            <a:schemeClr val="lt1"/>
-          </a:fontRef>
-        </p:style>
-        <p:txBody>
-          <a:bodyPr rtlCol="0" anchor="ctr"/>
-          <a:lstStyle/>
-          <a:p>
-            <a:pPr algn="ctr"/>
-          </a:p>
-        </p:txBody>
-      </p:sp>
-      <p:sp>
-        <p:nvSpPr>
-          <p:cNvPr id="6" name="Rectangle 5"/>
-          <p:cNvSpPr/>
-          <p:nvPr/>
-        </p:nvSpPr>
-        <p:spPr>
-          <a:xfrm>
-            <a:off x="457200" y="1261872"/>
-            <a:ext cx="11277295" cy="320040"/>
-          </a:xfrm>
-          <a:prstGeom prst="rect">
-            <a:avLst/>
-          </a:prstGeom>
-          <a:solidFill>
-            <a:srgbClr val="095292"/>
-          </a:solidFill>
-          <a:ln>
-            <a:noFill/>
-          </a:ln>
-        </p:spPr>
-        <p:style>
-          <a:lnRef idx="1">
-            <a:schemeClr val="accent1"/>
-          </a:lnRef>
-          <a:fillRef idx="3">
-            <a:schemeClr val="accent1"/>
-          </a:fillRef>
-          <a:effectRef idx="2">
-            <a:schemeClr val="accent1"/>
-          </a:effectRef>
-          <a:fontRef idx="minor">
-            <a:schemeClr val="lt1"/>
-          </a:fontRef>
-        </p:style>
-        <p:txBody>
-          <a:bodyPr rtlCol="0" anchor="ctr"/>
-          <a:lstStyle/>
-          <a:p>
-            <a:pPr algn="ctr"/>
-          </a:p>
-        </p:txBody>
-      </p:sp>
-      <p:sp>
-        <p:nvSpPr>
-          <p:cNvPr id="7" name="TextBox 6"/>
+              <a:t>Revisar no es leer de arriba a abajo a ver qué salta: se revisa por... (1/2)</a:t>
+            </a:r>
+          </a:p>
+        </p:txBody>
+      </p:sp>
+      <p:sp>
+        <p:nvSpPr>
+          <p:cNvPr id="5" name="TextBox 4"/>
           <p:cNvSpPr txBox="1"/>
           <p:nvPr/>
         </p:nvSpPr>
         <p:spPr>
           <a:xfrm>
-            <a:off x="685800" y="1307592"/>
-            <a:ext cx="10820095" cy="256032"/>
-          </a:xfrm>
-          <a:prstGeom prst="rect">
-            <a:avLst/>
-          </a:prstGeom>
-          <a:noFill/>
-        </p:spPr>
-        <p:txBody>
-          <a:bodyPr wrap="square" anchor="ctr"/>
-          <a:lstStyle/>
-          <a:p>
-            <a:r>
-              <a:rPr sz="1000" b="1" i="0">
-                <a:solidFill>
-                  <a:srgbClr val="269CCB"/>
-                </a:solidFill>
-                <a:latin typeface="Calibri"/>
-              </a:rPr>
-              <a:t>● ● ●</a:t>
-            </a:r>
-          </a:p>
-        </p:txBody>
-      </p:sp>
-      <p:sp>
-        <p:nvSpPr>
-          <p:cNvPr id="8" name="TextBox 7"/>
-          <p:cNvSpPr txBox="1"/>
-          <p:nvPr/>
-        </p:nvSpPr>
-        <p:spPr>
-          <a:xfrm>
-            <a:off x="777240" y="1719072"/>
-            <a:ext cx="10637215" cy="4133087"/>
+            <a:off x="457200" y="1170432"/>
+            <a:ext cx="11277295" cy="5230368"/>
           </a:xfrm>
           <a:prstGeom prst="rect">
             <a:avLst/>
@@ -7145,251 +10013,104 @@
           <a:p>
             <a:pPr>
               <a:spcAft>
-                <a:spcPts val="400"/>
+                <a:spcPts val="800"/>
               </a:spcAft>
             </a:pPr>
             <a:r>
-              <a:rPr sz="1400" b="0" i="0">
-                <a:solidFill>
-                  <a:srgbClr val="FFFFFF"/>
-                </a:solidFill>
-                <a:latin typeface="Calibri"/>
-              </a:rPr>
-              <a:t>public static void proceso(String a, String b, String c, String d, String e) { // 1. nombre y parametros sin significado</a:t>
+              <a:rPr sz="2000" b="0" i="0">
+                <a:solidFill>
+                  <a:srgbClr val="333333"/>
+                </a:solidFill>
+                <a:latin typeface="Calibri"/>
+              </a:rPr>
+              <a:t>–   Revisar no es leer de arriba a abajo a ver qué salta: se revisa por capas y en orden de importancia, porque el tiempo es finito y el detalle cosmético es el que más tienta.</a:t>
             </a:r>
           </a:p>
           <a:p>
             <a:pPr>
               <a:spcAft>
-                <a:spcPts val="400"/>
+                <a:spcPts val="800"/>
               </a:spcAft>
             </a:pPr>
             <a:r>
-              <a:rPr sz="1400" b="0" i="0">
-                <a:solidFill>
-                  <a:srgbClr val="FFFFFF"/>
-                </a:solidFill>
-                <a:latin typeface="Calibri"/>
-              </a:rPr>
-              <a:t>    int x = 0;</a:t>
+              <a:rPr sz="2000" b="0" i="0">
+                <a:solidFill>
+                  <a:srgbClr val="333333"/>
+                </a:solidFill>
+                <a:latin typeface="Calibri"/>
+              </a:rPr>
+              <a:t>–   Primera capa: ¿el proyecto abre y hace lo que dice hacer?</a:t>
             </a:r>
           </a:p>
           <a:p>
             <a:pPr>
               <a:spcAft>
-                <a:spcPts val="400"/>
+                <a:spcPts val="800"/>
               </a:spcAft>
             </a:pPr>
             <a:r>
-              <a:rPr sz="1400" b="0" i="0">
-                <a:solidFill>
-                  <a:srgbClr val="FFFFFF"/>
-                </a:solidFill>
-                <a:latin typeface="Calibri"/>
-              </a:rPr>
-              <a:t>    try {</a:t>
+              <a:rPr sz="2000" b="0" i="0">
+                <a:solidFill>
+                  <a:srgbClr val="333333"/>
+                </a:solidFill>
+                <a:latin typeface="Calibri"/>
+              </a:rPr>
+              <a:t>–   Se ejecuta antes de opinar.</a:t>
             </a:r>
           </a:p>
           <a:p>
             <a:pPr>
               <a:spcAft>
-                <a:spcPts val="400"/>
+                <a:spcPts val="800"/>
               </a:spcAft>
             </a:pPr>
             <a:r>
-              <a:rPr sz="1400" b="0" i="0">
-                <a:solidFill>
-                  <a:srgbClr val="FFFFFF"/>
-                </a:solidFill>
-                <a:latin typeface="Calibri"/>
-              </a:rPr>
-              <a:t>        x = Integer.parseInt(d);</a:t>
+              <a:rPr sz="2000" b="0" i="0">
+                <a:solidFill>
+                  <a:srgbClr val="333333"/>
+                </a:solidFill>
+                <a:latin typeface="Calibri"/>
+              </a:rPr>
+              <a:t>–   Segunda capa: corrección y casos borde, que en VetCare son siempre los mismos y hay que buscarlos a propósito: edad negativa o con letras</a:t>
             </a:r>
           </a:p>
           <a:p>
             <a:pPr>
               <a:spcAft>
-                <a:spcPts val="400"/>
+                <a:spcPts val="800"/>
               </a:spcAft>
             </a:pPr>
             <a:r>
-              <a:rPr sz="1400" b="0" i="0">
-                <a:solidFill>
-                  <a:srgbClr val="FFFFFF"/>
-                </a:solidFill>
-                <a:latin typeface="Calibri"/>
-              </a:rPr>
-              <a:t>    } catch (Exception ex) {            // 2. catch vacio: la edad "dos" se vuelve 0 en silencio</a:t>
+              <a:rPr sz="2000" b="0" i="0">
+                <a:solidFill>
+                  <a:srgbClr val="333333"/>
+                </a:solidFill>
+                <a:latin typeface="Calibri"/>
+              </a:rPr>
+              <a:t>–   Campos vacíos, ID repetido, buscar un ID que no existe, cerrar sin haber registrado nada, archivo mascotas.csv inexistente o con una línea dañada.</a:t>
             </a:r>
           </a:p>
           <a:p>
             <a:pPr>
               <a:spcAft>
-                <a:spcPts val="400"/>
+                <a:spcPts val="800"/>
               </a:spcAft>
             </a:pPr>
             <a:r>
-              <a:rPr sz="1400" b="0" i="0">
-                <a:solidFill>
-                  <a:srgbClr val="FFFFFF"/>
-                </a:solidFill>
-                <a:latin typeface="Calibri"/>
-              </a:rPr>
-              <a:t>    }</a:t>
-            </a:r>
-          </a:p>
-          <a:p>
-            <a:pPr>
-              <a:spcAft>
-                <a:spcPts val="400"/>
-              </a:spcAft>
-            </a:pPr>
-            <a:r>
-              <a:rPr sz="1400" b="0" i="0">
-                <a:solidFill>
-                  <a:srgbClr val="FFFFFF"/>
-                </a:solidFill>
-                <a:latin typeface="Calibri"/>
-              </a:rPr>
-              <a:t>    if (x &gt; 25) {                       // 3. numero magico: por que 25? y la edad -3 pasa derecho</a:t>
-            </a:r>
-          </a:p>
-          <a:p>
-            <a:pPr>
-              <a:spcAft>
-                <a:spcPts val="400"/>
-              </a:spcAft>
-            </a:pPr>
-            <a:r>
-              <a:rPr sz="1400" b="0" i="0">
-                <a:solidFill>
-                  <a:srgbClr val="FFFFFF"/>
-                </a:solidFill>
-                <a:latin typeface="Calibri"/>
-              </a:rPr>
-              <a:t>        System.out.println("edad rara"); // 4. el aviso muere en consola: la ventana no se entera</a:t>
-            </a:r>
-          </a:p>
-          <a:p>
-            <a:pPr>
-              <a:spcAft>
-                <a:spcPts val="400"/>
-              </a:spcAft>
-            </a:pPr>
-            <a:r>
-              <a:rPr sz="1400" b="0" i="0">
-                <a:solidFill>
-                  <a:srgbClr val="FFFFFF"/>
-                </a:solidFill>
-                <a:latin typeface="Calibri"/>
-              </a:rPr>
-              <a:t>    }</a:t>
-            </a:r>
-          </a:p>
-          <a:p>
-            <a:pPr>
-              <a:spcAft>
-                <a:spcPts val="400"/>
-              </a:spcAft>
-            </a:pPr>
-            <a:r>
-              <a:rPr sz="1400" b="0" i="0">
-                <a:solidFill>
-                  <a:srgbClr val="FFFFFF"/>
-                </a:solidFill>
-                <a:latin typeface="Calibri"/>
-              </a:rPr>
-              <a:t>    String[] v = new String[5];         // 5. arreglo de String en vez de la clase Mascota</a:t>
-            </a:r>
-          </a:p>
-          <a:p>
-            <a:pPr>
-              <a:spcAft>
-                <a:spcPts val="400"/>
-              </a:spcAft>
-            </a:pPr>
-            <a:r>
-              <a:rPr sz="1400" b="0" i="0">
-                <a:solidFill>
-                  <a:srgbClr val="FFFFFF"/>
-                </a:solidFill>
-                <a:latin typeface="Calibri"/>
-              </a:rPr>
-              <a:t>    v[0] = a; v[1] = b; v[2] = c; v[3] = String.valueOf(x); v[4] = e;</a:t>
-            </a:r>
-          </a:p>
-          <a:p>
-            <a:pPr>
-              <a:spcAft>
-                <a:spcPts val="400"/>
-              </a:spcAft>
-            </a:pPr>
-            <a:r>
-              <a:rPr sz="1400" b="0" i="0">
-                <a:solidFill>
-                  <a:srgbClr val="FFFFFF"/>
-                </a:solidFill>
-                <a:latin typeface="Calibri"/>
-              </a:rPr>
-              <a:t>    datos.add(v);                       // 6. 'datos' es public static: cualquiera lo modifica</a:t>
-            </a:r>
-          </a:p>
-          <a:p>
-            <a:pPr>
-              <a:spcAft>
-                <a:spcPts val="400"/>
-              </a:spcAft>
-            </a:pPr>
-            <a:r>
-              <a:rPr sz="1400" b="0" i="0">
-                <a:solidFill>
-                  <a:srgbClr val="FFFFFF"/>
-                </a:solidFill>
-                <a:latin typeface="Calibri"/>
-              </a:rPr>
-              <a:t>}</a:t>
-            </a:r>
-          </a:p>
-        </p:txBody>
-      </p:sp>
-      <p:sp>
-        <p:nvSpPr>
-          <p:cNvPr id="9" name="TextBox 8"/>
-          <p:cNvSpPr txBox="1"/>
-          <p:nvPr/>
-        </p:nvSpPr>
-        <p:spPr>
-          <a:xfrm>
-            <a:off x="457200" y="6080760"/>
-            <a:ext cx="11277295" cy="320040"/>
-          </a:xfrm>
-          <a:prstGeom prst="rect">
-            <a:avLst/>
-          </a:prstGeom>
-          <a:noFill/>
-        </p:spPr>
-        <p:txBody>
-          <a:bodyPr wrap="square">
-            <a:spAutoFit/>
-          </a:bodyPr>
-          <a:lstStyle/>
-          <a:p>
-            <a:pPr algn="ctr"/>
-            <a:r>
-              <a:rPr sz="1200" b="0" i="1">
-                <a:solidFill>
-                  <a:srgbClr val="666666"/>
-                </a:solidFill>
-                <a:latin typeface="Calibri"/>
-              </a:rPr>
-              <a:t>El código compila y corre; la revisión no busca errores del compilador, busca lo que va a doler en el mostrador de la clínica.</a:t>
-            </a:r>
-          </a:p>
-        </p:txBody>
-      </p:sp>
-      <p:sp>
-        <p:nvSpPr>
-          <p:cNvPr id="10" name="TextBox 9"/>
+              <a:rPr sz="2000" b="0" i="0">
+                <a:solidFill>
+                  <a:srgbClr val="333333"/>
+                </a:solidFill>
+                <a:latin typeface="Calibri"/>
+              </a:rPr>
+              <a:t>–   Tercera capa: diseño y responsabilidades, es decir si hay clases de verdad o solo arreglos de String, si los atributos son privados, y si la ventana está haciendo de repositorio escribiendo archivos por su cuenta.</a:t>
+            </a:r>
+          </a:p>
+        </p:txBody>
+      </p:sp>
+      <p:sp>
+        <p:nvSpPr>
+          <p:cNvPr id="6" name="TextBox 5"/>
           <p:cNvSpPr txBox="1"/>
           <p:nvPr/>
         </p:nvSpPr>
@@ -7563,7 +10284,7 @@
                 </a:solidFill>
                 <a:latin typeface="Calibri"/>
               </a:rPr>
-              <a:t>Demo del dia</a:t>
+              <a:t>Revisar no es leer de arriba a abajo a ver qué salta: se revisa por... (2/2)</a:t>
             </a:r>
           </a:p>
         </p:txBody>
@@ -7602,25 +10323,7 @@
                 </a:solidFill>
                 <a:latin typeface="Calibri"/>
               </a:rPr>
-              <a:t>–   </a:t>
-            </a:r>
-            <a:r>
-              <a:rPr sz="2000" b="1" i="0">
-                <a:solidFill>
-                  <a:srgbClr val="333333"/>
-                </a:solidFill>
-                <a:latin typeface="Calibri"/>
-              </a:rPr>
-              <a:t>Herramienta:</a:t>
-            </a:r>
-            <a:r>
-              <a:rPr sz="2000" b="0" i="0">
-                <a:solidFill>
-                  <a:srgbClr val="333333"/>
-                </a:solidFill>
-                <a:latin typeface="Calibri"/>
-              </a:rPr>
-              <a:t> Visual Studio Code (Java)</a:t>
+              <a:t>–   Cuarta capa: manejo de errores, con el catch vacío como sospechoso número uno.</a:t>
             </a:r>
           </a:p>
           <a:p>
@@ -7636,25 +10339,7 @@
                 </a:solidFill>
                 <a:latin typeface="Calibri"/>
               </a:rPr>
-              <a:t>–   </a:t>
-            </a:r>
-            <a:r>
-              <a:rPr sz="2000" b="1" i="0">
-                <a:solidFill>
-                  <a:srgbClr val="333333"/>
-                </a:solidFill>
-                <a:latin typeface="Calibri"/>
-              </a:rPr>
-              <a:t>Demo:</a:t>
-            </a:r>
-            <a:r>
-              <a:rPr sz="2000" b="0" i="0">
-                <a:solidFill>
-                  <a:srgbClr val="333333"/>
-                </a:solidFill>
-                <a:latin typeface="Calibri"/>
-              </a:rPr>
-              <a:t> El docente proyecta VetCareParaRevisar.java, lo ejecuta en vivo, aplica el checklist delante del grupo y reescribe dos comentarios mal formulados del tipo 'este código es un desastre' en retroalimentación accionable.</a:t>
+              <a:t>–   Quinta capa: legibilidad, o sea nombres, métodos largos y duplicación.</a:t>
             </a:r>
           </a:p>
           <a:p>
@@ -7670,7 +10355,23 @@
                 </a:solidFill>
                 <a:latin typeface="Calibri"/>
               </a:rPr>
-              <a:t>–   Mismo dominio VetCare — no otro ejemplo.</a:t>
+              <a:t>–   Y solo al final, la sexta: formato e indentación, que es la que menos vale y la que todo el mundo comenta primero.</a:t>
+            </a:r>
+          </a:p>
+          <a:p>
+            <a:pPr>
+              <a:spcAft>
+                <a:spcPts val="800"/>
+              </a:spcAft>
+            </a:pPr>
+            <a:r>
+              <a:rPr sz="2000" b="0" i="0">
+                <a:solidFill>
+                  <a:srgbClr val="333333"/>
+                </a:solidFill>
+                <a:latin typeface="Calibri"/>
+              </a:rPr>
+              <a:t>–   Si un informe de revisión de VetCare tiene ocho comentarios de espacios y ninguno sobre el NullPointerException al buscar un ID inexistente, esa revisión no sirvió.</a:t>
             </a:r>
           </a:p>
         </p:txBody>
@@ -7851,7 +10552,7 @@
                 </a:solidFill>
                 <a:latin typeface="Calibri"/>
               </a:rPr>
-              <a:t>Taller PI — por que importa</a:t>
+              <a:t>La retroalimentación útil tiene una estructura, y esa estructura se... (1/2)</a:t>
             </a:r>
           </a:p>
         </p:txBody>
@@ -7890,25 +10591,7 @@
                 </a:solidFill>
                 <a:latin typeface="Calibri"/>
               </a:rPr>
-              <a:t>–   </a:t>
-            </a:r>
-            <a:r>
-              <a:rPr sz="2000" b="1" i="0">
-                <a:solidFill>
-                  <a:srgbClr val="333333"/>
-                </a:solidFill>
-                <a:latin typeface="Calibri"/>
-              </a:rPr>
-              <a:t>Por que importa al PI:</a:t>
-            </a:r>
-            <a:r>
-              <a:rPr sz="2000" b="0" i="0">
-                <a:solidFill>
-                  <a:srgbClr val="333333"/>
-                </a:solidFill>
-                <a:latin typeface="Calibri"/>
-              </a:rPr>
-              <a:t> la semana entrante se integran los módulos, y un defecto que entra a la integración cuesta el triple de encontrar; esta revisión es el filtro que deja entrar solo código que otro humano ya leyó.</a:t>
+              <a:t>–   La retroalimentación útil tiene una estructura, y esa estructura se enseña con plantilla porque a punta de buena intención no sale.</a:t>
             </a:r>
           </a:p>
           <a:p>
@@ -7924,7 +10607,7 @@
                 </a:solidFill>
                 <a:latin typeface="Calibri"/>
               </a:rPr>
-              <a:t>–   El informe que reciba cada uno es la lista de tareas real con la que va a llegar a la entrega final: deja de adivinar qué le falta a VetCare porque alguien externo se lo escribió con evidencia.</a:t>
+              <a:t>–   Primero, se habla del código y nunca de la persona: 'el método guarda sin validar' y jamás 'usted no valida nada'.</a:t>
             </a:r>
           </a:p>
           <a:p>
@@ -7940,7 +10623,87 @@
                 </a:solidFill>
                 <a:latin typeface="Calibri"/>
               </a:rPr>
-              <a:t>–   Saber dar y recibir retroalimentación técnica es exactamente lo que se le va a exigir en el primer empleo, donde nadie mezcla código sin la aprobación de otro.</a:t>
+              <a:t>–   Segundo, se aporta evidencia localizable: archivo y línea, o el paso exacto para reproducirlo.</a:t>
+            </a:r>
+          </a:p>
+          <a:p>
+            <a:pPr>
+              <a:spcAft>
+                <a:spcPts val="800"/>
+              </a:spcAft>
+            </a:pPr>
+            <a:r>
+              <a:rPr sz="2000" b="0" i="0">
+                <a:solidFill>
+                  <a:srgbClr val="333333"/>
+                </a:solidFill>
+                <a:latin typeface="Calibri"/>
+              </a:rPr>
+              <a:t>–   Tercero, se explica el impacto, es decir qué se rompe y cuándo, porque un hallazgo sin consecuencia no convence a nadie.</a:t>
+            </a:r>
+          </a:p>
+          <a:p>
+            <a:pPr>
+              <a:spcAft>
+                <a:spcPts val="800"/>
+              </a:spcAft>
+            </a:pPr>
+            <a:r>
+              <a:rPr sz="2000" b="0" i="0">
+                <a:solidFill>
+                  <a:srgbClr val="333333"/>
+                </a:solidFill>
+                <a:latin typeface="Calibri"/>
+              </a:rPr>
+              <a:t>–   Cuarto, se propone una salida concreta.</a:t>
+            </a:r>
+          </a:p>
+          <a:p>
+            <a:pPr>
+              <a:spcAft>
+                <a:spcPts val="800"/>
+              </a:spcAft>
+            </a:pPr>
+            <a:r>
+              <a:rPr sz="2000" b="0" i="0">
+                <a:solidFill>
+                  <a:srgbClr val="333333"/>
+                </a:solidFill>
+                <a:latin typeface="Calibri"/>
+              </a:rPr>
+              <a:t>–   Compare las dos versiones.</a:t>
+            </a:r>
+          </a:p>
+          <a:p>
+            <a:pPr>
+              <a:spcAft>
+                <a:spcPts val="800"/>
+              </a:spcAft>
+            </a:pPr>
+            <a:r>
+              <a:rPr sz="2000" b="0" i="0">
+                <a:solidFill>
+                  <a:srgbClr val="333333"/>
+                </a:solidFill>
+                <a:latin typeface="Calibri"/>
+              </a:rPr>
+              <a:t>–   Mala: 'el manejo de errores está horrible'.</a:t>
+            </a:r>
+          </a:p>
+          <a:p>
+            <a:pPr>
+              <a:spcAft>
+                <a:spcPts val="800"/>
+              </a:spcAft>
+            </a:pPr>
+            <a:r>
+              <a:rPr sz="2000" b="0" i="0">
+                <a:solidFill>
+                  <a:srgbClr val="333333"/>
+                </a:solidFill>
+                <a:latin typeface="Calibri"/>
+              </a:rPr>
+              <a:t>–   Buena: 'En VentanaPrincipal.java línea 84 el catch (Exception e) está vacío; si el disco está lleno la mascota registrada se pierde y el usuario ve el mensaje de éxito igual.</a:t>
             </a:r>
           </a:p>
         </p:txBody>
@@ -8121,7 +10884,7 @@
                 </a:solidFill>
                 <a:latin typeface="Calibri"/>
               </a:rPr>
-              <a:t>Taller PI — punto de partida</a:t>
+              <a:t>La retroalimentación útil tiene una estructura, y esa estructura se... (2/2)</a:t>
             </a:r>
           </a:p>
         </p:txBody>
@@ -8160,7 +10923,7 @@
                 </a:solidFill>
                 <a:latin typeface="Calibri"/>
               </a:rPr>
-              <a:t>–   Cada estudiante llega con su versión de VetCare hasta la clase 9: dominio, colección, ventana Swing y persistencia en .csv, en distinto grado de avance.</a:t>
+              <a:t>–   Sugerencia: mostrar un JOptionPane con e.getMessage() y no limpiar el formulario hasta confirmar el guardado'.</a:t>
             </a:r>
           </a:p>
           <a:p>
@@ -8176,7 +10939,7 @@
                 </a:solidFill>
                 <a:latin typeface="Calibri"/>
               </a:rPr>
-              <a:t>–   El docente proyecta el archivo VetCareParaRevisar.java, que compila y arranca pero termina con una excepción en tiempo de ejecución y contiene al menos siete hallazgos sembrados a propósito.</a:t>
+              <a:t>–   La segunda se puede atender esta tarde; la primera solo produce rabia.</a:t>
             </a:r>
           </a:p>
           <a:p>
@@ -8192,7 +10955,7 @@
                 </a:solidFill>
                 <a:latin typeface="Calibri"/>
               </a:rPr>
-              <a:t>–   Los estudiantes se cruzan en cadena (el 1 revisa al 2, el 2 al 3 y así hasta cerrar el círculo) y nadie revisa a quien lo está revisando (si el docente autorizó equipos, la cadena se arma entre equipos).</a:t>
+              <a:t>–   Dos reglas más: cuando hay duda se pregunta en vez de afirmar ('¿qué pasa si el usuario deja la edad vacía?'), y cada hallazgo se etiqueta como bloqueante, mayor o menor, porque un informe con cuarenta comentarios del mismo peso no lo atiende nadie.</a:t>
             </a:r>
           </a:p>
         </p:txBody>
@@ -8373,111 +11136,21 @@
                 </a:solidFill>
                 <a:latin typeface="Calibri"/>
               </a:rPr>
-              <a:t>Taller PI — pasos guiados</a:t>
-            </a:r>
-          </a:p>
-        </p:txBody>
-      </p:sp>
-      <p:sp>
-        <p:nvSpPr>
-          <p:cNvPr id="5" name="Rounded Rectangle 4"/>
-          <p:cNvSpPr/>
-          <p:nvPr/>
-        </p:nvSpPr>
-        <p:spPr>
-          <a:xfrm>
-            <a:off x="457200" y="1234440"/>
-            <a:ext cx="11277295" cy="950976"/>
-          </a:xfrm>
-          <a:prstGeom prst="roundRect">
-            <a:avLst>
-              <a:gd name="adj" fmla="val 12000"/>
-            </a:avLst>
-          </a:prstGeom>
-          <a:solidFill>
-            <a:srgbClr val="F2F2F2"/>
-          </a:solidFill>
-          <a:ln>
-            <a:noFill/>
-          </a:ln>
-        </p:spPr>
-        <p:style>
-          <a:lnRef idx="1">
-            <a:schemeClr val="accent1"/>
-          </a:lnRef>
-          <a:fillRef idx="3">
-            <a:schemeClr val="accent1"/>
-          </a:fillRef>
-          <a:effectRef idx="2">
-            <a:schemeClr val="accent1"/>
-          </a:effectRef>
-          <a:fontRef idx="minor">
-            <a:schemeClr val="lt1"/>
-          </a:fontRef>
-        </p:style>
-        <p:txBody>
-          <a:bodyPr rtlCol="0" anchor="ctr"/>
-          <a:lstStyle/>
-          <a:p>
-            <a:pPr algn="ctr"/>
-          </a:p>
-        </p:txBody>
-      </p:sp>
-      <p:sp>
-        <p:nvSpPr>
-          <p:cNvPr id="6" name="Rounded Rectangle 5"/>
-          <p:cNvSpPr/>
-          <p:nvPr/>
-        </p:nvSpPr>
-        <p:spPr>
-          <a:xfrm>
-            <a:off x="594360" y="1490472"/>
-            <a:ext cx="438912" cy="438912"/>
-          </a:xfrm>
-          <a:prstGeom prst="roundRect">
-            <a:avLst>
-              <a:gd name="adj" fmla="val 12000"/>
-            </a:avLst>
-          </a:prstGeom>
-          <a:solidFill>
-            <a:srgbClr val="095292"/>
-          </a:solidFill>
-          <a:ln>
-            <a:noFill/>
-          </a:ln>
-        </p:spPr>
-        <p:style>
-          <a:lnRef idx="1">
-            <a:schemeClr val="accent1"/>
-          </a:lnRef>
-          <a:fillRef idx="3">
-            <a:schemeClr val="accent1"/>
-          </a:fillRef>
-          <a:effectRef idx="2">
-            <a:schemeClr val="accent1"/>
-          </a:effectRef>
-          <a:fontRef idx="minor">
-            <a:schemeClr val="lt1"/>
-          </a:fontRef>
-        </p:style>
-        <p:txBody>
-          <a:bodyPr rtlCol="0" anchor="ctr"/>
-          <a:lstStyle/>
-          <a:p>
-            <a:pPr algn="ctr"/>
-          </a:p>
-        </p:txBody>
-      </p:sp>
-      <p:sp>
-        <p:nvSpPr>
-          <p:cNvPr id="7" name="TextBox 6"/>
+              <a:t>El checklist es lo que impide que la revisión se vuelva una... (1/2)</a:t>
+            </a:r>
+          </a:p>
+        </p:txBody>
+      </p:sp>
+      <p:sp>
+        <p:nvSpPr>
+          <p:cNvPr id="5" name="TextBox 4"/>
           <p:cNvSpPr txBox="1"/>
           <p:nvPr/>
         </p:nvSpPr>
         <p:spPr>
           <a:xfrm>
-            <a:off x="594360" y="1490472"/>
-            <a:ext cx="438912" cy="438912"/>
+            <a:off x="457200" y="1170432"/>
+            <a:ext cx="11277295" cy="5230368"/>
           </a:xfrm>
           <a:prstGeom prst="rect">
             <a:avLst/>
@@ -8485,677 +11158,111 @@
           <a:noFill/>
         </p:spPr>
         <p:txBody>
-          <a:bodyPr wrap="square" anchor="ctr"/>
-          <a:lstStyle/>
-          <a:p>
-            <a:pPr algn="ctr"/>
-            <a:r>
-              <a:rPr sz="1600" b="1" i="0">
-                <a:solidFill>
-                  <a:srgbClr val="FFFFFF"/>
-                </a:solidFill>
-                <a:latin typeface="Calibri"/>
-              </a:rPr>
-              <a:t>1</a:t>
-            </a:r>
-          </a:p>
-        </p:txBody>
-      </p:sp>
-      <p:sp>
-        <p:nvSpPr>
-          <p:cNvPr id="8" name="TextBox 7"/>
-          <p:cNvSpPr txBox="1"/>
-          <p:nvPr/>
-        </p:nvSpPr>
-        <p:spPr>
-          <a:xfrm>
-            <a:off x="1188720" y="1325880"/>
-            <a:ext cx="10271455" cy="786384"/>
-          </a:xfrm>
-          <a:prstGeom prst="rect">
-            <a:avLst/>
-          </a:prstGeom>
-          <a:noFill/>
-        </p:spPr>
-        <p:txBody>
-          <a:bodyPr wrap="square" anchor="ctr"/>
-          <a:lstStyle/>
-          <a:p>
-            <a:r>
-              <a:rPr sz="1400" b="1" i="0">
-                <a:solidFill>
-                  <a:srgbClr val="095292"/>
-                </a:solidFill>
-                <a:latin typeface="Calibri"/>
-              </a:rPr>
-              <a:t>Intercambien proyectos: cada estudiante entrega su carpeta comprimida más un archivo de tres líneas con las instrucciones de ejecución, y recibe el proyecto de otro compañero (si el docente autorizó equipos, el de otro equipo; la revisión funciona igual); lo primero es abrirlo en VS Code y ejecutarlo, anotando si arrancó y, si no, el mensaje de error exacto copiado tal cual.</a:t>
-            </a:r>
-          </a:p>
-        </p:txBody>
-      </p:sp>
-      <p:sp>
-        <p:nvSpPr>
-          <p:cNvPr id="9" name="Rounded Rectangle 8"/>
-          <p:cNvSpPr/>
-          <p:nvPr/>
-        </p:nvSpPr>
-        <p:spPr>
-          <a:xfrm>
-            <a:off x="457200" y="2276856"/>
-            <a:ext cx="11277295" cy="950976"/>
-          </a:xfrm>
-          <a:prstGeom prst="roundRect">
-            <a:avLst>
-              <a:gd name="adj" fmla="val 12000"/>
-            </a:avLst>
-          </a:prstGeom>
-          <a:solidFill>
-            <a:srgbClr val="E8F4FA"/>
-          </a:solidFill>
-          <a:ln>
-            <a:noFill/>
-          </a:ln>
-        </p:spPr>
-        <p:style>
-          <a:lnRef idx="1">
-            <a:schemeClr val="accent1"/>
-          </a:lnRef>
-          <a:fillRef idx="3">
-            <a:schemeClr val="accent1"/>
-          </a:fillRef>
-          <a:effectRef idx="2">
-            <a:schemeClr val="accent1"/>
-          </a:effectRef>
-          <a:fontRef idx="minor">
-            <a:schemeClr val="lt1"/>
-          </a:fontRef>
-        </p:style>
-        <p:txBody>
-          <a:bodyPr rtlCol="0" anchor="ctr"/>
-          <a:lstStyle/>
-          <a:p>
-            <a:pPr algn="ctr"/>
-          </a:p>
-        </p:txBody>
-      </p:sp>
-      <p:sp>
-        <p:nvSpPr>
-          <p:cNvPr id="10" name="Rounded Rectangle 9"/>
-          <p:cNvSpPr/>
-          <p:nvPr/>
-        </p:nvSpPr>
-        <p:spPr>
-          <a:xfrm>
-            <a:off x="594360" y="2532888"/>
-            <a:ext cx="438912" cy="438912"/>
-          </a:xfrm>
-          <a:prstGeom prst="roundRect">
-            <a:avLst>
-              <a:gd name="adj" fmla="val 12000"/>
-            </a:avLst>
-          </a:prstGeom>
-          <a:solidFill>
-            <a:srgbClr val="095292"/>
-          </a:solidFill>
-          <a:ln>
-            <a:noFill/>
-          </a:ln>
-        </p:spPr>
-        <p:style>
-          <a:lnRef idx="1">
-            <a:schemeClr val="accent1"/>
-          </a:lnRef>
-          <a:fillRef idx="3">
-            <a:schemeClr val="accent1"/>
-          </a:fillRef>
-          <a:effectRef idx="2">
-            <a:schemeClr val="accent1"/>
-          </a:effectRef>
-          <a:fontRef idx="minor">
-            <a:schemeClr val="lt1"/>
-          </a:fontRef>
-        </p:style>
-        <p:txBody>
-          <a:bodyPr rtlCol="0" anchor="ctr"/>
-          <a:lstStyle/>
-          <a:p>
-            <a:pPr algn="ctr"/>
-          </a:p>
-        </p:txBody>
-      </p:sp>
-      <p:sp>
-        <p:nvSpPr>
-          <p:cNvPr id="11" name="TextBox 10"/>
-          <p:cNvSpPr txBox="1"/>
-          <p:nvPr/>
-        </p:nvSpPr>
-        <p:spPr>
-          <a:xfrm>
-            <a:off x="594360" y="2532888"/>
-            <a:ext cx="438912" cy="438912"/>
-          </a:xfrm>
-          <a:prstGeom prst="rect">
-            <a:avLst/>
-          </a:prstGeom>
-          <a:noFill/>
-        </p:spPr>
-        <p:txBody>
-          <a:bodyPr wrap="square" anchor="ctr"/>
-          <a:lstStyle/>
-          <a:p>
-            <a:pPr algn="ctr"/>
-            <a:r>
-              <a:rPr sz="1600" b="1" i="0">
-                <a:solidFill>
-                  <a:srgbClr val="FFFFFF"/>
-                </a:solidFill>
-                <a:latin typeface="Calibri"/>
-              </a:rPr>
-              <a:t>2</a:t>
-            </a:r>
-          </a:p>
-        </p:txBody>
-      </p:sp>
-      <p:sp>
-        <p:nvSpPr>
-          <p:cNvPr id="12" name="TextBox 11"/>
-          <p:cNvSpPr txBox="1"/>
-          <p:nvPr/>
-        </p:nvSpPr>
-        <p:spPr>
-          <a:xfrm>
-            <a:off x="1188720" y="2368296"/>
-            <a:ext cx="10271455" cy="786384"/>
-          </a:xfrm>
-          <a:prstGeom prst="rect">
-            <a:avLst/>
-          </a:prstGeom>
-          <a:noFill/>
-        </p:spPr>
-        <p:txBody>
-          <a:bodyPr wrap="square" anchor="ctr"/>
-          <a:lstStyle/>
-          <a:p>
-            <a:r>
-              <a:rPr sz="1400" b="1" i="0">
-                <a:solidFill>
-                  <a:srgbClr val="095292"/>
-                </a:solidFill>
-                <a:latin typeface="Calibri"/>
-              </a:rPr>
-              <a:t>Recorran el proyecto recibido con el checklist de doce ítems (clase de dominio, encapsulamiento, colección, interfaz gráfica, try-catch en fronteras, persistencia, catch vacío, métodos largos, duplicación, nombres, números mágicos, validación de casos borde) marcando cumple / no cumple / no aplica y escribiendo la evidencia archivo:línea en cada 'no cumple'.</a:t>
-            </a:r>
-          </a:p>
-        </p:txBody>
-      </p:sp>
-      <p:sp>
-        <p:nvSpPr>
-          <p:cNvPr id="13" name="Rounded Rectangle 12"/>
-          <p:cNvSpPr/>
-          <p:nvPr/>
-        </p:nvSpPr>
-        <p:spPr>
-          <a:xfrm>
-            <a:off x="457200" y="3319272"/>
-            <a:ext cx="11277295" cy="950976"/>
-          </a:xfrm>
-          <a:prstGeom prst="roundRect">
-            <a:avLst>
-              <a:gd name="adj" fmla="val 12000"/>
-            </a:avLst>
-          </a:prstGeom>
-          <a:solidFill>
-            <a:srgbClr val="F2F2F2"/>
-          </a:solidFill>
-          <a:ln>
-            <a:noFill/>
-          </a:ln>
-        </p:spPr>
-        <p:style>
-          <a:lnRef idx="1">
-            <a:schemeClr val="accent1"/>
-          </a:lnRef>
-          <a:fillRef idx="3">
-            <a:schemeClr val="accent1"/>
-          </a:fillRef>
-          <a:effectRef idx="2">
-            <a:schemeClr val="accent1"/>
-          </a:effectRef>
-          <a:fontRef idx="minor">
-            <a:schemeClr val="lt1"/>
-          </a:fontRef>
-        </p:style>
-        <p:txBody>
-          <a:bodyPr rtlCol="0" anchor="ctr"/>
-          <a:lstStyle/>
-          <a:p>
-            <a:pPr algn="ctr"/>
-          </a:p>
-        </p:txBody>
-      </p:sp>
-      <p:sp>
-        <p:nvSpPr>
-          <p:cNvPr id="14" name="Rounded Rectangle 13"/>
-          <p:cNvSpPr/>
-          <p:nvPr/>
-        </p:nvSpPr>
-        <p:spPr>
-          <a:xfrm>
-            <a:off x="594360" y="3575304"/>
-            <a:ext cx="438912" cy="438912"/>
-          </a:xfrm>
-          <a:prstGeom prst="roundRect">
-            <a:avLst>
-              <a:gd name="adj" fmla="val 12000"/>
-            </a:avLst>
-          </a:prstGeom>
-          <a:solidFill>
-            <a:srgbClr val="095292"/>
-          </a:solidFill>
-          <a:ln>
-            <a:noFill/>
-          </a:ln>
-        </p:spPr>
-        <p:style>
-          <a:lnRef idx="1">
-            <a:schemeClr val="accent1"/>
-          </a:lnRef>
-          <a:fillRef idx="3">
-            <a:schemeClr val="accent1"/>
-          </a:fillRef>
-          <a:effectRef idx="2">
-            <a:schemeClr val="accent1"/>
-          </a:effectRef>
-          <a:fontRef idx="minor">
-            <a:schemeClr val="lt1"/>
-          </a:fontRef>
-        </p:style>
-        <p:txBody>
-          <a:bodyPr rtlCol="0" anchor="ctr"/>
-          <a:lstStyle/>
-          <a:p>
-            <a:pPr algn="ctr"/>
-          </a:p>
-        </p:txBody>
-      </p:sp>
-      <p:sp>
-        <p:nvSpPr>
-          <p:cNvPr id="15" name="TextBox 14"/>
-          <p:cNvSpPr txBox="1"/>
-          <p:nvPr/>
-        </p:nvSpPr>
-        <p:spPr>
-          <a:xfrm>
-            <a:off x="594360" y="3575304"/>
-            <a:ext cx="438912" cy="438912"/>
-          </a:xfrm>
-          <a:prstGeom prst="rect">
-            <a:avLst/>
-          </a:prstGeom>
-          <a:noFill/>
-        </p:spPr>
-        <p:txBody>
-          <a:bodyPr wrap="square" anchor="ctr"/>
-          <a:lstStyle/>
-          <a:p>
-            <a:pPr algn="ctr"/>
-            <a:r>
-              <a:rPr sz="1600" b="1" i="0">
-                <a:solidFill>
-                  <a:srgbClr val="FFFFFF"/>
-                </a:solidFill>
-                <a:latin typeface="Calibri"/>
-              </a:rPr>
-              <a:t>3</a:t>
-            </a:r>
-          </a:p>
-        </p:txBody>
-      </p:sp>
-      <p:sp>
-        <p:nvSpPr>
-          <p:cNvPr id="16" name="TextBox 15"/>
-          <p:cNvSpPr txBox="1"/>
-          <p:nvPr/>
-        </p:nvSpPr>
-        <p:spPr>
-          <a:xfrm>
-            <a:off x="1188720" y="3410712"/>
-            <a:ext cx="10271455" cy="786384"/>
-          </a:xfrm>
-          <a:prstGeom prst="rect">
-            <a:avLst/>
-          </a:prstGeom>
-          <a:noFill/>
-        </p:spPr>
-        <p:txBody>
-          <a:bodyPr wrap="square" anchor="ctr"/>
-          <a:lstStyle/>
-          <a:p>
-            <a:r>
-              <a:rPr sz="1500" b="1" i="0">
-                <a:solidFill>
-                  <a:srgbClr val="095292"/>
-                </a:solidFill>
-                <a:latin typeface="Calibri"/>
-              </a:rPr>
-              <a:t>Provoquen a propósito los cuatro casos borde de VetCare (edad con letras, campos vacíos, buscar un ID inexistente, borrar o dañar una línea de mascotas.csv) y registren qué hizo la aplicación en cada uno, con el texto del mensaje o de la excepción.</a:t>
-            </a:r>
-          </a:p>
-        </p:txBody>
-      </p:sp>
-      <p:sp>
-        <p:nvSpPr>
-          <p:cNvPr id="17" name="Rounded Rectangle 16"/>
-          <p:cNvSpPr/>
-          <p:nvPr/>
-        </p:nvSpPr>
-        <p:spPr>
-          <a:xfrm>
-            <a:off x="457200" y="4361688"/>
-            <a:ext cx="11277295" cy="950976"/>
-          </a:xfrm>
-          <a:prstGeom prst="roundRect">
-            <a:avLst>
-              <a:gd name="adj" fmla="val 12000"/>
-            </a:avLst>
-          </a:prstGeom>
-          <a:solidFill>
-            <a:srgbClr val="E8F4FA"/>
-          </a:solidFill>
-          <a:ln>
-            <a:noFill/>
-          </a:ln>
-        </p:spPr>
-        <p:style>
-          <a:lnRef idx="1">
-            <a:schemeClr val="accent1"/>
-          </a:lnRef>
-          <a:fillRef idx="3">
-            <a:schemeClr val="accent1"/>
-          </a:fillRef>
-          <a:effectRef idx="2">
-            <a:schemeClr val="accent1"/>
-          </a:effectRef>
-          <a:fontRef idx="minor">
-            <a:schemeClr val="lt1"/>
-          </a:fontRef>
-        </p:style>
-        <p:txBody>
-          <a:bodyPr rtlCol="0" anchor="ctr"/>
-          <a:lstStyle/>
-          <a:p>
-            <a:pPr algn="ctr"/>
-          </a:p>
-        </p:txBody>
-      </p:sp>
-      <p:sp>
-        <p:nvSpPr>
-          <p:cNvPr id="18" name="Rounded Rectangle 17"/>
-          <p:cNvSpPr/>
-          <p:nvPr/>
-        </p:nvSpPr>
-        <p:spPr>
-          <a:xfrm>
-            <a:off x="594360" y="4617720"/>
-            <a:ext cx="438912" cy="438912"/>
-          </a:xfrm>
-          <a:prstGeom prst="roundRect">
-            <a:avLst>
-              <a:gd name="adj" fmla="val 12000"/>
-            </a:avLst>
-          </a:prstGeom>
-          <a:solidFill>
-            <a:srgbClr val="095292"/>
-          </a:solidFill>
-          <a:ln>
-            <a:noFill/>
-          </a:ln>
-        </p:spPr>
-        <p:style>
-          <a:lnRef idx="1">
-            <a:schemeClr val="accent1"/>
-          </a:lnRef>
-          <a:fillRef idx="3">
-            <a:schemeClr val="accent1"/>
-          </a:fillRef>
-          <a:effectRef idx="2">
-            <a:schemeClr val="accent1"/>
-          </a:effectRef>
-          <a:fontRef idx="minor">
-            <a:schemeClr val="lt1"/>
-          </a:fontRef>
-        </p:style>
-        <p:txBody>
-          <a:bodyPr rtlCol="0" anchor="ctr"/>
-          <a:lstStyle/>
-          <a:p>
-            <a:pPr algn="ctr"/>
-          </a:p>
-        </p:txBody>
-      </p:sp>
-      <p:sp>
-        <p:nvSpPr>
-          <p:cNvPr id="19" name="TextBox 18"/>
-          <p:cNvSpPr txBox="1"/>
-          <p:nvPr/>
-        </p:nvSpPr>
-        <p:spPr>
-          <a:xfrm>
-            <a:off x="594360" y="4617720"/>
-            <a:ext cx="438912" cy="438912"/>
-          </a:xfrm>
-          <a:prstGeom prst="rect">
-            <a:avLst/>
-          </a:prstGeom>
-          <a:noFill/>
-        </p:spPr>
-        <p:txBody>
-          <a:bodyPr wrap="square" anchor="ctr"/>
-          <a:lstStyle/>
-          <a:p>
-            <a:pPr algn="ctr"/>
-            <a:r>
-              <a:rPr sz="1600" b="1" i="0">
-                <a:solidFill>
-                  <a:srgbClr val="FFFFFF"/>
-                </a:solidFill>
-                <a:latin typeface="Calibri"/>
-              </a:rPr>
-              <a:t>4</a:t>
-            </a:r>
-          </a:p>
-        </p:txBody>
-      </p:sp>
-      <p:sp>
-        <p:nvSpPr>
-          <p:cNvPr id="20" name="TextBox 19"/>
-          <p:cNvSpPr txBox="1"/>
-          <p:nvPr/>
-        </p:nvSpPr>
-        <p:spPr>
-          <a:xfrm>
-            <a:off x="1188720" y="4453128"/>
-            <a:ext cx="10271455" cy="786384"/>
-          </a:xfrm>
-          <a:prstGeom prst="rect">
-            <a:avLst/>
-          </a:prstGeom>
-          <a:noFill/>
-        </p:spPr>
-        <p:txBody>
-          <a:bodyPr wrap="square" anchor="ctr"/>
-          <a:lstStyle/>
-          <a:p>
-            <a:r>
-              <a:rPr sz="1500" b="1" i="0">
-                <a:solidFill>
-                  <a:srgbClr val="095292"/>
-                </a:solidFill>
-                <a:latin typeface="Calibri"/>
-              </a:rPr>
-              <a:t>Redacten cinco hallazgos priorizados como bloqueante, mayor o menor, cada uno con el formato Evidencia + Impacto + Sugerencia, todos referidos al código y ninguno a la persona; incluyan al menos un bloqueante si existe.</a:t>
-            </a:r>
-          </a:p>
-        </p:txBody>
-      </p:sp>
-      <p:sp>
-        <p:nvSpPr>
-          <p:cNvPr id="21" name="Rounded Rectangle 20"/>
-          <p:cNvSpPr/>
-          <p:nvPr/>
-        </p:nvSpPr>
-        <p:spPr>
-          <a:xfrm>
-            <a:off x="457200" y="5404104"/>
-            <a:ext cx="11277295" cy="950976"/>
-          </a:xfrm>
-          <a:prstGeom prst="roundRect">
-            <a:avLst>
-              <a:gd name="adj" fmla="val 12000"/>
-            </a:avLst>
-          </a:prstGeom>
-          <a:solidFill>
-            <a:srgbClr val="F2F2F2"/>
-          </a:solidFill>
-          <a:ln>
-            <a:noFill/>
-          </a:ln>
-        </p:spPr>
-        <p:style>
-          <a:lnRef idx="1">
-            <a:schemeClr val="accent1"/>
-          </a:lnRef>
-          <a:fillRef idx="3">
-            <a:schemeClr val="accent1"/>
-          </a:fillRef>
-          <a:effectRef idx="2">
-            <a:schemeClr val="accent1"/>
-          </a:effectRef>
-          <a:fontRef idx="minor">
-            <a:schemeClr val="lt1"/>
-          </a:fontRef>
-        </p:style>
-        <p:txBody>
-          <a:bodyPr rtlCol="0" anchor="ctr"/>
-          <a:lstStyle/>
-          <a:p>
-            <a:pPr algn="ctr"/>
-          </a:p>
-        </p:txBody>
-      </p:sp>
-      <p:sp>
-        <p:nvSpPr>
-          <p:cNvPr id="22" name="Rounded Rectangle 21"/>
-          <p:cNvSpPr/>
-          <p:nvPr/>
-        </p:nvSpPr>
-        <p:spPr>
-          <a:xfrm>
-            <a:off x="594360" y="5660136"/>
-            <a:ext cx="438912" cy="438912"/>
-          </a:xfrm>
-          <a:prstGeom prst="roundRect">
-            <a:avLst>
-              <a:gd name="adj" fmla="val 12000"/>
-            </a:avLst>
-          </a:prstGeom>
-          <a:solidFill>
-            <a:srgbClr val="095292"/>
-          </a:solidFill>
-          <a:ln>
-            <a:noFill/>
-          </a:ln>
-        </p:spPr>
-        <p:style>
-          <a:lnRef idx="1">
-            <a:schemeClr val="accent1"/>
-          </a:lnRef>
-          <a:fillRef idx="3">
-            <a:schemeClr val="accent1"/>
-          </a:fillRef>
-          <a:effectRef idx="2">
-            <a:schemeClr val="accent1"/>
-          </a:effectRef>
-          <a:fontRef idx="minor">
-            <a:schemeClr val="lt1"/>
-          </a:fontRef>
-        </p:style>
-        <p:txBody>
-          <a:bodyPr rtlCol="0" anchor="ctr"/>
-          <a:lstStyle/>
-          <a:p>
-            <a:pPr algn="ctr"/>
-          </a:p>
-        </p:txBody>
-      </p:sp>
-      <p:sp>
-        <p:nvSpPr>
-          <p:cNvPr id="23" name="TextBox 22"/>
-          <p:cNvSpPr txBox="1"/>
-          <p:nvPr/>
-        </p:nvSpPr>
-        <p:spPr>
-          <a:xfrm>
-            <a:off x="594360" y="5660136"/>
-            <a:ext cx="438912" cy="438912"/>
-          </a:xfrm>
-          <a:prstGeom prst="rect">
-            <a:avLst/>
-          </a:prstGeom>
-          <a:noFill/>
-        </p:spPr>
-        <p:txBody>
-          <a:bodyPr wrap="square" anchor="ctr"/>
-          <a:lstStyle/>
-          <a:p>
-            <a:pPr algn="ctr"/>
-            <a:r>
-              <a:rPr sz="1600" b="1" i="0">
-                <a:solidFill>
-                  <a:srgbClr val="FFFFFF"/>
-                </a:solidFill>
-                <a:latin typeface="Calibri"/>
-              </a:rPr>
-              <a:t>5</a:t>
-            </a:r>
-          </a:p>
-        </p:txBody>
-      </p:sp>
-      <p:sp>
-        <p:nvSpPr>
-          <p:cNvPr id="24" name="TextBox 23"/>
-          <p:cNvSpPr txBox="1"/>
-          <p:nvPr/>
-        </p:nvSpPr>
-        <p:spPr>
-          <a:xfrm>
-            <a:off x="1188720" y="5495544"/>
-            <a:ext cx="10271455" cy="786384"/>
-          </a:xfrm>
-          <a:prstGeom prst="rect">
-            <a:avLst/>
-          </a:prstGeom>
-          <a:noFill/>
-        </p:spPr>
-        <p:txBody>
-          <a:bodyPr wrap="square" anchor="ctr"/>
-          <a:lstStyle/>
-          <a:p>
-            <a:r>
-              <a:rPr sz="1500" b="1" i="0">
-                <a:solidFill>
-                  <a:srgbClr val="095292"/>
-                </a:solidFill>
-                <a:latin typeface="Calibri"/>
-              </a:rPr>
-              <a:t>Hagan la devolución cruzada de ocho minutos por proyecto revisado y cierren con el plan de corrección escrito por su autor: qué acepta y corrige, qué justifica y deja igual, y qué difiere, con responsable en cada línea.</a:t>
-            </a:r>
-          </a:p>
-        </p:txBody>
-      </p:sp>
-      <p:sp>
-        <p:nvSpPr>
-          <p:cNvPr id="25" name="TextBox 24"/>
+          <a:bodyPr wrap="square">
+            <a:spAutoFit/>
+          </a:bodyPr>
+          <a:lstStyle/>
+          <a:p>
+            <a:pPr>
+              <a:spcAft>
+                <a:spcPts val="800"/>
+              </a:spcAft>
+            </a:pPr>
+            <a:r>
+              <a:rPr sz="2000" b="0" i="0">
+                <a:solidFill>
+                  <a:srgbClr val="333333"/>
+                </a:solidFill>
+                <a:latin typeface="Calibri"/>
+              </a:rPr>
+              <a:t>–   El checklist es lo que impide que la revisión se vuelva una conversación de gustos.</a:t>
+            </a:r>
+          </a:p>
+          <a:p>
+            <a:pPr>
+              <a:spcAft>
+                <a:spcPts val="800"/>
+              </a:spcAft>
+            </a:pPr>
+            <a:r>
+              <a:rPr sz="2000" b="0" i="0">
+                <a:solidFill>
+                  <a:srgbClr val="333333"/>
+                </a:solidFill>
+                <a:latin typeface="Calibri"/>
+              </a:rPr>
+              <a:t>–   Se construye directamente con los requisitos del PI de VetCare, y sus ítems son binarios y verificables: ¿existe al menos una clase del dominio con atributos privados y getters, o los datos andan sueltos en arreglos de String?</a:t>
+            </a:r>
+          </a:p>
+          <a:p>
+            <a:pPr>
+              <a:spcAft>
+                <a:spcPts val="800"/>
+              </a:spcAft>
+            </a:pPr>
+            <a:r>
+              <a:rPr sz="2000" b="0" i="0">
+                <a:solidFill>
+                  <a:srgbClr val="333333"/>
+                </a:solidFill>
+                <a:latin typeface="Calibri"/>
+              </a:rPr>
+              <a:t>–   ¿se usa una colección de Java para administrar las mascotas?</a:t>
+            </a:r>
+          </a:p>
+          <a:p>
+            <a:pPr>
+              <a:spcAft>
+                <a:spcPts val="800"/>
+              </a:spcAft>
+            </a:pPr>
+            <a:r>
+              <a:rPr sz="2000" b="0" i="0">
+                <a:solidFill>
+                  <a:srgbClr val="333333"/>
+                </a:solidFill>
+                <a:latin typeface="Calibri"/>
+              </a:rPr>
+              <a:t>–   ¿la interfaz gráfica muestra la lista y permite registrar y buscar?</a:t>
+            </a:r>
+          </a:p>
+          <a:p>
+            <a:pPr>
+              <a:spcAft>
+                <a:spcPts val="800"/>
+              </a:spcAft>
+            </a:pPr>
+            <a:r>
+              <a:rPr sz="2000" b="0" i="0">
+                <a:solidFill>
+                  <a:srgbClr val="333333"/>
+                </a:solidFill>
+                <a:latin typeface="Calibri"/>
+              </a:rPr>
+              <a:t>–   ¿hay try-catch en las fronteras, es decir donde entra texto del usuario y donde se toca el archivo?</a:t>
+            </a:r>
+          </a:p>
+          <a:p>
+            <a:pPr>
+              <a:spcAft>
+                <a:spcPts val="800"/>
+              </a:spcAft>
+            </a:pPr>
+            <a:r>
+              <a:rPr sz="2000" b="0" i="0">
+                <a:solidFill>
+                  <a:srgbClr val="333333"/>
+                </a:solidFill>
+                <a:latin typeface="Calibri"/>
+              </a:rPr>
+              <a:t>–   ¿el proyecto guarda y recupera datos de un.txt o.csv?</a:t>
+            </a:r>
+          </a:p>
+        </p:txBody>
+      </p:sp>
+      <p:sp>
+        <p:nvSpPr>
+          <p:cNvPr id="6" name="TextBox 5"/>
           <p:cNvSpPr txBox="1"/>
           <p:nvPr/>
         </p:nvSpPr>

--- a/Programacion II/Clases/Clase 11 - Revision de codigo cruzada/Presentacion.pptx
+++ b/Programacion II/Clases/Clase 11 - Revision de codigo cruzada/Presentacion.pptx
@@ -25,6 +25,15 @@
     <p:sldId id="273" r:id="rId24"/>
     <p:sldId id="274" r:id="rId25"/>
     <p:sldId id="275" r:id="rId26"/>
+    <p:sldId id="276" r:id="rId27"/>
+    <p:sldId id="277" r:id="rId28"/>
+    <p:sldId id="278" r:id="rId29"/>
+    <p:sldId id="279" r:id="rId30"/>
+    <p:sldId id="280" r:id="rId31"/>
+    <p:sldId id="281" r:id="rId32"/>
+    <p:sldId id="282" r:id="rId33"/>
+    <p:sldId id="283" r:id="rId34"/>
+    <p:sldId id="284" r:id="rId35"/>
   </p:sldIdLst>
   <p:sldSz cx="12191695" cy="6858000" type="screen4x3"/>
   <p:notesSz cx="6858000" cy="9144000"/>
@@ -3625,7 +3634,7 @@
                 </a:solidFill>
                 <a:latin typeface="Calibri"/>
               </a:rPr>
-              <a:t>El checklist es lo que impide que la revisión se vuelva una... (2/2)</a:t>
+              <a:t>El checklist es lo que impide que la revisión se vuelva una... (1/2)</a:t>
             </a:r>
           </a:p>
         </p:txBody>
@@ -3664,7 +3673,7 @@
                 </a:solidFill>
                 <a:latin typeface="Calibri"/>
               </a:rPr>
-              <a:t>–   ¿hay algún catch vacío?</a:t>
+              <a:t>–   El checklist es lo que impide que la revisión se vuelva una conversación de gustos.</a:t>
             </a:r>
           </a:p>
           <a:p>
@@ -3680,7 +3689,7 @@
                 </a:solidFill>
                 <a:latin typeface="Calibri"/>
               </a:rPr>
-              <a:t>–   ¿algún método pasa de cincuenta líneas?</a:t>
+              <a:t>–   Se construye directamente con los requisitos del PI de VetCare, y sus ítems son binarios y verificables: ¿existe al menos una clase del dominio con atributos privados y getters, o los datos andan sueltos en arreglos de String?</a:t>
             </a:r>
           </a:p>
           <a:p>
@@ -3696,7 +3705,7 @@
                 </a:solidFill>
                 <a:latin typeface="Calibri"/>
               </a:rPr>
-              <a:t>–   ¿hay bloques duplicados?</a:t>
+              <a:t>–   ¿se usa una colección de Java para administrar las mascotas?</a:t>
             </a:r>
           </a:p>
           <a:p>
@@ -3712,39 +3721,7 @@
                 </a:solidFill>
                 <a:latin typeface="Calibri"/>
               </a:rPr>
-              <a:t>–   Cada ítem se marca cumple, no cumple o no aplica, y el 'no cumple' obliga a escribir la evidencia archivo:línea.</a:t>
-            </a:r>
-          </a:p>
-          <a:p>
-            <a:pPr>
-              <a:spcAft>
-                <a:spcPts val="800"/>
-              </a:spcAft>
-            </a:pPr>
-            <a:r>
-              <a:rPr sz="2000" b="0" i="0">
-                <a:solidFill>
-                  <a:srgbClr val="333333"/>
-                </a:solidFill>
-                <a:latin typeface="Calibri"/>
-              </a:rPr>
-              <a:t>–   Esto tiene tres efectos: hace comparables las revisiones entre unos y otros, evita que el revisor se quede solo con lo que le llamó la atención, y le da al autor del proyecto una lista de trabajo en vez de una sensación.</a:t>
-            </a:r>
-          </a:p>
-          <a:p>
-            <a:pPr>
-              <a:spcAft>
-                <a:spcPts val="800"/>
-              </a:spcAft>
-            </a:pPr>
-            <a:r>
-              <a:rPr sz="2000" b="0" i="0">
-                <a:solidFill>
-                  <a:srgbClr val="333333"/>
-                </a:solidFill>
-                <a:latin typeface="Calibri"/>
-              </a:rPr>
-              <a:t>–   El checklist no reemplaza el criterio; lo ordena, que es distinto.</a:t>
+              <a:t>–   ¿hay try-catch en las fronteras, es decir donde entra texto del usuario y donde se toca el archivo?</a:t>
             </a:r>
           </a:p>
         </p:txBody>
@@ -3925,7 +3902,7 @@
                 </a:solidFill>
                 <a:latin typeface="Calibri"/>
               </a:rPr>
-              <a:t>Recibir la crítica también se practica, y es la mitad difícil</a:t>
+              <a:t>El checklist es lo que impide que la revisión se vuelva una... (2/2)</a:t>
             </a:r>
           </a:p>
         </p:txBody>
@@ -3964,7 +3941,7 @@
                 </a:solidFill>
                 <a:latin typeface="Calibri"/>
               </a:rPr>
-              <a:t>–   Recibir la crítica también se practica, y es la mitad difícil.</a:t>
+              <a:t>–   ¿el proyecto guarda y recupera datos de un.txt o.csv?</a:t>
             </a:r>
           </a:p>
           <a:p>
@@ -3980,7 +3957,7 @@
                 </a:solidFill>
                 <a:latin typeface="Calibri"/>
               </a:rPr>
-              <a:t>–   La reacción natural del autor es defenderse en caliente y explicar por qué lo hizo así; el protocolo de clase es otro: escuchar completo, pedir aclaración si el hallazgo no se entiende</a:t>
+              <a:t>–   Cada ítem se marca cumple, no cumple o no aplica, y el 'no cumple' obliga a escribir la evidencia archivo:línea.</a:t>
             </a:r>
           </a:p>
           <a:p>
@@ -3996,7 +3973,7 @@
                 </a:solidFill>
                 <a:latin typeface="Calibri"/>
               </a:rPr>
-              <a:t>–   Y luego decidir con una de tres respuestas escritas: acepto y corrijo (con responsable y fecha), justifico por qué se queda como está, o difiero para después de la entrega.</a:t>
+              <a:t>–   Esto tiene tres efectos: hace comparables las revisiones entre unos y otros, evita que el revisor se quede solo con lo que le llamó la atención, y le da al autor del proyecto una lista de trabajo en vez de una sensación.</a:t>
             </a:r>
           </a:p>
           <a:p>
@@ -4012,55 +3989,7 @@
                 </a:solidFill>
                 <a:latin typeface="Calibri"/>
               </a:rPr>
-              <a:t>–   Todo eso queda en el plan de corrección y es lo que el docente revisa.</a:t>
-            </a:r>
-          </a:p>
-          <a:p>
-            <a:pPr>
-              <a:spcAft>
-                <a:spcPts val="800"/>
-              </a:spcAft>
-            </a:pPr>
-            <a:r>
-              <a:rPr sz="2000" b="0" i="0">
-                <a:solidFill>
-                  <a:srgbClr val="333333"/>
-                </a:solidFill>
-                <a:latin typeface="Calibri"/>
-              </a:rPr>
-              <a:t>–   Del lado del revisor también hay deberes: verificar antes de acusar, porque un hallazgo falso como 'esto no compila' cuando en realidad faltaba abrir el proyecto correcto quema la credibilidad de todo el informe.</a:t>
-            </a:r>
-          </a:p>
-          <a:p>
-            <a:pPr>
-              <a:spcAft>
-                <a:spcPts val="800"/>
-              </a:spcAft>
-            </a:pPr>
-            <a:r>
-              <a:rPr sz="2000" b="0" i="0">
-                <a:solidFill>
-                  <a:srgbClr val="333333"/>
-                </a:solidFill>
-                <a:latin typeface="Calibri"/>
-              </a:rPr>
-              <a:t>–   Hay tres antipatrones que van a aparecer y conviene nombrarlos de una vez: la revisión de sello, que aprueba en dos minutos sin haber ejecutado nada; la revisión de gusto personal</a:t>
-            </a:r>
-          </a:p>
-          <a:p>
-            <a:pPr>
-              <a:spcAft>
-                <a:spcPts val="800"/>
-              </a:spcAft>
-            </a:pPr>
-            <a:r>
-              <a:rPr sz="2000" b="0" i="0">
-                <a:solidFill>
-                  <a:srgbClr val="333333"/>
-                </a:solidFill>
-                <a:latin typeface="Calibri"/>
-              </a:rPr>
-              <a:t>–   Que solo señala estilo e indentación; y la revisión que rediseña el proyecto ajeno, donde el revisor propone rehacer VetCare con su propia arquitectura en vez de señalar problemas concretos del que tiene enfrente.</a:t>
+              <a:t>–   El checklist no reemplaza el criterio; lo ordena, que es distinto.</a:t>
             </a:r>
           </a:p>
         </p:txBody>
@@ -4241,141 +4170,21 @@
                 </a:solidFill>
                 <a:latin typeface="Calibri"/>
               </a:rPr>
-              <a:t>Un método real de VetCare y sus seis hallazgos</a:t>
-            </a:r>
-          </a:p>
-        </p:txBody>
-      </p:sp>
-      <p:sp>
-        <p:nvSpPr>
-          <p:cNvPr id="5" name="Rounded Rectangle 4"/>
-          <p:cNvSpPr/>
-          <p:nvPr/>
-        </p:nvSpPr>
-        <p:spPr>
-          <a:xfrm>
-            <a:off x="457200" y="1261872"/>
-            <a:ext cx="11277295" cy="4773168"/>
-          </a:xfrm>
-          <a:prstGeom prst="roundRect">
-            <a:avLst>
-              <a:gd name="adj" fmla="val 12000"/>
-            </a:avLst>
-          </a:prstGeom>
-          <a:solidFill>
-            <a:srgbClr val="1E2A38"/>
-          </a:solidFill>
-          <a:ln>
-            <a:noFill/>
-          </a:ln>
-        </p:spPr>
-        <p:style>
-          <a:lnRef idx="1">
-            <a:schemeClr val="accent1"/>
-          </a:lnRef>
-          <a:fillRef idx="3">
-            <a:schemeClr val="accent1"/>
-          </a:fillRef>
-          <a:effectRef idx="2">
-            <a:schemeClr val="accent1"/>
-          </a:effectRef>
-          <a:fontRef idx="minor">
-            <a:schemeClr val="lt1"/>
-          </a:fontRef>
-        </p:style>
-        <p:txBody>
-          <a:bodyPr rtlCol="0" anchor="ctr"/>
-          <a:lstStyle/>
-          <a:p>
-            <a:pPr algn="ctr"/>
-          </a:p>
-        </p:txBody>
-      </p:sp>
-      <p:sp>
-        <p:nvSpPr>
-          <p:cNvPr id="6" name="Rectangle 5"/>
-          <p:cNvSpPr/>
-          <p:nvPr/>
-        </p:nvSpPr>
-        <p:spPr>
-          <a:xfrm>
-            <a:off x="457200" y="1261872"/>
-            <a:ext cx="11277295" cy="320040"/>
-          </a:xfrm>
-          <a:prstGeom prst="rect">
-            <a:avLst/>
-          </a:prstGeom>
-          <a:solidFill>
-            <a:srgbClr val="095292"/>
-          </a:solidFill>
-          <a:ln>
-            <a:noFill/>
-          </a:ln>
-        </p:spPr>
-        <p:style>
-          <a:lnRef idx="1">
-            <a:schemeClr val="accent1"/>
-          </a:lnRef>
-          <a:fillRef idx="3">
-            <a:schemeClr val="accent1"/>
-          </a:fillRef>
-          <a:effectRef idx="2">
-            <a:schemeClr val="accent1"/>
-          </a:effectRef>
-          <a:fontRef idx="minor">
-            <a:schemeClr val="lt1"/>
-          </a:fontRef>
-        </p:style>
-        <p:txBody>
-          <a:bodyPr rtlCol="0" anchor="ctr"/>
-          <a:lstStyle/>
-          <a:p>
-            <a:pPr algn="ctr"/>
-          </a:p>
-        </p:txBody>
-      </p:sp>
-      <p:sp>
-        <p:nvSpPr>
-          <p:cNvPr id="7" name="TextBox 6"/>
+              <a:t>Recibir la crítica también se practica, y es la mitad difícil (1/2)</a:t>
+            </a:r>
+          </a:p>
+        </p:txBody>
+      </p:sp>
+      <p:sp>
+        <p:nvSpPr>
+          <p:cNvPr id="5" name="TextBox 4"/>
           <p:cNvSpPr txBox="1"/>
           <p:nvPr/>
         </p:nvSpPr>
         <p:spPr>
           <a:xfrm>
-            <a:off x="685800" y="1307592"/>
-            <a:ext cx="10820095" cy="256032"/>
-          </a:xfrm>
-          <a:prstGeom prst="rect">
-            <a:avLst/>
-          </a:prstGeom>
-          <a:noFill/>
-        </p:spPr>
-        <p:txBody>
-          <a:bodyPr wrap="square" anchor="ctr"/>
-          <a:lstStyle/>
-          <a:p>
-            <a:r>
-              <a:rPr sz="1000" b="1" i="0">
-                <a:solidFill>
-                  <a:srgbClr val="269CCB"/>
-                </a:solidFill>
-                <a:latin typeface="Calibri"/>
-              </a:rPr>
-              <a:t>● ● ●</a:t>
-            </a:r>
-          </a:p>
-        </p:txBody>
-      </p:sp>
-      <p:sp>
-        <p:nvSpPr>
-          <p:cNvPr id="8" name="TextBox 7"/>
-          <p:cNvSpPr txBox="1"/>
-          <p:nvPr/>
-        </p:nvSpPr>
-        <p:spPr>
-          <a:xfrm>
-            <a:off x="777240" y="1719072"/>
-            <a:ext cx="10637215" cy="4133087"/>
+            <a:off x="457200" y="1170432"/>
+            <a:ext cx="11277295" cy="5230368"/>
           </a:xfrm>
           <a:prstGeom prst="rect">
             <a:avLst/>
@@ -4390,251 +4199,88 @@
           <a:p>
             <a:pPr>
               <a:spcAft>
-                <a:spcPts val="400"/>
+                <a:spcPts val="800"/>
               </a:spcAft>
             </a:pPr>
             <a:r>
-              <a:rPr sz="1400" b="0" i="0">
-                <a:solidFill>
-                  <a:srgbClr val="FFFFFF"/>
-                </a:solidFill>
-                <a:latin typeface="Calibri"/>
-              </a:rPr>
-              <a:t>public static void proceso(String a, String b, String c, String d, String e) { // 1. nombre y parametros sin significado</a:t>
+              <a:rPr sz="2000" b="0" i="0">
+                <a:solidFill>
+                  <a:srgbClr val="333333"/>
+                </a:solidFill>
+                <a:latin typeface="Calibri"/>
+              </a:rPr>
+              <a:t>–   Recibir la crítica también se practica, y es la mitad difícil.</a:t>
             </a:r>
           </a:p>
           <a:p>
             <a:pPr>
               <a:spcAft>
-                <a:spcPts val="400"/>
+                <a:spcPts val="800"/>
               </a:spcAft>
             </a:pPr>
             <a:r>
-              <a:rPr sz="1400" b="0" i="0">
-                <a:solidFill>
-                  <a:srgbClr val="FFFFFF"/>
-                </a:solidFill>
-                <a:latin typeface="Calibri"/>
-              </a:rPr>
-              <a:t>    int x = 0;</a:t>
+              <a:rPr sz="2000" b="0" i="0">
+                <a:solidFill>
+                  <a:srgbClr val="333333"/>
+                </a:solidFill>
+                <a:latin typeface="Calibri"/>
+              </a:rPr>
+              <a:t>–   La reacción natural del autor es defenderse en caliente y explicar por qué lo hizo así; el protocolo de clase es otro: escuchar completo, pedir aclaración si el hallazgo no se entiende</a:t>
             </a:r>
           </a:p>
           <a:p>
             <a:pPr>
               <a:spcAft>
-                <a:spcPts val="400"/>
+                <a:spcPts val="800"/>
               </a:spcAft>
             </a:pPr>
             <a:r>
-              <a:rPr sz="1400" b="0" i="0">
-                <a:solidFill>
-                  <a:srgbClr val="FFFFFF"/>
-                </a:solidFill>
-                <a:latin typeface="Calibri"/>
-              </a:rPr>
-              <a:t>    try {</a:t>
+              <a:rPr sz="2000" b="0" i="0">
+                <a:solidFill>
+                  <a:srgbClr val="333333"/>
+                </a:solidFill>
+                <a:latin typeface="Calibri"/>
+              </a:rPr>
+              <a:t>–   Y luego decidir con una de tres respuestas escritas: acepto y corrijo (con responsable y fecha), justifico por qué se queda como está, o difiero para después de la entrega.</a:t>
             </a:r>
           </a:p>
           <a:p>
             <a:pPr>
               <a:spcAft>
-                <a:spcPts val="400"/>
+                <a:spcPts val="800"/>
               </a:spcAft>
             </a:pPr>
             <a:r>
-              <a:rPr sz="1400" b="0" i="0">
-                <a:solidFill>
-                  <a:srgbClr val="FFFFFF"/>
-                </a:solidFill>
-                <a:latin typeface="Calibri"/>
-              </a:rPr>
-              <a:t>        x = Integer.parseInt(d);</a:t>
+              <a:rPr sz="2000" b="0" i="0">
+                <a:solidFill>
+                  <a:srgbClr val="333333"/>
+                </a:solidFill>
+                <a:latin typeface="Calibri"/>
+              </a:rPr>
+              <a:t>–   Todo eso queda en el plan de corrección y es lo que el docente revisa.</a:t>
             </a:r>
           </a:p>
           <a:p>
             <a:pPr>
               <a:spcAft>
-                <a:spcPts val="400"/>
+                <a:spcPts val="800"/>
               </a:spcAft>
             </a:pPr>
             <a:r>
-              <a:rPr sz="1400" b="0" i="0">
-                <a:solidFill>
-                  <a:srgbClr val="FFFFFF"/>
-                </a:solidFill>
-                <a:latin typeface="Calibri"/>
-              </a:rPr>
-              <a:t>    } catch (Exception ex) {            // 2. catch vacio: la edad "dos" se vuelve 0 en silencio</a:t>
-            </a:r>
-          </a:p>
-          <a:p>
-            <a:pPr>
-              <a:spcAft>
-                <a:spcPts val="400"/>
-              </a:spcAft>
-            </a:pPr>
-            <a:r>
-              <a:rPr sz="1400" b="0" i="0">
-                <a:solidFill>
-                  <a:srgbClr val="FFFFFF"/>
-                </a:solidFill>
-                <a:latin typeface="Calibri"/>
-              </a:rPr>
-              <a:t>    }</a:t>
-            </a:r>
-          </a:p>
-          <a:p>
-            <a:pPr>
-              <a:spcAft>
-                <a:spcPts val="400"/>
-              </a:spcAft>
-            </a:pPr>
-            <a:r>
-              <a:rPr sz="1400" b="0" i="0">
-                <a:solidFill>
-                  <a:srgbClr val="FFFFFF"/>
-                </a:solidFill>
-                <a:latin typeface="Calibri"/>
-              </a:rPr>
-              <a:t>    if (x &gt; 25) {                       // 3. numero magico: por que 25? y la edad -3 pasa derecho</a:t>
-            </a:r>
-          </a:p>
-          <a:p>
-            <a:pPr>
-              <a:spcAft>
-                <a:spcPts val="400"/>
-              </a:spcAft>
-            </a:pPr>
-            <a:r>
-              <a:rPr sz="1400" b="0" i="0">
-                <a:solidFill>
-                  <a:srgbClr val="FFFFFF"/>
-                </a:solidFill>
-                <a:latin typeface="Calibri"/>
-              </a:rPr>
-              <a:t>        System.out.println("edad rara"); // 4. el aviso muere en consola: la ventana no se entera</a:t>
-            </a:r>
-          </a:p>
-          <a:p>
-            <a:pPr>
-              <a:spcAft>
-                <a:spcPts val="400"/>
-              </a:spcAft>
-            </a:pPr>
-            <a:r>
-              <a:rPr sz="1400" b="0" i="0">
-                <a:solidFill>
-                  <a:srgbClr val="FFFFFF"/>
-                </a:solidFill>
-                <a:latin typeface="Calibri"/>
-              </a:rPr>
-              <a:t>    }</a:t>
-            </a:r>
-          </a:p>
-          <a:p>
-            <a:pPr>
-              <a:spcAft>
-                <a:spcPts val="400"/>
-              </a:spcAft>
-            </a:pPr>
-            <a:r>
-              <a:rPr sz="1400" b="0" i="0">
-                <a:solidFill>
-                  <a:srgbClr val="FFFFFF"/>
-                </a:solidFill>
-                <a:latin typeface="Calibri"/>
-              </a:rPr>
-              <a:t>    String[] v = new String[5];         // 5. arreglo de String en vez de la clase Mascota</a:t>
-            </a:r>
-          </a:p>
-          <a:p>
-            <a:pPr>
-              <a:spcAft>
-                <a:spcPts val="400"/>
-              </a:spcAft>
-            </a:pPr>
-            <a:r>
-              <a:rPr sz="1400" b="0" i="0">
-                <a:solidFill>
-                  <a:srgbClr val="FFFFFF"/>
-                </a:solidFill>
-                <a:latin typeface="Calibri"/>
-              </a:rPr>
-              <a:t>    v[0] = a; v[1] = b; v[2] = c; v[3] = String.valueOf(x); v[4] = e;</a:t>
-            </a:r>
-          </a:p>
-          <a:p>
-            <a:pPr>
-              <a:spcAft>
-                <a:spcPts val="400"/>
-              </a:spcAft>
-            </a:pPr>
-            <a:r>
-              <a:rPr sz="1400" b="0" i="0">
-                <a:solidFill>
-                  <a:srgbClr val="FFFFFF"/>
-                </a:solidFill>
-                <a:latin typeface="Calibri"/>
-              </a:rPr>
-              <a:t>    datos.add(v);                       // 6. 'datos' es public static: cualquiera lo modifica</a:t>
-            </a:r>
-          </a:p>
-          <a:p>
-            <a:pPr>
-              <a:spcAft>
-                <a:spcPts val="400"/>
-              </a:spcAft>
-            </a:pPr>
-            <a:r>
-              <a:rPr sz="1400" b="0" i="0">
-                <a:solidFill>
-                  <a:srgbClr val="FFFFFF"/>
-                </a:solidFill>
-                <a:latin typeface="Calibri"/>
-              </a:rPr>
-              <a:t>}</a:t>
-            </a:r>
-          </a:p>
-        </p:txBody>
-      </p:sp>
-      <p:sp>
-        <p:nvSpPr>
-          <p:cNvPr id="9" name="TextBox 8"/>
-          <p:cNvSpPr txBox="1"/>
-          <p:nvPr/>
-        </p:nvSpPr>
-        <p:spPr>
-          <a:xfrm>
-            <a:off x="457200" y="6080760"/>
-            <a:ext cx="11277295" cy="320040"/>
-          </a:xfrm>
-          <a:prstGeom prst="rect">
-            <a:avLst/>
-          </a:prstGeom>
-          <a:noFill/>
-        </p:spPr>
-        <p:txBody>
-          <a:bodyPr wrap="square">
-            <a:spAutoFit/>
-          </a:bodyPr>
-          <a:lstStyle/>
-          <a:p>
-            <a:pPr algn="ctr"/>
-            <a:r>
-              <a:rPr sz="1200" b="0" i="1">
-                <a:solidFill>
-                  <a:srgbClr val="666666"/>
-                </a:solidFill>
-                <a:latin typeface="Calibri"/>
-              </a:rPr>
-              <a:t>El código compila y corre; la revisión no busca errores del compilador, busca lo que va a doler en el mostrador de la clínica.</a:t>
-            </a:r>
-          </a:p>
-        </p:txBody>
-      </p:sp>
-      <p:sp>
-        <p:nvSpPr>
-          <p:cNvPr id="10" name="TextBox 9"/>
+              <a:rPr sz="2000" b="0" i="0">
+                <a:solidFill>
+                  <a:srgbClr val="333333"/>
+                </a:solidFill>
+                <a:latin typeface="Calibri"/>
+              </a:rPr>
+              <a:t>–   Del lado del revisor también hay deberes: verificar antes de acusar, porque un hallazgo falso como 'esto no compila' cuando en realidad faltaba abrir el proyecto correcto quema la credibilidad de todo el informe.</a:t>
+            </a:r>
+          </a:p>
+        </p:txBody>
+      </p:sp>
+      <p:sp>
+        <p:nvSpPr>
+          <p:cNvPr id="6" name="TextBox 5"/>
           <p:cNvSpPr txBox="1"/>
           <p:nvPr/>
         </p:nvSpPr>
@@ -4808,7 +4454,7 @@
                 </a:solidFill>
                 <a:latin typeface="Calibri"/>
               </a:rPr>
-              <a:t>Demo del dia</a:t>
+              <a:t>Recibir la crítica también se practica, y es la mitad difícil (2/2)</a:t>
             </a:r>
           </a:p>
         </p:txBody>
@@ -4847,25 +4493,7 @@
                 </a:solidFill>
                 <a:latin typeface="Calibri"/>
               </a:rPr>
-              <a:t>–   </a:t>
-            </a:r>
-            <a:r>
-              <a:rPr sz="2000" b="1" i="0">
-                <a:solidFill>
-                  <a:srgbClr val="333333"/>
-                </a:solidFill>
-                <a:latin typeface="Calibri"/>
-              </a:rPr>
-              <a:t>Herramienta:</a:t>
-            </a:r>
-            <a:r>
-              <a:rPr sz="2000" b="0" i="0">
-                <a:solidFill>
-                  <a:srgbClr val="333333"/>
-                </a:solidFill>
-                <a:latin typeface="Calibri"/>
-              </a:rPr>
-              <a:t> Visual Studio Code (Java)</a:t>
+              <a:t>–   Hay tres antipatrones que van a aparecer y conviene nombrarlos de una vez: la revisión de sello, que aprueba en dos minutos sin haber ejecutado nada; la revisión de gusto personal</a:t>
             </a:r>
           </a:p>
           <a:p>
@@ -4881,41 +4509,7 @@
                 </a:solidFill>
                 <a:latin typeface="Calibri"/>
               </a:rPr>
-              <a:t>–   </a:t>
-            </a:r>
-            <a:r>
-              <a:rPr sz="2000" b="1" i="0">
-                <a:solidFill>
-                  <a:srgbClr val="333333"/>
-                </a:solidFill>
-                <a:latin typeface="Calibri"/>
-              </a:rPr>
-              <a:t>Demo:</a:t>
-            </a:r>
-            <a:r>
-              <a:rPr sz="2000" b="0" i="0">
-                <a:solidFill>
-                  <a:srgbClr val="333333"/>
-                </a:solidFill>
-                <a:latin typeface="Calibri"/>
-              </a:rPr>
-              <a:t> El docente proyecta VetCareParaRevisar.java, lo ejecuta en vivo, aplica el checklist delante del grupo y reescribe dos comentarios mal formulados del tipo 'este código es un desastre' en retroalimentación accionable.</a:t>
-            </a:r>
-          </a:p>
-          <a:p>
-            <a:pPr>
-              <a:spcAft>
-                <a:spcPts val="800"/>
-              </a:spcAft>
-            </a:pPr>
-            <a:r>
-              <a:rPr sz="2000" b="0" i="0">
-                <a:solidFill>
-                  <a:srgbClr val="333333"/>
-                </a:solidFill>
-                <a:latin typeface="Calibri"/>
-              </a:rPr>
-              <a:t>–   Mismo dominio VetCare — no otro ejemplo.</a:t>
+              <a:t>–   Que solo señala estilo e indentación; y la revisión que rediseña el proyecto ajeno, donde el revisor propone rehacer VetCare con su propia arquitectura en vez de señalar problemas concretos del que tiene enfrente.</a:t>
             </a:r>
           </a:p>
         </p:txBody>
@@ -5096,21 +4690,141 @@
                 </a:solidFill>
                 <a:latin typeface="Calibri"/>
               </a:rPr>
-              <a:t>Taller PI — por que importa</a:t>
-            </a:r>
-          </a:p>
-        </p:txBody>
-      </p:sp>
-      <p:sp>
-        <p:nvSpPr>
-          <p:cNvPr id="5" name="TextBox 4"/>
+              <a:t>VetCareParaRevisar.java — class VetCareParaRevisar</a:t>
+            </a:r>
+          </a:p>
+        </p:txBody>
+      </p:sp>
+      <p:sp>
+        <p:nvSpPr>
+          <p:cNvPr id="5" name="Rounded Rectangle 4"/>
+          <p:cNvSpPr/>
+          <p:nvPr/>
+        </p:nvSpPr>
+        <p:spPr>
+          <a:xfrm>
+            <a:off x="457200" y="1261872"/>
+            <a:ext cx="11277295" cy="5093208"/>
+          </a:xfrm>
+          <a:prstGeom prst="roundRect">
+            <a:avLst>
+              <a:gd name="adj" fmla="val 12000"/>
+            </a:avLst>
+          </a:prstGeom>
+          <a:solidFill>
+            <a:srgbClr val="1E2A38"/>
+          </a:solidFill>
+          <a:ln>
+            <a:noFill/>
+          </a:ln>
+        </p:spPr>
+        <p:style>
+          <a:lnRef idx="1">
+            <a:schemeClr val="accent1"/>
+          </a:lnRef>
+          <a:fillRef idx="3">
+            <a:schemeClr val="accent1"/>
+          </a:fillRef>
+          <a:effectRef idx="2">
+            <a:schemeClr val="accent1"/>
+          </a:effectRef>
+          <a:fontRef idx="minor">
+            <a:schemeClr val="lt1"/>
+          </a:fontRef>
+        </p:style>
+        <p:txBody>
+          <a:bodyPr rtlCol="0" anchor="ctr"/>
+          <a:lstStyle/>
+          <a:p>
+            <a:pPr algn="ctr"/>
+          </a:p>
+        </p:txBody>
+      </p:sp>
+      <p:sp>
+        <p:nvSpPr>
+          <p:cNvPr id="6" name="Rectangle 5"/>
+          <p:cNvSpPr/>
+          <p:nvPr/>
+        </p:nvSpPr>
+        <p:spPr>
+          <a:xfrm>
+            <a:off x="457200" y="1261872"/>
+            <a:ext cx="11277295" cy="320040"/>
+          </a:xfrm>
+          <a:prstGeom prst="rect">
+            <a:avLst/>
+          </a:prstGeom>
+          <a:solidFill>
+            <a:srgbClr val="095292"/>
+          </a:solidFill>
+          <a:ln>
+            <a:noFill/>
+          </a:ln>
+        </p:spPr>
+        <p:style>
+          <a:lnRef idx="1">
+            <a:schemeClr val="accent1"/>
+          </a:lnRef>
+          <a:fillRef idx="3">
+            <a:schemeClr val="accent1"/>
+          </a:fillRef>
+          <a:effectRef idx="2">
+            <a:schemeClr val="accent1"/>
+          </a:effectRef>
+          <a:fontRef idx="minor">
+            <a:schemeClr val="lt1"/>
+          </a:fontRef>
+        </p:style>
+        <p:txBody>
+          <a:bodyPr rtlCol="0" anchor="ctr"/>
+          <a:lstStyle/>
+          <a:p>
+            <a:pPr algn="ctr"/>
+          </a:p>
+        </p:txBody>
+      </p:sp>
+      <p:sp>
+        <p:nvSpPr>
+          <p:cNvPr id="7" name="TextBox 6"/>
           <p:cNvSpPr txBox="1"/>
           <p:nvPr/>
         </p:nvSpPr>
         <p:spPr>
           <a:xfrm>
-            <a:off x="457200" y="1170432"/>
-            <a:ext cx="11277295" cy="5230368"/>
+            <a:off x="685800" y="1307592"/>
+            <a:ext cx="10820095" cy="256032"/>
+          </a:xfrm>
+          <a:prstGeom prst="rect">
+            <a:avLst/>
+          </a:prstGeom>
+          <a:noFill/>
+        </p:spPr>
+        <p:txBody>
+          <a:bodyPr wrap="square" anchor="ctr"/>
+          <a:lstStyle/>
+          <a:p>
+            <a:r>
+              <a:rPr sz="1000" b="1" i="0">
+                <a:solidFill>
+                  <a:srgbClr val="269CCB"/>
+                </a:solidFill>
+                <a:latin typeface="Calibri"/>
+              </a:rPr>
+              <a:t>● ● ●</a:t>
+            </a:r>
+          </a:p>
+        </p:txBody>
+      </p:sp>
+      <p:sp>
+        <p:nvSpPr>
+          <p:cNvPr id="8" name="TextBox 7"/>
+          <p:cNvSpPr txBox="1"/>
+          <p:nvPr/>
+        </p:nvSpPr>
+        <p:spPr>
+          <a:xfrm>
+            <a:off x="777240" y="1719072"/>
+            <a:ext cx="10637215" cy="4453128"/>
           </a:xfrm>
           <a:prstGeom prst="rect">
             <a:avLst/>
@@ -5125,74 +4839,72 @@
           <a:p>
             <a:pPr>
               <a:spcAft>
-                <a:spcPts val="800"/>
+                <a:spcPts val="400"/>
               </a:spcAft>
             </a:pPr>
             <a:r>
-              <a:rPr sz="2000" b="0" i="0">
-                <a:solidFill>
-                  <a:srgbClr val="333333"/>
-                </a:solidFill>
-                <a:latin typeface="Calibri"/>
-              </a:rPr>
-              <a:t>–   </a:t>
-            </a:r>
-            <a:r>
-              <a:rPr sz="2000" b="1" i="0">
-                <a:solidFill>
-                  <a:srgbClr val="333333"/>
-                </a:solidFill>
-                <a:latin typeface="Calibri"/>
-              </a:rPr>
-              <a:t>Por que importa al PI:</a:t>
-            </a:r>
-            <a:r>
-              <a:rPr sz="2000" b="0" i="0">
-                <a:solidFill>
-                  <a:srgbClr val="333333"/>
-                </a:solidFill>
-                <a:latin typeface="Calibri"/>
-              </a:rPr>
-              <a:t> la semana entrante se integran los módulos, y un defecto que entra a la integración cuesta el triple de encontrar; esta revisión es el filtro que deja entrar solo código que otro humano ya leyó.</a:t>
+              <a:rPr sz="1400" b="0" i="0">
+                <a:solidFill>
+                  <a:srgbClr val="FFFFFF"/>
+                </a:solidFill>
+                <a:latin typeface="Calibri"/>
+              </a:rPr>
+              <a:t>public class VetCareParaRevisar {</a:t>
             </a:r>
           </a:p>
           <a:p>
             <a:pPr>
               <a:spcAft>
-                <a:spcPts val="800"/>
+                <a:spcPts val="400"/>
               </a:spcAft>
             </a:pPr>
             <a:r>
-              <a:rPr sz="2000" b="0" i="0">
-                <a:solidFill>
-                  <a:srgbClr val="333333"/>
-                </a:solidFill>
-                <a:latin typeface="Calibri"/>
-              </a:rPr>
-              <a:t>–   El informe que reciba cada uno es la lista de tareas real con la que va a llegar a la entrega final: deja de adivinar qué le falta a VetCare porque alguien externo se lo escribió con evidencia.</a:t>
+              <a:rPr sz="1400" b="0" i="0">
+                <a:solidFill>
+                  <a:srgbClr val="FFFFFF"/>
+                </a:solidFill>
+                <a:latin typeface="Calibri"/>
+              </a:rPr>
+              <a:t/>
             </a:r>
           </a:p>
           <a:p>
             <a:pPr>
               <a:spcAft>
-                <a:spcPts val="800"/>
+                <a:spcPts val="400"/>
               </a:spcAft>
             </a:pPr>
             <a:r>
-              <a:rPr sz="2000" b="0" i="0">
-                <a:solidFill>
-                  <a:srgbClr val="333333"/>
-                </a:solidFill>
-                <a:latin typeface="Calibri"/>
-              </a:rPr>
-              <a:t>–   Saber dar y recibir retroalimentación técnica es exactamente lo que se le va a exigir en el primer empleo, donde nadie mezcla código sin la aprobación de otro.</a:t>
-            </a:r>
-          </a:p>
-        </p:txBody>
-      </p:sp>
-      <p:sp>
-        <p:nvSpPr>
-          <p:cNvPr id="6" name="TextBox 5"/>
+              <a:rPr sz="1400" b="0" i="0">
+                <a:solidFill>
+                  <a:srgbClr val="FFFFFF"/>
+                </a:solidFill>
+                <a:latin typeface="Calibri"/>
+              </a:rPr>
+              <a:t>    public static ArrayList&lt;String[]&gt; datos = new ArrayList&lt;String[]&gt;();</a:t>
+            </a:r>
+          </a:p>
+          <a:p>
+            <a:pPr>
+              <a:spcAft>
+                <a:spcPts val="400"/>
+              </a:spcAft>
+            </a:pPr>
+            <a:r>
+              <a:rPr sz="1400" b="0" i="0">
+                <a:solidFill>
+                  <a:srgbClr val="FFFFFF"/>
+                </a:solidFill>
+                <a:latin typeface="Calibri"/>
+              </a:rPr>
+              <a:t/>
+            </a:r>
+          </a:p>
+        </p:txBody>
+      </p:sp>
+      <p:sp>
+        <p:nvSpPr>
+          <p:cNvPr id="9" name="TextBox 8"/>
           <p:cNvSpPr txBox="1"/>
           <p:nvPr/>
         </p:nvSpPr>
@@ -5366,21 +5078,141 @@
                 </a:solidFill>
                 <a:latin typeface="Calibri"/>
               </a:rPr>
-              <a:t>Taller PI — punto de partida</a:t>
-            </a:r>
-          </a:p>
-        </p:txBody>
-      </p:sp>
-      <p:sp>
-        <p:nvSpPr>
-          <p:cNvPr id="5" name="TextBox 4"/>
+              <a:t>VetCareParaRevisar.java — main() (1/2)</a:t>
+            </a:r>
+          </a:p>
+        </p:txBody>
+      </p:sp>
+      <p:sp>
+        <p:nvSpPr>
+          <p:cNvPr id="5" name="Rounded Rectangle 4"/>
+          <p:cNvSpPr/>
+          <p:nvPr/>
+        </p:nvSpPr>
+        <p:spPr>
+          <a:xfrm>
+            <a:off x="457200" y="1261872"/>
+            <a:ext cx="11277295" cy="5093208"/>
+          </a:xfrm>
+          <a:prstGeom prst="roundRect">
+            <a:avLst>
+              <a:gd name="adj" fmla="val 12000"/>
+            </a:avLst>
+          </a:prstGeom>
+          <a:solidFill>
+            <a:srgbClr val="1E2A38"/>
+          </a:solidFill>
+          <a:ln>
+            <a:noFill/>
+          </a:ln>
+        </p:spPr>
+        <p:style>
+          <a:lnRef idx="1">
+            <a:schemeClr val="accent1"/>
+          </a:lnRef>
+          <a:fillRef idx="3">
+            <a:schemeClr val="accent1"/>
+          </a:fillRef>
+          <a:effectRef idx="2">
+            <a:schemeClr val="accent1"/>
+          </a:effectRef>
+          <a:fontRef idx="minor">
+            <a:schemeClr val="lt1"/>
+          </a:fontRef>
+        </p:style>
+        <p:txBody>
+          <a:bodyPr rtlCol="0" anchor="ctr"/>
+          <a:lstStyle/>
+          <a:p>
+            <a:pPr algn="ctr"/>
+          </a:p>
+        </p:txBody>
+      </p:sp>
+      <p:sp>
+        <p:nvSpPr>
+          <p:cNvPr id="6" name="Rectangle 5"/>
+          <p:cNvSpPr/>
+          <p:nvPr/>
+        </p:nvSpPr>
+        <p:spPr>
+          <a:xfrm>
+            <a:off x="457200" y="1261872"/>
+            <a:ext cx="11277295" cy="320040"/>
+          </a:xfrm>
+          <a:prstGeom prst="rect">
+            <a:avLst/>
+          </a:prstGeom>
+          <a:solidFill>
+            <a:srgbClr val="095292"/>
+          </a:solidFill>
+          <a:ln>
+            <a:noFill/>
+          </a:ln>
+        </p:spPr>
+        <p:style>
+          <a:lnRef idx="1">
+            <a:schemeClr val="accent1"/>
+          </a:lnRef>
+          <a:fillRef idx="3">
+            <a:schemeClr val="accent1"/>
+          </a:fillRef>
+          <a:effectRef idx="2">
+            <a:schemeClr val="accent1"/>
+          </a:effectRef>
+          <a:fontRef idx="minor">
+            <a:schemeClr val="lt1"/>
+          </a:fontRef>
+        </p:style>
+        <p:txBody>
+          <a:bodyPr rtlCol="0" anchor="ctr"/>
+          <a:lstStyle/>
+          <a:p>
+            <a:pPr algn="ctr"/>
+          </a:p>
+        </p:txBody>
+      </p:sp>
+      <p:sp>
+        <p:nvSpPr>
+          <p:cNvPr id="7" name="TextBox 6"/>
           <p:cNvSpPr txBox="1"/>
           <p:nvPr/>
         </p:nvSpPr>
         <p:spPr>
           <a:xfrm>
-            <a:off x="457200" y="1170432"/>
-            <a:ext cx="11277295" cy="5230368"/>
+            <a:off x="685800" y="1307592"/>
+            <a:ext cx="10820095" cy="256032"/>
+          </a:xfrm>
+          <a:prstGeom prst="rect">
+            <a:avLst/>
+          </a:prstGeom>
+          <a:noFill/>
+        </p:spPr>
+        <p:txBody>
+          <a:bodyPr wrap="square" anchor="ctr"/>
+          <a:lstStyle/>
+          <a:p>
+            <a:r>
+              <a:rPr sz="1000" b="1" i="0">
+                <a:solidFill>
+                  <a:srgbClr val="269CCB"/>
+                </a:solidFill>
+                <a:latin typeface="Calibri"/>
+              </a:rPr>
+              <a:t>● ● ●</a:t>
+            </a:r>
+          </a:p>
+        </p:txBody>
+      </p:sp>
+      <p:sp>
+        <p:nvSpPr>
+          <p:cNvPr id="8" name="TextBox 7"/>
+          <p:cNvSpPr txBox="1"/>
+          <p:nvPr/>
+        </p:nvSpPr>
+        <p:spPr>
+          <a:xfrm>
+            <a:off x="777240" y="1719072"/>
+            <a:ext cx="5181447" cy="4453128"/>
           </a:xfrm>
           <a:prstGeom prst="rect">
             <a:avLst/>
@@ -5395,56 +5227,351 @@
           <a:p>
             <a:pPr>
               <a:spcAft>
-                <a:spcPts val="800"/>
+                <a:spcPts val="400"/>
               </a:spcAft>
             </a:pPr>
             <a:r>
-              <a:rPr sz="2000" b="0" i="0">
-                <a:solidFill>
-                  <a:srgbClr val="333333"/>
-                </a:solidFill>
-                <a:latin typeface="Calibri"/>
-              </a:rPr>
-              <a:t>–   Cada estudiante llega con su versión de VetCare hasta la clase 9: dominio, colección, ventana Swing y persistencia en .csv, en distinto grado de avance.</a:t>
+              <a:rPr sz="1400" b="0" i="0">
+                <a:solidFill>
+                  <a:srgbClr val="FFFFFF"/>
+                </a:solidFill>
+                <a:latin typeface="Calibri"/>
+              </a:rPr>
+              <a:t>    public static void main(String[] args) {</a:t>
             </a:r>
           </a:p>
           <a:p>
             <a:pPr>
               <a:spcAft>
-                <a:spcPts val="800"/>
+                <a:spcPts val="400"/>
               </a:spcAft>
             </a:pPr>
             <a:r>
-              <a:rPr sz="2000" b="0" i="0">
-                <a:solidFill>
-                  <a:srgbClr val="333333"/>
-                </a:solidFill>
-                <a:latin typeface="Calibri"/>
-              </a:rPr>
-              <a:t>–   El docente proyecta el archivo VetCareParaRevisar.java, que compila y arranca pero termina con una excepción en tiempo de ejecución y contiene al menos siete hallazgos sembrados a propósito.</a:t>
+              <a:rPr sz="1400" b="0" i="0">
+                <a:solidFill>
+                  <a:srgbClr val="FFFFFF"/>
+                </a:solidFill>
+                <a:latin typeface="Calibri"/>
+              </a:rPr>
+              <a:t>        System.out.println("=== VetCare Huellitas (version para revisar) ===");</a:t>
             </a:r>
           </a:p>
           <a:p>
             <a:pPr>
               <a:spcAft>
-                <a:spcPts val="800"/>
+                <a:spcPts val="400"/>
               </a:spcAft>
             </a:pPr>
             <a:r>
-              <a:rPr sz="2000" b="0" i="0">
-                <a:solidFill>
-                  <a:srgbClr val="333333"/>
-                </a:solidFill>
-                <a:latin typeface="Calibri"/>
-              </a:rPr>
-              <a:t>–   Los estudiantes se cruzan en cadena (el 1 revisa al 2, el 2 al 3 y así hasta cerrar el círculo) y nadie revisa a quien lo está revisando (si el docente autorizó equipos, la cadena se arma entre equipos).</a:t>
-            </a:r>
-          </a:p>
-        </p:txBody>
-      </p:sp>
-      <p:sp>
-        <p:nvSpPr>
-          <p:cNvPr id="6" name="TextBox 5"/>
+              <a:rPr sz="1400" b="0" i="0">
+                <a:solidFill>
+                  <a:srgbClr val="FFFFFF"/>
+                </a:solidFill>
+                <a:latin typeface="Calibri"/>
+              </a:rPr>
+              <a:t/>
+            </a:r>
+          </a:p>
+          <a:p>
+            <a:pPr>
+              <a:spcAft>
+                <a:spcPts val="400"/>
+              </a:spcAft>
+            </a:pPr>
+            <a:r>
+              <a:rPr sz="1400" b="0" i="0">
+                <a:solidFill>
+                  <a:srgbClr val="FFFFFF"/>
+                </a:solidFill>
+                <a:latin typeface="Calibri"/>
+              </a:rPr>
+              <a:t>        int consecutivo = 1;</a:t>
+            </a:r>
+          </a:p>
+          <a:p>
+            <a:pPr>
+              <a:spcAft>
+                <a:spcPts val="400"/>
+              </a:spcAft>
+            </a:pPr>
+            <a:r>
+              <a:rPr sz="1400" b="0" i="0">
+                <a:solidFill>
+                  <a:srgbClr val="FFFFFF"/>
+                </a:solidFill>
+                <a:latin typeface="Calibri"/>
+              </a:rPr>
+              <a:t>        proceso("M00" + consecutivo, "Firulais", "Canino", "4", "1144556677");</a:t>
+            </a:r>
+          </a:p>
+          <a:p>
+            <a:pPr>
+              <a:spcAft>
+                <a:spcPts val="400"/>
+              </a:spcAft>
+            </a:pPr>
+            <a:r>
+              <a:rPr sz="1400" b="0" i="0">
+                <a:solidFill>
+                  <a:srgbClr val="FFFFFF"/>
+                </a:solidFill>
+                <a:latin typeface="Calibri"/>
+              </a:rPr>
+              <a:t>        consecutivo++;</a:t>
+            </a:r>
+          </a:p>
+          <a:p>
+            <a:pPr>
+              <a:spcAft>
+                <a:spcPts val="400"/>
+              </a:spcAft>
+            </a:pPr>
+            <a:r>
+              <a:rPr sz="1400" b="0" i="0">
+                <a:solidFill>
+                  <a:srgbClr val="FFFFFF"/>
+                </a:solidFill>
+                <a:latin typeface="Calibri"/>
+              </a:rPr>
+              <a:t>        proceso("M00" + consecutivo, "Michi", "Felino", "2", "1098765432");</a:t>
+            </a:r>
+          </a:p>
+          <a:p>
+            <a:pPr>
+              <a:spcAft>
+                <a:spcPts val="400"/>
+              </a:spcAft>
+            </a:pPr>
+            <a:r>
+              <a:rPr sz="1400" b="0" i="0">
+                <a:solidFill>
+                  <a:srgbClr val="FFFFFF"/>
+                </a:solidFill>
+                <a:latin typeface="Calibri"/>
+              </a:rPr>
+              <a:t>        consecutivo++;</a:t>
+            </a:r>
+          </a:p>
+          <a:p>
+            <a:pPr>
+              <a:spcAft>
+                <a:spcPts val="400"/>
+              </a:spcAft>
+            </a:pPr>
+            <a:r>
+              <a:rPr sz="1400" b="0" i="0">
+                <a:solidFill>
+                  <a:srgbClr val="FFFFFF"/>
+                </a:solidFill>
+                <a:latin typeface="Calibri"/>
+              </a:rPr>
+              <a:t>        proceso("M00" + consecutivo, "Pelusa", "Felino", "-3", "1052233445");</a:t>
+            </a:r>
+          </a:p>
+          <a:p>
+            <a:pPr>
+              <a:spcAft>
+                <a:spcPts val="400"/>
+              </a:spcAft>
+            </a:pPr>
+            <a:r>
+              <a:rPr sz="1400" b="0" i="0">
+                <a:solidFill>
+                  <a:srgbClr val="FFFFFF"/>
+                </a:solidFill>
+                <a:latin typeface="Calibri"/>
+              </a:rPr>
+              <a:t>        consecutivo++;</a:t>
+            </a:r>
+          </a:p>
+        </p:txBody>
+      </p:sp>
+      <p:sp>
+        <p:nvSpPr>
+          <p:cNvPr id="9" name="TextBox 8"/>
+          <p:cNvSpPr txBox="1"/>
+          <p:nvPr/>
+        </p:nvSpPr>
+        <p:spPr>
+          <a:xfrm>
+            <a:off x="6233007" y="1719072"/>
+            <a:ext cx="5181447" cy="4453128"/>
+          </a:xfrm>
+          <a:prstGeom prst="rect">
+            <a:avLst/>
+          </a:prstGeom>
+          <a:noFill/>
+        </p:spPr>
+        <p:txBody>
+          <a:bodyPr wrap="square">
+            <a:spAutoFit/>
+          </a:bodyPr>
+          <a:lstStyle/>
+          <a:p>
+            <a:pPr>
+              <a:spcAft>
+                <a:spcPts val="400"/>
+              </a:spcAft>
+            </a:pPr>
+            <a:r>
+              <a:rPr sz="1400" b="0" i="0">
+                <a:solidFill>
+                  <a:srgbClr val="FFFFFF"/>
+                </a:solidFill>
+                <a:latin typeface="Calibri"/>
+              </a:rPr>
+              <a:t>        proceso("M00" + consecutivo, "Nube", "Felino", "dos", "1052233446");</a:t>
+            </a:r>
+          </a:p>
+          <a:p>
+            <a:pPr>
+              <a:spcAft>
+                <a:spcPts val="400"/>
+              </a:spcAft>
+            </a:pPr>
+            <a:r>
+              <a:rPr sz="1400" b="0" i="0">
+                <a:solidFill>
+                  <a:srgbClr val="FFFFFF"/>
+                </a:solidFill>
+                <a:latin typeface="Calibri"/>
+              </a:rPr>
+              <a:t/>
+            </a:r>
+          </a:p>
+          <a:p>
+            <a:pPr>
+              <a:spcAft>
+                <a:spcPts val="400"/>
+              </a:spcAft>
+            </a:pPr>
+            <a:r>
+              <a:rPr sz="1400" b="0" i="0">
+                <a:solidFill>
+                  <a:srgbClr val="FFFFFF"/>
+                </a:solidFill>
+                <a:latin typeface="Calibri"/>
+              </a:rPr>
+              <a:t>        System.out.println("Registros en memoria: " + datos.size());</a:t>
+            </a:r>
+          </a:p>
+          <a:p>
+            <a:pPr>
+              <a:spcAft>
+                <a:spcPts val="400"/>
+              </a:spcAft>
+            </a:pPr>
+            <a:r>
+              <a:rPr sz="1400" b="0" i="0">
+                <a:solidFill>
+                  <a:srgbClr val="FFFFFF"/>
+                </a:solidFill>
+                <a:latin typeface="Calibri"/>
+              </a:rPr>
+              <a:t/>
+            </a:r>
+          </a:p>
+          <a:p>
+            <a:pPr>
+              <a:spcAft>
+                <a:spcPts val="400"/>
+              </a:spcAft>
+            </a:pPr>
+            <a:r>
+              <a:rPr sz="1400" b="0" i="0">
+                <a:solidFill>
+                  <a:srgbClr val="FFFFFF"/>
+                </a:solidFill>
+                <a:latin typeface="Calibri"/>
+              </a:rPr>
+              <a:t>        String[] encontrada = buscarPorId("M002");</a:t>
+            </a:r>
+          </a:p>
+          <a:p>
+            <a:pPr>
+              <a:spcAft>
+                <a:spcPts val="400"/>
+              </a:spcAft>
+            </a:pPr>
+            <a:r>
+              <a:rPr sz="1400" b="0" i="0">
+                <a:solidFill>
+                  <a:srgbClr val="FFFFFF"/>
+                </a:solidFill>
+                <a:latin typeface="Calibri"/>
+              </a:rPr>
+              <a:t>        if (encontrada != null) {</a:t>
+            </a:r>
+          </a:p>
+          <a:p>
+            <a:pPr>
+              <a:spcAft>
+                <a:spcPts val="400"/>
+              </a:spcAft>
+            </a:pPr>
+            <a:r>
+              <a:rPr sz="1400" b="0" i="0">
+                <a:solidFill>
+                  <a:srgbClr val="FFFFFF"/>
+                </a:solidFill>
+                <a:latin typeface="Calibri"/>
+              </a:rPr>
+              <a:t>            System.out.println("Busqueda 1 encontro a: " + encontrada[1]);</a:t>
+            </a:r>
+          </a:p>
+          <a:p>
+            <a:pPr>
+              <a:spcAft>
+                <a:spcPts val="400"/>
+              </a:spcAft>
+            </a:pPr>
+            <a:r>
+              <a:rPr sz="1400" b="0" i="0">
+                <a:solidFill>
+                  <a:srgbClr val="FFFFFF"/>
+                </a:solidFill>
+                <a:latin typeface="Calibri"/>
+              </a:rPr>
+              <a:t>        } else {</a:t>
+            </a:r>
+          </a:p>
+          <a:p>
+            <a:pPr>
+              <a:spcAft>
+                <a:spcPts val="400"/>
+              </a:spcAft>
+            </a:pPr>
+            <a:r>
+              <a:rPr sz="1400" b="0" i="0">
+                <a:solidFill>
+                  <a:srgbClr val="FFFFFF"/>
+                </a:solidFill>
+                <a:latin typeface="Calibri"/>
+              </a:rPr>
+              <a:t>            System.out.println("Busqueda 1 no encontro nada.");</a:t>
+            </a:r>
+          </a:p>
+          <a:p>
+            <a:pPr>
+              <a:spcAft>
+                <a:spcPts val="400"/>
+              </a:spcAft>
+            </a:pPr>
+            <a:r>
+              <a:rPr sz="1400" b="0" i="0">
+                <a:solidFill>
+                  <a:srgbClr val="FFFFFF"/>
+                </a:solidFill>
+                <a:latin typeface="Calibri"/>
+              </a:rPr>
+              <a:t>        }</a:t>
+            </a:r>
+          </a:p>
+        </p:txBody>
+      </p:sp>
+      <p:sp>
+        <p:nvSpPr>
+          <p:cNvPr id="10" name="TextBox 9"/>
           <p:cNvSpPr txBox="1"/>
           <p:nvPr/>
         </p:nvSpPr>
@@ -5618,7 +5745,7 @@
                 </a:solidFill>
                 <a:latin typeface="Calibri"/>
               </a:rPr>
-              <a:t>Taller PI — pasos guiados</a:t>
+              <a:t>VetCareParaRevisar.java — main() (2/2)</a:t>
             </a:r>
           </a:p>
         </p:txBody>
@@ -5631,8 +5758,8 @@
         </p:nvSpPr>
         <p:spPr>
           <a:xfrm>
-            <a:off x="457200" y="1234440"/>
-            <a:ext cx="11277295" cy="950976"/>
+            <a:off x="457200" y="1261872"/>
+            <a:ext cx="11277295" cy="5093208"/>
           </a:xfrm>
           <a:prstGeom prst="roundRect">
             <a:avLst>
@@ -5640,7 +5767,7 @@
             </a:avLst>
           </a:prstGeom>
           <a:solidFill>
-            <a:srgbClr val="F2F2F2"/>
+            <a:srgbClr val="1E2A38"/>
           </a:solidFill>
           <a:ln>
             <a:noFill/>
@@ -5670,19 +5797,17 @@
       </p:sp>
       <p:sp>
         <p:nvSpPr>
-          <p:cNvPr id="6" name="Rounded Rectangle 5"/>
+          <p:cNvPr id="6" name="Rectangle 5"/>
           <p:cNvSpPr/>
           <p:nvPr/>
         </p:nvSpPr>
         <p:spPr>
           <a:xfrm>
-            <a:off x="594360" y="1490472"/>
-            <a:ext cx="438912" cy="438912"/>
-          </a:xfrm>
-          <a:prstGeom prst="roundRect">
-            <a:avLst>
-              <a:gd name="adj" fmla="val 12000"/>
-            </a:avLst>
+            <a:off x="457200" y="1261872"/>
+            <a:ext cx="11277295" cy="320040"/>
+          </a:xfrm>
+          <a:prstGeom prst="rect">
+            <a:avLst/>
           </a:prstGeom>
           <a:solidFill>
             <a:srgbClr val="095292"/>
@@ -5721,8 +5846,8 @@
         </p:nvSpPr>
         <p:spPr>
           <a:xfrm>
-            <a:off x="594360" y="1490472"/>
-            <a:ext cx="438912" cy="438912"/>
+            <a:off x="685800" y="1307592"/>
+            <a:ext cx="10820095" cy="256032"/>
           </a:xfrm>
           <a:prstGeom prst="rect">
             <a:avLst/>
@@ -5733,15 +5858,14 @@
           <a:bodyPr wrap="square" anchor="ctr"/>
           <a:lstStyle/>
           <a:p>
-            <a:pPr algn="ctr"/>
-            <a:r>
-              <a:rPr sz="1600" b="1" i="0">
-                <a:solidFill>
-                  <a:srgbClr val="FFFFFF"/>
-                </a:solidFill>
-                <a:latin typeface="Calibri"/>
-              </a:rPr>
-              <a:t>1</a:t>
+            <a:r>
+              <a:rPr sz="1000" b="1" i="0">
+                <a:solidFill>
+                  <a:srgbClr val="269CCB"/>
+                </a:solidFill>
+                <a:latin typeface="Calibri"/>
+              </a:rPr>
+              <a:t>● ● ●</a:t>
             </a:r>
           </a:p>
         </p:txBody>
@@ -5754,8 +5878,8 @@
         </p:nvSpPr>
         <p:spPr>
           <a:xfrm>
-            <a:off x="1188720" y="1325880"/>
-            <a:ext cx="10271455" cy="786384"/>
+            <a:off x="777240" y="1719072"/>
+            <a:ext cx="10637215" cy="4453128"/>
           </a:xfrm>
           <a:prstGeom prst="rect">
             <a:avLst/>
@@ -5763,644 +5887,127 @@
           <a:noFill/>
         </p:spPr>
         <p:txBody>
-          <a:bodyPr wrap="square" anchor="ctr"/>
-          <a:lstStyle/>
-          <a:p>
-            <a:r>
-              <a:rPr sz="1400" b="1" i="0">
-                <a:solidFill>
-                  <a:srgbClr val="095292"/>
-                </a:solidFill>
-                <a:latin typeface="Calibri"/>
-              </a:rPr>
-              <a:t>Intercambien proyectos: cada estudiante entrega su carpeta comprimida más un archivo de tres líneas con las instrucciones de ejecución, y recibe el proyecto de otro compañero (si el docente autorizó equipos, el de otro equipo; la revisión funciona igual); lo primero es abrirlo en VS Code y ejecutarlo, anotando si arrancó y, si no, el mensaje de error exacto copiado tal cual.</a:t>
-            </a:r>
-          </a:p>
-        </p:txBody>
-      </p:sp>
-      <p:sp>
-        <p:nvSpPr>
-          <p:cNvPr id="9" name="Rounded Rectangle 8"/>
-          <p:cNvSpPr/>
-          <p:nvPr/>
-        </p:nvSpPr>
-        <p:spPr>
-          <a:xfrm>
-            <a:off x="457200" y="2276856"/>
-            <a:ext cx="11277295" cy="950976"/>
-          </a:xfrm>
-          <a:prstGeom prst="roundRect">
-            <a:avLst>
-              <a:gd name="adj" fmla="val 12000"/>
-            </a:avLst>
-          </a:prstGeom>
-          <a:solidFill>
-            <a:srgbClr val="E8F4FA"/>
-          </a:solidFill>
-          <a:ln>
-            <a:noFill/>
-          </a:ln>
-        </p:spPr>
-        <p:style>
-          <a:lnRef idx="1">
-            <a:schemeClr val="accent1"/>
-          </a:lnRef>
-          <a:fillRef idx="3">
-            <a:schemeClr val="accent1"/>
-          </a:fillRef>
-          <a:effectRef idx="2">
-            <a:schemeClr val="accent1"/>
-          </a:effectRef>
-          <a:fontRef idx="minor">
-            <a:schemeClr val="lt1"/>
-          </a:fontRef>
-        </p:style>
-        <p:txBody>
-          <a:bodyPr rtlCol="0" anchor="ctr"/>
-          <a:lstStyle/>
-          <a:p>
-            <a:pPr algn="ctr"/>
-          </a:p>
-        </p:txBody>
-      </p:sp>
-      <p:sp>
-        <p:nvSpPr>
-          <p:cNvPr id="10" name="Rounded Rectangle 9"/>
-          <p:cNvSpPr/>
-          <p:nvPr/>
-        </p:nvSpPr>
-        <p:spPr>
-          <a:xfrm>
-            <a:off x="594360" y="2532888"/>
-            <a:ext cx="438912" cy="438912"/>
-          </a:xfrm>
-          <a:prstGeom prst="roundRect">
-            <a:avLst>
-              <a:gd name="adj" fmla="val 12000"/>
-            </a:avLst>
-          </a:prstGeom>
-          <a:solidFill>
-            <a:srgbClr val="095292"/>
-          </a:solidFill>
-          <a:ln>
-            <a:noFill/>
-          </a:ln>
-        </p:spPr>
-        <p:style>
-          <a:lnRef idx="1">
-            <a:schemeClr val="accent1"/>
-          </a:lnRef>
-          <a:fillRef idx="3">
-            <a:schemeClr val="accent1"/>
-          </a:fillRef>
-          <a:effectRef idx="2">
-            <a:schemeClr val="accent1"/>
-          </a:effectRef>
-          <a:fontRef idx="minor">
-            <a:schemeClr val="lt1"/>
-          </a:fontRef>
-        </p:style>
-        <p:txBody>
-          <a:bodyPr rtlCol="0" anchor="ctr"/>
-          <a:lstStyle/>
-          <a:p>
-            <a:pPr algn="ctr"/>
-          </a:p>
-        </p:txBody>
-      </p:sp>
-      <p:sp>
-        <p:nvSpPr>
-          <p:cNvPr id="11" name="TextBox 10"/>
-          <p:cNvSpPr txBox="1"/>
-          <p:nvPr/>
-        </p:nvSpPr>
-        <p:spPr>
-          <a:xfrm>
-            <a:off x="594360" y="2532888"/>
-            <a:ext cx="438912" cy="438912"/>
-          </a:xfrm>
-          <a:prstGeom prst="rect">
-            <a:avLst/>
-          </a:prstGeom>
-          <a:noFill/>
-        </p:spPr>
-        <p:txBody>
-          <a:bodyPr wrap="square" anchor="ctr"/>
-          <a:lstStyle/>
-          <a:p>
-            <a:pPr algn="ctr"/>
-            <a:r>
-              <a:rPr sz="1600" b="1" i="0">
+          <a:bodyPr wrap="square">
+            <a:spAutoFit/>
+          </a:bodyPr>
+          <a:lstStyle/>
+          <a:p>
+            <a:pPr>
+              <a:spcAft>
+                <a:spcPts val="400"/>
+              </a:spcAft>
+            </a:pPr>
+            <a:r>
+              <a:rPr sz="1400" b="0" i="0">
                 <a:solidFill>
                   <a:srgbClr val="FFFFFF"/>
                 </a:solidFill>
                 <a:latin typeface="Calibri"/>
               </a:rPr>
-              <a:t>2</a:t>
-            </a:r>
-          </a:p>
-        </p:txBody>
-      </p:sp>
-      <p:sp>
-        <p:nvSpPr>
-          <p:cNvPr id="12" name="TextBox 11"/>
-          <p:cNvSpPr txBox="1"/>
-          <p:nvPr/>
-        </p:nvSpPr>
-        <p:spPr>
-          <a:xfrm>
-            <a:off x="1188720" y="2368296"/>
-            <a:ext cx="10271455" cy="786384"/>
-          </a:xfrm>
-          <a:prstGeom prst="rect">
-            <a:avLst/>
-          </a:prstGeom>
-          <a:noFill/>
-        </p:spPr>
-        <p:txBody>
-          <a:bodyPr wrap="square" anchor="ctr"/>
-          <a:lstStyle/>
-          <a:p>
-            <a:r>
-              <a:rPr sz="1400" b="1" i="0">
-                <a:solidFill>
-                  <a:srgbClr val="095292"/>
-                </a:solidFill>
-                <a:latin typeface="Calibri"/>
-              </a:rPr>
-              <a:t>Recorran el proyecto recibido con el checklist de doce ítems (clase de dominio, encapsulamiento, colección, interfaz gráfica, try-catch en fronteras, persistencia, catch vacío, métodos largos, duplicación, nombres, números mágicos, validación de casos borde) marcando cumple / no cumple / no aplica y escribiendo la evidencia archivo:línea en cada 'no cumple'.</a:t>
-            </a:r>
-          </a:p>
-        </p:txBody>
-      </p:sp>
-      <p:sp>
-        <p:nvSpPr>
-          <p:cNvPr id="13" name="Rounded Rectangle 12"/>
-          <p:cNvSpPr/>
-          <p:nvPr/>
-        </p:nvSpPr>
-        <p:spPr>
-          <a:xfrm>
-            <a:off x="457200" y="3319272"/>
-            <a:ext cx="11277295" cy="950976"/>
-          </a:xfrm>
-          <a:prstGeom prst="roundRect">
-            <a:avLst>
-              <a:gd name="adj" fmla="val 12000"/>
-            </a:avLst>
-          </a:prstGeom>
-          <a:solidFill>
-            <a:srgbClr val="F2F2F2"/>
-          </a:solidFill>
-          <a:ln>
-            <a:noFill/>
-          </a:ln>
-        </p:spPr>
-        <p:style>
-          <a:lnRef idx="1">
-            <a:schemeClr val="accent1"/>
-          </a:lnRef>
-          <a:fillRef idx="3">
-            <a:schemeClr val="accent1"/>
-          </a:fillRef>
-          <a:effectRef idx="2">
-            <a:schemeClr val="accent1"/>
-          </a:effectRef>
-          <a:fontRef idx="minor">
-            <a:schemeClr val="lt1"/>
-          </a:fontRef>
-        </p:style>
-        <p:txBody>
-          <a:bodyPr rtlCol="0" anchor="ctr"/>
-          <a:lstStyle/>
-          <a:p>
-            <a:pPr algn="ctr"/>
-          </a:p>
-        </p:txBody>
-      </p:sp>
-      <p:sp>
-        <p:nvSpPr>
-          <p:cNvPr id="14" name="Rounded Rectangle 13"/>
-          <p:cNvSpPr/>
-          <p:nvPr/>
-        </p:nvSpPr>
-        <p:spPr>
-          <a:xfrm>
-            <a:off x="594360" y="3575304"/>
-            <a:ext cx="438912" cy="438912"/>
-          </a:xfrm>
-          <a:prstGeom prst="roundRect">
-            <a:avLst>
-              <a:gd name="adj" fmla="val 12000"/>
-            </a:avLst>
-          </a:prstGeom>
-          <a:solidFill>
-            <a:srgbClr val="095292"/>
-          </a:solidFill>
-          <a:ln>
-            <a:noFill/>
-          </a:ln>
-        </p:spPr>
-        <p:style>
-          <a:lnRef idx="1">
-            <a:schemeClr val="accent1"/>
-          </a:lnRef>
-          <a:fillRef idx="3">
-            <a:schemeClr val="accent1"/>
-          </a:fillRef>
-          <a:effectRef idx="2">
-            <a:schemeClr val="accent1"/>
-          </a:effectRef>
-          <a:fontRef idx="minor">
-            <a:schemeClr val="lt1"/>
-          </a:fontRef>
-        </p:style>
-        <p:txBody>
-          <a:bodyPr rtlCol="0" anchor="ctr"/>
-          <a:lstStyle/>
-          <a:p>
-            <a:pPr algn="ctr"/>
-          </a:p>
-        </p:txBody>
-      </p:sp>
-      <p:sp>
-        <p:nvSpPr>
-          <p:cNvPr id="15" name="TextBox 14"/>
-          <p:cNvSpPr txBox="1"/>
-          <p:nvPr/>
-        </p:nvSpPr>
-        <p:spPr>
-          <a:xfrm>
-            <a:off x="594360" y="3575304"/>
-            <a:ext cx="438912" cy="438912"/>
-          </a:xfrm>
-          <a:prstGeom prst="rect">
-            <a:avLst/>
-          </a:prstGeom>
-          <a:noFill/>
-        </p:spPr>
-        <p:txBody>
-          <a:bodyPr wrap="square" anchor="ctr"/>
-          <a:lstStyle/>
-          <a:p>
-            <a:pPr algn="ctr"/>
-            <a:r>
-              <a:rPr sz="1600" b="1" i="0">
+              <a:t/>
+            </a:r>
+          </a:p>
+          <a:p>
+            <a:pPr>
+              <a:spcAft>
+                <a:spcPts val="400"/>
+              </a:spcAft>
+            </a:pPr>
+            <a:r>
+              <a:rPr sz="1400" b="0" i="0">
                 <a:solidFill>
                   <a:srgbClr val="FFFFFF"/>
                 </a:solidFill>
                 <a:latin typeface="Calibri"/>
               </a:rPr>
-              <a:t>3</a:t>
-            </a:r>
-          </a:p>
-        </p:txBody>
-      </p:sp>
-      <p:sp>
-        <p:nvSpPr>
-          <p:cNvPr id="16" name="TextBox 15"/>
-          <p:cNvSpPr txBox="1"/>
-          <p:nvPr/>
-        </p:nvSpPr>
-        <p:spPr>
-          <a:xfrm>
-            <a:off x="1188720" y="3410712"/>
-            <a:ext cx="10271455" cy="786384"/>
-          </a:xfrm>
-          <a:prstGeom prst="rect">
-            <a:avLst/>
-          </a:prstGeom>
-          <a:noFill/>
-        </p:spPr>
-        <p:txBody>
-          <a:bodyPr wrap="square" anchor="ctr"/>
-          <a:lstStyle/>
-          <a:p>
-            <a:r>
-              <a:rPr sz="1500" b="1" i="0">
-                <a:solidFill>
-                  <a:srgbClr val="095292"/>
-                </a:solidFill>
-                <a:latin typeface="Calibri"/>
-              </a:rPr>
-              <a:t>Provoquen a propósito los cuatro casos borde de VetCare (edad con letras, campos vacíos, buscar un ID inexistente, borrar o dañar una línea de mascotas.csv) y registren qué hizo la aplicación en cada uno, con el texto del mensaje o de la excepción.</a:t>
-            </a:r>
-          </a:p>
-        </p:txBody>
-      </p:sp>
-      <p:sp>
-        <p:nvSpPr>
-          <p:cNvPr id="17" name="Rounded Rectangle 16"/>
-          <p:cNvSpPr/>
-          <p:nvPr/>
-        </p:nvSpPr>
-        <p:spPr>
-          <a:xfrm>
-            <a:off x="457200" y="4361688"/>
-            <a:ext cx="11277295" cy="950976"/>
-          </a:xfrm>
-          <a:prstGeom prst="roundRect">
-            <a:avLst>
-              <a:gd name="adj" fmla="val 12000"/>
-            </a:avLst>
-          </a:prstGeom>
-          <a:solidFill>
-            <a:srgbClr val="E8F4FA"/>
-          </a:solidFill>
-          <a:ln>
-            <a:noFill/>
-          </a:ln>
-        </p:spPr>
-        <p:style>
-          <a:lnRef idx="1">
-            <a:schemeClr val="accent1"/>
-          </a:lnRef>
-          <a:fillRef idx="3">
-            <a:schemeClr val="accent1"/>
-          </a:fillRef>
-          <a:effectRef idx="2">
-            <a:schemeClr val="accent1"/>
-          </a:effectRef>
-          <a:fontRef idx="minor">
-            <a:schemeClr val="lt1"/>
-          </a:fontRef>
-        </p:style>
-        <p:txBody>
-          <a:bodyPr rtlCol="0" anchor="ctr"/>
-          <a:lstStyle/>
-          <a:p>
-            <a:pPr algn="ctr"/>
-          </a:p>
-        </p:txBody>
-      </p:sp>
-      <p:sp>
-        <p:nvSpPr>
-          <p:cNvPr id="18" name="Rounded Rectangle 17"/>
-          <p:cNvSpPr/>
-          <p:nvPr/>
-        </p:nvSpPr>
-        <p:spPr>
-          <a:xfrm>
-            <a:off x="594360" y="4617720"/>
-            <a:ext cx="438912" cy="438912"/>
-          </a:xfrm>
-          <a:prstGeom prst="roundRect">
-            <a:avLst>
-              <a:gd name="adj" fmla="val 12000"/>
-            </a:avLst>
-          </a:prstGeom>
-          <a:solidFill>
-            <a:srgbClr val="095292"/>
-          </a:solidFill>
-          <a:ln>
-            <a:noFill/>
-          </a:ln>
-        </p:spPr>
-        <p:style>
-          <a:lnRef idx="1">
-            <a:schemeClr val="accent1"/>
-          </a:lnRef>
-          <a:fillRef idx="3">
-            <a:schemeClr val="accent1"/>
-          </a:fillRef>
-          <a:effectRef idx="2">
-            <a:schemeClr val="accent1"/>
-          </a:effectRef>
-          <a:fontRef idx="minor">
-            <a:schemeClr val="lt1"/>
-          </a:fontRef>
-        </p:style>
-        <p:txBody>
-          <a:bodyPr rtlCol="0" anchor="ctr"/>
-          <a:lstStyle/>
-          <a:p>
-            <a:pPr algn="ctr"/>
-          </a:p>
-        </p:txBody>
-      </p:sp>
-      <p:sp>
-        <p:nvSpPr>
-          <p:cNvPr id="19" name="TextBox 18"/>
-          <p:cNvSpPr txBox="1"/>
-          <p:nvPr/>
-        </p:nvSpPr>
-        <p:spPr>
-          <a:xfrm>
-            <a:off x="594360" y="4617720"/>
-            <a:ext cx="438912" cy="438912"/>
-          </a:xfrm>
-          <a:prstGeom prst="rect">
-            <a:avLst/>
-          </a:prstGeom>
-          <a:noFill/>
-        </p:spPr>
-        <p:txBody>
-          <a:bodyPr wrap="square" anchor="ctr"/>
-          <a:lstStyle/>
-          <a:p>
-            <a:pPr algn="ctr"/>
-            <a:r>
-              <a:rPr sz="1600" b="1" i="0">
+              <a:t>        imprimirFicha("M002");</a:t>
+            </a:r>
+          </a:p>
+          <a:p>
+            <a:pPr>
+              <a:spcAft>
+                <a:spcPts val="400"/>
+              </a:spcAft>
+            </a:pPr>
+            <a:r>
+              <a:rPr sz="1400" b="0" i="0">
                 <a:solidFill>
                   <a:srgbClr val="FFFFFF"/>
                 </a:solidFill>
                 <a:latin typeface="Calibri"/>
               </a:rPr>
-              <a:t>4</a:t>
-            </a:r>
-          </a:p>
-        </p:txBody>
-      </p:sp>
-      <p:sp>
-        <p:nvSpPr>
-          <p:cNvPr id="20" name="TextBox 19"/>
-          <p:cNvSpPr txBox="1"/>
-          <p:nvPr/>
-        </p:nvSpPr>
-        <p:spPr>
-          <a:xfrm>
-            <a:off x="1188720" y="4453128"/>
-            <a:ext cx="10271455" cy="786384"/>
-          </a:xfrm>
-          <a:prstGeom prst="rect">
-            <a:avLst/>
-          </a:prstGeom>
-          <a:noFill/>
-        </p:spPr>
-        <p:txBody>
-          <a:bodyPr wrap="square" anchor="ctr"/>
-          <a:lstStyle/>
-          <a:p>
-            <a:r>
-              <a:rPr sz="1500" b="1" i="0">
-                <a:solidFill>
-                  <a:srgbClr val="095292"/>
-                </a:solidFill>
-                <a:latin typeface="Calibri"/>
-              </a:rPr>
-              <a:t>Redacten cinco hallazgos priorizados como bloqueante, mayor o menor, cada uno con el formato Evidencia + Impacto + Sugerencia, todos referidos al código y ninguno a la persona; incluyan al menos un bloqueante si existe.</a:t>
-            </a:r>
-          </a:p>
-        </p:txBody>
-      </p:sp>
-      <p:sp>
-        <p:nvSpPr>
-          <p:cNvPr id="21" name="Rounded Rectangle 20"/>
-          <p:cNvSpPr/>
-          <p:nvPr/>
-        </p:nvSpPr>
-        <p:spPr>
-          <a:xfrm>
-            <a:off x="457200" y="5404104"/>
-            <a:ext cx="11277295" cy="950976"/>
-          </a:xfrm>
-          <a:prstGeom prst="roundRect">
-            <a:avLst>
-              <a:gd name="adj" fmla="val 12000"/>
-            </a:avLst>
-          </a:prstGeom>
-          <a:solidFill>
-            <a:srgbClr val="F2F2F2"/>
-          </a:solidFill>
-          <a:ln>
-            <a:noFill/>
-          </a:ln>
-        </p:spPr>
-        <p:style>
-          <a:lnRef idx="1">
-            <a:schemeClr val="accent1"/>
-          </a:lnRef>
-          <a:fillRef idx="3">
-            <a:schemeClr val="accent1"/>
-          </a:fillRef>
-          <a:effectRef idx="2">
-            <a:schemeClr val="accent1"/>
-          </a:effectRef>
-          <a:fontRef idx="minor">
-            <a:schemeClr val="lt1"/>
-          </a:fontRef>
-        </p:style>
-        <p:txBody>
-          <a:bodyPr rtlCol="0" anchor="ctr"/>
-          <a:lstStyle/>
-          <a:p>
-            <a:pPr algn="ctr"/>
-          </a:p>
-        </p:txBody>
-      </p:sp>
-      <p:sp>
-        <p:nvSpPr>
-          <p:cNvPr id="22" name="Rounded Rectangle 21"/>
-          <p:cNvSpPr/>
-          <p:nvPr/>
-        </p:nvSpPr>
-        <p:spPr>
-          <a:xfrm>
-            <a:off x="594360" y="5660136"/>
-            <a:ext cx="438912" cy="438912"/>
-          </a:xfrm>
-          <a:prstGeom prst="roundRect">
-            <a:avLst>
-              <a:gd name="adj" fmla="val 12000"/>
-            </a:avLst>
-          </a:prstGeom>
-          <a:solidFill>
-            <a:srgbClr val="095292"/>
-          </a:solidFill>
-          <a:ln>
-            <a:noFill/>
-          </a:ln>
-        </p:spPr>
-        <p:style>
-          <a:lnRef idx="1">
-            <a:schemeClr val="accent1"/>
-          </a:lnRef>
-          <a:fillRef idx="3">
-            <a:schemeClr val="accent1"/>
-          </a:fillRef>
-          <a:effectRef idx="2">
-            <a:schemeClr val="accent1"/>
-          </a:effectRef>
-          <a:fontRef idx="minor">
-            <a:schemeClr val="lt1"/>
-          </a:fontRef>
-        </p:style>
-        <p:txBody>
-          <a:bodyPr rtlCol="0" anchor="ctr"/>
-          <a:lstStyle/>
-          <a:p>
-            <a:pPr algn="ctr"/>
-          </a:p>
-        </p:txBody>
-      </p:sp>
-      <p:sp>
-        <p:nvSpPr>
-          <p:cNvPr id="23" name="TextBox 22"/>
-          <p:cNvSpPr txBox="1"/>
-          <p:nvPr/>
-        </p:nvSpPr>
-        <p:spPr>
-          <a:xfrm>
-            <a:off x="594360" y="5660136"/>
-            <a:ext cx="438912" cy="438912"/>
-          </a:xfrm>
-          <a:prstGeom prst="rect">
-            <a:avLst/>
-          </a:prstGeom>
-          <a:noFill/>
-        </p:spPr>
-        <p:txBody>
-          <a:bodyPr wrap="square" anchor="ctr"/>
-          <a:lstStyle/>
-          <a:p>
-            <a:pPr algn="ctr"/>
-            <a:r>
-              <a:rPr sz="1600" b="1" i="0">
+              <a:t/>
+            </a:r>
+          </a:p>
+          <a:p>
+            <a:pPr>
+              <a:spcAft>
+                <a:spcPts val="400"/>
+              </a:spcAft>
+            </a:pPr>
+            <a:r>
+              <a:rPr sz="1400" b="0" i="0">
                 <a:solidFill>
                   <a:srgbClr val="FFFFFF"/>
                 </a:solidFill>
                 <a:latin typeface="Calibri"/>
               </a:rPr>
-              <a:t>5</a:t>
-            </a:r>
-          </a:p>
-        </p:txBody>
-      </p:sp>
-      <p:sp>
-        <p:nvSpPr>
-          <p:cNvPr id="24" name="TextBox 23"/>
-          <p:cNvSpPr txBox="1"/>
-          <p:nvPr/>
-        </p:nvSpPr>
-        <p:spPr>
-          <a:xfrm>
-            <a:off x="1188720" y="5495544"/>
-            <a:ext cx="10271455" cy="786384"/>
-          </a:xfrm>
-          <a:prstGeom prst="rect">
-            <a:avLst/>
-          </a:prstGeom>
-          <a:noFill/>
-        </p:spPr>
-        <p:txBody>
-          <a:bodyPr wrap="square" anchor="ctr"/>
-          <a:lstStyle/>
-          <a:p>
-            <a:r>
-              <a:rPr sz="1500" b="1" i="0">
-                <a:solidFill>
-                  <a:srgbClr val="095292"/>
-                </a:solidFill>
-                <a:latin typeface="Calibri"/>
-              </a:rPr>
-              <a:t>Hagan la devolución cruzada de ocho minutos por proyecto revisado y cierren con el plan de corrección escrito por su autor: qué acepta y corrige, qué justifica y deja igual, y qué difiere, con responsable en cada línea.</a:t>
-            </a:r>
-          </a:p>
-        </p:txBody>
-      </p:sp>
-      <p:sp>
-        <p:nvSpPr>
-          <p:cNvPr id="25" name="TextBox 24"/>
+              <a:t>        String[] fantasma = buscarDeNuevo("M009");</a:t>
+            </a:r>
+          </a:p>
+          <a:p>
+            <a:pPr>
+              <a:spcAft>
+                <a:spcPts val="400"/>
+              </a:spcAft>
+            </a:pPr>
+            <a:r>
+              <a:rPr sz="1400" b="0" i="0">
+                <a:solidFill>
+                  <a:srgbClr val="FFFFFF"/>
+                </a:solidFill>
+                <a:latin typeface="Calibri"/>
+              </a:rPr>
+              <a:t>        System.out.println("Busqueda 3 devolvio: " + fantasma[1]);</a:t>
+            </a:r>
+          </a:p>
+          <a:p>
+            <a:pPr>
+              <a:spcAft>
+                <a:spcPts val="400"/>
+              </a:spcAft>
+            </a:pPr>
+            <a:r>
+              <a:rPr sz="1400" b="0" i="0">
+                <a:solidFill>
+                  <a:srgbClr val="FFFFFF"/>
+                </a:solidFill>
+                <a:latin typeface="Calibri"/>
+              </a:rPr>
+              <a:t>    }</a:t>
+            </a:r>
+          </a:p>
+          <a:p>
+            <a:pPr>
+              <a:spcAft>
+                <a:spcPts val="400"/>
+              </a:spcAft>
+            </a:pPr>
+            <a:r>
+              <a:rPr sz="1400" b="0" i="0">
+                <a:solidFill>
+                  <a:srgbClr val="FFFFFF"/>
+                </a:solidFill>
+                <a:latin typeface="Calibri"/>
+              </a:rPr>
+              <a:t/>
+            </a:r>
+          </a:p>
+        </p:txBody>
+      </p:sp>
+      <p:sp>
+        <p:nvSpPr>
+          <p:cNvPr id="9" name="TextBox 8"/>
           <p:cNvSpPr txBox="1"/>
           <p:nvPr/>
         </p:nvSpPr>
@@ -6574,7 +6181,7 @@
                 </a:solidFill>
                 <a:latin typeface="Calibri"/>
               </a:rPr>
-              <a:t>Antes de entregar — autochequeo</a:t>
+              <a:t>VetCareParaRevisar.java — proceso()</a:t>
             </a:r>
           </a:p>
         </p:txBody>
@@ -6588,7 +6195,7 @@
         <p:spPr>
           <a:xfrm>
             <a:off x="457200" y="1261872"/>
-            <a:ext cx="11277295" cy="566928"/>
+            <a:ext cx="11277295" cy="5093208"/>
           </a:xfrm>
           <a:prstGeom prst="roundRect">
             <a:avLst>
@@ -6596,7 +6203,7 @@
             </a:avLst>
           </a:prstGeom>
           <a:solidFill>
-            <a:srgbClr val="F2F2F2"/>
+            <a:srgbClr val="1E2A38"/>
           </a:solidFill>
           <a:ln>
             <a:noFill/>
@@ -6632,19 +6239,17 @@
         </p:nvSpPr>
         <p:spPr>
           <a:xfrm>
-            <a:off x="640080" y="1408175"/>
-            <a:ext cx="274320" cy="274320"/>
+            <a:off x="457200" y="1261872"/>
+            <a:ext cx="11277295" cy="320040"/>
           </a:xfrm>
           <a:prstGeom prst="rect">
             <a:avLst/>
           </a:prstGeom>
           <a:solidFill>
-            <a:srgbClr val="FFFFFF"/>
+            <a:srgbClr val="095292"/>
           </a:solidFill>
           <a:ln>
-            <a:solidFill>
-              <a:srgbClr val="333333"/>
-            </a:solidFill>
+            <a:noFill/>
           </a:ln>
         </p:spPr>
         <p:style>
@@ -6671,44 +6276,33 @@
       </p:sp>
       <p:sp>
         <p:nvSpPr>
-          <p:cNvPr id="7" name="Rectangle 6"/>
-          <p:cNvSpPr/>
-          <p:nvPr/>
-        </p:nvSpPr>
-        <p:spPr>
-          <a:xfrm>
-            <a:off x="640080" y="1408175"/>
-            <a:ext cx="73152" cy="274320"/>
-          </a:xfrm>
-          <a:prstGeom prst="rect">
-            <a:avLst/>
-          </a:prstGeom>
-          <a:solidFill>
-            <a:srgbClr val="269CCB"/>
-          </a:solidFill>
-          <a:ln>
-            <a:noFill/>
-          </a:ln>
-        </p:spPr>
-        <p:style>
-          <a:lnRef idx="1">
-            <a:schemeClr val="accent1"/>
-          </a:lnRef>
-          <a:fillRef idx="3">
-            <a:schemeClr val="accent1"/>
-          </a:fillRef>
-          <a:effectRef idx="2">
-            <a:schemeClr val="accent1"/>
-          </a:effectRef>
-          <a:fontRef idx="minor">
-            <a:schemeClr val="lt1"/>
-          </a:fontRef>
-        </p:style>
-        <p:txBody>
-          <a:bodyPr rtlCol="0" anchor="ctr"/>
-          <a:lstStyle/>
-          <a:p>
-            <a:pPr algn="ctr"/>
+          <p:cNvPr id="7" name="TextBox 6"/>
+          <p:cNvSpPr txBox="1"/>
+          <p:nvPr/>
+        </p:nvSpPr>
+        <p:spPr>
+          <a:xfrm>
+            <a:off x="685800" y="1307592"/>
+            <a:ext cx="10820095" cy="256032"/>
+          </a:xfrm>
+          <a:prstGeom prst="rect">
+            <a:avLst/>
+          </a:prstGeom>
+          <a:noFill/>
+        </p:spPr>
+        <p:txBody>
+          <a:bodyPr wrap="square" anchor="ctr"/>
+          <a:lstStyle/>
+          <a:p>
+            <a:r>
+              <a:rPr sz="1000" b="1" i="0">
+                <a:solidFill>
+                  <a:srgbClr val="269CCB"/>
+                </a:solidFill>
+                <a:latin typeface="Calibri"/>
+              </a:rPr>
+              <a:t>● ● ●</a:t>
+            </a:r>
           </a:p>
         </p:txBody>
       </p:sp>
@@ -6720,8 +6314,8 @@
         </p:nvSpPr>
         <p:spPr>
           <a:xfrm>
-            <a:off x="1097280" y="1353312"/>
-            <a:ext cx="10362895" cy="402336"/>
+            <a:off x="777240" y="1719072"/>
+            <a:ext cx="10637215" cy="4453128"/>
           </a:xfrm>
           <a:prstGeom prst="rect">
             <a:avLst/>
@@ -6729,354 +6323,319 @@
           <a:noFill/>
         </p:spPr>
         <p:txBody>
-          <a:bodyPr wrap="square" anchor="ctr"/>
-          <a:lstStyle/>
-          <a:p>
-            <a:r>
-              <a:rPr sz="1500" b="0" i="0">
-                <a:solidFill>
-                  <a:srgbClr val="333333"/>
-                </a:solidFill>
-                <a:latin typeface="Calibri"/>
-              </a:rPr>
-              <a:t>¿Su informe le sirve al otro estudiante para trabajar esta misma tarde, o solo le dice que algo está mal sin decirle dónde ni qué hacer?</a:t>
-            </a:r>
-          </a:p>
-        </p:txBody>
-      </p:sp>
-      <p:sp>
-        <p:nvSpPr>
-          <p:cNvPr id="9" name="Rounded Rectangle 8"/>
-          <p:cNvSpPr/>
-          <p:nvPr/>
-        </p:nvSpPr>
-        <p:spPr>
-          <a:xfrm>
-            <a:off x="457200" y="1938528"/>
-            <a:ext cx="11277295" cy="566928"/>
-          </a:xfrm>
-          <a:prstGeom prst="roundRect">
-            <a:avLst>
-              <a:gd name="adj" fmla="val 12000"/>
-            </a:avLst>
-          </a:prstGeom>
-          <a:solidFill>
-            <a:srgbClr val="F2F2F2"/>
-          </a:solidFill>
-          <a:ln>
-            <a:noFill/>
-          </a:ln>
-        </p:spPr>
-        <p:style>
-          <a:lnRef idx="1">
-            <a:schemeClr val="accent1"/>
-          </a:lnRef>
-          <a:fillRef idx="3">
-            <a:schemeClr val="accent1"/>
-          </a:fillRef>
-          <a:effectRef idx="2">
-            <a:schemeClr val="accent1"/>
-          </a:effectRef>
-          <a:fontRef idx="minor">
-            <a:schemeClr val="lt1"/>
-          </a:fontRef>
-        </p:style>
-        <p:txBody>
-          <a:bodyPr rtlCol="0" anchor="ctr"/>
-          <a:lstStyle/>
-          <a:p>
-            <a:pPr algn="ctr"/>
-          </a:p>
-        </p:txBody>
-      </p:sp>
-      <p:sp>
-        <p:nvSpPr>
-          <p:cNvPr id="10" name="Rectangle 9"/>
-          <p:cNvSpPr/>
-          <p:nvPr/>
-        </p:nvSpPr>
-        <p:spPr>
-          <a:xfrm>
-            <a:off x="640080" y="2084832"/>
-            <a:ext cx="274320" cy="274320"/>
-          </a:xfrm>
-          <a:prstGeom prst="rect">
-            <a:avLst/>
-          </a:prstGeom>
-          <a:solidFill>
-            <a:srgbClr val="FFFFFF"/>
-          </a:solidFill>
-          <a:ln>
-            <a:solidFill>
-              <a:srgbClr val="333333"/>
-            </a:solidFill>
-          </a:ln>
-        </p:spPr>
-        <p:style>
-          <a:lnRef idx="1">
-            <a:schemeClr val="accent1"/>
-          </a:lnRef>
-          <a:fillRef idx="3">
-            <a:schemeClr val="accent1"/>
-          </a:fillRef>
-          <a:effectRef idx="2">
-            <a:schemeClr val="accent1"/>
-          </a:effectRef>
-          <a:fontRef idx="minor">
-            <a:schemeClr val="lt1"/>
-          </a:fontRef>
-        </p:style>
-        <p:txBody>
-          <a:bodyPr rtlCol="0" anchor="ctr"/>
-          <a:lstStyle/>
-          <a:p>
-            <a:pPr algn="ctr"/>
-          </a:p>
-        </p:txBody>
-      </p:sp>
-      <p:sp>
-        <p:nvSpPr>
-          <p:cNvPr id="11" name="Rectangle 10"/>
-          <p:cNvSpPr/>
-          <p:nvPr/>
-        </p:nvSpPr>
-        <p:spPr>
-          <a:xfrm>
-            <a:off x="640080" y="2084832"/>
-            <a:ext cx="73152" cy="274320"/>
-          </a:xfrm>
-          <a:prstGeom prst="rect">
-            <a:avLst/>
-          </a:prstGeom>
-          <a:solidFill>
-            <a:srgbClr val="269CCB"/>
-          </a:solidFill>
-          <a:ln>
-            <a:noFill/>
-          </a:ln>
-        </p:spPr>
-        <p:style>
-          <a:lnRef idx="1">
-            <a:schemeClr val="accent1"/>
-          </a:lnRef>
-          <a:fillRef idx="3">
-            <a:schemeClr val="accent1"/>
-          </a:fillRef>
-          <a:effectRef idx="2">
-            <a:schemeClr val="accent1"/>
-          </a:effectRef>
-          <a:fontRef idx="minor">
-            <a:schemeClr val="lt1"/>
-          </a:fontRef>
-        </p:style>
-        <p:txBody>
-          <a:bodyPr rtlCol="0" anchor="ctr"/>
-          <a:lstStyle/>
-          <a:p>
-            <a:pPr algn="ctr"/>
-          </a:p>
-        </p:txBody>
-      </p:sp>
-      <p:sp>
-        <p:nvSpPr>
-          <p:cNvPr id="12" name="TextBox 11"/>
-          <p:cNvSpPr txBox="1"/>
-          <p:nvPr/>
-        </p:nvSpPr>
-        <p:spPr>
-          <a:xfrm>
-            <a:off x="1097280" y="2029968"/>
-            <a:ext cx="10362895" cy="402336"/>
-          </a:xfrm>
-          <a:prstGeom prst="rect">
-            <a:avLst/>
-          </a:prstGeom>
-          <a:noFill/>
-        </p:spPr>
-        <p:txBody>
-          <a:bodyPr wrap="square" anchor="ctr"/>
-          <a:lstStyle/>
-          <a:p>
-            <a:r>
-              <a:rPr sz="1500" b="0" i="0">
-                <a:solidFill>
-                  <a:srgbClr val="333333"/>
-                </a:solidFill>
-                <a:latin typeface="Calibri"/>
-              </a:rPr>
-              <a:t>Si tuviera que borrar todos sus comentarios menos uno, ¿cuál dejaría, y por qué ese es más importante que los otros cuatro?</a:t>
-            </a:r>
-          </a:p>
-        </p:txBody>
-      </p:sp>
-      <p:sp>
-        <p:nvSpPr>
-          <p:cNvPr id="13" name="Rounded Rectangle 12"/>
-          <p:cNvSpPr/>
-          <p:nvPr/>
-        </p:nvSpPr>
-        <p:spPr>
-          <a:xfrm>
-            <a:off x="457200" y="2615184"/>
-            <a:ext cx="11277295" cy="566928"/>
-          </a:xfrm>
-          <a:prstGeom prst="roundRect">
-            <a:avLst>
-              <a:gd name="adj" fmla="val 12000"/>
-            </a:avLst>
-          </a:prstGeom>
-          <a:solidFill>
-            <a:srgbClr val="F2F2F2"/>
-          </a:solidFill>
-          <a:ln>
-            <a:noFill/>
-          </a:ln>
-        </p:spPr>
-        <p:style>
-          <a:lnRef idx="1">
-            <a:schemeClr val="accent1"/>
-          </a:lnRef>
-          <a:fillRef idx="3">
-            <a:schemeClr val="accent1"/>
-          </a:fillRef>
-          <a:effectRef idx="2">
-            <a:schemeClr val="accent1"/>
-          </a:effectRef>
-          <a:fontRef idx="minor">
-            <a:schemeClr val="lt1"/>
-          </a:fontRef>
-        </p:style>
-        <p:txBody>
-          <a:bodyPr rtlCol="0" anchor="ctr"/>
-          <a:lstStyle/>
-          <a:p>
-            <a:pPr algn="ctr"/>
-          </a:p>
-        </p:txBody>
-      </p:sp>
-      <p:sp>
-        <p:nvSpPr>
-          <p:cNvPr id="14" name="Rectangle 13"/>
-          <p:cNvSpPr/>
-          <p:nvPr/>
-        </p:nvSpPr>
-        <p:spPr>
-          <a:xfrm>
-            <a:off x="640080" y="2761488"/>
-            <a:ext cx="274320" cy="274320"/>
-          </a:xfrm>
-          <a:prstGeom prst="rect">
-            <a:avLst/>
-          </a:prstGeom>
-          <a:solidFill>
-            <a:srgbClr val="FFFFFF"/>
-          </a:solidFill>
-          <a:ln>
-            <a:solidFill>
-              <a:srgbClr val="333333"/>
-            </a:solidFill>
-          </a:ln>
-        </p:spPr>
-        <p:style>
-          <a:lnRef idx="1">
-            <a:schemeClr val="accent1"/>
-          </a:lnRef>
-          <a:fillRef idx="3">
-            <a:schemeClr val="accent1"/>
-          </a:fillRef>
-          <a:effectRef idx="2">
-            <a:schemeClr val="accent1"/>
-          </a:effectRef>
-          <a:fontRef idx="minor">
-            <a:schemeClr val="lt1"/>
-          </a:fontRef>
-        </p:style>
-        <p:txBody>
-          <a:bodyPr rtlCol="0" anchor="ctr"/>
-          <a:lstStyle/>
-          <a:p>
-            <a:pPr algn="ctr"/>
-          </a:p>
-        </p:txBody>
-      </p:sp>
-      <p:sp>
-        <p:nvSpPr>
-          <p:cNvPr id="15" name="Rectangle 14"/>
-          <p:cNvSpPr/>
-          <p:nvPr/>
-        </p:nvSpPr>
-        <p:spPr>
-          <a:xfrm>
-            <a:off x="640080" y="2761488"/>
-            <a:ext cx="73152" cy="274320"/>
-          </a:xfrm>
-          <a:prstGeom prst="rect">
-            <a:avLst/>
-          </a:prstGeom>
-          <a:solidFill>
-            <a:srgbClr val="269CCB"/>
-          </a:solidFill>
-          <a:ln>
-            <a:noFill/>
-          </a:ln>
-        </p:spPr>
-        <p:style>
-          <a:lnRef idx="1">
-            <a:schemeClr val="accent1"/>
-          </a:lnRef>
-          <a:fillRef idx="3">
-            <a:schemeClr val="accent1"/>
-          </a:fillRef>
-          <a:effectRef idx="2">
-            <a:schemeClr val="accent1"/>
-          </a:effectRef>
-          <a:fontRef idx="minor">
-            <a:schemeClr val="lt1"/>
-          </a:fontRef>
-        </p:style>
-        <p:txBody>
-          <a:bodyPr rtlCol="0" anchor="ctr"/>
-          <a:lstStyle/>
-          <a:p>
-            <a:pPr algn="ctr"/>
-          </a:p>
-        </p:txBody>
-      </p:sp>
-      <p:sp>
-        <p:nvSpPr>
-          <p:cNvPr id="16" name="TextBox 15"/>
-          <p:cNvSpPr txBox="1"/>
-          <p:nvPr/>
-        </p:nvSpPr>
-        <p:spPr>
-          <a:xfrm>
-            <a:off x="1097280" y="2706624"/>
-            <a:ext cx="10362895" cy="402336"/>
-          </a:xfrm>
-          <a:prstGeom prst="rect">
-            <a:avLst/>
-          </a:prstGeom>
-          <a:noFill/>
-        </p:spPr>
-        <p:txBody>
-          <a:bodyPr wrap="square" anchor="ctr"/>
-          <a:lstStyle/>
-          <a:p>
-            <a:r>
-              <a:rPr sz="1500" b="0" i="0">
-                <a:solidFill>
-                  <a:srgbClr val="333333"/>
-                </a:solidFill>
-                <a:latin typeface="Calibri"/>
-              </a:rPr>
-              <a:t>¿Cuántos de sus hallazgos los comprobó ejecutando y cuántos los está suponiendo por haber leído el código?</a:t>
-            </a:r>
-          </a:p>
-        </p:txBody>
-      </p:sp>
-      <p:sp>
-        <p:nvSpPr>
-          <p:cNvPr id="17" name="TextBox 16"/>
+          <a:bodyPr wrap="square">
+            <a:spAutoFit/>
+          </a:bodyPr>
+          <a:lstStyle/>
+          <a:p>
+            <a:pPr>
+              <a:spcAft>
+                <a:spcPts val="314"/>
+              </a:spcAft>
+            </a:pPr>
+            <a:r>
+              <a:rPr sz="1100" b="0" i="0">
+                <a:solidFill>
+                  <a:srgbClr val="FFFFFF"/>
+                </a:solidFill>
+                <a:latin typeface="Calibri"/>
+              </a:rPr>
+              <a:t>    public static void proceso(String a, String b, String c, String d, String e) {</a:t>
+            </a:r>
+          </a:p>
+          <a:p>
+            <a:pPr>
+              <a:spcAft>
+                <a:spcPts val="314"/>
+              </a:spcAft>
+            </a:pPr>
+            <a:r>
+              <a:rPr sz="1100" b="0" i="0">
+                <a:solidFill>
+                  <a:srgbClr val="FFFFFF"/>
+                </a:solidFill>
+                <a:latin typeface="Calibri"/>
+              </a:rPr>
+              <a:t>        int x = 0;</a:t>
+            </a:r>
+          </a:p>
+          <a:p>
+            <a:pPr>
+              <a:spcAft>
+                <a:spcPts val="314"/>
+              </a:spcAft>
+            </a:pPr>
+            <a:r>
+              <a:rPr sz="1100" b="0" i="0">
+                <a:solidFill>
+                  <a:srgbClr val="FFFFFF"/>
+                </a:solidFill>
+                <a:latin typeface="Calibri"/>
+              </a:rPr>
+              <a:t>        try {</a:t>
+            </a:r>
+          </a:p>
+          <a:p>
+            <a:pPr>
+              <a:spcAft>
+                <a:spcPts val="314"/>
+              </a:spcAft>
+            </a:pPr>
+            <a:r>
+              <a:rPr sz="1100" b="0" i="0">
+                <a:solidFill>
+                  <a:srgbClr val="FFFFFF"/>
+                </a:solidFill>
+                <a:latin typeface="Calibri"/>
+              </a:rPr>
+              <a:t>            x = Integer.parseInt(d);</a:t>
+            </a:r>
+          </a:p>
+          <a:p>
+            <a:pPr>
+              <a:spcAft>
+                <a:spcPts val="314"/>
+              </a:spcAft>
+            </a:pPr>
+            <a:r>
+              <a:rPr sz="1100" b="0" i="0">
+                <a:solidFill>
+                  <a:srgbClr val="FFFFFF"/>
+                </a:solidFill>
+                <a:latin typeface="Calibri"/>
+              </a:rPr>
+              <a:t>        } catch (Exception ex) {</a:t>
+            </a:r>
+          </a:p>
+          <a:p>
+            <a:pPr>
+              <a:spcAft>
+                <a:spcPts val="314"/>
+              </a:spcAft>
+            </a:pPr>
+            <a:r>
+              <a:rPr sz="1100" b="0" i="0">
+                <a:solidFill>
+                  <a:srgbClr val="FFFFFF"/>
+                </a:solidFill>
+                <a:latin typeface="Calibri"/>
+              </a:rPr>
+              <a:t>        }</a:t>
+            </a:r>
+          </a:p>
+          <a:p>
+            <a:pPr>
+              <a:spcAft>
+                <a:spcPts val="314"/>
+              </a:spcAft>
+            </a:pPr>
+            <a:r>
+              <a:rPr sz="1100" b="0" i="0">
+                <a:solidFill>
+                  <a:srgbClr val="FFFFFF"/>
+                </a:solidFill>
+                <a:latin typeface="Calibri"/>
+              </a:rPr>
+              <a:t>        if (x &gt; 25) {</a:t>
+            </a:r>
+          </a:p>
+          <a:p>
+            <a:pPr>
+              <a:spcAft>
+                <a:spcPts val="314"/>
+              </a:spcAft>
+            </a:pPr>
+            <a:r>
+              <a:rPr sz="1100" b="0" i="0">
+                <a:solidFill>
+                  <a:srgbClr val="FFFFFF"/>
+                </a:solidFill>
+                <a:latin typeface="Calibri"/>
+              </a:rPr>
+              <a:t>            System.out.println("edad rara");</a:t>
+            </a:r>
+          </a:p>
+          <a:p>
+            <a:pPr>
+              <a:spcAft>
+                <a:spcPts val="314"/>
+              </a:spcAft>
+            </a:pPr>
+            <a:r>
+              <a:rPr sz="1100" b="0" i="0">
+                <a:solidFill>
+                  <a:srgbClr val="FFFFFF"/>
+                </a:solidFill>
+                <a:latin typeface="Calibri"/>
+              </a:rPr>
+              <a:t>        }</a:t>
+            </a:r>
+          </a:p>
+          <a:p>
+            <a:pPr>
+              <a:spcAft>
+                <a:spcPts val="314"/>
+              </a:spcAft>
+            </a:pPr>
+            <a:r>
+              <a:rPr sz="1100" b="0" i="0">
+                <a:solidFill>
+                  <a:srgbClr val="FFFFFF"/>
+                </a:solidFill>
+                <a:latin typeface="Calibri"/>
+              </a:rPr>
+              <a:t>        String[] v = new String[5];</a:t>
+            </a:r>
+          </a:p>
+          <a:p>
+            <a:pPr>
+              <a:spcAft>
+                <a:spcPts val="314"/>
+              </a:spcAft>
+            </a:pPr>
+            <a:r>
+              <a:rPr sz="1100" b="0" i="0">
+                <a:solidFill>
+                  <a:srgbClr val="FFFFFF"/>
+                </a:solidFill>
+                <a:latin typeface="Calibri"/>
+              </a:rPr>
+              <a:t>        v[0] = a;</a:t>
+            </a:r>
+          </a:p>
+          <a:p>
+            <a:pPr>
+              <a:spcAft>
+                <a:spcPts val="314"/>
+              </a:spcAft>
+            </a:pPr>
+            <a:r>
+              <a:rPr sz="1100" b="0" i="0">
+                <a:solidFill>
+                  <a:srgbClr val="FFFFFF"/>
+                </a:solidFill>
+                <a:latin typeface="Calibri"/>
+              </a:rPr>
+              <a:t>        v[1] = b;</a:t>
+            </a:r>
+          </a:p>
+          <a:p>
+            <a:pPr>
+              <a:spcAft>
+                <a:spcPts val="314"/>
+              </a:spcAft>
+            </a:pPr>
+            <a:r>
+              <a:rPr sz="1100" b="0" i="0">
+                <a:solidFill>
+                  <a:srgbClr val="FFFFFF"/>
+                </a:solidFill>
+                <a:latin typeface="Calibri"/>
+              </a:rPr>
+              <a:t>        v[2] = c;</a:t>
+            </a:r>
+          </a:p>
+          <a:p>
+            <a:pPr>
+              <a:spcAft>
+                <a:spcPts val="314"/>
+              </a:spcAft>
+            </a:pPr>
+            <a:r>
+              <a:rPr sz="1100" b="0" i="0">
+                <a:solidFill>
+                  <a:srgbClr val="FFFFFF"/>
+                </a:solidFill>
+                <a:latin typeface="Calibri"/>
+              </a:rPr>
+              <a:t>        v[3] = String.valueOf(x);</a:t>
+            </a:r>
+          </a:p>
+          <a:p>
+            <a:pPr>
+              <a:spcAft>
+                <a:spcPts val="314"/>
+              </a:spcAft>
+            </a:pPr>
+            <a:r>
+              <a:rPr sz="1100" b="0" i="0">
+                <a:solidFill>
+                  <a:srgbClr val="FFFFFF"/>
+                </a:solidFill>
+                <a:latin typeface="Calibri"/>
+              </a:rPr>
+              <a:t>        v[4] = e;</a:t>
+            </a:r>
+          </a:p>
+          <a:p>
+            <a:pPr>
+              <a:spcAft>
+                <a:spcPts val="314"/>
+              </a:spcAft>
+            </a:pPr>
+            <a:r>
+              <a:rPr sz="1100" b="0" i="0">
+                <a:solidFill>
+                  <a:srgbClr val="FFFFFF"/>
+                </a:solidFill>
+                <a:latin typeface="Calibri"/>
+              </a:rPr>
+              <a:t>        datos.add(v);</a:t>
+            </a:r>
+          </a:p>
+          <a:p>
+            <a:pPr>
+              <a:spcAft>
+                <a:spcPts val="314"/>
+              </a:spcAft>
+            </a:pPr>
+            <a:r>
+              <a:rPr sz="1100" b="0" i="0">
+                <a:solidFill>
+                  <a:srgbClr val="FFFFFF"/>
+                </a:solidFill>
+                <a:latin typeface="Calibri"/>
+              </a:rPr>
+              <a:t>        System.out.println("ok " + a + " " + b);</a:t>
+            </a:r>
+          </a:p>
+          <a:p>
+            <a:pPr>
+              <a:spcAft>
+                <a:spcPts val="314"/>
+              </a:spcAft>
+            </a:pPr>
+            <a:r>
+              <a:rPr sz="1100" b="0" i="0">
+                <a:solidFill>
+                  <a:srgbClr val="FFFFFF"/>
+                </a:solidFill>
+                <a:latin typeface="Calibri"/>
+              </a:rPr>
+              <a:t>    }</a:t>
+            </a:r>
+          </a:p>
+          <a:p>
+            <a:pPr>
+              <a:spcAft>
+                <a:spcPts val="314"/>
+              </a:spcAft>
+            </a:pPr>
+            <a:r>
+              <a:rPr sz="1100" b="0" i="0">
+                <a:solidFill>
+                  <a:srgbClr val="FFFFFF"/>
+                </a:solidFill>
+                <a:latin typeface="Calibri"/>
+              </a:rPr>
+              <a:t/>
+            </a:r>
+          </a:p>
+        </p:txBody>
+      </p:sp>
+      <p:sp>
+        <p:nvSpPr>
+          <p:cNvPr id="9" name="TextBox 8"/>
           <p:cNvSpPr txBox="1"/>
           <p:nvPr/>
         </p:nvSpPr>
@@ -7250,21 +6809,141 @@
                 </a:solidFill>
                 <a:latin typeface="Calibri"/>
               </a:rPr>
-              <a:t>Criterios de exito / entregable</a:t>
-            </a:r>
-          </a:p>
-        </p:txBody>
-      </p:sp>
-      <p:sp>
-        <p:nvSpPr>
-          <p:cNvPr id="5" name="TextBox 4"/>
+              <a:t>VetCareParaRevisar.java — buscarPorId()</a:t>
+            </a:r>
+          </a:p>
+        </p:txBody>
+      </p:sp>
+      <p:sp>
+        <p:nvSpPr>
+          <p:cNvPr id="5" name="Rounded Rectangle 4"/>
+          <p:cNvSpPr/>
+          <p:nvPr/>
+        </p:nvSpPr>
+        <p:spPr>
+          <a:xfrm>
+            <a:off x="457200" y="1261872"/>
+            <a:ext cx="11277295" cy="5093208"/>
+          </a:xfrm>
+          <a:prstGeom prst="roundRect">
+            <a:avLst>
+              <a:gd name="adj" fmla="val 12000"/>
+            </a:avLst>
+          </a:prstGeom>
+          <a:solidFill>
+            <a:srgbClr val="1E2A38"/>
+          </a:solidFill>
+          <a:ln>
+            <a:noFill/>
+          </a:ln>
+        </p:spPr>
+        <p:style>
+          <a:lnRef idx="1">
+            <a:schemeClr val="accent1"/>
+          </a:lnRef>
+          <a:fillRef idx="3">
+            <a:schemeClr val="accent1"/>
+          </a:fillRef>
+          <a:effectRef idx="2">
+            <a:schemeClr val="accent1"/>
+          </a:effectRef>
+          <a:fontRef idx="minor">
+            <a:schemeClr val="lt1"/>
+          </a:fontRef>
+        </p:style>
+        <p:txBody>
+          <a:bodyPr rtlCol="0" anchor="ctr"/>
+          <a:lstStyle/>
+          <a:p>
+            <a:pPr algn="ctr"/>
+          </a:p>
+        </p:txBody>
+      </p:sp>
+      <p:sp>
+        <p:nvSpPr>
+          <p:cNvPr id="6" name="Rectangle 5"/>
+          <p:cNvSpPr/>
+          <p:nvPr/>
+        </p:nvSpPr>
+        <p:spPr>
+          <a:xfrm>
+            <a:off x="457200" y="1261872"/>
+            <a:ext cx="11277295" cy="320040"/>
+          </a:xfrm>
+          <a:prstGeom prst="rect">
+            <a:avLst/>
+          </a:prstGeom>
+          <a:solidFill>
+            <a:srgbClr val="095292"/>
+          </a:solidFill>
+          <a:ln>
+            <a:noFill/>
+          </a:ln>
+        </p:spPr>
+        <p:style>
+          <a:lnRef idx="1">
+            <a:schemeClr val="accent1"/>
+          </a:lnRef>
+          <a:fillRef idx="3">
+            <a:schemeClr val="accent1"/>
+          </a:fillRef>
+          <a:effectRef idx="2">
+            <a:schemeClr val="accent1"/>
+          </a:effectRef>
+          <a:fontRef idx="minor">
+            <a:schemeClr val="lt1"/>
+          </a:fontRef>
+        </p:style>
+        <p:txBody>
+          <a:bodyPr rtlCol="0" anchor="ctr"/>
+          <a:lstStyle/>
+          <a:p>
+            <a:pPr algn="ctr"/>
+          </a:p>
+        </p:txBody>
+      </p:sp>
+      <p:sp>
+        <p:nvSpPr>
+          <p:cNvPr id="7" name="TextBox 6"/>
           <p:cNvSpPr txBox="1"/>
           <p:nvPr/>
         </p:nvSpPr>
         <p:spPr>
           <a:xfrm>
-            <a:off x="457200" y="1170432"/>
-            <a:ext cx="11277295" cy="5230368"/>
+            <a:off x="685800" y="1307592"/>
+            <a:ext cx="10820095" cy="256032"/>
+          </a:xfrm>
+          <a:prstGeom prst="rect">
+            <a:avLst/>
+          </a:prstGeom>
+          <a:noFill/>
+        </p:spPr>
+        <p:txBody>
+          <a:bodyPr wrap="square" anchor="ctr"/>
+          <a:lstStyle/>
+          <a:p>
+            <a:r>
+              <a:rPr sz="1000" b="1" i="0">
+                <a:solidFill>
+                  <a:srgbClr val="269CCB"/>
+                </a:solidFill>
+                <a:latin typeface="Calibri"/>
+              </a:rPr>
+              <a:t>● ● ●</a:t>
+            </a:r>
+          </a:p>
+        </p:txBody>
+      </p:sp>
+      <p:sp>
+        <p:nvSpPr>
+          <p:cNvPr id="8" name="TextBox 7"/>
+          <p:cNvSpPr txBox="1"/>
+          <p:nvPr/>
+        </p:nvSpPr>
+        <p:spPr>
+          <a:xfrm>
+            <a:off x="777240" y="1719072"/>
+            <a:ext cx="10637215" cy="4453128"/>
           </a:xfrm>
           <a:prstGeom prst="rect">
             <a:avLst/>
@@ -7279,212 +6958,152 @@
           <a:p>
             <a:pPr>
               <a:spcAft>
-                <a:spcPts val="800"/>
+                <a:spcPts val="400"/>
               </a:spcAft>
             </a:pPr>
             <a:r>
-              <a:rPr sz="2000" b="0" i="0">
-                <a:solidFill>
-                  <a:srgbClr val="333333"/>
-                </a:solidFill>
-                <a:latin typeface="Calibri"/>
-              </a:rPr>
-              <a:t>–   </a:t>
-            </a:r>
-            <a:r>
-              <a:rPr sz="2000" b="1" i="0">
-                <a:solidFill>
-                  <a:srgbClr val="333333"/>
-                </a:solidFill>
-                <a:latin typeface="Calibri"/>
-              </a:rPr>
-              <a:t>Entregable:</a:t>
-            </a:r>
-            <a:r>
-              <a:rPr sz="2000" b="0" i="0">
-                <a:solidFill>
-                  <a:srgbClr val="333333"/>
-                </a:solidFill>
-                <a:latin typeface="Calibri"/>
-              </a:rPr>
-              <a:t> Informe de revisión de una página sobre el proyecto asignado (el de otro estudiante; si el docente autorizó equipos, el de otro equipo): checklist diligenciado con evidencia archivo:línea y cinco hallazgos priorizados con formato Evidencia + Impacto + Sugerencia, subido a la plataforma del curso.</a:t>
+              <a:rPr sz="1400" b="0" i="0">
+                <a:solidFill>
+                  <a:srgbClr val="FFFFFF"/>
+                </a:solidFill>
+                <a:latin typeface="Calibri"/>
+              </a:rPr>
+              <a:t>    public static String[] buscarPorId(String id) {</a:t>
             </a:r>
           </a:p>
           <a:p>
             <a:pPr>
               <a:spcAft>
-                <a:spcPts val="800"/>
+                <a:spcPts val="400"/>
               </a:spcAft>
             </a:pPr>
             <a:r>
-              <a:rPr sz="2000" b="0" i="0">
-                <a:solidFill>
-                  <a:srgbClr val="333333"/>
-                </a:solidFill>
-                <a:latin typeface="Calibri"/>
-              </a:rPr>
-              <a:t>–   </a:t>
-            </a:r>
-            <a:r>
-              <a:rPr sz="2000" b="1" i="0">
-                <a:solidFill>
-                  <a:srgbClr val="333333"/>
-                </a:solidFill>
-                <a:latin typeface="Calibri"/>
-              </a:rPr>
-              <a:t>Exito:</a:t>
-            </a:r>
-            <a:r>
-              <a:rPr sz="2000" b="0" i="0">
-                <a:solidFill>
-                  <a:srgbClr val="333333"/>
-                </a:solidFill>
-                <a:latin typeface="Calibri"/>
-              </a:rPr>
-              <a:t> El informe demuestra que el proyecto fue ejecutado: incluye el resultado de los cuatro casos borde con el mensaje o la excepción textual observada.</a:t>
+              <a:rPr sz="1400" b="0" i="0">
+                <a:solidFill>
+                  <a:srgbClr val="FFFFFF"/>
+                </a:solidFill>
+                <a:latin typeface="Calibri"/>
+              </a:rPr>
+              <a:t>        for (int i = 0; i &lt; datos.size(); i++) {</a:t>
             </a:r>
           </a:p>
           <a:p>
             <a:pPr>
               <a:spcAft>
-                <a:spcPts val="800"/>
+                <a:spcPts val="400"/>
               </a:spcAft>
             </a:pPr>
             <a:r>
-              <a:rPr sz="2000" b="0" i="0">
-                <a:solidFill>
-                  <a:srgbClr val="333333"/>
-                </a:solidFill>
-                <a:latin typeface="Calibri"/>
-              </a:rPr>
-              <a:t>–   </a:t>
-            </a:r>
-            <a:r>
-              <a:rPr sz="2000" b="1" i="0">
-                <a:solidFill>
-                  <a:srgbClr val="333333"/>
-                </a:solidFill>
-                <a:latin typeface="Calibri"/>
-              </a:rPr>
-              <a:t>Exito:</a:t>
-            </a:r>
-            <a:r>
-              <a:rPr sz="2000" b="0" i="0">
-                <a:solidFill>
-                  <a:srgbClr val="333333"/>
-                </a:solidFill>
-                <a:latin typeface="Calibri"/>
-              </a:rPr>
-              <a:t> El checklist está completo y todo ítem marcado 'no cumple' trae evidencia localizable en formato archivo:línea o pasos para reproducir.</a:t>
+              <a:rPr sz="1400" b="0" i="0">
+                <a:solidFill>
+                  <a:srgbClr val="FFFFFF"/>
+                </a:solidFill>
+                <a:latin typeface="Calibri"/>
+              </a:rPr>
+              <a:t>            if (datos.get(i)[0] == id) {</a:t>
             </a:r>
           </a:p>
           <a:p>
             <a:pPr>
               <a:spcAft>
-                <a:spcPts val="800"/>
+                <a:spcPts val="400"/>
               </a:spcAft>
             </a:pPr>
             <a:r>
-              <a:rPr sz="2000" b="0" i="0">
-                <a:solidFill>
-                  <a:srgbClr val="333333"/>
-                </a:solidFill>
-                <a:latin typeface="Calibri"/>
-              </a:rPr>
-              <a:t>–   </a:t>
-            </a:r>
-            <a:r>
-              <a:rPr sz="2000" b="1" i="0">
-                <a:solidFill>
-                  <a:srgbClr val="333333"/>
-                </a:solidFill>
-                <a:latin typeface="Calibri"/>
-              </a:rPr>
-              <a:t>Exito:</a:t>
-            </a:r>
-            <a:r>
-              <a:rPr sz="2000" b="0" i="0">
-                <a:solidFill>
-                  <a:srgbClr val="333333"/>
-                </a:solidFill>
-                <a:latin typeface="Calibri"/>
-              </a:rPr>
-              <a:t> Los cinco hallazgos están priorizados y redactados con Evidencia + Impacto + Sugerencia; ninguno se refiere a la persona ni al esfuerzo que puso el otro estudiante.</a:t>
+              <a:rPr sz="1400" b="0" i="0">
+                <a:solidFill>
+                  <a:srgbClr val="FFFFFF"/>
+                </a:solidFill>
+                <a:latin typeface="Calibri"/>
+              </a:rPr>
+              <a:t>                return datos.get(i);</a:t>
             </a:r>
           </a:p>
           <a:p>
             <a:pPr>
               <a:spcAft>
-                <a:spcPts val="800"/>
+                <a:spcPts val="400"/>
               </a:spcAft>
             </a:pPr>
             <a:r>
-              <a:rPr sz="2000" b="0" i="0">
-                <a:solidFill>
-                  <a:srgbClr val="333333"/>
-                </a:solidFill>
-                <a:latin typeface="Calibri"/>
-              </a:rPr>
-              <a:t>–   </a:t>
-            </a:r>
-            <a:r>
-              <a:rPr sz="2000" b="1" i="0">
-                <a:solidFill>
-                  <a:srgbClr val="333333"/>
-                </a:solidFill>
-                <a:latin typeface="Calibri"/>
-              </a:rPr>
-              <a:t>Exito:</a:t>
-            </a:r>
-            <a:r>
-              <a:rPr sz="2000" b="0" i="0">
-                <a:solidFill>
-                  <a:srgbClr val="333333"/>
-                </a:solidFill>
-                <a:latin typeface="Calibri"/>
-              </a:rPr>
-              <a:t> El autor del proyecto entrega su plan de corrección con las tres decisiones posibles (acepto, justifico, difiero) y un responsable por línea.</a:t>
+              <a:rPr sz="1400" b="0" i="0">
+                <a:solidFill>
+                  <a:srgbClr val="FFFFFF"/>
+                </a:solidFill>
+                <a:latin typeface="Calibri"/>
+              </a:rPr>
+              <a:t>            }</a:t>
             </a:r>
           </a:p>
           <a:p>
             <a:pPr>
               <a:spcAft>
-                <a:spcPts val="800"/>
+                <a:spcPts val="400"/>
               </a:spcAft>
             </a:pPr>
             <a:r>
-              <a:rPr sz="2000" b="0" i="0">
-                <a:solidFill>
-                  <a:srgbClr val="333333"/>
-                </a:solidFill>
-                <a:latin typeface="Calibri"/>
-              </a:rPr>
-              <a:t>–   </a:t>
-            </a:r>
-            <a:r>
-              <a:rPr sz="2000" b="1" i="0">
-                <a:solidFill>
-                  <a:srgbClr val="333333"/>
-                </a:solidFill>
-                <a:latin typeface="Calibri"/>
-              </a:rPr>
-              <a:t>Entrega en la plataforma del curso</a:t>
-            </a:r>
-            <a:r>
-              <a:rPr sz="2000" b="0" i="0">
-                <a:solidFill>
-                  <a:srgbClr val="333333"/>
-                </a:solidFill>
-                <a:latin typeface="Calibri"/>
-              </a:rPr>
-              <a:t> — en la fecha que indique el docente.</a:t>
-            </a:r>
-          </a:p>
-        </p:txBody>
-      </p:sp>
-      <p:sp>
-        <p:nvSpPr>
-          <p:cNvPr id="6" name="TextBox 5"/>
+              <a:rPr sz="1400" b="0" i="0">
+                <a:solidFill>
+                  <a:srgbClr val="FFFFFF"/>
+                </a:solidFill>
+                <a:latin typeface="Calibri"/>
+              </a:rPr>
+              <a:t>        }</a:t>
+            </a:r>
+          </a:p>
+          <a:p>
+            <a:pPr>
+              <a:spcAft>
+                <a:spcPts val="400"/>
+              </a:spcAft>
+            </a:pPr>
+            <a:r>
+              <a:rPr sz="1400" b="0" i="0">
+                <a:solidFill>
+                  <a:srgbClr val="FFFFFF"/>
+                </a:solidFill>
+                <a:latin typeface="Calibri"/>
+              </a:rPr>
+              <a:t>        return null;</a:t>
+            </a:r>
+          </a:p>
+          <a:p>
+            <a:pPr>
+              <a:spcAft>
+                <a:spcPts val="400"/>
+              </a:spcAft>
+            </a:pPr>
+            <a:r>
+              <a:rPr sz="1400" b="0" i="0">
+                <a:solidFill>
+                  <a:srgbClr val="FFFFFF"/>
+                </a:solidFill>
+                <a:latin typeface="Calibri"/>
+              </a:rPr>
+              <a:t>    }</a:t>
+            </a:r>
+          </a:p>
+          <a:p>
+            <a:pPr>
+              <a:spcAft>
+                <a:spcPts val="400"/>
+              </a:spcAft>
+            </a:pPr>
+            <a:r>
+              <a:rPr sz="1400" b="0" i="0">
+                <a:solidFill>
+                  <a:srgbClr val="FFFFFF"/>
+                </a:solidFill>
+                <a:latin typeface="Calibri"/>
+              </a:rPr>
+              <a:t/>
+            </a:r>
+          </a:p>
+        </p:txBody>
+      </p:sp>
+      <p:sp>
+        <p:nvSpPr>
+          <p:cNvPr id="9" name="TextBox 8"/>
           <p:cNvSpPr txBox="1"/>
           <p:nvPr/>
         </p:nvSpPr>
@@ -7658,7 +7277,7 @@
                 </a:solidFill>
                 <a:latin typeface="Calibri"/>
               </a:rPr>
-              <a:t>Para el PI esta semana</a:t>
+              <a:t>VetCareParaRevisar.java — imprimirFicha()</a:t>
             </a:r>
           </a:p>
         </p:txBody>
@@ -7672,7 +7291,7 @@
         <p:spPr>
           <a:xfrm>
             <a:off x="457200" y="1261872"/>
-            <a:ext cx="11277295" cy="1051560"/>
+            <a:ext cx="11277295" cy="5093208"/>
           </a:xfrm>
           <a:prstGeom prst="roundRect">
             <a:avLst>
@@ -7680,7 +7299,7 @@
             </a:avLst>
           </a:prstGeom>
           <a:solidFill>
-            <a:srgbClr val="E8F4FA"/>
+            <a:srgbClr val="1E2A38"/>
           </a:solidFill>
           <a:ln>
             <a:noFill/>
@@ -7717,13 +7336,13 @@
         <p:spPr>
           <a:xfrm>
             <a:off x="457200" y="1261872"/>
-            <a:ext cx="128016" cy="1051560"/>
+            <a:ext cx="11277295" cy="320040"/>
           </a:xfrm>
           <a:prstGeom prst="rect">
             <a:avLst/>
           </a:prstGeom>
           <a:solidFill>
-            <a:srgbClr val="269CCB"/>
+            <a:srgbClr val="095292"/>
           </a:solidFill>
           <a:ln>
             <a:noFill/>
@@ -7759,8 +7378,40 @@
         </p:nvSpPr>
         <p:spPr>
           <a:xfrm>
-            <a:off x="777240" y="1399031"/>
-            <a:ext cx="10774375" cy="822959"/>
+            <a:off x="685800" y="1307592"/>
+            <a:ext cx="10820095" cy="256032"/>
+          </a:xfrm>
+          <a:prstGeom prst="rect">
+            <a:avLst/>
+          </a:prstGeom>
+          <a:noFill/>
+        </p:spPr>
+        <p:txBody>
+          <a:bodyPr wrap="square" anchor="ctr"/>
+          <a:lstStyle/>
+          <a:p>
+            <a:r>
+              <a:rPr sz="1000" b="1" i="0">
+                <a:solidFill>
+                  <a:srgbClr val="269CCB"/>
+                </a:solidFill>
+                <a:latin typeface="Calibri"/>
+              </a:rPr>
+              <a:t>● ● ●</a:t>
+            </a:r>
+          </a:p>
+        </p:txBody>
+      </p:sp>
+      <p:sp>
+        <p:nvSpPr>
+          <p:cNvPr id="8" name="TextBox 7"/>
+          <p:cNvSpPr txBox="1"/>
+          <p:nvPr/>
+        </p:nvSpPr>
+        <p:spPr>
+          <a:xfrm>
+            <a:off x="777240" y="1719072"/>
+            <a:ext cx="10637215" cy="4453128"/>
           </a:xfrm>
           <a:prstGeom prst="rect">
             <a:avLst/>
@@ -7773,313 +7424,202 @@
           </a:bodyPr>
           <a:lstStyle/>
           <a:p>
-            <a:r>
-              <a:rPr sz="1200" b="1" i="0">
-                <a:solidFill>
-                  <a:srgbClr val="269CCB"/>
-                </a:solidFill>
-                <a:latin typeface="Calibri"/>
-              </a:rPr>
-              <a:t>Info</a:t>
-            </a:r>
-          </a:p>
-          <a:p>
             <a:pPr>
-              <a:spcBef>
+              <a:spcAft>
                 <a:spcPts val="400"/>
-              </a:spcBef>
+              </a:spcAft>
             </a:pPr>
             <a:r>
               <a:rPr sz="1400" b="0" i="0">
                 <a:solidFill>
-                  <a:srgbClr val="333333"/>
-                </a:solidFill>
-                <a:latin typeface="Calibri"/>
-              </a:rPr>
-              <a:t>Hito: Cada estudiante recibe un informe externo con hallazgos priorizados y deja escrito su plan de corrección de VetCare antes de la integración final.</a:t>
-            </a:r>
-          </a:p>
-        </p:txBody>
-      </p:sp>
-      <p:sp>
-        <p:nvSpPr>
-          <p:cNvPr id="8" name="Rounded Rectangle 7"/>
-          <p:cNvSpPr/>
-          <p:nvPr/>
-        </p:nvSpPr>
-        <p:spPr>
-          <a:xfrm>
-            <a:off x="457200" y="2478024"/>
-            <a:ext cx="11277295" cy="1051560"/>
-          </a:xfrm>
-          <a:prstGeom prst="roundRect">
-            <a:avLst>
-              <a:gd name="adj" fmla="val 12000"/>
-            </a:avLst>
-          </a:prstGeom>
-          <a:solidFill>
-            <a:srgbClr val="FFF8E1"/>
-          </a:solidFill>
-          <a:ln>
-            <a:noFill/>
-          </a:ln>
-        </p:spPr>
-        <p:style>
-          <a:lnRef idx="1">
-            <a:schemeClr val="accent1"/>
-          </a:lnRef>
-          <a:fillRef idx="3">
-            <a:schemeClr val="accent1"/>
-          </a:fillRef>
-          <a:effectRef idx="2">
-            <a:schemeClr val="accent1"/>
-          </a:effectRef>
-          <a:fontRef idx="minor">
-            <a:schemeClr val="lt1"/>
-          </a:fontRef>
-        </p:style>
-        <p:txBody>
-          <a:bodyPr rtlCol="0" anchor="ctr"/>
-          <a:lstStyle/>
-          <a:p>
-            <a:pPr algn="ctr"/>
-          </a:p>
-        </p:txBody>
-      </p:sp>
-      <p:sp>
-        <p:nvSpPr>
-          <p:cNvPr id="9" name="Rectangle 8"/>
-          <p:cNvSpPr/>
-          <p:nvPr/>
-        </p:nvSpPr>
-        <p:spPr>
-          <a:xfrm>
-            <a:off x="457200" y="2478024"/>
-            <a:ext cx="128016" cy="1051560"/>
-          </a:xfrm>
-          <a:prstGeom prst="rect">
-            <a:avLst/>
-          </a:prstGeom>
-          <a:solidFill>
-            <a:srgbClr val="FFD000"/>
-          </a:solidFill>
-          <a:ln>
-            <a:noFill/>
-          </a:ln>
-        </p:spPr>
-        <p:style>
-          <a:lnRef idx="1">
-            <a:schemeClr val="accent1"/>
-          </a:lnRef>
-          <a:fillRef idx="3">
-            <a:schemeClr val="accent1"/>
-          </a:fillRef>
-          <a:effectRef idx="2">
-            <a:schemeClr val="accent1"/>
-          </a:effectRef>
-          <a:fontRef idx="minor">
-            <a:schemeClr val="lt1"/>
-          </a:fontRef>
-        </p:style>
-        <p:txBody>
-          <a:bodyPr rtlCol="0" anchor="ctr"/>
-          <a:lstStyle/>
-          <a:p>
-            <a:pPr algn="ctr"/>
-          </a:p>
-        </p:txBody>
-      </p:sp>
-      <p:sp>
-        <p:nvSpPr>
-          <p:cNvPr id="10" name="TextBox 9"/>
-          <p:cNvSpPr txBox="1"/>
-          <p:nvPr/>
-        </p:nvSpPr>
-        <p:spPr>
-          <a:xfrm>
-            <a:off x="777240" y="2615184"/>
-            <a:ext cx="10774375" cy="822959"/>
-          </a:xfrm>
-          <a:prstGeom prst="rect">
-            <a:avLst/>
-          </a:prstGeom>
-          <a:noFill/>
-        </p:spPr>
-        <p:txBody>
-          <a:bodyPr wrap="square">
-            <a:spAutoFit/>
-          </a:bodyPr>
-          <a:lstStyle/>
-          <a:p>
-            <a:r>
-              <a:rPr sz="1200" b="1" i="0">
-                <a:solidFill>
-                  <a:srgbClr val="FFD000"/>
-                </a:solidFill>
-                <a:latin typeface="Calibri"/>
-              </a:rPr>
-              <a:t>Aclaración</a:t>
+                  <a:srgbClr val="FFFFFF"/>
+                </a:solidFill>
+                <a:latin typeface="Calibri"/>
+              </a:rPr>
+              <a:t>    public static void imprimirFicha(String id) {</a:t>
             </a:r>
           </a:p>
           <a:p>
             <a:pPr>
-              <a:spcBef>
+              <a:spcAft>
                 <a:spcPts val="400"/>
-              </a:spcBef>
+              </a:spcAft>
             </a:pPr>
             <a:r>
               <a:rPr sz="1400" b="0" i="0">
                 <a:solidFill>
-                  <a:srgbClr val="333333"/>
-                </a:solidFill>
-                <a:latin typeface="Calibri"/>
-              </a:rPr>
-              <a:t>Enunciado completo: Clases/Proyecto Integrador/ (VetCare).</a:t>
-            </a:r>
-          </a:p>
-        </p:txBody>
-      </p:sp>
-      <p:sp>
-        <p:nvSpPr>
-          <p:cNvPr id="11" name="Rounded Rectangle 10"/>
-          <p:cNvSpPr/>
-          <p:nvPr/>
-        </p:nvSpPr>
-        <p:spPr>
-          <a:xfrm>
-            <a:off x="457200" y="3694176"/>
-            <a:ext cx="11277295" cy="1051560"/>
-          </a:xfrm>
-          <a:prstGeom prst="roundRect">
-            <a:avLst>
-              <a:gd name="adj" fmla="val 12000"/>
-            </a:avLst>
-          </a:prstGeom>
-          <a:solidFill>
-            <a:srgbClr val="FBE4E4"/>
-          </a:solidFill>
-          <a:ln>
-            <a:noFill/>
-          </a:ln>
-        </p:spPr>
-        <p:style>
-          <a:lnRef idx="1">
-            <a:schemeClr val="accent1"/>
-          </a:lnRef>
-          <a:fillRef idx="3">
-            <a:schemeClr val="accent1"/>
-          </a:fillRef>
-          <a:effectRef idx="2">
-            <a:schemeClr val="accent1"/>
-          </a:effectRef>
-          <a:fontRef idx="minor">
-            <a:schemeClr val="lt1"/>
-          </a:fontRef>
-        </p:style>
-        <p:txBody>
-          <a:bodyPr rtlCol="0" anchor="ctr"/>
-          <a:lstStyle/>
-          <a:p>
-            <a:pPr algn="ctr"/>
-          </a:p>
-        </p:txBody>
-      </p:sp>
-      <p:sp>
-        <p:nvSpPr>
-          <p:cNvPr id="12" name="Rectangle 11"/>
-          <p:cNvSpPr/>
-          <p:nvPr/>
-        </p:nvSpPr>
-        <p:spPr>
-          <a:xfrm>
-            <a:off x="457200" y="3694176"/>
-            <a:ext cx="128016" cy="1051560"/>
-          </a:xfrm>
-          <a:prstGeom prst="rect">
-            <a:avLst/>
-          </a:prstGeom>
-          <a:solidFill>
-            <a:srgbClr val="A02030"/>
-          </a:solidFill>
-          <a:ln>
-            <a:noFill/>
-          </a:ln>
-        </p:spPr>
-        <p:style>
-          <a:lnRef idx="1">
-            <a:schemeClr val="accent1"/>
-          </a:lnRef>
-          <a:fillRef idx="3">
-            <a:schemeClr val="accent1"/>
-          </a:fillRef>
-          <a:effectRef idx="2">
-            <a:schemeClr val="accent1"/>
-          </a:effectRef>
-          <a:fontRef idx="minor">
-            <a:schemeClr val="lt1"/>
-          </a:fontRef>
-        </p:style>
-        <p:txBody>
-          <a:bodyPr rtlCol="0" anchor="ctr"/>
-          <a:lstStyle/>
-          <a:p>
-            <a:pPr algn="ctr"/>
-          </a:p>
-        </p:txBody>
-      </p:sp>
-      <p:sp>
-        <p:nvSpPr>
-          <p:cNvPr id="13" name="TextBox 12"/>
-          <p:cNvSpPr txBox="1"/>
-          <p:nvPr/>
-        </p:nvSpPr>
-        <p:spPr>
-          <a:xfrm>
-            <a:off x="777240" y="3831336"/>
-            <a:ext cx="10774375" cy="822959"/>
-          </a:xfrm>
-          <a:prstGeom prst="rect">
-            <a:avLst/>
-          </a:prstGeom>
-          <a:noFill/>
-        </p:spPr>
-        <p:txBody>
-          <a:bodyPr wrap="square">
-            <a:spAutoFit/>
-          </a:bodyPr>
-          <a:lstStyle/>
-          <a:p>
-            <a:r>
-              <a:rPr sz="1200" b="1" i="0">
-                <a:solidFill>
-                  <a:srgbClr val="A02030"/>
-                </a:solidFill>
-                <a:latin typeface="Calibri"/>
-              </a:rPr>
-              <a:t>Atención</a:t>
+                  <a:srgbClr val="FFFFFF"/>
+                </a:solidFill>
+                <a:latin typeface="Calibri"/>
+              </a:rPr>
+              <a:t>        for (int i = 0; i &lt; datos.size(); i++) {</a:t>
             </a:r>
           </a:p>
           <a:p>
             <a:pPr>
-              <a:spcBef>
+              <a:spcAft>
                 <a:spcPts val="400"/>
-              </a:spcBef>
+              </a:spcAft>
             </a:pPr>
             <a:r>
               <a:rPr sz="1400" b="0" i="0">
                 <a:solidFill>
-                  <a:srgbClr val="333333"/>
-                </a:solidFill>
-                <a:latin typeface="Calibri"/>
-              </a:rPr>
-              <a:t>Entrega del taller, si el docente lo asigna · en la fecha que indique el docente.</a:t>
-            </a:r>
-          </a:p>
-        </p:txBody>
-      </p:sp>
-      <p:sp>
-        <p:nvSpPr>
-          <p:cNvPr id="14" name="TextBox 13"/>
+                  <a:srgbClr val="FFFFFF"/>
+                </a:solidFill>
+                <a:latin typeface="Calibri"/>
+              </a:rPr>
+              <a:t>            if (datos.get(i)[0].equals(id)) {</a:t>
+            </a:r>
+          </a:p>
+          <a:p>
+            <a:pPr>
+              <a:spcAft>
+                <a:spcPts val="400"/>
+              </a:spcAft>
+            </a:pPr>
+            <a:r>
+              <a:rPr sz="1400" b="0" i="0">
+                <a:solidFill>
+                  <a:srgbClr val="FFFFFF"/>
+                </a:solidFill>
+                <a:latin typeface="Calibri"/>
+              </a:rPr>
+              <a:t>                System.out.println("Ficha -&gt; id=" + datos.get(i)[0]</a:t>
+            </a:r>
+          </a:p>
+          <a:p>
+            <a:pPr>
+              <a:spcAft>
+                <a:spcPts val="400"/>
+              </a:spcAft>
+            </a:pPr>
+            <a:r>
+              <a:rPr sz="1400" b="0" i="0">
+                <a:solidFill>
+                  <a:srgbClr val="FFFFFF"/>
+                </a:solidFill>
+                <a:latin typeface="Calibri"/>
+              </a:rPr>
+              <a:t>                        + " nombre=" + datos.get(i)[1]</a:t>
+            </a:r>
+          </a:p>
+          <a:p>
+            <a:pPr>
+              <a:spcAft>
+                <a:spcPts val="400"/>
+              </a:spcAft>
+            </a:pPr>
+            <a:r>
+              <a:rPr sz="1400" b="0" i="0">
+                <a:solidFill>
+                  <a:srgbClr val="FFFFFF"/>
+                </a:solidFill>
+                <a:latin typeface="Calibri"/>
+              </a:rPr>
+              <a:t>                        + " especie=" + datos.get(i)[2]</a:t>
+            </a:r>
+          </a:p>
+          <a:p>
+            <a:pPr>
+              <a:spcAft>
+                <a:spcPts val="400"/>
+              </a:spcAft>
+            </a:pPr>
+            <a:r>
+              <a:rPr sz="1400" b="0" i="0">
+                <a:solidFill>
+                  <a:srgbClr val="FFFFFF"/>
+                </a:solidFill>
+                <a:latin typeface="Calibri"/>
+              </a:rPr>
+              <a:t>                        + " edad=" + datos.get(i)[3]</a:t>
+            </a:r>
+          </a:p>
+          <a:p>
+            <a:pPr>
+              <a:spcAft>
+                <a:spcPts val="400"/>
+              </a:spcAft>
+            </a:pPr>
+            <a:r>
+              <a:rPr sz="1400" b="0" i="0">
+                <a:solidFill>
+                  <a:srgbClr val="FFFFFF"/>
+                </a:solidFill>
+                <a:latin typeface="Calibri"/>
+              </a:rPr>
+              <a:t>                        + " cc=" + datos.get(i)[4]);</a:t>
+            </a:r>
+          </a:p>
+          <a:p>
+            <a:pPr>
+              <a:spcAft>
+                <a:spcPts val="400"/>
+              </a:spcAft>
+            </a:pPr>
+            <a:r>
+              <a:rPr sz="1400" b="0" i="0">
+                <a:solidFill>
+                  <a:srgbClr val="FFFFFF"/>
+                </a:solidFill>
+                <a:latin typeface="Calibri"/>
+              </a:rPr>
+              <a:t>            }</a:t>
+            </a:r>
+          </a:p>
+          <a:p>
+            <a:pPr>
+              <a:spcAft>
+                <a:spcPts val="400"/>
+              </a:spcAft>
+            </a:pPr>
+            <a:r>
+              <a:rPr sz="1400" b="0" i="0">
+                <a:solidFill>
+                  <a:srgbClr val="FFFFFF"/>
+                </a:solidFill>
+                <a:latin typeface="Calibri"/>
+              </a:rPr>
+              <a:t>        }</a:t>
+            </a:r>
+          </a:p>
+          <a:p>
+            <a:pPr>
+              <a:spcAft>
+                <a:spcPts val="400"/>
+              </a:spcAft>
+            </a:pPr>
+            <a:r>
+              <a:rPr sz="1400" b="0" i="0">
+                <a:solidFill>
+                  <a:srgbClr val="FFFFFF"/>
+                </a:solidFill>
+                <a:latin typeface="Calibri"/>
+              </a:rPr>
+              <a:t>    }</a:t>
+            </a:r>
+          </a:p>
+          <a:p>
+            <a:pPr>
+              <a:spcAft>
+                <a:spcPts val="400"/>
+              </a:spcAft>
+            </a:pPr>
+            <a:r>
+              <a:rPr sz="1400" b="0" i="0">
+                <a:solidFill>
+                  <a:srgbClr val="FFFFFF"/>
+                </a:solidFill>
+                <a:latin typeface="Calibri"/>
+              </a:rPr>
+              <a:t/>
+            </a:r>
+          </a:p>
+        </p:txBody>
+      </p:sp>
+      <p:sp>
+        <p:nvSpPr>
+          <p:cNvPr id="9" name="TextBox 8"/>
           <p:cNvSpPr txBox="1"/>
           <p:nvPr/>
         </p:nvSpPr>
@@ -8478,6 +8018,4502 @@
         <p:spPr>
           <a:xfrm>
             <a:off x="0" y="0"/>
+            <a:ext cx="12191695" cy="960120"/>
+          </a:xfrm>
+          <a:prstGeom prst="rect">
+            <a:avLst/>
+          </a:prstGeom>
+          <a:solidFill>
+            <a:srgbClr val="095292"/>
+          </a:solidFill>
+          <a:ln>
+            <a:noFill/>
+          </a:ln>
+        </p:spPr>
+        <p:style>
+          <a:lnRef idx="1">
+            <a:schemeClr val="accent1"/>
+          </a:lnRef>
+          <a:fillRef idx="3">
+            <a:schemeClr val="accent1"/>
+          </a:fillRef>
+          <a:effectRef idx="2">
+            <a:schemeClr val="accent1"/>
+          </a:effectRef>
+          <a:fontRef idx="minor">
+            <a:schemeClr val="lt1"/>
+          </a:fontRef>
+        </p:style>
+        <p:txBody>
+          <a:bodyPr rtlCol="0" anchor="ctr"/>
+          <a:lstStyle/>
+          <a:p>
+            <a:pPr algn="ctr"/>
+          </a:p>
+        </p:txBody>
+      </p:sp>
+      <p:sp>
+        <p:nvSpPr>
+          <p:cNvPr id="3" name="Rectangle 2"/>
+          <p:cNvSpPr/>
+          <p:nvPr/>
+        </p:nvSpPr>
+        <p:spPr>
+          <a:xfrm>
+            <a:off x="0" y="960120"/>
+            <a:ext cx="12191695" cy="41148"/>
+          </a:xfrm>
+          <a:prstGeom prst="rect">
+            <a:avLst/>
+          </a:prstGeom>
+          <a:solidFill>
+            <a:srgbClr val="FFD000"/>
+          </a:solidFill>
+          <a:ln>
+            <a:noFill/>
+          </a:ln>
+        </p:spPr>
+        <p:style>
+          <a:lnRef idx="1">
+            <a:schemeClr val="accent1"/>
+          </a:lnRef>
+          <a:fillRef idx="3">
+            <a:schemeClr val="accent1"/>
+          </a:fillRef>
+          <a:effectRef idx="2">
+            <a:schemeClr val="accent1"/>
+          </a:effectRef>
+          <a:fontRef idx="minor">
+            <a:schemeClr val="lt1"/>
+          </a:fontRef>
+        </p:style>
+        <p:txBody>
+          <a:bodyPr rtlCol="0" anchor="ctr"/>
+          <a:lstStyle/>
+          <a:p>
+            <a:pPr algn="ctr"/>
+          </a:p>
+        </p:txBody>
+      </p:sp>
+      <p:sp>
+        <p:nvSpPr>
+          <p:cNvPr id="4" name="TextBox 3"/>
+          <p:cNvSpPr txBox="1"/>
+          <p:nvPr/>
+        </p:nvSpPr>
+        <p:spPr>
+          <a:xfrm>
+            <a:off x="457200" y="164592"/>
+            <a:ext cx="11277295" cy="502920"/>
+          </a:xfrm>
+          <a:prstGeom prst="rect">
+            <a:avLst/>
+          </a:prstGeom>
+          <a:noFill/>
+        </p:spPr>
+        <p:txBody>
+          <a:bodyPr wrap="square">
+            <a:spAutoFit/>
+          </a:bodyPr>
+          <a:lstStyle/>
+          <a:p>
+            <a:r>
+              <a:rPr sz="2600" b="1" i="0">
+                <a:solidFill>
+                  <a:srgbClr val="FFFFFF"/>
+                </a:solidFill>
+                <a:latin typeface="Calibri"/>
+              </a:rPr>
+              <a:t>VetCareParaRevisar.java — buscarDeNuevo()</a:t>
+            </a:r>
+          </a:p>
+        </p:txBody>
+      </p:sp>
+      <p:sp>
+        <p:nvSpPr>
+          <p:cNvPr id="5" name="Rounded Rectangle 4"/>
+          <p:cNvSpPr/>
+          <p:nvPr/>
+        </p:nvSpPr>
+        <p:spPr>
+          <a:xfrm>
+            <a:off x="457200" y="1261872"/>
+            <a:ext cx="11277295" cy="5093208"/>
+          </a:xfrm>
+          <a:prstGeom prst="roundRect">
+            <a:avLst>
+              <a:gd name="adj" fmla="val 12000"/>
+            </a:avLst>
+          </a:prstGeom>
+          <a:solidFill>
+            <a:srgbClr val="1E2A38"/>
+          </a:solidFill>
+          <a:ln>
+            <a:noFill/>
+          </a:ln>
+        </p:spPr>
+        <p:style>
+          <a:lnRef idx="1">
+            <a:schemeClr val="accent1"/>
+          </a:lnRef>
+          <a:fillRef idx="3">
+            <a:schemeClr val="accent1"/>
+          </a:fillRef>
+          <a:effectRef idx="2">
+            <a:schemeClr val="accent1"/>
+          </a:effectRef>
+          <a:fontRef idx="minor">
+            <a:schemeClr val="lt1"/>
+          </a:fontRef>
+        </p:style>
+        <p:txBody>
+          <a:bodyPr rtlCol="0" anchor="ctr"/>
+          <a:lstStyle/>
+          <a:p>
+            <a:pPr algn="ctr"/>
+          </a:p>
+        </p:txBody>
+      </p:sp>
+      <p:sp>
+        <p:nvSpPr>
+          <p:cNvPr id="6" name="Rectangle 5"/>
+          <p:cNvSpPr/>
+          <p:nvPr/>
+        </p:nvSpPr>
+        <p:spPr>
+          <a:xfrm>
+            <a:off x="457200" y="1261872"/>
+            <a:ext cx="11277295" cy="320040"/>
+          </a:xfrm>
+          <a:prstGeom prst="rect">
+            <a:avLst/>
+          </a:prstGeom>
+          <a:solidFill>
+            <a:srgbClr val="095292"/>
+          </a:solidFill>
+          <a:ln>
+            <a:noFill/>
+          </a:ln>
+        </p:spPr>
+        <p:style>
+          <a:lnRef idx="1">
+            <a:schemeClr val="accent1"/>
+          </a:lnRef>
+          <a:fillRef idx="3">
+            <a:schemeClr val="accent1"/>
+          </a:fillRef>
+          <a:effectRef idx="2">
+            <a:schemeClr val="accent1"/>
+          </a:effectRef>
+          <a:fontRef idx="minor">
+            <a:schemeClr val="lt1"/>
+          </a:fontRef>
+        </p:style>
+        <p:txBody>
+          <a:bodyPr rtlCol="0" anchor="ctr"/>
+          <a:lstStyle/>
+          <a:p>
+            <a:pPr algn="ctr"/>
+          </a:p>
+        </p:txBody>
+      </p:sp>
+      <p:sp>
+        <p:nvSpPr>
+          <p:cNvPr id="7" name="TextBox 6"/>
+          <p:cNvSpPr txBox="1"/>
+          <p:nvPr/>
+        </p:nvSpPr>
+        <p:spPr>
+          <a:xfrm>
+            <a:off x="685800" y="1307592"/>
+            <a:ext cx="10820095" cy="256032"/>
+          </a:xfrm>
+          <a:prstGeom prst="rect">
+            <a:avLst/>
+          </a:prstGeom>
+          <a:noFill/>
+        </p:spPr>
+        <p:txBody>
+          <a:bodyPr wrap="square" anchor="ctr"/>
+          <a:lstStyle/>
+          <a:p>
+            <a:r>
+              <a:rPr sz="1000" b="1" i="0">
+                <a:solidFill>
+                  <a:srgbClr val="269CCB"/>
+                </a:solidFill>
+                <a:latin typeface="Calibri"/>
+              </a:rPr>
+              <a:t>● ● ●</a:t>
+            </a:r>
+          </a:p>
+        </p:txBody>
+      </p:sp>
+      <p:sp>
+        <p:nvSpPr>
+          <p:cNvPr id="8" name="TextBox 7"/>
+          <p:cNvSpPr txBox="1"/>
+          <p:nvPr/>
+        </p:nvSpPr>
+        <p:spPr>
+          <a:xfrm>
+            <a:off x="777240" y="1719072"/>
+            <a:ext cx="10637215" cy="4453128"/>
+          </a:xfrm>
+          <a:prstGeom prst="rect">
+            <a:avLst/>
+          </a:prstGeom>
+          <a:noFill/>
+        </p:spPr>
+        <p:txBody>
+          <a:bodyPr wrap="square">
+            <a:spAutoFit/>
+          </a:bodyPr>
+          <a:lstStyle/>
+          <a:p>
+            <a:pPr>
+              <a:spcAft>
+                <a:spcPts val="400"/>
+              </a:spcAft>
+            </a:pPr>
+            <a:r>
+              <a:rPr sz="1400" b="0" i="0">
+                <a:solidFill>
+                  <a:srgbClr val="FFFFFF"/>
+                </a:solidFill>
+                <a:latin typeface="Calibri"/>
+              </a:rPr>
+              <a:t>    public static String[] buscarDeNuevo(String id) {</a:t>
+            </a:r>
+          </a:p>
+          <a:p>
+            <a:pPr>
+              <a:spcAft>
+                <a:spcPts val="400"/>
+              </a:spcAft>
+            </a:pPr>
+            <a:r>
+              <a:rPr sz="1400" b="0" i="0">
+                <a:solidFill>
+                  <a:srgbClr val="FFFFFF"/>
+                </a:solidFill>
+                <a:latin typeface="Calibri"/>
+              </a:rPr>
+              <a:t>        for (int i = 0; i &lt; datos.size(); i++) {</a:t>
+            </a:r>
+          </a:p>
+          <a:p>
+            <a:pPr>
+              <a:spcAft>
+                <a:spcPts val="400"/>
+              </a:spcAft>
+            </a:pPr>
+            <a:r>
+              <a:rPr sz="1400" b="0" i="0">
+                <a:solidFill>
+                  <a:srgbClr val="FFFFFF"/>
+                </a:solidFill>
+                <a:latin typeface="Calibri"/>
+              </a:rPr>
+              <a:t>            if (datos.get(i)[0].equals(id)) {</a:t>
+            </a:r>
+          </a:p>
+          <a:p>
+            <a:pPr>
+              <a:spcAft>
+                <a:spcPts val="400"/>
+              </a:spcAft>
+            </a:pPr>
+            <a:r>
+              <a:rPr sz="1400" b="0" i="0">
+                <a:solidFill>
+                  <a:srgbClr val="FFFFFF"/>
+                </a:solidFill>
+                <a:latin typeface="Calibri"/>
+              </a:rPr>
+              <a:t>                return datos.get(i);</a:t>
+            </a:r>
+          </a:p>
+          <a:p>
+            <a:pPr>
+              <a:spcAft>
+                <a:spcPts val="400"/>
+              </a:spcAft>
+            </a:pPr>
+            <a:r>
+              <a:rPr sz="1400" b="0" i="0">
+                <a:solidFill>
+                  <a:srgbClr val="FFFFFF"/>
+                </a:solidFill>
+                <a:latin typeface="Calibri"/>
+              </a:rPr>
+              <a:t>            }</a:t>
+            </a:r>
+          </a:p>
+          <a:p>
+            <a:pPr>
+              <a:spcAft>
+                <a:spcPts val="400"/>
+              </a:spcAft>
+            </a:pPr>
+            <a:r>
+              <a:rPr sz="1400" b="0" i="0">
+                <a:solidFill>
+                  <a:srgbClr val="FFFFFF"/>
+                </a:solidFill>
+                <a:latin typeface="Calibri"/>
+              </a:rPr>
+              <a:t>        }</a:t>
+            </a:r>
+          </a:p>
+          <a:p>
+            <a:pPr>
+              <a:spcAft>
+                <a:spcPts val="400"/>
+              </a:spcAft>
+            </a:pPr>
+            <a:r>
+              <a:rPr sz="1400" b="0" i="0">
+                <a:solidFill>
+                  <a:srgbClr val="FFFFFF"/>
+                </a:solidFill>
+                <a:latin typeface="Calibri"/>
+              </a:rPr>
+              <a:t>        return null;</a:t>
+            </a:r>
+          </a:p>
+          <a:p>
+            <a:pPr>
+              <a:spcAft>
+                <a:spcPts val="400"/>
+              </a:spcAft>
+            </a:pPr>
+            <a:r>
+              <a:rPr sz="1400" b="0" i="0">
+                <a:solidFill>
+                  <a:srgbClr val="FFFFFF"/>
+                </a:solidFill>
+                <a:latin typeface="Calibri"/>
+              </a:rPr>
+              <a:t>    }</a:t>
+            </a:r>
+          </a:p>
+          <a:p>
+            <a:pPr>
+              <a:spcAft>
+                <a:spcPts val="400"/>
+              </a:spcAft>
+            </a:pPr>
+            <a:r>
+              <a:rPr sz="1400" b="0" i="0">
+                <a:solidFill>
+                  <a:srgbClr val="FFFFFF"/>
+                </a:solidFill>
+                <a:latin typeface="Calibri"/>
+              </a:rPr>
+              <a:t>}</a:t>
+            </a:r>
+          </a:p>
+          <a:p>
+            <a:pPr>
+              <a:spcAft>
+                <a:spcPts val="400"/>
+              </a:spcAft>
+            </a:pPr>
+            <a:r>
+              <a:rPr sz="1400" b="0" i="0">
+                <a:solidFill>
+                  <a:srgbClr val="FFFFFF"/>
+                </a:solidFill>
+                <a:latin typeface="Calibri"/>
+              </a:rPr>
+              <a:t/>
+            </a:r>
+          </a:p>
+        </p:txBody>
+      </p:sp>
+      <p:sp>
+        <p:nvSpPr>
+          <p:cNvPr id="9" name="TextBox 8"/>
+          <p:cNvSpPr txBox="1"/>
+          <p:nvPr/>
+        </p:nvSpPr>
+        <p:spPr>
+          <a:xfrm>
+            <a:off x="11185855" y="6473952"/>
+            <a:ext cx="640080" cy="274320"/>
+          </a:xfrm>
+          <a:prstGeom prst="rect">
+            <a:avLst/>
+          </a:prstGeom>
+          <a:noFill/>
+        </p:spPr>
+        <p:txBody>
+          <a:bodyPr wrap="square">
+            <a:spAutoFit/>
+          </a:bodyPr>
+          <a:lstStyle/>
+          <a:p>
+            <a:pPr algn="r"/>
+            <a:r>
+              <a:rPr sz="1100" b="0" i="0">
+                <a:solidFill>
+                  <a:srgbClr val="666666"/>
+                </a:solidFill>
+                <a:latin typeface="Calibri"/>
+              </a:rPr>
+              <a:t>20</a:t>
+            </a:r>
+          </a:p>
+        </p:txBody>
+      </p:sp>
+    </p:spTree>
+  </p:cSld>
+  <p:clrMapOvr>
+    <a:masterClrMapping/>
+  </p:clrMapOvr>
+</p:sld>
+</file>
+
+<file path=ppt/slides/slide21.xml><?xml version="1.0" encoding="utf-8"?>
+<p:sld xmlns:a="http://schemas.openxmlformats.org/drawingml/2006/main" xmlns:p="http://schemas.openxmlformats.org/presentationml/2006/main" xmlns:r="http://schemas.openxmlformats.org/officeDocument/2006/relationships">
+  <p:cSld>
+    <p:bg>
+      <p:bgPr>
+        <a:solidFill>
+          <a:srgbClr val="FFFFFF"/>
+        </a:solidFill>
+        <a:effectLst/>
+      </p:bgPr>
+    </p:bg>
+    <p:spTree>
+      <p:nvGrpSpPr>
+        <p:cNvPr id="1" name=""/>
+        <p:cNvGrpSpPr/>
+        <p:nvPr/>
+      </p:nvGrpSpPr>
+      <p:grpSpPr/>
+      <p:sp>
+        <p:nvSpPr>
+          <p:cNvPr id="2" name="Rectangle 1"/>
+          <p:cNvSpPr/>
+          <p:nvPr/>
+        </p:nvSpPr>
+        <p:spPr>
+          <a:xfrm>
+            <a:off x="0" y="0"/>
+            <a:ext cx="12191695" cy="960120"/>
+          </a:xfrm>
+          <a:prstGeom prst="rect">
+            <a:avLst/>
+          </a:prstGeom>
+          <a:solidFill>
+            <a:srgbClr val="095292"/>
+          </a:solidFill>
+          <a:ln>
+            <a:noFill/>
+          </a:ln>
+        </p:spPr>
+        <p:style>
+          <a:lnRef idx="1">
+            <a:schemeClr val="accent1"/>
+          </a:lnRef>
+          <a:fillRef idx="3">
+            <a:schemeClr val="accent1"/>
+          </a:fillRef>
+          <a:effectRef idx="2">
+            <a:schemeClr val="accent1"/>
+          </a:effectRef>
+          <a:fontRef idx="minor">
+            <a:schemeClr val="lt1"/>
+          </a:fontRef>
+        </p:style>
+        <p:txBody>
+          <a:bodyPr rtlCol="0" anchor="ctr"/>
+          <a:lstStyle/>
+          <a:p>
+            <a:pPr algn="ctr"/>
+          </a:p>
+        </p:txBody>
+      </p:sp>
+      <p:sp>
+        <p:nvSpPr>
+          <p:cNvPr id="3" name="Rectangle 2"/>
+          <p:cNvSpPr/>
+          <p:nvPr/>
+        </p:nvSpPr>
+        <p:spPr>
+          <a:xfrm>
+            <a:off x="0" y="960120"/>
+            <a:ext cx="12191695" cy="41148"/>
+          </a:xfrm>
+          <a:prstGeom prst="rect">
+            <a:avLst/>
+          </a:prstGeom>
+          <a:solidFill>
+            <a:srgbClr val="FFD000"/>
+          </a:solidFill>
+          <a:ln>
+            <a:noFill/>
+          </a:ln>
+        </p:spPr>
+        <p:style>
+          <a:lnRef idx="1">
+            <a:schemeClr val="accent1"/>
+          </a:lnRef>
+          <a:fillRef idx="3">
+            <a:schemeClr val="accent1"/>
+          </a:fillRef>
+          <a:effectRef idx="2">
+            <a:schemeClr val="accent1"/>
+          </a:effectRef>
+          <a:fontRef idx="minor">
+            <a:schemeClr val="lt1"/>
+          </a:fontRef>
+        </p:style>
+        <p:txBody>
+          <a:bodyPr rtlCol="0" anchor="ctr"/>
+          <a:lstStyle/>
+          <a:p>
+            <a:pPr algn="ctr"/>
+          </a:p>
+        </p:txBody>
+      </p:sp>
+      <p:sp>
+        <p:nvSpPr>
+          <p:cNvPr id="4" name="TextBox 3"/>
+          <p:cNvSpPr txBox="1"/>
+          <p:nvPr/>
+        </p:nvSpPr>
+        <p:spPr>
+          <a:xfrm>
+            <a:off x="457200" y="164592"/>
+            <a:ext cx="11277295" cy="502920"/>
+          </a:xfrm>
+          <a:prstGeom prst="rect">
+            <a:avLst/>
+          </a:prstGeom>
+          <a:noFill/>
+        </p:spPr>
+        <p:txBody>
+          <a:bodyPr wrap="square">
+            <a:spAutoFit/>
+          </a:bodyPr>
+          <a:lstStyle/>
+          <a:p>
+            <a:r>
+              <a:rPr sz="2600" b="1" i="0">
+                <a:solidFill>
+                  <a:srgbClr val="FFFFFF"/>
+                </a:solidFill>
+                <a:latin typeface="Calibri"/>
+              </a:rPr>
+              <a:t>Un método real de VetCare y sus seis hallazgos</a:t>
+            </a:r>
+          </a:p>
+        </p:txBody>
+      </p:sp>
+      <p:sp>
+        <p:nvSpPr>
+          <p:cNvPr id="5" name="Rounded Rectangle 4"/>
+          <p:cNvSpPr/>
+          <p:nvPr/>
+        </p:nvSpPr>
+        <p:spPr>
+          <a:xfrm>
+            <a:off x="457200" y="1261872"/>
+            <a:ext cx="11277295" cy="4773168"/>
+          </a:xfrm>
+          <a:prstGeom prst="roundRect">
+            <a:avLst>
+              <a:gd name="adj" fmla="val 12000"/>
+            </a:avLst>
+          </a:prstGeom>
+          <a:solidFill>
+            <a:srgbClr val="1E2A38"/>
+          </a:solidFill>
+          <a:ln>
+            <a:noFill/>
+          </a:ln>
+        </p:spPr>
+        <p:style>
+          <a:lnRef idx="1">
+            <a:schemeClr val="accent1"/>
+          </a:lnRef>
+          <a:fillRef idx="3">
+            <a:schemeClr val="accent1"/>
+          </a:fillRef>
+          <a:effectRef idx="2">
+            <a:schemeClr val="accent1"/>
+          </a:effectRef>
+          <a:fontRef idx="minor">
+            <a:schemeClr val="lt1"/>
+          </a:fontRef>
+        </p:style>
+        <p:txBody>
+          <a:bodyPr rtlCol="0" anchor="ctr"/>
+          <a:lstStyle/>
+          <a:p>
+            <a:pPr algn="ctr"/>
+          </a:p>
+        </p:txBody>
+      </p:sp>
+      <p:sp>
+        <p:nvSpPr>
+          <p:cNvPr id="6" name="Rectangle 5"/>
+          <p:cNvSpPr/>
+          <p:nvPr/>
+        </p:nvSpPr>
+        <p:spPr>
+          <a:xfrm>
+            <a:off x="457200" y="1261872"/>
+            <a:ext cx="11277295" cy="320040"/>
+          </a:xfrm>
+          <a:prstGeom prst="rect">
+            <a:avLst/>
+          </a:prstGeom>
+          <a:solidFill>
+            <a:srgbClr val="095292"/>
+          </a:solidFill>
+          <a:ln>
+            <a:noFill/>
+          </a:ln>
+        </p:spPr>
+        <p:style>
+          <a:lnRef idx="1">
+            <a:schemeClr val="accent1"/>
+          </a:lnRef>
+          <a:fillRef idx="3">
+            <a:schemeClr val="accent1"/>
+          </a:fillRef>
+          <a:effectRef idx="2">
+            <a:schemeClr val="accent1"/>
+          </a:effectRef>
+          <a:fontRef idx="minor">
+            <a:schemeClr val="lt1"/>
+          </a:fontRef>
+        </p:style>
+        <p:txBody>
+          <a:bodyPr rtlCol="0" anchor="ctr"/>
+          <a:lstStyle/>
+          <a:p>
+            <a:pPr algn="ctr"/>
+          </a:p>
+        </p:txBody>
+      </p:sp>
+      <p:sp>
+        <p:nvSpPr>
+          <p:cNvPr id="7" name="TextBox 6"/>
+          <p:cNvSpPr txBox="1"/>
+          <p:nvPr/>
+        </p:nvSpPr>
+        <p:spPr>
+          <a:xfrm>
+            <a:off x="685800" y="1307592"/>
+            <a:ext cx="10820095" cy="256032"/>
+          </a:xfrm>
+          <a:prstGeom prst="rect">
+            <a:avLst/>
+          </a:prstGeom>
+          <a:noFill/>
+        </p:spPr>
+        <p:txBody>
+          <a:bodyPr wrap="square" anchor="ctr"/>
+          <a:lstStyle/>
+          <a:p>
+            <a:r>
+              <a:rPr sz="1000" b="1" i="0">
+                <a:solidFill>
+                  <a:srgbClr val="269CCB"/>
+                </a:solidFill>
+                <a:latin typeface="Calibri"/>
+              </a:rPr>
+              <a:t>● ● ●</a:t>
+            </a:r>
+          </a:p>
+        </p:txBody>
+      </p:sp>
+      <p:sp>
+        <p:nvSpPr>
+          <p:cNvPr id="8" name="TextBox 7"/>
+          <p:cNvSpPr txBox="1"/>
+          <p:nvPr/>
+        </p:nvSpPr>
+        <p:spPr>
+          <a:xfrm>
+            <a:off x="777240" y="1719072"/>
+            <a:ext cx="10637215" cy="4133087"/>
+          </a:xfrm>
+          <a:prstGeom prst="rect">
+            <a:avLst/>
+          </a:prstGeom>
+          <a:noFill/>
+        </p:spPr>
+        <p:txBody>
+          <a:bodyPr wrap="square">
+            <a:spAutoFit/>
+          </a:bodyPr>
+          <a:lstStyle/>
+          <a:p>
+            <a:pPr>
+              <a:spcAft>
+                <a:spcPts val="400"/>
+              </a:spcAft>
+            </a:pPr>
+            <a:r>
+              <a:rPr sz="1400" b="0" i="0">
+                <a:solidFill>
+                  <a:srgbClr val="FFFFFF"/>
+                </a:solidFill>
+                <a:latin typeface="Calibri"/>
+              </a:rPr>
+              <a:t>public static void proceso(String a, String b, String c, String d, String e) { // 1. nombre y parametros sin significado</a:t>
+            </a:r>
+          </a:p>
+          <a:p>
+            <a:pPr>
+              <a:spcAft>
+                <a:spcPts val="400"/>
+              </a:spcAft>
+            </a:pPr>
+            <a:r>
+              <a:rPr sz="1400" b="0" i="0">
+                <a:solidFill>
+                  <a:srgbClr val="FFFFFF"/>
+                </a:solidFill>
+                <a:latin typeface="Calibri"/>
+              </a:rPr>
+              <a:t>    int x = 0;</a:t>
+            </a:r>
+          </a:p>
+          <a:p>
+            <a:pPr>
+              <a:spcAft>
+                <a:spcPts val="400"/>
+              </a:spcAft>
+            </a:pPr>
+            <a:r>
+              <a:rPr sz="1400" b="0" i="0">
+                <a:solidFill>
+                  <a:srgbClr val="FFFFFF"/>
+                </a:solidFill>
+                <a:latin typeface="Calibri"/>
+              </a:rPr>
+              <a:t>    try {</a:t>
+            </a:r>
+          </a:p>
+          <a:p>
+            <a:pPr>
+              <a:spcAft>
+                <a:spcPts val="400"/>
+              </a:spcAft>
+            </a:pPr>
+            <a:r>
+              <a:rPr sz="1400" b="0" i="0">
+                <a:solidFill>
+                  <a:srgbClr val="FFFFFF"/>
+                </a:solidFill>
+                <a:latin typeface="Calibri"/>
+              </a:rPr>
+              <a:t>        x = Integer.parseInt(d);</a:t>
+            </a:r>
+          </a:p>
+          <a:p>
+            <a:pPr>
+              <a:spcAft>
+                <a:spcPts val="400"/>
+              </a:spcAft>
+            </a:pPr>
+            <a:r>
+              <a:rPr sz="1400" b="0" i="0">
+                <a:solidFill>
+                  <a:srgbClr val="FFFFFF"/>
+                </a:solidFill>
+                <a:latin typeface="Calibri"/>
+              </a:rPr>
+              <a:t>    } catch (Exception ex) {            // 2. catch vacio: la edad "dos" se vuelve 0 en silencio</a:t>
+            </a:r>
+          </a:p>
+          <a:p>
+            <a:pPr>
+              <a:spcAft>
+                <a:spcPts val="400"/>
+              </a:spcAft>
+            </a:pPr>
+            <a:r>
+              <a:rPr sz="1400" b="0" i="0">
+                <a:solidFill>
+                  <a:srgbClr val="FFFFFF"/>
+                </a:solidFill>
+                <a:latin typeface="Calibri"/>
+              </a:rPr>
+              <a:t>    }</a:t>
+            </a:r>
+          </a:p>
+          <a:p>
+            <a:pPr>
+              <a:spcAft>
+                <a:spcPts val="400"/>
+              </a:spcAft>
+            </a:pPr>
+            <a:r>
+              <a:rPr sz="1400" b="0" i="0">
+                <a:solidFill>
+                  <a:srgbClr val="FFFFFF"/>
+                </a:solidFill>
+                <a:latin typeface="Calibri"/>
+              </a:rPr>
+              <a:t>    if (x &gt; 25) {                       // 3. numero magico: por que 25? y la edad -3 pasa derecho</a:t>
+            </a:r>
+          </a:p>
+          <a:p>
+            <a:pPr>
+              <a:spcAft>
+                <a:spcPts val="400"/>
+              </a:spcAft>
+            </a:pPr>
+            <a:r>
+              <a:rPr sz="1400" b="0" i="0">
+                <a:solidFill>
+                  <a:srgbClr val="FFFFFF"/>
+                </a:solidFill>
+                <a:latin typeface="Calibri"/>
+              </a:rPr>
+              <a:t>        System.out.println("edad rara"); // 4. el aviso muere en consola: la ventana no se entera</a:t>
+            </a:r>
+          </a:p>
+          <a:p>
+            <a:pPr>
+              <a:spcAft>
+                <a:spcPts val="400"/>
+              </a:spcAft>
+            </a:pPr>
+            <a:r>
+              <a:rPr sz="1400" b="0" i="0">
+                <a:solidFill>
+                  <a:srgbClr val="FFFFFF"/>
+                </a:solidFill>
+                <a:latin typeface="Calibri"/>
+              </a:rPr>
+              <a:t>    }</a:t>
+            </a:r>
+          </a:p>
+          <a:p>
+            <a:pPr>
+              <a:spcAft>
+                <a:spcPts val="400"/>
+              </a:spcAft>
+            </a:pPr>
+            <a:r>
+              <a:rPr sz="1400" b="0" i="0">
+                <a:solidFill>
+                  <a:srgbClr val="FFFFFF"/>
+                </a:solidFill>
+                <a:latin typeface="Calibri"/>
+              </a:rPr>
+              <a:t>    String[] v = new String[5];         // 5. arreglo de String en vez de la clase Mascota</a:t>
+            </a:r>
+          </a:p>
+          <a:p>
+            <a:pPr>
+              <a:spcAft>
+                <a:spcPts val="400"/>
+              </a:spcAft>
+            </a:pPr>
+            <a:r>
+              <a:rPr sz="1400" b="0" i="0">
+                <a:solidFill>
+                  <a:srgbClr val="FFFFFF"/>
+                </a:solidFill>
+                <a:latin typeface="Calibri"/>
+              </a:rPr>
+              <a:t>    v[0] = a; v[1] = b; v[2] = c; v[3] = String.valueOf(x); v[4] = e;</a:t>
+            </a:r>
+          </a:p>
+          <a:p>
+            <a:pPr>
+              <a:spcAft>
+                <a:spcPts val="400"/>
+              </a:spcAft>
+            </a:pPr>
+            <a:r>
+              <a:rPr sz="1400" b="0" i="0">
+                <a:solidFill>
+                  <a:srgbClr val="FFFFFF"/>
+                </a:solidFill>
+                <a:latin typeface="Calibri"/>
+              </a:rPr>
+              <a:t>    datos.add(v);                       // 6. 'datos' es public static: cualquiera lo modifica</a:t>
+            </a:r>
+          </a:p>
+          <a:p>
+            <a:pPr>
+              <a:spcAft>
+                <a:spcPts val="400"/>
+              </a:spcAft>
+            </a:pPr>
+            <a:r>
+              <a:rPr sz="1400" b="0" i="0">
+                <a:solidFill>
+                  <a:srgbClr val="FFFFFF"/>
+                </a:solidFill>
+                <a:latin typeface="Calibri"/>
+              </a:rPr>
+              <a:t>}</a:t>
+            </a:r>
+          </a:p>
+        </p:txBody>
+      </p:sp>
+      <p:sp>
+        <p:nvSpPr>
+          <p:cNvPr id="9" name="TextBox 8"/>
+          <p:cNvSpPr txBox="1"/>
+          <p:nvPr/>
+        </p:nvSpPr>
+        <p:spPr>
+          <a:xfrm>
+            <a:off x="457200" y="6080760"/>
+            <a:ext cx="11277295" cy="320040"/>
+          </a:xfrm>
+          <a:prstGeom prst="rect">
+            <a:avLst/>
+          </a:prstGeom>
+          <a:noFill/>
+        </p:spPr>
+        <p:txBody>
+          <a:bodyPr wrap="square">
+            <a:spAutoFit/>
+          </a:bodyPr>
+          <a:lstStyle/>
+          <a:p>
+            <a:pPr algn="ctr"/>
+            <a:r>
+              <a:rPr sz="1200" b="0" i="1">
+                <a:solidFill>
+                  <a:srgbClr val="666666"/>
+                </a:solidFill>
+                <a:latin typeface="Calibri"/>
+              </a:rPr>
+              <a:t>El código compila y corre; la revisión no busca errores del compilador, busca lo que va a doler en el mostrador de la clínica.</a:t>
+            </a:r>
+          </a:p>
+        </p:txBody>
+      </p:sp>
+      <p:sp>
+        <p:nvSpPr>
+          <p:cNvPr id="10" name="TextBox 9"/>
+          <p:cNvSpPr txBox="1"/>
+          <p:nvPr/>
+        </p:nvSpPr>
+        <p:spPr>
+          <a:xfrm>
+            <a:off x="11185855" y="6473952"/>
+            <a:ext cx="640080" cy="274320"/>
+          </a:xfrm>
+          <a:prstGeom prst="rect">
+            <a:avLst/>
+          </a:prstGeom>
+          <a:noFill/>
+        </p:spPr>
+        <p:txBody>
+          <a:bodyPr wrap="square">
+            <a:spAutoFit/>
+          </a:bodyPr>
+          <a:lstStyle/>
+          <a:p>
+            <a:pPr algn="r"/>
+            <a:r>
+              <a:rPr sz="1100" b="0" i="0">
+                <a:solidFill>
+                  <a:srgbClr val="666666"/>
+                </a:solidFill>
+                <a:latin typeface="Calibri"/>
+              </a:rPr>
+              <a:t>21</a:t>
+            </a:r>
+          </a:p>
+        </p:txBody>
+      </p:sp>
+    </p:spTree>
+  </p:cSld>
+  <p:clrMapOvr>
+    <a:masterClrMapping/>
+  </p:clrMapOvr>
+</p:sld>
+</file>
+
+<file path=ppt/slides/slide22.xml><?xml version="1.0" encoding="utf-8"?>
+<p:sld xmlns:a="http://schemas.openxmlformats.org/drawingml/2006/main" xmlns:p="http://schemas.openxmlformats.org/presentationml/2006/main" xmlns:r="http://schemas.openxmlformats.org/officeDocument/2006/relationships">
+  <p:cSld>
+    <p:bg>
+      <p:bgPr>
+        <a:solidFill>
+          <a:srgbClr val="FFFFFF"/>
+        </a:solidFill>
+        <a:effectLst/>
+      </p:bgPr>
+    </p:bg>
+    <p:spTree>
+      <p:nvGrpSpPr>
+        <p:cNvPr id="1" name=""/>
+        <p:cNvGrpSpPr/>
+        <p:nvPr/>
+      </p:nvGrpSpPr>
+      <p:grpSpPr/>
+      <p:sp>
+        <p:nvSpPr>
+          <p:cNvPr id="2" name="Rectangle 1"/>
+          <p:cNvSpPr/>
+          <p:nvPr/>
+        </p:nvSpPr>
+        <p:spPr>
+          <a:xfrm>
+            <a:off x="0" y="0"/>
+            <a:ext cx="12191695" cy="960120"/>
+          </a:xfrm>
+          <a:prstGeom prst="rect">
+            <a:avLst/>
+          </a:prstGeom>
+          <a:solidFill>
+            <a:srgbClr val="095292"/>
+          </a:solidFill>
+          <a:ln>
+            <a:noFill/>
+          </a:ln>
+        </p:spPr>
+        <p:style>
+          <a:lnRef idx="1">
+            <a:schemeClr val="accent1"/>
+          </a:lnRef>
+          <a:fillRef idx="3">
+            <a:schemeClr val="accent1"/>
+          </a:fillRef>
+          <a:effectRef idx="2">
+            <a:schemeClr val="accent1"/>
+          </a:effectRef>
+          <a:fontRef idx="minor">
+            <a:schemeClr val="lt1"/>
+          </a:fontRef>
+        </p:style>
+        <p:txBody>
+          <a:bodyPr rtlCol="0" anchor="ctr"/>
+          <a:lstStyle/>
+          <a:p>
+            <a:pPr algn="ctr"/>
+          </a:p>
+        </p:txBody>
+      </p:sp>
+      <p:sp>
+        <p:nvSpPr>
+          <p:cNvPr id="3" name="Rectangle 2"/>
+          <p:cNvSpPr/>
+          <p:nvPr/>
+        </p:nvSpPr>
+        <p:spPr>
+          <a:xfrm>
+            <a:off x="0" y="960120"/>
+            <a:ext cx="12191695" cy="41148"/>
+          </a:xfrm>
+          <a:prstGeom prst="rect">
+            <a:avLst/>
+          </a:prstGeom>
+          <a:solidFill>
+            <a:srgbClr val="FFD000"/>
+          </a:solidFill>
+          <a:ln>
+            <a:noFill/>
+          </a:ln>
+        </p:spPr>
+        <p:style>
+          <a:lnRef idx="1">
+            <a:schemeClr val="accent1"/>
+          </a:lnRef>
+          <a:fillRef idx="3">
+            <a:schemeClr val="accent1"/>
+          </a:fillRef>
+          <a:effectRef idx="2">
+            <a:schemeClr val="accent1"/>
+          </a:effectRef>
+          <a:fontRef idx="minor">
+            <a:schemeClr val="lt1"/>
+          </a:fontRef>
+        </p:style>
+        <p:txBody>
+          <a:bodyPr rtlCol="0" anchor="ctr"/>
+          <a:lstStyle/>
+          <a:p>
+            <a:pPr algn="ctr"/>
+          </a:p>
+        </p:txBody>
+      </p:sp>
+      <p:sp>
+        <p:nvSpPr>
+          <p:cNvPr id="4" name="TextBox 3"/>
+          <p:cNvSpPr txBox="1"/>
+          <p:nvPr/>
+        </p:nvSpPr>
+        <p:spPr>
+          <a:xfrm>
+            <a:off x="457200" y="164592"/>
+            <a:ext cx="11277295" cy="502920"/>
+          </a:xfrm>
+          <a:prstGeom prst="rect">
+            <a:avLst/>
+          </a:prstGeom>
+          <a:noFill/>
+        </p:spPr>
+        <p:txBody>
+          <a:bodyPr wrap="square">
+            <a:spAutoFit/>
+          </a:bodyPr>
+          <a:lstStyle/>
+          <a:p>
+            <a:r>
+              <a:rPr sz="2600" b="1" i="0">
+                <a:solidFill>
+                  <a:srgbClr val="FFFFFF"/>
+                </a:solidFill>
+                <a:latin typeface="Calibri"/>
+              </a:rPr>
+              <a:t>Demo del dia</a:t>
+            </a:r>
+          </a:p>
+        </p:txBody>
+      </p:sp>
+      <p:sp>
+        <p:nvSpPr>
+          <p:cNvPr id="5" name="TextBox 4"/>
+          <p:cNvSpPr txBox="1"/>
+          <p:nvPr/>
+        </p:nvSpPr>
+        <p:spPr>
+          <a:xfrm>
+            <a:off x="457200" y="1170432"/>
+            <a:ext cx="11277295" cy="5230368"/>
+          </a:xfrm>
+          <a:prstGeom prst="rect">
+            <a:avLst/>
+          </a:prstGeom>
+          <a:noFill/>
+        </p:spPr>
+        <p:txBody>
+          <a:bodyPr wrap="square">
+            <a:spAutoFit/>
+          </a:bodyPr>
+          <a:lstStyle/>
+          <a:p>
+            <a:pPr>
+              <a:spcAft>
+                <a:spcPts val="800"/>
+              </a:spcAft>
+            </a:pPr>
+            <a:r>
+              <a:rPr sz="2000" b="0" i="0">
+                <a:solidFill>
+                  <a:srgbClr val="333333"/>
+                </a:solidFill>
+                <a:latin typeface="Calibri"/>
+              </a:rPr>
+              <a:t>–   </a:t>
+            </a:r>
+            <a:r>
+              <a:rPr sz="2000" b="1" i="0">
+                <a:solidFill>
+                  <a:srgbClr val="333333"/>
+                </a:solidFill>
+                <a:latin typeface="Calibri"/>
+              </a:rPr>
+              <a:t>Herramienta:</a:t>
+            </a:r>
+            <a:r>
+              <a:rPr sz="2000" b="0" i="0">
+                <a:solidFill>
+                  <a:srgbClr val="333333"/>
+                </a:solidFill>
+                <a:latin typeface="Calibri"/>
+              </a:rPr>
+              <a:t> Visual Studio Code (Java)</a:t>
+            </a:r>
+          </a:p>
+          <a:p>
+            <a:pPr>
+              <a:spcAft>
+                <a:spcPts val="800"/>
+              </a:spcAft>
+            </a:pPr>
+            <a:r>
+              <a:rPr sz="2000" b="0" i="0">
+                <a:solidFill>
+                  <a:srgbClr val="333333"/>
+                </a:solidFill>
+                <a:latin typeface="Calibri"/>
+              </a:rPr>
+              <a:t>–   </a:t>
+            </a:r>
+            <a:r>
+              <a:rPr sz="2000" b="1" i="0">
+                <a:solidFill>
+                  <a:srgbClr val="333333"/>
+                </a:solidFill>
+                <a:latin typeface="Calibri"/>
+              </a:rPr>
+              <a:t>Demo:</a:t>
+            </a:r>
+            <a:r>
+              <a:rPr sz="2000" b="0" i="0">
+                <a:solidFill>
+                  <a:srgbClr val="333333"/>
+                </a:solidFill>
+                <a:latin typeface="Calibri"/>
+              </a:rPr>
+              <a:t> El docente proyecta VetCareParaRevisar.java, lo ejecuta en vivo, aplica el checklist delante del grupo y reescribe dos comentarios mal formulados del tipo 'este código es un desastre' en retroalimentación accionable.</a:t>
+            </a:r>
+          </a:p>
+          <a:p>
+            <a:pPr>
+              <a:spcAft>
+                <a:spcPts val="800"/>
+              </a:spcAft>
+            </a:pPr>
+            <a:r>
+              <a:rPr sz="2000" b="0" i="0">
+                <a:solidFill>
+                  <a:srgbClr val="333333"/>
+                </a:solidFill>
+                <a:latin typeface="Calibri"/>
+              </a:rPr>
+              <a:t>–   Mismo dominio VetCare — no otro ejemplo.</a:t>
+            </a:r>
+          </a:p>
+        </p:txBody>
+      </p:sp>
+      <p:sp>
+        <p:nvSpPr>
+          <p:cNvPr id="6" name="TextBox 5"/>
+          <p:cNvSpPr txBox="1"/>
+          <p:nvPr/>
+        </p:nvSpPr>
+        <p:spPr>
+          <a:xfrm>
+            <a:off x="11185855" y="6473952"/>
+            <a:ext cx="640080" cy="274320"/>
+          </a:xfrm>
+          <a:prstGeom prst="rect">
+            <a:avLst/>
+          </a:prstGeom>
+          <a:noFill/>
+        </p:spPr>
+        <p:txBody>
+          <a:bodyPr wrap="square">
+            <a:spAutoFit/>
+          </a:bodyPr>
+          <a:lstStyle/>
+          <a:p>
+            <a:pPr algn="r"/>
+            <a:r>
+              <a:rPr sz="1100" b="0" i="0">
+                <a:solidFill>
+                  <a:srgbClr val="666666"/>
+                </a:solidFill>
+                <a:latin typeface="Calibri"/>
+              </a:rPr>
+              <a:t>22</a:t>
+            </a:r>
+          </a:p>
+        </p:txBody>
+      </p:sp>
+    </p:spTree>
+  </p:cSld>
+  <p:clrMapOvr>
+    <a:masterClrMapping/>
+  </p:clrMapOvr>
+</p:sld>
+</file>
+
+<file path=ppt/slides/slide23.xml><?xml version="1.0" encoding="utf-8"?>
+<p:sld xmlns:a="http://schemas.openxmlformats.org/drawingml/2006/main" xmlns:p="http://schemas.openxmlformats.org/presentationml/2006/main" xmlns:r="http://schemas.openxmlformats.org/officeDocument/2006/relationships">
+  <p:cSld>
+    <p:bg>
+      <p:bgPr>
+        <a:solidFill>
+          <a:srgbClr val="FFFFFF"/>
+        </a:solidFill>
+        <a:effectLst/>
+      </p:bgPr>
+    </p:bg>
+    <p:spTree>
+      <p:nvGrpSpPr>
+        <p:cNvPr id="1" name=""/>
+        <p:cNvGrpSpPr/>
+        <p:nvPr/>
+      </p:nvGrpSpPr>
+      <p:grpSpPr/>
+      <p:sp>
+        <p:nvSpPr>
+          <p:cNvPr id="2" name="Rectangle 1"/>
+          <p:cNvSpPr/>
+          <p:nvPr/>
+        </p:nvSpPr>
+        <p:spPr>
+          <a:xfrm>
+            <a:off x="0" y="0"/>
+            <a:ext cx="12191695" cy="960120"/>
+          </a:xfrm>
+          <a:prstGeom prst="rect">
+            <a:avLst/>
+          </a:prstGeom>
+          <a:solidFill>
+            <a:srgbClr val="095292"/>
+          </a:solidFill>
+          <a:ln>
+            <a:noFill/>
+          </a:ln>
+        </p:spPr>
+        <p:style>
+          <a:lnRef idx="1">
+            <a:schemeClr val="accent1"/>
+          </a:lnRef>
+          <a:fillRef idx="3">
+            <a:schemeClr val="accent1"/>
+          </a:fillRef>
+          <a:effectRef idx="2">
+            <a:schemeClr val="accent1"/>
+          </a:effectRef>
+          <a:fontRef idx="minor">
+            <a:schemeClr val="lt1"/>
+          </a:fontRef>
+        </p:style>
+        <p:txBody>
+          <a:bodyPr rtlCol="0" anchor="ctr"/>
+          <a:lstStyle/>
+          <a:p>
+            <a:pPr algn="ctr"/>
+          </a:p>
+        </p:txBody>
+      </p:sp>
+      <p:sp>
+        <p:nvSpPr>
+          <p:cNvPr id="3" name="Rectangle 2"/>
+          <p:cNvSpPr/>
+          <p:nvPr/>
+        </p:nvSpPr>
+        <p:spPr>
+          <a:xfrm>
+            <a:off x="0" y="960120"/>
+            <a:ext cx="12191695" cy="41148"/>
+          </a:xfrm>
+          <a:prstGeom prst="rect">
+            <a:avLst/>
+          </a:prstGeom>
+          <a:solidFill>
+            <a:srgbClr val="FFD000"/>
+          </a:solidFill>
+          <a:ln>
+            <a:noFill/>
+          </a:ln>
+        </p:spPr>
+        <p:style>
+          <a:lnRef idx="1">
+            <a:schemeClr val="accent1"/>
+          </a:lnRef>
+          <a:fillRef idx="3">
+            <a:schemeClr val="accent1"/>
+          </a:fillRef>
+          <a:effectRef idx="2">
+            <a:schemeClr val="accent1"/>
+          </a:effectRef>
+          <a:fontRef idx="minor">
+            <a:schemeClr val="lt1"/>
+          </a:fontRef>
+        </p:style>
+        <p:txBody>
+          <a:bodyPr rtlCol="0" anchor="ctr"/>
+          <a:lstStyle/>
+          <a:p>
+            <a:pPr algn="ctr"/>
+          </a:p>
+        </p:txBody>
+      </p:sp>
+      <p:sp>
+        <p:nvSpPr>
+          <p:cNvPr id="4" name="TextBox 3"/>
+          <p:cNvSpPr txBox="1"/>
+          <p:nvPr/>
+        </p:nvSpPr>
+        <p:spPr>
+          <a:xfrm>
+            <a:off x="457200" y="164592"/>
+            <a:ext cx="11277295" cy="502920"/>
+          </a:xfrm>
+          <a:prstGeom prst="rect">
+            <a:avLst/>
+          </a:prstGeom>
+          <a:noFill/>
+        </p:spPr>
+        <p:txBody>
+          <a:bodyPr wrap="square">
+            <a:spAutoFit/>
+          </a:bodyPr>
+          <a:lstStyle/>
+          <a:p>
+            <a:r>
+              <a:rPr sz="2600" b="1" i="0">
+                <a:solidFill>
+                  <a:srgbClr val="FFFFFF"/>
+                </a:solidFill>
+                <a:latin typeface="Calibri"/>
+              </a:rPr>
+              <a:t>Taller PI — por que importa</a:t>
+            </a:r>
+          </a:p>
+        </p:txBody>
+      </p:sp>
+      <p:sp>
+        <p:nvSpPr>
+          <p:cNvPr id="5" name="TextBox 4"/>
+          <p:cNvSpPr txBox="1"/>
+          <p:nvPr/>
+        </p:nvSpPr>
+        <p:spPr>
+          <a:xfrm>
+            <a:off x="457200" y="1170432"/>
+            <a:ext cx="11277295" cy="5230368"/>
+          </a:xfrm>
+          <a:prstGeom prst="rect">
+            <a:avLst/>
+          </a:prstGeom>
+          <a:noFill/>
+        </p:spPr>
+        <p:txBody>
+          <a:bodyPr wrap="square">
+            <a:spAutoFit/>
+          </a:bodyPr>
+          <a:lstStyle/>
+          <a:p>
+            <a:pPr>
+              <a:spcAft>
+                <a:spcPts val="800"/>
+              </a:spcAft>
+            </a:pPr>
+            <a:r>
+              <a:rPr sz="2000" b="0" i="0">
+                <a:solidFill>
+                  <a:srgbClr val="333333"/>
+                </a:solidFill>
+                <a:latin typeface="Calibri"/>
+              </a:rPr>
+              <a:t>–   </a:t>
+            </a:r>
+            <a:r>
+              <a:rPr sz="2000" b="1" i="0">
+                <a:solidFill>
+                  <a:srgbClr val="333333"/>
+                </a:solidFill>
+                <a:latin typeface="Calibri"/>
+              </a:rPr>
+              <a:t>Por que importa al PI:</a:t>
+            </a:r>
+            <a:r>
+              <a:rPr sz="2000" b="0" i="0">
+                <a:solidFill>
+                  <a:srgbClr val="333333"/>
+                </a:solidFill>
+                <a:latin typeface="Calibri"/>
+              </a:rPr>
+              <a:t> la semana entrante se integran los módulos, y un defecto que entra a la integración cuesta el triple de encontrar; esta revisión es el filtro que deja entrar solo código que otro humano ya leyó.</a:t>
+            </a:r>
+          </a:p>
+          <a:p>
+            <a:pPr>
+              <a:spcAft>
+                <a:spcPts val="800"/>
+              </a:spcAft>
+            </a:pPr>
+            <a:r>
+              <a:rPr sz="2000" b="0" i="0">
+                <a:solidFill>
+                  <a:srgbClr val="333333"/>
+                </a:solidFill>
+                <a:latin typeface="Calibri"/>
+              </a:rPr>
+              <a:t>–   El informe que reciba cada uno es la lista de tareas real con la que va a llegar a la entrega final: deja de adivinar qué le falta a VetCare porque alguien externo se lo escribió con evidencia.</a:t>
+            </a:r>
+          </a:p>
+          <a:p>
+            <a:pPr>
+              <a:spcAft>
+                <a:spcPts val="800"/>
+              </a:spcAft>
+            </a:pPr>
+            <a:r>
+              <a:rPr sz="2000" b="0" i="0">
+                <a:solidFill>
+                  <a:srgbClr val="333333"/>
+                </a:solidFill>
+                <a:latin typeface="Calibri"/>
+              </a:rPr>
+              <a:t>–   Saber dar y recibir retroalimentación técnica es exactamente lo que se le va a exigir en el primer empleo, donde nadie mezcla código sin la aprobación de otro.</a:t>
+            </a:r>
+          </a:p>
+        </p:txBody>
+      </p:sp>
+      <p:sp>
+        <p:nvSpPr>
+          <p:cNvPr id="6" name="TextBox 5"/>
+          <p:cNvSpPr txBox="1"/>
+          <p:nvPr/>
+        </p:nvSpPr>
+        <p:spPr>
+          <a:xfrm>
+            <a:off x="11185855" y="6473952"/>
+            <a:ext cx="640080" cy="274320"/>
+          </a:xfrm>
+          <a:prstGeom prst="rect">
+            <a:avLst/>
+          </a:prstGeom>
+          <a:noFill/>
+        </p:spPr>
+        <p:txBody>
+          <a:bodyPr wrap="square">
+            <a:spAutoFit/>
+          </a:bodyPr>
+          <a:lstStyle/>
+          <a:p>
+            <a:pPr algn="r"/>
+            <a:r>
+              <a:rPr sz="1100" b="0" i="0">
+                <a:solidFill>
+                  <a:srgbClr val="666666"/>
+                </a:solidFill>
+                <a:latin typeface="Calibri"/>
+              </a:rPr>
+              <a:t>23</a:t>
+            </a:r>
+          </a:p>
+        </p:txBody>
+      </p:sp>
+    </p:spTree>
+  </p:cSld>
+  <p:clrMapOvr>
+    <a:masterClrMapping/>
+  </p:clrMapOvr>
+</p:sld>
+</file>
+
+<file path=ppt/slides/slide24.xml><?xml version="1.0" encoding="utf-8"?>
+<p:sld xmlns:a="http://schemas.openxmlformats.org/drawingml/2006/main" xmlns:p="http://schemas.openxmlformats.org/presentationml/2006/main" xmlns:r="http://schemas.openxmlformats.org/officeDocument/2006/relationships">
+  <p:cSld>
+    <p:bg>
+      <p:bgPr>
+        <a:solidFill>
+          <a:srgbClr val="FFFFFF"/>
+        </a:solidFill>
+        <a:effectLst/>
+      </p:bgPr>
+    </p:bg>
+    <p:spTree>
+      <p:nvGrpSpPr>
+        <p:cNvPr id="1" name=""/>
+        <p:cNvGrpSpPr/>
+        <p:nvPr/>
+      </p:nvGrpSpPr>
+      <p:grpSpPr/>
+      <p:sp>
+        <p:nvSpPr>
+          <p:cNvPr id="2" name="Rectangle 1"/>
+          <p:cNvSpPr/>
+          <p:nvPr/>
+        </p:nvSpPr>
+        <p:spPr>
+          <a:xfrm>
+            <a:off x="0" y="0"/>
+            <a:ext cx="12191695" cy="960120"/>
+          </a:xfrm>
+          <a:prstGeom prst="rect">
+            <a:avLst/>
+          </a:prstGeom>
+          <a:solidFill>
+            <a:srgbClr val="095292"/>
+          </a:solidFill>
+          <a:ln>
+            <a:noFill/>
+          </a:ln>
+        </p:spPr>
+        <p:style>
+          <a:lnRef idx="1">
+            <a:schemeClr val="accent1"/>
+          </a:lnRef>
+          <a:fillRef idx="3">
+            <a:schemeClr val="accent1"/>
+          </a:fillRef>
+          <a:effectRef idx="2">
+            <a:schemeClr val="accent1"/>
+          </a:effectRef>
+          <a:fontRef idx="minor">
+            <a:schemeClr val="lt1"/>
+          </a:fontRef>
+        </p:style>
+        <p:txBody>
+          <a:bodyPr rtlCol="0" anchor="ctr"/>
+          <a:lstStyle/>
+          <a:p>
+            <a:pPr algn="ctr"/>
+          </a:p>
+        </p:txBody>
+      </p:sp>
+      <p:sp>
+        <p:nvSpPr>
+          <p:cNvPr id="3" name="Rectangle 2"/>
+          <p:cNvSpPr/>
+          <p:nvPr/>
+        </p:nvSpPr>
+        <p:spPr>
+          <a:xfrm>
+            <a:off x="0" y="960120"/>
+            <a:ext cx="12191695" cy="41148"/>
+          </a:xfrm>
+          <a:prstGeom prst="rect">
+            <a:avLst/>
+          </a:prstGeom>
+          <a:solidFill>
+            <a:srgbClr val="FFD000"/>
+          </a:solidFill>
+          <a:ln>
+            <a:noFill/>
+          </a:ln>
+        </p:spPr>
+        <p:style>
+          <a:lnRef idx="1">
+            <a:schemeClr val="accent1"/>
+          </a:lnRef>
+          <a:fillRef idx="3">
+            <a:schemeClr val="accent1"/>
+          </a:fillRef>
+          <a:effectRef idx="2">
+            <a:schemeClr val="accent1"/>
+          </a:effectRef>
+          <a:fontRef idx="minor">
+            <a:schemeClr val="lt1"/>
+          </a:fontRef>
+        </p:style>
+        <p:txBody>
+          <a:bodyPr rtlCol="0" anchor="ctr"/>
+          <a:lstStyle/>
+          <a:p>
+            <a:pPr algn="ctr"/>
+          </a:p>
+        </p:txBody>
+      </p:sp>
+      <p:sp>
+        <p:nvSpPr>
+          <p:cNvPr id="4" name="TextBox 3"/>
+          <p:cNvSpPr txBox="1"/>
+          <p:nvPr/>
+        </p:nvSpPr>
+        <p:spPr>
+          <a:xfrm>
+            <a:off x="457200" y="164592"/>
+            <a:ext cx="11277295" cy="502920"/>
+          </a:xfrm>
+          <a:prstGeom prst="rect">
+            <a:avLst/>
+          </a:prstGeom>
+          <a:noFill/>
+        </p:spPr>
+        <p:txBody>
+          <a:bodyPr wrap="square">
+            <a:spAutoFit/>
+          </a:bodyPr>
+          <a:lstStyle/>
+          <a:p>
+            <a:r>
+              <a:rPr sz="2600" b="1" i="0">
+                <a:solidFill>
+                  <a:srgbClr val="FFFFFF"/>
+                </a:solidFill>
+                <a:latin typeface="Calibri"/>
+              </a:rPr>
+              <a:t>Taller PI — punto de partida</a:t>
+            </a:r>
+          </a:p>
+        </p:txBody>
+      </p:sp>
+      <p:sp>
+        <p:nvSpPr>
+          <p:cNvPr id="5" name="TextBox 4"/>
+          <p:cNvSpPr txBox="1"/>
+          <p:nvPr/>
+        </p:nvSpPr>
+        <p:spPr>
+          <a:xfrm>
+            <a:off x="457200" y="1170432"/>
+            <a:ext cx="11277295" cy="5230368"/>
+          </a:xfrm>
+          <a:prstGeom prst="rect">
+            <a:avLst/>
+          </a:prstGeom>
+          <a:noFill/>
+        </p:spPr>
+        <p:txBody>
+          <a:bodyPr wrap="square">
+            <a:spAutoFit/>
+          </a:bodyPr>
+          <a:lstStyle/>
+          <a:p>
+            <a:pPr>
+              <a:spcAft>
+                <a:spcPts val="800"/>
+              </a:spcAft>
+            </a:pPr>
+            <a:r>
+              <a:rPr sz="2000" b="0" i="0">
+                <a:solidFill>
+                  <a:srgbClr val="333333"/>
+                </a:solidFill>
+                <a:latin typeface="Calibri"/>
+              </a:rPr>
+              <a:t>–   Cada estudiante llega con su versión de VetCare hasta la clase 9: dominio, colección, ventana Swing y persistencia en .csv, en distinto grado de avance.</a:t>
+            </a:r>
+          </a:p>
+          <a:p>
+            <a:pPr>
+              <a:spcAft>
+                <a:spcPts val="800"/>
+              </a:spcAft>
+            </a:pPr>
+            <a:r>
+              <a:rPr sz="2000" b="0" i="0">
+                <a:solidFill>
+                  <a:srgbClr val="333333"/>
+                </a:solidFill>
+                <a:latin typeface="Calibri"/>
+              </a:rPr>
+              <a:t>–   El docente proyecta el archivo VetCareParaRevisar.java, que compila y arranca pero termina con una excepción en tiempo de ejecución y contiene al menos siete hallazgos sembrados a propósito.</a:t>
+            </a:r>
+          </a:p>
+          <a:p>
+            <a:pPr>
+              <a:spcAft>
+                <a:spcPts val="800"/>
+              </a:spcAft>
+            </a:pPr>
+            <a:r>
+              <a:rPr sz="2000" b="0" i="0">
+                <a:solidFill>
+                  <a:srgbClr val="333333"/>
+                </a:solidFill>
+                <a:latin typeface="Calibri"/>
+              </a:rPr>
+              <a:t>–   Los estudiantes se cruzan en cadena (el 1 revisa al 2, el 2 al 3 y así hasta cerrar el círculo) y nadie revisa a quien lo está revisando (si el docente autorizó equipos, la cadena se arma entre equipos).</a:t>
+            </a:r>
+          </a:p>
+        </p:txBody>
+      </p:sp>
+      <p:sp>
+        <p:nvSpPr>
+          <p:cNvPr id="6" name="TextBox 5"/>
+          <p:cNvSpPr txBox="1"/>
+          <p:nvPr/>
+        </p:nvSpPr>
+        <p:spPr>
+          <a:xfrm>
+            <a:off x="11185855" y="6473952"/>
+            <a:ext cx="640080" cy="274320"/>
+          </a:xfrm>
+          <a:prstGeom prst="rect">
+            <a:avLst/>
+          </a:prstGeom>
+          <a:noFill/>
+        </p:spPr>
+        <p:txBody>
+          <a:bodyPr wrap="square">
+            <a:spAutoFit/>
+          </a:bodyPr>
+          <a:lstStyle/>
+          <a:p>
+            <a:pPr algn="r"/>
+            <a:r>
+              <a:rPr sz="1100" b="0" i="0">
+                <a:solidFill>
+                  <a:srgbClr val="666666"/>
+                </a:solidFill>
+                <a:latin typeface="Calibri"/>
+              </a:rPr>
+              <a:t>24</a:t>
+            </a:r>
+          </a:p>
+        </p:txBody>
+      </p:sp>
+    </p:spTree>
+  </p:cSld>
+  <p:clrMapOvr>
+    <a:masterClrMapping/>
+  </p:clrMapOvr>
+</p:sld>
+</file>
+
+<file path=ppt/slides/slide25.xml><?xml version="1.0" encoding="utf-8"?>
+<p:sld xmlns:a="http://schemas.openxmlformats.org/drawingml/2006/main" xmlns:p="http://schemas.openxmlformats.org/presentationml/2006/main" xmlns:r="http://schemas.openxmlformats.org/officeDocument/2006/relationships">
+  <p:cSld>
+    <p:bg>
+      <p:bgPr>
+        <a:solidFill>
+          <a:srgbClr val="FFFFFF"/>
+        </a:solidFill>
+        <a:effectLst/>
+      </p:bgPr>
+    </p:bg>
+    <p:spTree>
+      <p:nvGrpSpPr>
+        <p:cNvPr id="1" name=""/>
+        <p:cNvGrpSpPr/>
+        <p:nvPr/>
+      </p:nvGrpSpPr>
+      <p:grpSpPr/>
+      <p:sp>
+        <p:nvSpPr>
+          <p:cNvPr id="2" name="Rectangle 1"/>
+          <p:cNvSpPr/>
+          <p:nvPr/>
+        </p:nvSpPr>
+        <p:spPr>
+          <a:xfrm>
+            <a:off x="0" y="0"/>
+            <a:ext cx="12191695" cy="960120"/>
+          </a:xfrm>
+          <a:prstGeom prst="rect">
+            <a:avLst/>
+          </a:prstGeom>
+          <a:solidFill>
+            <a:srgbClr val="095292"/>
+          </a:solidFill>
+          <a:ln>
+            <a:noFill/>
+          </a:ln>
+        </p:spPr>
+        <p:style>
+          <a:lnRef idx="1">
+            <a:schemeClr val="accent1"/>
+          </a:lnRef>
+          <a:fillRef idx="3">
+            <a:schemeClr val="accent1"/>
+          </a:fillRef>
+          <a:effectRef idx="2">
+            <a:schemeClr val="accent1"/>
+          </a:effectRef>
+          <a:fontRef idx="minor">
+            <a:schemeClr val="lt1"/>
+          </a:fontRef>
+        </p:style>
+        <p:txBody>
+          <a:bodyPr rtlCol="0" anchor="ctr"/>
+          <a:lstStyle/>
+          <a:p>
+            <a:pPr algn="ctr"/>
+          </a:p>
+        </p:txBody>
+      </p:sp>
+      <p:sp>
+        <p:nvSpPr>
+          <p:cNvPr id="3" name="Rectangle 2"/>
+          <p:cNvSpPr/>
+          <p:nvPr/>
+        </p:nvSpPr>
+        <p:spPr>
+          <a:xfrm>
+            <a:off x="0" y="960120"/>
+            <a:ext cx="12191695" cy="41148"/>
+          </a:xfrm>
+          <a:prstGeom prst="rect">
+            <a:avLst/>
+          </a:prstGeom>
+          <a:solidFill>
+            <a:srgbClr val="FFD000"/>
+          </a:solidFill>
+          <a:ln>
+            <a:noFill/>
+          </a:ln>
+        </p:spPr>
+        <p:style>
+          <a:lnRef idx="1">
+            <a:schemeClr val="accent1"/>
+          </a:lnRef>
+          <a:fillRef idx="3">
+            <a:schemeClr val="accent1"/>
+          </a:fillRef>
+          <a:effectRef idx="2">
+            <a:schemeClr val="accent1"/>
+          </a:effectRef>
+          <a:fontRef idx="minor">
+            <a:schemeClr val="lt1"/>
+          </a:fontRef>
+        </p:style>
+        <p:txBody>
+          <a:bodyPr rtlCol="0" anchor="ctr"/>
+          <a:lstStyle/>
+          <a:p>
+            <a:pPr algn="ctr"/>
+          </a:p>
+        </p:txBody>
+      </p:sp>
+      <p:sp>
+        <p:nvSpPr>
+          <p:cNvPr id="4" name="TextBox 3"/>
+          <p:cNvSpPr txBox="1"/>
+          <p:nvPr/>
+        </p:nvSpPr>
+        <p:spPr>
+          <a:xfrm>
+            <a:off x="457200" y="164592"/>
+            <a:ext cx="11277295" cy="502920"/>
+          </a:xfrm>
+          <a:prstGeom prst="rect">
+            <a:avLst/>
+          </a:prstGeom>
+          <a:noFill/>
+        </p:spPr>
+        <p:txBody>
+          <a:bodyPr wrap="square">
+            <a:spAutoFit/>
+          </a:bodyPr>
+          <a:lstStyle/>
+          <a:p>
+            <a:r>
+              <a:rPr sz="2600" b="1" i="0">
+                <a:solidFill>
+                  <a:srgbClr val="FFFFFF"/>
+                </a:solidFill>
+                <a:latin typeface="Calibri"/>
+              </a:rPr>
+              <a:t>Taller PI — pasos guiados</a:t>
+            </a:r>
+          </a:p>
+        </p:txBody>
+      </p:sp>
+      <p:sp>
+        <p:nvSpPr>
+          <p:cNvPr id="5" name="Rounded Rectangle 4"/>
+          <p:cNvSpPr/>
+          <p:nvPr/>
+        </p:nvSpPr>
+        <p:spPr>
+          <a:xfrm>
+            <a:off x="457200" y="1234440"/>
+            <a:ext cx="11277295" cy="950976"/>
+          </a:xfrm>
+          <a:prstGeom prst="roundRect">
+            <a:avLst>
+              <a:gd name="adj" fmla="val 12000"/>
+            </a:avLst>
+          </a:prstGeom>
+          <a:solidFill>
+            <a:srgbClr val="F2F2F2"/>
+          </a:solidFill>
+          <a:ln>
+            <a:noFill/>
+          </a:ln>
+        </p:spPr>
+        <p:style>
+          <a:lnRef idx="1">
+            <a:schemeClr val="accent1"/>
+          </a:lnRef>
+          <a:fillRef idx="3">
+            <a:schemeClr val="accent1"/>
+          </a:fillRef>
+          <a:effectRef idx="2">
+            <a:schemeClr val="accent1"/>
+          </a:effectRef>
+          <a:fontRef idx="minor">
+            <a:schemeClr val="lt1"/>
+          </a:fontRef>
+        </p:style>
+        <p:txBody>
+          <a:bodyPr rtlCol="0" anchor="ctr"/>
+          <a:lstStyle/>
+          <a:p>
+            <a:pPr algn="ctr"/>
+          </a:p>
+        </p:txBody>
+      </p:sp>
+      <p:sp>
+        <p:nvSpPr>
+          <p:cNvPr id="6" name="Rounded Rectangle 5"/>
+          <p:cNvSpPr/>
+          <p:nvPr/>
+        </p:nvSpPr>
+        <p:spPr>
+          <a:xfrm>
+            <a:off x="594360" y="1490472"/>
+            <a:ext cx="438912" cy="438912"/>
+          </a:xfrm>
+          <a:prstGeom prst="roundRect">
+            <a:avLst>
+              <a:gd name="adj" fmla="val 12000"/>
+            </a:avLst>
+          </a:prstGeom>
+          <a:solidFill>
+            <a:srgbClr val="095292"/>
+          </a:solidFill>
+          <a:ln>
+            <a:noFill/>
+          </a:ln>
+        </p:spPr>
+        <p:style>
+          <a:lnRef idx="1">
+            <a:schemeClr val="accent1"/>
+          </a:lnRef>
+          <a:fillRef idx="3">
+            <a:schemeClr val="accent1"/>
+          </a:fillRef>
+          <a:effectRef idx="2">
+            <a:schemeClr val="accent1"/>
+          </a:effectRef>
+          <a:fontRef idx="minor">
+            <a:schemeClr val="lt1"/>
+          </a:fontRef>
+        </p:style>
+        <p:txBody>
+          <a:bodyPr rtlCol="0" anchor="ctr"/>
+          <a:lstStyle/>
+          <a:p>
+            <a:pPr algn="ctr"/>
+          </a:p>
+        </p:txBody>
+      </p:sp>
+      <p:sp>
+        <p:nvSpPr>
+          <p:cNvPr id="7" name="TextBox 6"/>
+          <p:cNvSpPr txBox="1"/>
+          <p:nvPr/>
+        </p:nvSpPr>
+        <p:spPr>
+          <a:xfrm>
+            <a:off x="594360" y="1490472"/>
+            <a:ext cx="438912" cy="438912"/>
+          </a:xfrm>
+          <a:prstGeom prst="rect">
+            <a:avLst/>
+          </a:prstGeom>
+          <a:noFill/>
+        </p:spPr>
+        <p:txBody>
+          <a:bodyPr wrap="square" anchor="ctr"/>
+          <a:lstStyle/>
+          <a:p>
+            <a:pPr algn="ctr"/>
+            <a:r>
+              <a:rPr sz="1600" b="1" i="0">
+                <a:solidFill>
+                  <a:srgbClr val="FFFFFF"/>
+                </a:solidFill>
+                <a:latin typeface="Calibri"/>
+              </a:rPr>
+              <a:t>1</a:t>
+            </a:r>
+          </a:p>
+        </p:txBody>
+      </p:sp>
+      <p:sp>
+        <p:nvSpPr>
+          <p:cNvPr id="8" name="TextBox 7"/>
+          <p:cNvSpPr txBox="1"/>
+          <p:nvPr/>
+        </p:nvSpPr>
+        <p:spPr>
+          <a:xfrm>
+            <a:off x="1188720" y="1325880"/>
+            <a:ext cx="10271455" cy="786384"/>
+          </a:xfrm>
+          <a:prstGeom prst="rect">
+            <a:avLst/>
+          </a:prstGeom>
+          <a:noFill/>
+        </p:spPr>
+        <p:txBody>
+          <a:bodyPr wrap="square" anchor="ctr"/>
+          <a:lstStyle/>
+          <a:p>
+            <a:r>
+              <a:rPr sz="1400" b="1" i="0">
+                <a:solidFill>
+                  <a:srgbClr val="095292"/>
+                </a:solidFill>
+                <a:latin typeface="Calibri"/>
+              </a:rPr>
+              <a:t>Intercambien proyectos: cada estudiante entrega su carpeta comprimida más un archivo de tres líneas con las instrucciones de ejecución, y recibe el proyecto de otro compañero (si el docente autorizó equipos, el de otro equipo; la revisión funciona igual); lo primero es abrirlo en VS Code y ejecutarlo, anotando si arrancó y, si no, el mensaje de error exacto copiado tal cual.</a:t>
+            </a:r>
+          </a:p>
+        </p:txBody>
+      </p:sp>
+      <p:sp>
+        <p:nvSpPr>
+          <p:cNvPr id="9" name="Rounded Rectangle 8"/>
+          <p:cNvSpPr/>
+          <p:nvPr/>
+        </p:nvSpPr>
+        <p:spPr>
+          <a:xfrm>
+            <a:off x="457200" y="2276856"/>
+            <a:ext cx="11277295" cy="950976"/>
+          </a:xfrm>
+          <a:prstGeom prst="roundRect">
+            <a:avLst>
+              <a:gd name="adj" fmla="val 12000"/>
+            </a:avLst>
+          </a:prstGeom>
+          <a:solidFill>
+            <a:srgbClr val="E8F4FA"/>
+          </a:solidFill>
+          <a:ln>
+            <a:noFill/>
+          </a:ln>
+        </p:spPr>
+        <p:style>
+          <a:lnRef idx="1">
+            <a:schemeClr val="accent1"/>
+          </a:lnRef>
+          <a:fillRef idx="3">
+            <a:schemeClr val="accent1"/>
+          </a:fillRef>
+          <a:effectRef idx="2">
+            <a:schemeClr val="accent1"/>
+          </a:effectRef>
+          <a:fontRef idx="minor">
+            <a:schemeClr val="lt1"/>
+          </a:fontRef>
+        </p:style>
+        <p:txBody>
+          <a:bodyPr rtlCol="0" anchor="ctr"/>
+          <a:lstStyle/>
+          <a:p>
+            <a:pPr algn="ctr"/>
+          </a:p>
+        </p:txBody>
+      </p:sp>
+      <p:sp>
+        <p:nvSpPr>
+          <p:cNvPr id="10" name="Rounded Rectangle 9"/>
+          <p:cNvSpPr/>
+          <p:nvPr/>
+        </p:nvSpPr>
+        <p:spPr>
+          <a:xfrm>
+            <a:off x="594360" y="2532888"/>
+            <a:ext cx="438912" cy="438912"/>
+          </a:xfrm>
+          <a:prstGeom prst="roundRect">
+            <a:avLst>
+              <a:gd name="adj" fmla="val 12000"/>
+            </a:avLst>
+          </a:prstGeom>
+          <a:solidFill>
+            <a:srgbClr val="095292"/>
+          </a:solidFill>
+          <a:ln>
+            <a:noFill/>
+          </a:ln>
+        </p:spPr>
+        <p:style>
+          <a:lnRef idx="1">
+            <a:schemeClr val="accent1"/>
+          </a:lnRef>
+          <a:fillRef idx="3">
+            <a:schemeClr val="accent1"/>
+          </a:fillRef>
+          <a:effectRef idx="2">
+            <a:schemeClr val="accent1"/>
+          </a:effectRef>
+          <a:fontRef idx="minor">
+            <a:schemeClr val="lt1"/>
+          </a:fontRef>
+        </p:style>
+        <p:txBody>
+          <a:bodyPr rtlCol="0" anchor="ctr"/>
+          <a:lstStyle/>
+          <a:p>
+            <a:pPr algn="ctr"/>
+          </a:p>
+        </p:txBody>
+      </p:sp>
+      <p:sp>
+        <p:nvSpPr>
+          <p:cNvPr id="11" name="TextBox 10"/>
+          <p:cNvSpPr txBox="1"/>
+          <p:nvPr/>
+        </p:nvSpPr>
+        <p:spPr>
+          <a:xfrm>
+            <a:off x="594360" y="2532888"/>
+            <a:ext cx="438912" cy="438912"/>
+          </a:xfrm>
+          <a:prstGeom prst="rect">
+            <a:avLst/>
+          </a:prstGeom>
+          <a:noFill/>
+        </p:spPr>
+        <p:txBody>
+          <a:bodyPr wrap="square" anchor="ctr"/>
+          <a:lstStyle/>
+          <a:p>
+            <a:pPr algn="ctr"/>
+            <a:r>
+              <a:rPr sz="1600" b="1" i="0">
+                <a:solidFill>
+                  <a:srgbClr val="FFFFFF"/>
+                </a:solidFill>
+                <a:latin typeface="Calibri"/>
+              </a:rPr>
+              <a:t>2</a:t>
+            </a:r>
+          </a:p>
+        </p:txBody>
+      </p:sp>
+      <p:sp>
+        <p:nvSpPr>
+          <p:cNvPr id="12" name="TextBox 11"/>
+          <p:cNvSpPr txBox="1"/>
+          <p:nvPr/>
+        </p:nvSpPr>
+        <p:spPr>
+          <a:xfrm>
+            <a:off x="1188720" y="2368296"/>
+            <a:ext cx="10271455" cy="786384"/>
+          </a:xfrm>
+          <a:prstGeom prst="rect">
+            <a:avLst/>
+          </a:prstGeom>
+          <a:noFill/>
+        </p:spPr>
+        <p:txBody>
+          <a:bodyPr wrap="square" anchor="ctr"/>
+          <a:lstStyle/>
+          <a:p>
+            <a:r>
+              <a:rPr sz="1400" b="1" i="0">
+                <a:solidFill>
+                  <a:srgbClr val="095292"/>
+                </a:solidFill>
+                <a:latin typeface="Calibri"/>
+              </a:rPr>
+              <a:t>Recorran el proyecto recibido con el checklist de doce ítems (clase de dominio, encapsulamiento, colección, interfaz gráfica, try-catch en fronteras, persistencia, catch vacío, métodos largos, duplicación, nombres, números mágicos, validación de casos borde) marcando cumple / no cumple / no aplica y escribiendo la evidencia archivo:línea en cada 'no cumple'.</a:t>
+            </a:r>
+          </a:p>
+        </p:txBody>
+      </p:sp>
+      <p:sp>
+        <p:nvSpPr>
+          <p:cNvPr id="13" name="Rounded Rectangle 12"/>
+          <p:cNvSpPr/>
+          <p:nvPr/>
+        </p:nvSpPr>
+        <p:spPr>
+          <a:xfrm>
+            <a:off x="457200" y="3319272"/>
+            <a:ext cx="11277295" cy="950976"/>
+          </a:xfrm>
+          <a:prstGeom prst="roundRect">
+            <a:avLst>
+              <a:gd name="adj" fmla="val 12000"/>
+            </a:avLst>
+          </a:prstGeom>
+          <a:solidFill>
+            <a:srgbClr val="F2F2F2"/>
+          </a:solidFill>
+          <a:ln>
+            <a:noFill/>
+          </a:ln>
+        </p:spPr>
+        <p:style>
+          <a:lnRef idx="1">
+            <a:schemeClr val="accent1"/>
+          </a:lnRef>
+          <a:fillRef idx="3">
+            <a:schemeClr val="accent1"/>
+          </a:fillRef>
+          <a:effectRef idx="2">
+            <a:schemeClr val="accent1"/>
+          </a:effectRef>
+          <a:fontRef idx="minor">
+            <a:schemeClr val="lt1"/>
+          </a:fontRef>
+        </p:style>
+        <p:txBody>
+          <a:bodyPr rtlCol="0" anchor="ctr"/>
+          <a:lstStyle/>
+          <a:p>
+            <a:pPr algn="ctr"/>
+          </a:p>
+        </p:txBody>
+      </p:sp>
+      <p:sp>
+        <p:nvSpPr>
+          <p:cNvPr id="14" name="Rounded Rectangle 13"/>
+          <p:cNvSpPr/>
+          <p:nvPr/>
+        </p:nvSpPr>
+        <p:spPr>
+          <a:xfrm>
+            <a:off x="594360" y="3575304"/>
+            <a:ext cx="438912" cy="438912"/>
+          </a:xfrm>
+          <a:prstGeom prst="roundRect">
+            <a:avLst>
+              <a:gd name="adj" fmla="val 12000"/>
+            </a:avLst>
+          </a:prstGeom>
+          <a:solidFill>
+            <a:srgbClr val="095292"/>
+          </a:solidFill>
+          <a:ln>
+            <a:noFill/>
+          </a:ln>
+        </p:spPr>
+        <p:style>
+          <a:lnRef idx="1">
+            <a:schemeClr val="accent1"/>
+          </a:lnRef>
+          <a:fillRef idx="3">
+            <a:schemeClr val="accent1"/>
+          </a:fillRef>
+          <a:effectRef idx="2">
+            <a:schemeClr val="accent1"/>
+          </a:effectRef>
+          <a:fontRef idx="minor">
+            <a:schemeClr val="lt1"/>
+          </a:fontRef>
+        </p:style>
+        <p:txBody>
+          <a:bodyPr rtlCol="0" anchor="ctr"/>
+          <a:lstStyle/>
+          <a:p>
+            <a:pPr algn="ctr"/>
+          </a:p>
+        </p:txBody>
+      </p:sp>
+      <p:sp>
+        <p:nvSpPr>
+          <p:cNvPr id="15" name="TextBox 14"/>
+          <p:cNvSpPr txBox="1"/>
+          <p:nvPr/>
+        </p:nvSpPr>
+        <p:spPr>
+          <a:xfrm>
+            <a:off x="594360" y="3575304"/>
+            <a:ext cx="438912" cy="438912"/>
+          </a:xfrm>
+          <a:prstGeom prst="rect">
+            <a:avLst/>
+          </a:prstGeom>
+          <a:noFill/>
+        </p:spPr>
+        <p:txBody>
+          <a:bodyPr wrap="square" anchor="ctr"/>
+          <a:lstStyle/>
+          <a:p>
+            <a:pPr algn="ctr"/>
+            <a:r>
+              <a:rPr sz="1600" b="1" i="0">
+                <a:solidFill>
+                  <a:srgbClr val="FFFFFF"/>
+                </a:solidFill>
+                <a:latin typeface="Calibri"/>
+              </a:rPr>
+              <a:t>3</a:t>
+            </a:r>
+          </a:p>
+        </p:txBody>
+      </p:sp>
+      <p:sp>
+        <p:nvSpPr>
+          <p:cNvPr id="16" name="TextBox 15"/>
+          <p:cNvSpPr txBox="1"/>
+          <p:nvPr/>
+        </p:nvSpPr>
+        <p:spPr>
+          <a:xfrm>
+            <a:off x="1188720" y="3410712"/>
+            <a:ext cx="10271455" cy="786384"/>
+          </a:xfrm>
+          <a:prstGeom prst="rect">
+            <a:avLst/>
+          </a:prstGeom>
+          <a:noFill/>
+        </p:spPr>
+        <p:txBody>
+          <a:bodyPr wrap="square" anchor="ctr"/>
+          <a:lstStyle/>
+          <a:p>
+            <a:r>
+              <a:rPr sz="1500" b="1" i="0">
+                <a:solidFill>
+                  <a:srgbClr val="095292"/>
+                </a:solidFill>
+                <a:latin typeface="Calibri"/>
+              </a:rPr>
+              <a:t>Provoquen a propósito los cuatro casos borde de VetCare (edad con letras, campos vacíos, buscar un ID inexistente, borrar o dañar una línea de mascotas.csv) y registren qué hizo la aplicación en cada uno, con el texto del mensaje o de la excepción.</a:t>
+            </a:r>
+          </a:p>
+        </p:txBody>
+      </p:sp>
+      <p:sp>
+        <p:nvSpPr>
+          <p:cNvPr id="17" name="Rounded Rectangle 16"/>
+          <p:cNvSpPr/>
+          <p:nvPr/>
+        </p:nvSpPr>
+        <p:spPr>
+          <a:xfrm>
+            <a:off x="457200" y="4361688"/>
+            <a:ext cx="11277295" cy="950976"/>
+          </a:xfrm>
+          <a:prstGeom prst="roundRect">
+            <a:avLst>
+              <a:gd name="adj" fmla="val 12000"/>
+            </a:avLst>
+          </a:prstGeom>
+          <a:solidFill>
+            <a:srgbClr val="E8F4FA"/>
+          </a:solidFill>
+          <a:ln>
+            <a:noFill/>
+          </a:ln>
+        </p:spPr>
+        <p:style>
+          <a:lnRef idx="1">
+            <a:schemeClr val="accent1"/>
+          </a:lnRef>
+          <a:fillRef idx="3">
+            <a:schemeClr val="accent1"/>
+          </a:fillRef>
+          <a:effectRef idx="2">
+            <a:schemeClr val="accent1"/>
+          </a:effectRef>
+          <a:fontRef idx="minor">
+            <a:schemeClr val="lt1"/>
+          </a:fontRef>
+        </p:style>
+        <p:txBody>
+          <a:bodyPr rtlCol="0" anchor="ctr"/>
+          <a:lstStyle/>
+          <a:p>
+            <a:pPr algn="ctr"/>
+          </a:p>
+        </p:txBody>
+      </p:sp>
+      <p:sp>
+        <p:nvSpPr>
+          <p:cNvPr id="18" name="Rounded Rectangle 17"/>
+          <p:cNvSpPr/>
+          <p:nvPr/>
+        </p:nvSpPr>
+        <p:spPr>
+          <a:xfrm>
+            <a:off x="594360" y="4617720"/>
+            <a:ext cx="438912" cy="438912"/>
+          </a:xfrm>
+          <a:prstGeom prst="roundRect">
+            <a:avLst>
+              <a:gd name="adj" fmla="val 12000"/>
+            </a:avLst>
+          </a:prstGeom>
+          <a:solidFill>
+            <a:srgbClr val="095292"/>
+          </a:solidFill>
+          <a:ln>
+            <a:noFill/>
+          </a:ln>
+        </p:spPr>
+        <p:style>
+          <a:lnRef idx="1">
+            <a:schemeClr val="accent1"/>
+          </a:lnRef>
+          <a:fillRef idx="3">
+            <a:schemeClr val="accent1"/>
+          </a:fillRef>
+          <a:effectRef idx="2">
+            <a:schemeClr val="accent1"/>
+          </a:effectRef>
+          <a:fontRef idx="minor">
+            <a:schemeClr val="lt1"/>
+          </a:fontRef>
+        </p:style>
+        <p:txBody>
+          <a:bodyPr rtlCol="0" anchor="ctr"/>
+          <a:lstStyle/>
+          <a:p>
+            <a:pPr algn="ctr"/>
+          </a:p>
+        </p:txBody>
+      </p:sp>
+      <p:sp>
+        <p:nvSpPr>
+          <p:cNvPr id="19" name="TextBox 18"/>
+          <p:cNvSpPr txBox="1"/>
+          <p:nvPr/>
+        </p:nvSpPr>
+        <p:spPr>
+          <a:xfrm>
+            <a:off x="594360" y="4617720"/>
+            <a:ext cx="438912" cy="438912"/>
+          </a:xfrm>
+          <a:prstGeom prst="rect">
+            <a:avLst/>
+          </a:prstGeom>
+          <a:noFill/>
+        </p:spPr>
+        <p:txBody>
+          <a:bodyPr wrap="square" anchor="ctr"/>
+          <a:lstStyle/>
+          <a:p>
+            <a:pPr algn="ctr"/>
+            <a:r>
+              <a:rPr sz="1600" b="1" i="0">
+                <a:solidFill>
+                  <a:srgbClr val="FFFFFF"/>
+                </a:solidFill>
+                <a:latin typeface="Calibri"/>
+              </a:rPr>
+              <a:t>4</a:t>
+            </a:r>
+          </a:p>
+        </p:txBody>
+      </p:sp>
+      <p:sp>
+        <p:nvSpPr>
+          <p:cNvPr id="20" name="TextBox 19"/>
+          <p:cNvSpPr txBox="1"/>
+          <p:nvPr/>
+        </p:nvSpPr>
+        <p:spPr>
+          <a:xfrm>
+            <a:off x="1188720" y="4453128"/>
+            <a:ext cx="10271455" cy="786384"/>
+          </a:xfrm>
+          <a:prstGeom prst="rect">
+            <a:avLst/>
+          </a:prstGeom>
+          <a:noFill/>
+        </p:spPr>
+        <p:txBody>
+          <a:bodyPr wrap="square" anchor="ctr"/>
+          <a:lstStyle/>
+          <a:p>
+            <a:r>
+              <a:rPr sz="1500" b="1" i="0">
+                <a:solidFill>
+                  <a:srgbClr val="095292"/>
+                </a:solidFill>
+                <a:latin typeface="Calibri"/>
+              </a:rPr>
+              <a:t>Redacten cinco hallazgos priorizados como bloqueante, mayor o menor, cada uno con el formato Evidencia + Impacto + Sugerencia, todos referidos al código y ninguno a la persona; incluyan al menos un bloqueante si existe.</a:t>
+            </a:r>
+          </a:p>
+        </p:txBody>
+      </p:sp>
+      <p:sp>
+        <p:nvSpPr>
+          <p:cNvPr id="21" name="Rounded Rectangle 20"/>
+          <p:cNvSpPr/>
+          <p:nvPr/>
+        </p:nvSpPr>
+        <p:spPr>
+          <a:xfrm>
+            <a:off x="457200" y="5404104"/>
+            <a:ext cx="11277295" cy="950976"/>
+          </a:xfrm>
+          <a:prstGeom prst="roundRect">
+            <a:avLst>
+              <a:gd name="adj" fmla="val 12000"/>
+            </a:avLst>
+          </a:prstGeom>
+          <a:solidFill>
+            <a:srgbClr val="F2F2F2"/>
+          </a:solidFill>
+          <a:ln>
+            <a:noFill/>
+          </a:ln>
+        </p:spPr>
+        <p:style>
+          <a:lnRef idx="1">
+            <a:schemeClr val="accent1"/>
+          </a:lnRef>
+          <a:fillRef idx="3">
+            <a:schemeClr val="accent1"/>
+          </a:fillRef>
+          <a:effectRef idx="2">
+            <a:schemeClr val="accent1"/>
+          </a:effectRef>
+          <a:fontRef idx="minor">
+            <a:schemeClr val="lt1"/>
+          </a:fontRef>
+        </p:style>
+        <p:txBody>
+          <a:bodyPr rtlCol="0" anchor="ctr"/>
+          <a:lstStyle/>
+          <a:p>
+            <a:pPr algn="ctr"/>
+          </a:p>
+        </p:txBody>
+      </p:sp>
+      <p:sp>
+        <p:nvSpPr>
+          <p:cNvPr id="22" name="Rounded Rectangle 21"/>
+          <p:cNvSpPr/>
+          <p:nvPr/>
+        </p:nvSpPr>
+        <p:spPr>
+          <a:xfrm>
+            <a:off x="594360" y="5660136"/>
+            <a:ext cx="438912" cy="438912"/>
+          </a:xfrm>
+          <a:prstGeom prst="roundRect">
+            <a:avLst>
+              <a:gd name="adj" fmla="val 12000"/>
+            </a:avLst>
+          </a:prstGeom>
+          <a:solidFill>
+            <a:srgbClr val="095292"/>
+          </a:solidFill>
+          <a:ln>
+            <a:noFill/>
+          </a:ln>
+        </p:spPr>
+        <p:style>
+          <a:lnRef idx="1">
+            <a:schemeClr val="accent1"/>
+          </a:lnRef>
+          <a:fillRef idx="3">
+            <a:schemeClr val="accent1"/>
+          </a:fillRef>
+          <a:effectRef idx="2">
+            <a:schemeClr val="accent1"/>
+          </a:effectRef>
+          <a:fontRef idx="minor">
+            <a:schemeClr val="lt1"/>
+          </a:fontRef>
+        </p:style>
+        <p:txBody>
+          <a:bodyPr rtlCol="0" anchor="ctr"/>
+          <a:lstStyle/>
+          <a:p>
+            <a:pPr algn="ctr"/>
+          </a:p>
+        </p:txBody>
+      </p:sp>
+      <p:sp>
+        <p:nvSpPr>
+          <p:cNvPr id="23" name="TextBox 22"/>
+          <p:cNvSpPr txBox="1"/>
+          <p:nvPr/>
+        </p:nvSpPr>
+        <p:spPr>
+          <a:xfrm>
+            <a:off x="594360" y="5660136"/>
+            <a:ext cx="438912" cy="438912"/>
+          </a:xfrm>
+          <a:prstGeom prst="rect">
+            <a:avLst/>
+          </a:prstGeom>
+          <a:noFill/>
+        </p:spPr>
+        <p:txBody>
+          <a:bodyPr wrap="square" anchor="ctr"/>
+          <a:lstStyle/>
+          <a:p>
+            <a:pPr algn="ctr"/>
+            <a:r>
+              <a:rPr sz="1600" b="1" i="0">
+                <a:solidFill>
+                  <a:srgbClr val="FFFFFF"/>
+                </a:solidFill>
+                <a:latin typeface="Calibri"/>
+              </a:rPr>
+              <a:t>5</a:t>
+            </a:r>
+          </a:p>
+        </p:txBody>
+      </p:sp>
+      <p:sp>
+        <p:nvSpPr>
+          <p:cNvPr id="24" name="TextBox 23"/>
+          <p:cNvSpPr txBox="1"/>
+          <p:nvPr/>
+        </p:nvSpPr>
+        <p:spPr>
+          <a:xfrm>
+            <a:off x="1188720" y="5495544"/>
+            <a:ext cx="10271455" cy="786384"/>
+          </a:xfrm>
+          <a:prstGeom prst="rect">
+            <a:avLst/>
+          </a:prstGeom>
+          <a:noFill/>
+        </p:spPr>
+        <p:txBody>
+          <a:bodyPr wrap="square" anchor="ctr"/>
+          <a:lstStyle/>
+          <a:p>
+            <a:r>
+              <a:rPr sz="1500" b="1" i="0">
+                <a:solidFill>
+                  <a:srgbClr val="095292"/>
+                </a:solidFill>
+                <a:latin typeface="Calibri"/>
+              </a:rPr>
+              <a:t>Hagan la devolución cruzada de ocho minutos por proyecto revisado y cierren con el plan de corrección escrito por su autor: qué acepta y corrige, qué justifica y deja igual, y qué difiere, con responsable en cada línea.</a:t>
+            </a:r>
+          </a:p>
+        </p:txBody>
+      </p:sp>
+      <p:sp>
+        <p:nvSpPr>
+          <p:cNvPr id="25" name="TextBox 24"/>
+          <p:cNvSpPr txBox="1"/>
+          <p:nvPr/>
+        </p:nvSpPr>
+        <p:spPr>
+          <a:xfrm>
+            <a:off x="11185855" y="6473952"/>
+            <a:ext cx="640080" cy="274320"/>
+          </a:xfrm>
+          <a:prstGeom prst="rect">
+            <a:avLst/>
+          </a:prstGeom>
+          <a:noFill/>
+        </p:spPr>
+        <p:txBody>
+          <a:bodyPr wrap="square">
+            <a:spAutoFit/>
+          </a:bodyPr>
+          <a:lstStyle/>
+          <a:p>
+            <a:pPr algn="r"/>
+            <a:r>
+              <a:rPr sz="1100" b="0" i="0">
+                <a:solidFill>
+                  <a:srgbClr val="666666"/>
+                </a:solidFill>
+                <a:latin typeface="Calibri"/>
+              </a:rPr>
+              <a:t>25</a:t>
+            </a:r>
+          </a:p>
+        </p:txBody>
+      </p:sp>
+    </p:spTree>
+  </p:cSld>
+  <p:clrMapOvr>
+    <a:masterClrMapping/>
+  </p:clrMapOvr>
+</p:sld>
+</file>
+
+<file path=ppt/slides/slide26.xml><?xml version="1.0" encoding="utf-8"?>
+<p:sld xmlns:a="http://schemas.openxmlformats.org/drawingml/2006/main" xmlns:p="http://schemas.openxmlformats.org/presentationml/2006/main" xmlns:r="http://schemas.openxmlformats.org/officeDocument/2006/relationships">
+  <p:cSld>
+    <p:bg>
+      <p:bgPr>
+        <a:solidFill>
+          <a:srgbClr val="FFFFFF"/>
+        </a:solidFill>
+        <a:effectLst/>
+      </p:bgPr>
+    </p:bg>
+    <p:spTree>
+      <p:nvGrpSpPr>
+        <p:cNvPr id="1" name=""/>
+        <p:cNvGrpSpPr/>
+        <p:nvPr/>
+      </p:nvGrpSpPr>
+      <p:grpSpPr/>
+      <p:sp>
+        <p:nvSpPr>
+          <p:cNvPr id="2" name="Rectangle 1"/>
+          <p:cNvSpPr/>
+          <p:nvPr/>
+        </p:nvSpPr>
+        <p:spPr>
+          <a:xfrm>
+            <a:off x="0" y="0"/>
+            <a:ext cx="12191695" cy="960120"/>
+          </a:xfrm>
+          <a:prstGeom prst="rect">
+            <a:avLst/>
+          </a:prstGeom>
+          <a:solidFill>
+            <a:srgbClr val="095292"/>
+          </a:solidFill>
+          <a:ln>
+            <a:noFill/>
+          </a:ln>
+        </p:spPr>
+        <p:style>
+          <a:lnRef idx="1">
+            <a:schemeClr val="accent1"/>
+          </a:lnRef>
+          <a:fillRef idx="3">
+            <a:schemeClr val="accent1"/>
+          </a:fillRef>
+          <a:effectRef idx="2">
+            <a:schemeClr val="accent1"/>
+          </a:effectRef>
+          <a:fontRef idx="minor">
+            <a:schemeClr val="lt1"/>
+          </a:fontRef>
+        </p:style>
+        <p:txBody>
+          <a:bodyPr rtlCol="0" anchor="ctr"/>
+          <a:lstStyle/>
+          <a:p>
+            <a:pPr algn="ctr"/>
+          </a:p>
+        </p:txBody>
+      </p:sp>
+      <p:sp>
+        <p:nvSpPr>
+          <p:cNvPr id="3" name="Rectangle 2"/>
+          <p:cNvSpPr/>
+          <p:nvPr/>
+        </p:nvSpPr>
+        <p:spPr>
+          <a:xfrm>
+            <a:off x="0" y="960120"/>
+            <a:ext cx="12191695" cy="41148"/>
+          </a:xfrm>
+          <a:prstGeom prst="rect">
+            <a:avLst/>
+          </a:prstGeom>
+          <a:solidFill>
+            <a:srgbClr val="FFD000"/>
+          </a:solidFill>
+          <a:ln>
+            <a:noFill/>
+          </a:ln>
+        </p:spPr>
+        <p:style>
+          <a:lnRef idx="1">
+            <a:schemeClr val="accent1"/>
+          </a:lnRef>
+          <a:fillRef idx="3">
+            <a:schemeClr val="accent1"/>
+          </a:fillRef>
+          <a:effectRef idx="2">
+            <a:schemeClr val="accent1"/>
+          </a:effectRef>
+          <a:fontRef idx="minor">
+            <a:schemeClr val="lt1"/>
+          </a:fontRef>
+        </p:style>
+        <p:txBody>
+          <a:bodyPr rtlCol="0" anchor="ctr"/>
+          <a:lstStyle/>
+          <a:p>
+            <a:pPr algn="ctr"/>
+          </a:p>
+        </p:txBody>
+      </p:sp>
+      <p:sp>
+        <p:nvSpPr>
+          <p:cNvPr id="4" name="TextBox 3"/>
+          <p:cNvSpPr txBox="1"/>
+          <p:nvPr/>
+        </p:nvSpPr>
+        <p:spPr>
+          <a:xfrm>
+            <a:off x="457200" y="164592"/>
+            <a:ext cx="11277295" cy="502920"/>
+          </a:xfrm>
+          <a:prstGeom prst="rect">
+            <a:avLst/>
+          </a:prstGeom>
+          <a:noFill/>
+        </p:spPr>
+        <p:txBody>
+          <a:bodyPr wrap="square">
+            <a:spAutoFit/>
+          </a:bodyPr>
+          <a:lstStyle/>
+          <a:p>
+            <a:r>
+              <a:rPr sz="2600" b="1" i="0">
+                <a:solidFill>
+                  <a:srgbClr val="FFFFFF"/>
+                </a:solidFill>
+                <a:latin typeface="Calibri"/>
+              </a:rPr>
+              <a:t>Antes de entregar — autochequeo</a:t>
+            </a:r>
+          </a:p>
+        </p:txBody>
+      </p:sp>
+      <p:sp>
+        <p:nvSpPr>
+          <p:cNvPr id="5" name="Rounded Rectangle 4"/>
+          <p:cNvSpPr/>
+          <p:nvPr/>
+        </p:nvSpPr>
+        <p:spPr>
+          <a:xfrm>
+            <a:off x="457200" y="1261872"/>
+            <a:ext cx="11277295" cy="566928"/>
+          </a:xfrm>
+          <a:prstGeom prst="roundRect">
+            <a:avLst>
+              <a:gd name="adj" fmla="val 12000"/>
+            </a:avLst>
+          </a:prstGeom>
+          <a:solidFill>
+            <a:srgbClr val="F2F2F2"/>
+          </a:solidFill>
+          <a:ln>
+            <a:noFill/>
+          </a:ln>
+        </p:spPr>
+        <p:style>
+          <a:lnRef idx="1">
+            <a:schemeClr val="accent1"/>
+          </a:lnRef>
+          <a:fillRef idx="3">
+            <a:schemeClr val="accent1"/>
+          </a:fillRef>
+          <a:effectRef idx="2">
+            <a:schemeClr val="accent1"/>
+          </a:effectRef>
+          <a:fontRef idx="minor">
+            <a:schemeClr val="lt1"/>
+          </a:fontRef>
+        </p:style>
+        <p:txBody>
+          <a:bodyPr rtlCol="0" anchor="ctr"/>
+          <a:lstStyle/>
+          <a:p>
+            <a:pPr algn="ctr"/>
+          </a:p>
+        </p:txBody>
+      </p:sp>
+      <p:sp>
+        <p:nvSpPr>
+          <p:cNvPr id="6" name="Rectangle 5"/>
+          <p:cNvSpPr/>
+          <p:nvPr/>
+        </p:nvSpPr>
+        <p:spPr>
+          <a:xfrm>
+            <a:off x="640080" y="1408175"/>
+            <a:ext cx="274320" cy="274320"/>
+          </a:xfrm>
+          <a:prstGeom prst="rect">
+            <a:avLst/>
+          </a:prstGeom>
+          <a:solidFill>
+            <a:srgbClr val="FFFFFF"/>
+          </a:solidFill>
+          <a:ln>
+            <a:solidFill>
+              <a:srgbClr val="333333"/>
+            </a:solidFill>
+          </a:ln>
+        </p:spPr>
+        <p:style>
+          <a:lnRef idx="1">
+            <a:schemeClr val="accent1"/>
+          </a:lnRef>
+          <a:fillRef idx="3">
+            <a:schemeClr val="accent1"/>
+          </a:fillRef>
+          <a:effectRef idx="2">
+            <a:schemeClr val="accent1"/>
+          </a:effectRef>
+          <a:fontRef idx="minor">
+            <a:schemeClr val="lt1"/>
+          </a:fontRef>
+        </p:style>
+        <p:txBody>
+          <a:bodyPr rtlCol="0" anchor="ctr"/>
+          <a:lstStyle/>
+          <a:p>
+            <a:pPr algn="ctr"/>
+          </a:p>
+        </p:txBody>
+      </p:sp>
+      <p:sp>
+        <p:nvSpPr>
+          <p:cNvPr id="7" name="Rectangle 6"/>
+          <p:cNvSpPr/>
+          <p:nvPr/>
+        </p:nvSpPr>
+        <p:spPr>
+          <a:xfrm>
+            <a:off x="640080" y="1408175"/>
+            <a:ext cx="73152" cy="274320"/>
+          </a:xfrm>
+          <a:prstGeom prst="rect">
+            <a:avLst/>
+          </a:prstGeom>
+          <a:solidFill>
+            <a:srgbClr val="269CCB"/>
+          </a:solidFill>
+          <a:ln>
+            <a:noFill/>
+          </a:ln>
+        </p:spPr>
+        <p:style>
+          <a:lnRef idx="1">
+            <a:schemeClr val="accent1"/>
+          </a:lnRef>
+          <a:fillRef idx="3">
+            <a:schemeClr val="accent1"/>
+          </a:fillRef>
+          <a:effectRef idx="2">
+            <a:schemeClr val="accent1"/>
+          </a:effectRef>
+          <a:fontRef idx="minor">
+            <a:schemeClr val="lt1"/>
+          </a:fontRef>
+        </p:style>
+        <p:txBody>
+          <a:bodyPr rtlCol="0" anchor="ctr"/>
+          <a:lstStyle/>
+          <a:p>
+            <a:pPr algn="ctr"/>
+          </a:p>
+        </p:txBody>
+      </p:sp>
+      <p:sp>
+        <p:nvSpPr>
+          <p:cNvPr id="8" name="TextBox 7"/>
+          <p:cNvSpPr txBox="1"/>
+          <p:nvPr/>
+        </p:nvSpPr>
+        <p:spPr>
+          <a:xfrm>
+            <a:off x="1097280" y="1353312"/>
+            <a:ext cx="10362895" cy="402336"/>
+          </a:xfrm>
+          <a:prstGeom prst="rect">
+            <a:avLst/>
+          </a:prstGeom>
+          <a:noFill/>
+        </p:spPr>
+        <p:txBody>
+          <a:bodyPr wrap="square" anchor="ctr"/>
+          <a:lstStyle/>
+          <a:p>
+            <a:r>
+              <a:rPr sz="1500" b="0" i="0">
+                <a:solidFill>
+                  <a:srgbClr val="333333"/>
+                </a:solidFill>
+                <a:latin typeface="Calibri"/>
+              </a:rPr>
+              <a:t>¿Su informe le sirve al otro estudiante para trabajar esta misma tarde, o solo le dice que algo está mal sin decirle dónde ni qué hacer?</a:t>
+            </a:r>
+          </a:p>
+        </p:txBody>
+      </p:sp>
+      <p:sp>
+        <p:nvSpPr>
+          <p:cNvPr id="9" name="Rounded Rectangle 8"/>
+          <p:cNvSpPr/>
+          <p:nvPr/>
+        </p:nvSpPr>
+        <p:spPr>
+          <a:xfrm>
+            <a:off x="457200" y="1938528"/>
+            <a:ext cx="11277295" cy="566928"/>
+          </a:xfrm>
+          <a:prstGeom prst="roundRect">
+            <a:avLst>
+              <a:gd name="adj" fmla="val 12000"/>
+            </a:avLst>
+          </a:prstGeom>
+          <a:solidFill>
+            <a:srgbClr val="F2F2F2"/>
+          </a:solidFill>
+          <a:ln>
+            <a:noFill/>
+          </a:ln>
+        </p:spPr>
+        <p:style>
+          <a:lnRef idx="1">
+            <a:schemeClr val="accent1"/>
+          </a:lnRef>
+          <a:fillRef idx="3">
+            <a:schemeClr val="accent1"/>
+          </a:fillRef>
+          <a:effectRef idx="2">
+            <a:schemeClr val="accent1"/>
+          </a:effectRef>
+          <a:fontRef idx="minor">
+            <a:schemeClr val="lt1"/>
+          </a:fontRef>
+        </p:style>
+        <p:txBody>
+          <a:bodyPr rtlCol="0" anchor="ctr"/>
+          <a:lstStyle/>
+          <a:p>
+            <a:pPr algn="ctr"/>
+          </a:p>
+        </p:txBody>
+      </p:sp>
+      <p:sp>
+        <p:nvSpPr>
+          <p:cNvPr id="10" name="Rectangle 9"/>
+          <p:cNvSpPr/>
+          <p:nvPr/>
+        </p:nvSpPr>
+        <p:spPr>
+          <a:xfrm>
+            <a:off x="640080" y="2084832"/>
+            <a:ext cx="274320" cy="274320"/>
+          </a:xfrm>
+          <a:prstGeom prst="rect">
+            <a:avLst/>
+          </a:prstGeom>
+          <a:solidFill>
+            <a:srgbClr val="FFFFFF"/>
+          </a:solidFill>
+          <a:ln>
+            <a:solidFill>
+              <a:srgbClr val="333333"/>
+            </a:solidFill>
+          </a:ln>
+        </p:spPr>
+        <p:style>
+          <a:lnRef idx="1">
+            <a:schemeClr val="accent1"/>
+          </a:lnRef>
+          <a:fillRef idx="3">
+            <a:schemeClr val="accent1"/>
+          </a:fillRef>
+          <a:effectRef idx="2">
+            <a:schemeClr val="accent1"/>
+          </a:effectRef>
+          <a:fontRef idx="minor">
+            <a:schemeClr val="lt1"/>
+          </a:fontRef>
+        </p:style>
+        <p:txBody>
+          <a:bodyPr rtlCol="0" anchor="ctr"/>
+          <a:lstStyle/>
+          <a:p>
+            <a:pPr algn="ctr"/>
+          </a:p>
+        </p:txBody>
+      </p:sp>
+      <p:sp>
+        <p:nvSpPr>
+          <p:cNvPr id="11" name="Rectangle 10"/>
+          <p:cNvSpPr/>
+          <p:nvPr/>
+        </p:nvSpPr>
+        <p:spPr>
+          <a:xfrm>
+            <a:off x="640080" y="2084832"/>
+            <a:ext cx="73152" cy="274320"/>
+          </a:xfrm>
+          <a:prstGeom prst="rect">
+            <a:avLst/>
+          </a:prstGeom>
+          <a:solidFill>
+            <a:srgbClr val="269CCB"/>
+          </a:solidFill>
+          <a:ln>
+            <a:noFill/>
+          </a:ln>
+        </p:spPr>
+        <p:style>
+          <a:lnRef idx="1">
+            <a:schemeClr val="accent1"/>
+          </a:lnRef>
+          <a:fillRef idx="3">
+            <a:schemeClr val="accent1"/>
+          </a:fillRef>
+          <a:effectRef idx="2">
+            <a:schemeClr val="accent1"/>
+          </a:effectRef>
+          <a:fontRef idx="minor">
+            <a:schemeClr val="lt1"/>
+          </a:fontRef>
+        </p:style>
+        <p:txBody>
+          <a:bodyPr rtlCol="0" anchor="ctr"/>
+          <a:lstStyle/>
+          <a:p>
+            <a:pPr algn="ctr"/>
+          </a:p>
+        </p:txBody>
+      </p:sp>
+      <p:sp>
+        <p:nvSpPr>
+          <p:cNvPr id="12" name="TextBox 11"/>
+          <p:cNvSpPr txBox="1"/>
+          <p:nvPr/>
+        </p:nvSpPr>
+        <p:spPr>
+          <a:xfrm>
+            <a:off x="1097280" y="2029968"/>
+            <a:ext cx="10362895" cy="402336"/>
+          </a:xfrm>
+          <a:prstGeom prst="rect">
+            <a:avLst/>
+          </a:prstGeom>
+          <a:noFill/>
+        </p:spPr>
+        <p:txBody>
+          <a:bodyPr wrap="square" anchor="ctr"/>
+          <a:lstStyle/>
+          <a:p>
+            <a:r>
+              <a:rPr sz="1500" b="0" i="0">
+                <a:solidFill>
+                  <a:srgbClr val="333333"/>
+                </a:solidFill>
+                <a:latin typeface="Calibri"/>
+              </a:rPr>
+              <a:t>Si tuviera que borrar todos sus comentarios menos uno, ¿cuál dejaría, y por qué ese es más importante que los otros cuatro?</a:t>
+            </a:r>
+          </a:p>
+        </p:txBody>
+      </p:sp>
+      <p:sp>
+        <p:nvSpPr>
+          <p:cNvPr id="13" name="Rounded Rectangle 12"/>
+          <p:cNvSpPr/>
+          <p:nvPr/>
+        </p:nvSpPr>
+        <p:spPr>
+          <a:xfrm>
+            <a:off x="457200" y="2615184"/>
+            <a:ext cx="11277295" cy="566928"/>
+          </a:xfrm>
+          <a:prstGeom prst="roundRect">
+            <a:avLst>
+              <a:gd name="adj" fmla="val 12000"/>
+            </a:avLst>
+          </a:prstGeom>
+          <a:solidFill>
+            <a:srgbClr val="F2F2F2"/>
+          </a:solidFill>
+          <a:ln>
+            <a:noFill/>
+          </a:ln>
+        </p:spPr>
+        <p:style>
+          <a:lnRef idx="1">
+            <a:schemeClr val="accent1"/>
+          </a:lnRef>
+          <a:fillRef idx="3">
+            <a:schemeClr val="accent1"/>
+          </a:fillRef>
+          <a:effectRef idx="2">
+            <a:schemeClr val="accent1"/>
+          </a:effectRef>
+          <a:fontRef idx="minor">
+            <a:schemeClr val="lt1"/>
+          </a:fontRef>
+        </p:style>
+        <p:txBody>
+          <a:bodyPr rtlCol="0" anchor="ctr"/>
+          <a:lstStyle/>
+          <a:p>
+            <a:pPr algn="ctr"/>
+          </a:p>
+        </p:txBody>
+      </p:sp>
+      <p:sp>
+        <p:nvSpPr>
+          <p:cNvPr id="14" name="Rectangle 13"/>
+          <p:cNvSpPr/>
+          <p:nvPr/>
+        </p:nvSpPr>
+        <p:spPr>
+          <a:xfrm>
+            <a:off x="640080" y="2761488"/>
+            <a:ext cx="274320" cy="274320"/>
+          </a:xfrm>
+          <a:prstGeom prst="rect">
+            <a:avLst/>
+          </a:prstGeom>
+          <a:solidFill>
+            <a:srgbClr val="FFFFFF"/>
+          </a:solidFill>
+          <a:ln>
+            <a:solidFill>
+              <a:srgbClr val="333333"/>
+            </a:solidFill>
+          </a:ln>
+        </p:spPr>
+        <p:style>
+          <a:lnRef idx="1">
+            <a:schemeClr val="accent1"/>
+          </a:lnRef>
+          <a:fillRef idx="3">
+            <a:schemeClr val="accent1"/>
+          </a:fillRef>
+          <a:effectRef idx="2">
+            <a:schemeClr val="accent1"/>
+          </a:effectRef>
+          <a:fontRef idx="minor">
+            <a:schemeClr val="lt1"/>
+          </a:fontRef>
+        </p:style>
+        <p:txBody>
+          <a:bodyPr rtlCol="0" anchor="ctr"/>
+          <a:lstStyle/>
+          <a:p>
+            <a:pPr algn="ctr"/>
+          </a:p>
+        </p:txBody>
+      </p:sp>
+      <p:sp>
+        <p:nvSpPr>
+          <p:cNvPr id="15" name="Rectangle 14"/>
+          <p:cNvSpPr/>
+          <p:nvPr/>
+        </p:nvSpPr>
+        <p:spPr>
+          <a:xfrm>
+            <a:off x="640080" y="2761488"/>
+            <a:ext cx="73152" cy="274320"/>
+          </a:xfrm>
+          <a:prstGeom prst="rect">
+            <a:avLst/>
+          </a:prstGeom>
+          <a:solidFill>
+            <a:srgbClr val="269CCB"/>
+          </a:solidFill>
+          <a:ln>
+            <a:noFill/>
+          </a:ln>
+        </p:spPr>
+        <p:style>
+          <a:lnRef idx="1">
+            <a:schemeClr val="accent1"/>
+          </a:lnRef>
+          <a:fillRef idx="3">
+            <a:schemeClr val="accent1"/>
+          </a:fillRef>
+          <a:effectRef idx="2">
+            <a:schemeClr val="accent1"/>
+          </a:effectRef>
+          <a:fontRef idx="minor">
+            <a:schemeClr val="lt1"/>
+          </a:fontRef>
+        </p:style>
+        <p:txBody>
+          <a:bodyPr rtlCol="0" anchor="ctr"/>
+          <a:lstStyle/>
+          <a:p>
+            <a:pPr algn="ctr"/>
+          </a:p>
+        </p:txBody>
+      </p:sp>
+      <p:sp>
+        <p:nvSpPr>
+          <p:cNvPr id="16" name="TextBox 15"/>
+          <p:cNvSpPr txBox="1"/>
+          <p:nvPr/>
+        </p:nvSpPr>
+        <p:spPr>
+          <a:xfrm>
+            <a:off x="1097280" y="2706624"/>
+            <a:ext cx="10362895" cy="402336"/>
+          </a:xfrm>
+          <a:prstGeom prst="rect">
+            <a:avLst/>
+          </a:prstGeom>
+          <a:noFill/>
+        </p:spPr>
+        <p:txBody>
+          <a:bodyPr wrap="square" anchor="ctr"/>
+          <a:lstStyle/>
+          <a:p>
+            <a:r>
+              <a:rPr sz="1500" b="0" i="0">
+                <a:solidFill>
+                  <a:srgbClr val="333333"/>
+                </a:solidFill>
+                <a:latin typeface="Calibri"/>
+              </a:rPr>
+              <a:t>¿Cuántos de sus hallazgos los comprobó ejecutando y cuántos los está suponiendo por haber leído el código?</a:t>
+            </a:r>
+          </a:p>
+        </p:txBody>
+      </p:sp>
+      <p:sp>
+        <p:nvSpPr>
+          <p:cNvPr id="17" name="TextBox 16"/>
+          <p:cNvSpPr txBox="1"/>
+          <p:nvPr/>
+        </p:nvSpPr>
+        <p:spPr>
+          <a:xfrm>
+            <a:off x="11185855" y="6473952"/>
+            <a:ext cx="640080" cy="274320"/>
+          </a:xfrm>
+          <a:prstGeom prst="rect">
+            <a:avLst/>
+          </a:prstGeom>
+          <a:noFill/>
+        </p:spPr>
+        <p:txBody>
+          <a:bodyPr wrap="square">
+            <a:spAutoFit/>
+          </a:bodyPr>
+          <a:lstStyle/>
+          <a:p>
+            <a:pPr algn="r"/>
+            <a:r>
+              <a:rPr sz="1100" b="0" i="0">
+                <a:solidFill>
+                  <a:srgbClr val="666666"/>
+                </a:solidFill>
+                <a:latin typeface="Calibri"/>
+              </a:rPr>
+              <a:t>26</a:t>
+            </a:r>
+          </a:p>
+        </p:txBody>
+      </p:sp>
+    </p:spTree>
+  </p:cSld>
+  <p:clrMapOvr>
+    <a:masterClrMapping/>
+  </p:clrMapOvr>
+</p:sld>
+</file>
+
+<file path=ppt/slides/slide27.xml><?xml version="1.0" encoding="utf-8"?>
+<p:sld xmlns:a="http://schemas.openxmlformats.org/drawingml/2006/main" xmlns:p="http://schemas.openxmlformats.org/presentationml/2006/main" xmlns:r="http://schemas.openxmlformats.org/officeDocument/2006/relationships">
+  <p:cSld>
+    <p:bg>
+      <p:bgPr>
+        <a:solidFill>
+          <a:srgbClr val="FFFFFF"/>
+        </a:solidFill>
+        <a:effectLst/>
+      </p:bgPr>
+    </p:bg>
+    <p:spTree>
+      <p:nvGrpSpPr>
+        <p:cNvPr id="1" name=""/>
+        <p:cNvGrpSpPr/>
+        <p:nvPr/>
+      </p:nvGrpSpPr>
+      <p:grpSpPr/>
+      <p:sp>
+        <p:nvSpPr>
+          <p:cNvPr id="2" name="Rectangle 1"/>
+          <p:cNvSpPr/>
+          <p:nvPr/>
+        </p:nvSpPr>
+        <p:spPr>
+          <a:xfrm>
+            <a:off x="0" y="0"/>
+            <a:ext cx="12191695" cy="960120"/>
+          </a:xfrm>
+          <a:prstGeom prst="rect">
+            <a:avLst/>
+          </a:prstGeom>
+          <a:solidFill>
+            <a:srgbClr val="095292"/>
+          </a:solidFill>
+          <a:ln>
+            <a:noFill/>
+          </a:ln>
+        </p:spPr>
+        <p:style>
+          <a:lnRef idx="1">
+            <a:schemeClr val="accent1"/>
+          </a:lnRef>
+          <a:fillRef idx="3">
+            <a:schemeClr val="accent1"/>
+          </a:fillRef>
+          <a:effectRef idx="2">
+            <a:schemeClr val="accent1"/>
+          </a:effectRef>
+          <a:fontRef idx="minor">
+            <a:schemeClr val="lt1"/>
+          </a:fontRef>
+        </p:style>
+        <p:txBody>
+          <a:bodyPr rtlCol="0" anchor="ctr"/>
+          <a:lstStyle/>
+          <a:p>
+            <a:pPr algn="ctr"/>
+          </a:p>
+        </p:txBody>
+      </p:sp>
+      <p:sp>
+        <p:nvSpPr>
+          <p:cNvPr id="3" name="Rectangle 2"/>
+          <p:cNvSpPr/>
+          <p:nvPr/>
+        </p:nvSpPr>
+        <p:spPr>
+          <a:xfrm>
+            <a:off x="0" y="960120"/>
+            <a:ext cx="12191695" cy="41148"/>
+          </a:xfrm>
+          <a:prstGeom prst="rect">
+            <a:avLst/>
+          </a:prstGeom>
+          <a:solidFill>
+            <a:srgbClr val="FFD000"/>
+          </a:solidFill>
+          <a:ln>
+            <a:noFill/>
+          </a:ln>
+        </p:spPr>
+        <p:style>
+          <a:lnRef idx="1">
+            <a:schemeClr val="accent1"/>
+          </a:lnRef>
+          <a:fillRef idx="3">
+            <a:schemeClr val="accent1"/>
+          </a:fillRef>
+          <a:effectRef idx="2">
+            <a:schemeClr val="accent1"/>
+          </a:effectRef>
+          <a:fontRef idx="minor">
+            <a:schemeClr val="lt1"/>
+          </a:fontRef>
+        </p:style>
+        <p:txBody>
+          <a:bodyPr rtlCol="0" anchor="ctr"/>
+          <a:lstStyle/>
+          <a:p>
+            <a:pPr algn="ctr"/>
+          </a:p>
+        </p:txBody>
+      </p:sp>
+      <p:sp>
+        <p:nvSpPr>
+          <p:cNvPr id="4" name="TextBox 3"/>
+          <p:cNvSpPr txBox="1"/>
+          <p:nvPr/>
+        </p:nvSpPr>
+        <p:spPr>
+          <a:xfrm>
+            <a:off x="457200" y="164592"/>
+            <a:ext cx="11277295" cy="502920"/>
+          </a:xfrm>
+          <a:prstGeom prst="rect">
+            <a:avLst/>
+          </a:prstGeom>
+          <a:noFill/>
+        </p:spPr>
+        <p:txBody>
+          <a:bodyPr wrap="square">
+            <a:spAutoFit/>
+          </a:bodyPr>
+          <a:lstStyle/>
+          <a:p>
+            <a:r>
+              <a:rPr sz="2600" b="1" i="0">
+                <a:solidFill>
+                  <a:srgbClr val="FFFFFF"/>
+                </a:solidFill>
+                <a:latin typeface="Calibri"/>
+              </a:rPr>
+              <a:t>Criterios de exito / entregable</a:t>
+            </a:r>
+          </a:p>
+        </p:txBody>
+      </p:sp>
+      <p:sp>
+        <p:nvSpPr>
+          <p:cNvPr id="5" name="TextBox 4"/>
+          <p:cNvSpPr txBox="1"/>
+          <p:nvPr/>
+        </p:nvSpPr>
+        <p:spPr>
+          <a:xfrm>
+            <a:off x="457200" y="1170432"/>
+            <a:ext cx="11277295" cy="5230368"/>
+          </a:xfrm>
+          <a:prstGeom prst="rect">
+            <a:avLst/>
+          </a:prstGeom>
+          <a:noFill/>
+        </p:spPr>
+        <p:txBody>
+          <a:bodyPr wrap="square">
+            <a:spAutoFit/>
+          </a:bodyPr>
+          <a:lstStyle/>
+          <a:p>
+            <a:pPr>
+              <a:spcAft>
+                <a:spcPts val="800"/>
+              </a:spcAft>
+            </a:pPr>
+            <a:r>
+              <a:rPr sz="2000" b="0" i="0">
+                <a:solidFill>
+                  <a:srgbClr val="333333"/>
+                </a:solidFill>
+                <a:latin typeface="Calibri"/>
+              </a:rPr>
+              <a:t>–   </a:t>
+            </a:r>
+            <a:r>
+              <a:rPr sz="2000" b="1" i="0">
+                <a:solidFill>
+                  <a:srgbClr val="333333"/>
+                </a:solidFill>
+                <a:latin typeface="Calibri"/>
+              </a:rPr>
+              <a:t>Entregable:</a:t>
+            </a:r>
+            <a:r>
+              <a:rPr sz="2000" b="0" i="0">
+                <a:solidFill>
+                  <a:srgbClr val="333333"/>
+                </a:solidFill>
+                <a:latin typeface="Calibri"/>
+              </a:rPr>
+              <a:t> Informe de revisión de una página sobre el proyecto asignado (el de otro estudiante; si el docente autorizó equipos, el de otro equipo): checklist diligenciado con evidencia archivo:línea y cinco hallazgos priorizados con formato Evidencia + Impacto + Sugerencia, subido a la plataforma del curso.</a:t>
+            </a:r>
+          </a:p>
+          <a:p>
+            <a:pPr>
+              <a:spcAft>
+                <a:spcPts val="800"/>
+              </a:spcAft>
+            </a:pPr>
+            <a:r>
+              <a:rPr sz="2000" b="0" i="0">
+                <a:solidFill>
+                  <a:srgbClr val="333333"/>
+                </a:solidFill>
+                <a:latin typeface="Calibri"/>
+              </a:rPr>
+              <a:t>–   </a:t>
+            </a:r>
+            <a:r>
+              <a:rPr sz="2000" b="1" i="0">
+                <a:solidFill>
+                  <a:srgbClr val="333333"/>
+                </a:solidFill>
+                <a:latin typeface="Calibri"/>
+              </a:rPr>
+              <a:t>Exito:</a:t>
+            </a:r>
+            <a:r>
+              <a:rPr sz="2000" b="0" i="0">
+                <a:solidFill>
+                  <a:srgbClr val="333333"/>
+                </a:solidFill>
+                <a:latin typeface="Calibri"/>
+              </a:rPr>
+              <a:t> El informe demuestra que el proyecto fue ejecutado: incluye el resultado de los cuatro casos borde con el mensaje o la excepción textual observada.</a:t>
+            </a:r>
+          </a:p>
+          <a:p>
+            <a:pPr>
+              <a:spcAft>
+                <a:spcPts val="800"/>
+              </a:spcAft>
+            </a:pPr>
+            <a:r>
+              <a:rPr sz="2000" b="0" i="0">
+                <a:solidFill>
+                  <a:srgbClr val="333333"/>
+                </a:solidFill>
+                <a:latin typeface="Calibri"/>
+              </a:rPr>
+              <a:t>–   </a:t>
+            </a:r>
+            <a:r>
+              <a:rPr sz="2000" b="1" i="0">
+                <a:solidFill>
+                  <a:srgbClr val="333333"/>
+                </a:solidFill>
+                <a:latin typeface="Calibri"/>
+              </a:rPr>
+              <a:t>Exito:</a:t>
+            </a:r>
+            <a:r>
+              <a:rPr sz="2000" b="0" i="0">
+                <a:solidFill>
+                  <a:srgbClr val="333333"/>
+                </a:solidFill>
+                <a:latin typeface="Calibri"/>
+              </a:rPr>
+              <a:t> El checklist está completo y todo ítem marcado 'no cumple' trae evidencia localizable en formato archivo:línea o pasos para reproducir.</a:t>
+            </a:r>
+          </a:p>
+          <a:p>
+            <a:pPr>
+              <a:spcAft>
+                <a:spcPts val="800"/>
+              </a:spcAft>
+            </a:pPr>
+            <a:r>
+              <a:rPr sz="2000" b="0" i="0">
+                <a:solidFill>
+                  <a:srgbClr val="333333"/>
+                </a:solidFill>
+                <a:latin typeface="Calibri"/>
+              </a:rPr>
+              <a:t>–   </a:t>
+            </a:r>
+            <a:r>
+              <a:rPr sz="2000" b="1" i="0">
+                <a:solidFill>
+                  <a:srgbClr val="333333"/>
+                </a:solidFill>
+                <a:latin typeface="Calibri"/>
+              </a:rPr>
+              <a:t>Exito:</a:t>
+            </a:r>
+            <a:r>
+              <a:rPr sz="2000" b="0" i="0">
+                <a:solidFill>
+                  <a:srgbClr val="333333"/>
+                </a:solidFill>
+                <a:latin typeface="Calibri"/>
+              </a:rPr>
+              <a:t> Los cinco hallazgos están priorizados y redactados con Evidencia + Impacto + Sugerencia; ninguno se refiere a la persona ni al esfuerzo que puso el otro estudiante.</a:t>
+            </a:r>
+          </a:p>
+          <a:p>
+            <a:pPr>
+              <a:spcAft>
+                <a:spcPts val="800"/>
+              </a:spcAft>
+            </a:pPr>
+            <a:r>
+              <a:rPr sz="2000" b="0" i="0">
+                <a:solidFill>
+                  <a:srgbClr val="333333"/>
+                </a:solidFill>
+                <a:latin typeface="Calibri"/>
+              </a:rPr>
+              <a:t>–   </a:t>
+            </a:r>
+            <a:r>
+              <a:rPr sz="2000" b="1" i="0">
+                <a:solidFill>
+                  <a:srgbClr val="333333"/>
+                </a:solidFill>
+                <a:latin typeface="Calibri"/>
+              </a:rPr>
+              <a:t>Exito:</a:t>
+            </a:r>
+            <a:r>
+              <a:rPr sz="2000" b="0" i="0">
+                <a:solidFill>
+                  <a:srgbClr val="333333"/>
+                </a:solidFill>
+                <a:latin typeface="Calibri"/>
+              </a:rPr>
+              <a:t> El autor del proyecto entrega su plan de corrección con las tres decisiones posibles (acepto, justifico, difiero) y un responsable por línea.</a:t>
+            </a:r>
+          </a:p>
+          <a:p>
+            <a:pPr>
+              <a:spcAft>
+                <a:spcPts val="800"/>
+              </a:spcAft>
+            </a:pPr>
+            <a:r>
+              <a:rPr sz="2000" b="0" i="0">
+                <a:solidFill>
+                  <a:srgbClr val="333333"/>
+                </a:solidFill>
+                <a:latin typeface="Calibri"/>
+              </a:rPr>
+              <a:t>–   </a:t>
+            </a:r>
+            <a:r>
+              <a:rPr sz="2000" b="1" i="0">
+                <a:solidFill>
+                  <a:srgbClr val="333333"/>
+                </a:solidFill>
+                <a:latin typeface="Calibri"/>
+              </a:rPr>
+              <a:t>Entrega en la plataforma del curso</a:t>
+            </a:r>
+            <a:r>
+              <a:rPr sz="2000" b="0" i="0">
+                <a:solidFill>
+                  <a:srgbClr val="333333"/>
+                </a:solidFill>
+                <a:latin typeface="Calibri"/>
+              </a:rPr>
+              <a:t> — en la fecha que indique el docente.</a:t>
+            </a:r>
+          </a:p>
+        </p:txBody>
+      </p:sp>
+      <p:sp>
+        <p:nvSpPr>
+          <p:cNvPr id="6" name="TextBox 5"/>
+          <p:cNvSpPr txBox="1"/>
+          <p:nvPr/>
+        </p:nvSpPr>
+        <p:spPr>
+          <a:xfrm>
+            <a:off x="11185855" y="6473952"/>
+            <a:ext cx="640080" cy="274320"/>
+          </a:xfrm>
+          <a:prstGeom prst="rect">
+            <a:avLst/>
+          </a:prstGeom>
+          <a:noFill/>
+        </p:spPr>
+        <p:txBody>
+          <a:bodyPr wrap="square">
+            <a:spAutoFit/>
+          </a:bodyPr>
+          <a:lstStyle/>
+          <a:p>
+            <a:pPr algn="r"/>
+            <a:r>
+              <a:rPr sz="1100" b="0" i="0">
+                <a:solidFill>
+                  <a:srgbClr val="666666"/>
+                </a:solidFill>
+                <a:latin typeface="Calibri"/>
+              </a:rPr>
+              <a:t>27</a:t>
+            </a:r>
+          </a:p>
+        </p:txBody>
+      </p:sp>
+    </p:spTree>
+  </p:cSld>
+  <p:clrMapOvr>
+    <a:masterClrMapping/>
+  </p:clrMapOvr>
+</p:sld>
+</file>
+
+<file path=ppt/slides/slide28.xml><?xml version="1.0" encoding="utf-8"?>
+<p:sld xmlns:a="http://schemas.openxmlformats.org/drawingml/2006/main" xmlns:p="http://schemas.openxmlformats.org/presentationml/2006/main" xmlns:r="http://schemas.openxmlformats.org/officeDocument/2006/relationships">
+  <p:cSld>
+    <p:bg>
+      <p:bgPr>
+        <a:solidFill>
+          <a:srgbClr val="FFFFFF"/>
+        </a:solidFill>
+        <a:effectLst/>
+      </p:bgPr>
+    </p:bg>
+    <p:spTree>
+      <p:nvGrpSpPr>
+        <p:cNvPr id="1" name=""/>
+        <p:cNvGrpSpPr/>
+        <p:nvPr/>
+      </p:nvGrpSpPr>
+      <p:grpSpPr/>
+      <p:sp>
+        <p:nvSpPr>
+          <p:cNvPr id="2" name="Rectangle 1"/>
+          <p:cNvSpPr/>
+          <p:nvPr/>
+        </p:nvSpPr>
+        <p:spPr>
+          <a:xfrm>
+            <a:off x="0" y="0"/>
+            <a:ext cx="12191695" cy="960120"/>
+          </a:xfrm>
+          <a:prstGeom prst="rect">
+            <a:avLst/>
+          </a:prstGeom>
+          <a:solidFill>
+            <a:srgbClr val="095292"/>
+          </a:solidFill>
+          <a:ln>
+            <a:noFill/>
+          </a:ln>
+        </p:spPr>
+        <p:style>
+          <a:lnRef idx="1">
+            <a:schemeClr val="accent1"/>
+          </a:lnRef>
+          <a:fillRef idx="3">
+            <a:schemeClr val="accent1"/>
+          </a:fillRef>
+          <a:effectRef idx="2">
+            <a:schemeClr val="accent1"/>
+          </a:effectRef>
+          <a:fontRef idx="minor">
+            <a:schemeClr val="lt1"/>
+          </a:fontRef>
+        </p:style>
+        <p:txBody>
+          <a:bodyPr rtlCol="0" anchor="ctr"/>
+          <a:lstStyle/>
+          <a:p>
+            <a:pPr algn="ctr"/>
+          </a:p>
+        </p:txBody>
+      </p:sp>
+      <p:sp>
+        <p:nvSpPr>
+          <p:cNvPr id="3" name="Rectangle 2"/>
+          <p:cNvSpPr/>
+          <p:nvPr/>
+        </p:nvSpPr>
+        <p:spPr>
+          <a:xfrm>
+            <a:off x="0" y="960120"/>
+            <a:ext cx="12191695" cy="41148"/>
+          </a:xfrm>
+          <a:prstGeom prst="rect">
+            <a:avLst/>
+          </a:prstGeom>
+          <a:solidFill>
+            <a:srgbClr val="FFD000"/>
+          </a:solidFill>
+          <a:ln>
+            <a:noFill/>
+          </a:ln>
+        </p:spPr>
+        <p:style>
+          <a:lnRef idx="1">
+            <a:schemeClr val="accent1"/>
+          </a:lnRef>
+          <a:fillRef idx="3">
+            <a:schemeClr val="accent1"/>
+          </a:fillRef>
+          <a:effectRef idx="2">
+            <a:schemeClr val="accent1"/>
+          </a:effectRef>
+          <a:fontRef idx="minor">
+            <a:schemeClr val="lt1"/>
+          </a:fontRef>
+        </p:style>
+        <p:txBody>
+          <a:bodyPr rtlCol="0" anchor="ctr"/>
+          <a:lstStyle/>
+          <a:p>
+            <a:pPr algn="ctr"/>
+          </a:p>
+        </p:txBody>
+      </p:sp>
+      <p:sp>
+        <p:nvSpPr>
+          <p:cNvPr id="4" name="TextBox 3"/>
+          <p:cNvSpPr txBox="1"/>
+          <p:nvPr/>
+        </p:nvSpPr>
+        <p:spPr>
+          <a:xfrm>
+            <a:off x="457200" y="164592"/>
+            <a:ext cx="11277295" cy="502920"/>
+          </a:xfrm>
+          <a:prstGeom prst="rect">
+            <a:avLst/>
+          </a:prstGeom>
+          <a:noFill/>
+        </p:spPr>
+        <p:txBody>
+          <a:bodyPr wrap="square">
+            <a:spAutoFit/>
+          </a:bodyPr>
+          <a:lstStyle/>
+          <a:p>
+            <a:r>
+              <a:rPr sz="2600" b="1" i="0">
+                <a:solidFill>
+                  <a:srgbClr val="FFFFFF"/>
+                </a:solidFill>
+                <a:latin typeface="Calibri"/>
+              </a:rPr>
+              <a:t>Para el PI esta semana</a:t>
+            </a:r>
+          </a:p>
+        </p:txBody>
+      </p:sp>
+      <p:sp>
+        <p:nvSpPr>
+          <p:cNvPr id="5" name="Rounded Rectangle 4"/>
+          <p:cNvSpPr/>
+          <p:nvPr/>
+        </p:nvSpPr>
+        <p:spPr>
+          <a:xfrm>
+            <a:off x="457200" y="1261872"/>
+            <a:ext cx="11277295" cy="1051560"/>
+          </a:xfrm>
+          <a:prstGeom prst="roundRect">
+            <a:avLst>
+              <a:gd name="adj" fmla="val 12000"/>
+            </a:avLst>
+          </a:prstGeom>
+          <a:solidFill>
+            <a:srgbClr val="E8F4FA"/>
+          </a:solidFill>
+          <a:ln>
+            <a:noFill/>
+          </a:ln>
+        </p:spPr>
+        <p:style>
+          <a:lnRef idx="1">
+            <a:schemeClr val="accent1"/>
+          </a:lnRef>
+          <a:fillRef idx="3">
+            <a:schemeClr val="accent1"/>
+          </a:fillRef>
+          <a:effectRef idx="2">
+            <a:schemeClr val="accent1"/>
+          </a:effectRef>
+          <a:fontRef idx="minor">
+            <a:schemeClr val="lt1"/>
+          </a:fontRef>
+        </p:style>
+        <p:txBody>
+          <a:bodyPr rtlCol="0" anchor="ctr"/>
+          <a:lstStyle/>
+          <a:p>
+            <a:pPr algn="ctr"/>
+          </a:p>
+        </p:txBody>
+      </p:sp>
+      <p:sp>
+        <p:nvSpPr>
+          <p:cNvPr id="6" name="Rectangle 5"/>
+          <p:cNvSpPr/>
+          <p:nvPr/>
+        </p:nvSpPr>
+        <p:spPr>
+          <a:xfrm>
+            <a:off x="457200" y="1261872"/>
+            <a:ext cx="128016" cy="1051560"/>
+          </a:xfrm>
+          <a:prstGeom prst="rect">
+            <a:avLst/>
+          </a:prstGeom>
+          <a:solidFill>
+            <a:srgbClr val="269CCB"/>
+          </a:solidFill>
+          <a:ln>
+            <a:noFill/>
+          </a:ln>
+        </p:spPr>
+        <p:style>
+          <a:lnRef idx="1">
+            <a:schemeClr val="accent1"/>
+          </a:lnRef>
+          <a:fillRef idx="3">
+            <a:schemeClr val="accent1"/>
+          </a:fillRef>
+          <a:effectRef idx="2">
+            <a:schemeClr val="accent1"/>
+          </a:effectRef>
+          <a:fontRef idx="minor">
+            <a:schemeClr val="lt1"/>
+          </a:fontRef>
+        </p:style>
+        <p:txBody>
+          <a:bodyPr rtlCol="0" anchor="ctr"/>
+          <a:lstStyle/>
+          <a:p>
+            <a:pPr algn="ctr"/>
+          </a:p>
+        </p:txBody>
+      </p:sp>
+      <p:sp>
+        <p:nvSpPr>
+          <p:cNvPr id="7" name="TextBox 6"/>
+          <p:cNvSpPr txBox="1"/>
+          <p:nvPr/>
+        </p:nvSpPr>
+        <p:spPr>
+          <a:xfrm>
+            <a:off x="777240" y="1399031"/>
+            <a:ext cx="10774375" cy="822959"/>
+          </a:xfrm>
+          <a:prstGeom prst="rect">
+            <a:avLst/>
+          </a:prstGeom>
+          <a:noFill/>
+        </p:spPr>
+        <p:txBody>
+          <a:bodyPr wrap="square">
+            <a:spAutoFit/>
+          </a:bodyPr>
+          <a:lstStyle/>
+          <a:p>
+            <a:r>
+              <a:rPr sz="1200" b="1" i="0">
+                <a:solidFill>
+                  <a:srgbClr val="269CCB"/>
+                </a:solidFill>
+                <a:latin typeface="Calibri"/>
+              </a:rPr>
+              <a:t>Info</a:t>
+            </a:r>
+          </a:p>
+          <a:p>
+            <a:pPr>
+              <a:spcBef>
+                <a:spcPts val="400"/>
+              </a:spcBef>
+            </a:pPr>
+            <a:r>
+              <a:rPr sz="1400" b="0" i="0">
+                <a:solidFill>
+                  <a:srgbClr val="333333"/>
+                </a:solidFill>
+                <a:latin typeface="Calibri"/>
+              </a:rPr>
+              <a:t>Hito: Cada estudiante recibe un informe externo con hallazgos priorizados y deja escrito su plan de corrección de VetCare antes de la integración final.</a:t>
+            </a:r>
+          </a:p>
+        </p:txBody>
+      </p:sp>
+      <p:sp>
+        <p:nvSpPr>
+          <p:cNvPr id="8" name="Rounded Rectangle 7"/>
+          <p:cNvSpPr/>
+          <p:nvPr/>
+        </p:nvSpPr>
+        <p:spPr>
+          <a:xfrm>
+            <a:off x="457200" y="2478024"/>
+            <a:ext cx="11277295" cy="1051560"/>
+          </a:xfrm>
+          <a:prstGeom prst="roundRect">
+            <a:avLst>
+              <a:gd name="adj" fmla="val 12000"/>
+            </a:avLst>
+          </a:prstGeom>
+          <a:solidFill>
+            <a:srgbClr val="FFF8E1"/>
+          </a:solidFill>
+          <a:ln>
+            <a:noFill/>
+          </a:ln>
+        </p:spPr>
+        <p:style>
+          <a:lnRef idx="1">
+            <a:schemeClr val="accent1"/>
+          </a:lnRef>
+          <a:fillRef idx="3">
+            <a:schemeClr val="accent1"/>
+          </a:fillRef>
+          <a:effectRef idx="2">
+            <a:schemeClr val="accent1"/>
+          </a:effectRef>
+          <a:fontRef idx="minor">
+            <a:schemeClr val="lt1"/>
+          </a:fontRef>
+        </p:style>
+        <p:txBody>
+          <a:bodyPr rtlCol="0" anchor="ctr"/>
+          <a:lstStyle/>
+          <a:p>
+            <a:pPr algn="ctr"/>
+          </a:p>
+        </p:txBody>
+      </p:sp>
+      <p:sp>
+        <p:nvSpPr>
+          <p:cNvPr id="9" name="Rectangle 8"/>
+          <p:cNvSpPr/>
+          <p:nvPr/>
+        </p:nvSpPr>
+        <p:spPr>
+          <a:xfrm>
+            <a:off x="457200" y="2478024"/>
+            <a:ext cx="128016" cy="1051560"/>
+          </a:xfrm>
+          <a:prstGeom prst="rect">
+            <a:avLst/>
+          </a:prstGeom>
+          <a:solidFill>
+            <a:srgbClr val="FFD000"/>
+          </a:solidFill>
+          <a:ln>
+            <a:noFill/>
+          </a:ln>
+        </p:spPr>
+        <p:style>
+          <a:lnRef idx="1">
+            <a:schemeClr val="accent1"/>
+          </a:lnRef>
+          <a:fillRef idx="3">
+            <a:schemeClr val="accent1"/>
+          </a:fillRef>
+          <a:effectRef idx="2">
+            <a:schemeClr val="accent1"/>
+          </a:effectRef>
+          <a:fontRef idx="minor">
+            <a:schemeClr val="lt1"/>
+          </a:fontRef>
+        </p:style>
+        <p:txBody>
+          <a:bodyPr rtlCol="0" anchor="ctr"/>
+          <a:lstStyle/>
+          <a:p>
+            <a:pPr algn="ctr"/>
+          </a:p>
+        </p:txBody>
+      </p:sp>
+      <p:sp>
+        <p:nvSpPr>
+          <p:cNvPr id="10" name="TextBox 9"/>
+          <p:cNvSpPr txBox="1"/>
+          <p:nvPr/>
+        </p:nvSpPr>
+        <p:spPr>
+          <a:xfrm>
+            <a:off x="777240" y="2615184"/>
+            <a:ext cx="10774375" cy="822959"/>
+          </a:xfrm>
+          <a:prstGeom prst="rect">
+            <a:avLst/>
+          </a:prstGeom>
+          <a:noFill/>
+        </p:spPr>
+        <p:txBody>
+          <a:bodyPr wrap="square">
+            <a:spAutoFit/>
+          </a:bodyPr>
+          <a:lstStyle/>
+          <a:p>
+            <a:r>
+              <a:rPr sz="1200" b="1" i="0">
+                <a:solidFill>
+                  <a:srgbClr val="FFD000"/>
+                </a:solidFill>
+                <a:latin typeface="Calibri"/>
+              </a:rPr>
+              <a:t>Aclaración</a:t>
+            </a:r>
+          </a:p>
+          <a:p>
+            <a:pPr>
+              <a:spcBef>
+                <a:spcPts val="400"/>
+              </a:spcBef>
+            </a:pPr>
+            <a:r>
+              <a:rPr sz="1400" b="0" i="0">
+                <a:solidFill>
+                  <a:srgbClr val="333333"/>
+                </a:solidFill>
+                <a:latin typeface="Calibri"/>
+              </a:rPr>
+              <a:t>Enunciado completo: Clases/Proyecto Integrador/ (VetCare).</a:t>
+            </a:r>
+          </a:p>
+        </p:txBody>
+      </p:sp>
+      <p:sp>
+        <p:nvSpPr>
+          <p:cNvPr id="11" name="Rounded Rectangle 10"/>
+          <p:cNvSpPr/>
+          <p:nvPr/>
+        </p:nvSpPr>
+        <p:spPr>
+          <a:xfrm>
+            <a:off x="457200" y="3694176"/>
+            <a:ext cx="11277295" cy="1051560"/>
+          </a:xfrm>
+          <a:prstGeom prst="roundRect">
+            <a:avLst>
+              <a:gd name="adj" fmla="val 12000"/>
+            </a:avLst>
+          </a:prstGeom>
+          <a:solidFill>
+            <a:srgbClr val="FBE4E4"/>
+          </a:solidFill>
+          <a:ln>
+            <a:noFill/>
+          </a:ln>
+        </p:spPr>
+        <p:style>
+          <a:lnRef idx="1">
+            <a:schemeClr val="accent1"/>
+          </a:lnRef>
+          <a:fillRef idx="3">
+            <a:schemeClr val="accent1"/>
+          </a:fillRef>
+          <a:effectRef idx="2">
+            <a:schemeClr val="accent1"/>
+          </a:effectRef>
+          <a:fontRef idx="minor">
+            <a:schemeClr val="lt1"/>
+          </a:fontRef>
+        </p:style>
+        <p:txBody>
+          <a:bodyPr rtlCol="0" anchor="ctr"/>
+          <a:lstStyle/>
+          <a:p>
+            <a:pPr algn="ctr"/>
+          </a:p>
+        </p:txBody>
+      </p:sp>
+      <p:sp>
+        <p:nvSpPr>
+          <p:cNvPr id="12" name="Rectangle 11"/>
+          <p:cNvSpPr/>
+          <p:nvPr/>
+        </p:nvSpPr>
+        <p:spPr>
+          <a:xfrm>
+            <a:off x="457200" y="3694176"/>
+            <a:ext cx="128016" cy="1051560"/>
+          </a:xfrm>
+          <a:prstGeom prst="rect">
+            <a:avLst/>
+          </a:prstGeom>
+          <a:solidFill>
+            <a:srgbClr val="A02030"/>
+          </a:solidFill>
+          <a:ln>
+            <a:noFill/>
+          </a:ln>
+        </p:spPr>
+        <p:style>
+          <a:lnRef idx="1">
+            <a:schemeClr val="accent1"/>
+          </a:lnRef>
+          <a:fillRef idx="3">
+            <a:schemeClr val="accent1"/>
+          </a:fillRef>
+          <a:effectRef idx="2">
+            <a:schemeClr val="accent1"/>
+          </a:effectRef>
+          <a:fontRef idx="minor">
+            <a:schemeClr val="lt1"/>
+          </a:fontRef>
+        </p:style>
+        <p:txBody>
+          <a:bodyPr rtlCol="0" anchor="ctr"/>
+          <a:lstStyle/>
+          <a:p>
+            <a:pPr algn="ctr"/>
+          </a:p>
+        </p:txBody>
+      </p:sp>
+      <p:sp>
+        <p:nvSpPr>
+          <p:cNvPr id="13" name="TextBox 12"/>
+          <p:cNvSpPr txBox="1"/>
+          <p:nvPr/>
+        </p:nvSpPr>
+        <p:spPr>
+          <a:xfrm>
+            <a:off x="777240" y="3831336"/>
+            <a:ext cx="10774375" cy="822959"/>
+          </a:xfrm>
+          <a:prstGeom prst="rect">
+            <a:avLst/>
+          </a:prstGeom>
+          <a:noFill/>
+        </p:spPr>
+        <p:txBody>
+          <a:bodyPr wrap="square">
+            <a:spAutoFit/>
+          </a:bodyPr>
+          <a:lstStyle/>
+          <a:p>
+            <a:r>
+              <a:rPr sz="1200" b="1" i="0">
+                <a:solidFill>
+                  <a:srgbClr val="A02030"/>
+                </a:solidFill>
+                <a:latin typeface="Calibri"/>
+              </a:rPr>
+              <a:t>Atención</a:t>
+            </a:r>
+          </a:p>
+          <a:p>
+            <a:pPr>
+              <a:spcBef>
+                <a:spcPts val="400"/>
+              </a:spcBef>
+            </a:pPr>
+            <a:r>
+              <a:rPr sz="1400" b="0" i="0">
+                <a:solidFill>
+                  <a:srgbClr val="333333"/>
+                </a:solidFill>
+                <a:latin typeface="Calibri"/>
+              </a:rPr>
+              <a:t>Entrega del taller, si el docente lo asigna · en la fecha que indique el docente.</a:t>
+            </a:r>
+          </a:p>
+        </p:txBody>
+      </p:sp>
+      <p:sp>
+        <p:nvSpPr>
+          <p:cNvPr id="14" name="TextBox 13"/>
+          <p:cNvSpPr txBox="1"/>
+          <p:nvPr/>
+        </p:nvSpPr>
+        <p:spPr>
+          <a:xfrm>
+            <a:off x="11185855" y="6473952"/>
+            <a:ext cx="640080" cy="274320"/>
+          </a:xfrm>
+          <a:prstGeom prst="rect">
+            <a:avLst/>
+          </a:prstGeom>
+          <a:noFill/>
+        </p:spPr>
+        <p:txBody>
+          <a:bodyPr wrap="square">
+            <a:spAutoFit/>
+          </a:bodyPr>
+          <a:lstStyle/>
+          <a:p>
+            <a:pPr algn="r"/>
+            <a:r>
+              <a:rPr sz="1100" b="0" i="0">
+                <a:solidFill>
+                  <a:srgbClr val="666666"/>
+                </a:solidFill>
+                <a:latin typeface="Calibri"/>
+              </a:rPr>
+              <a:t>28</a:t>
+            </a:r>
+          </a:p>
+        </p:txBody>
+      </p:sp>
+    </p:spTree>
+  </p:cSld>
+  <p:clrMapOvr>
+    <a:masterClrMapping/>
+  </p:clrMapOvr>
+</p:sld>
+</file>
+
+<file path=ppt/slides/slide29.xml><?xml version="1.0" encoding="utf-8"?>
+<p:sld xmlns:a="http://schemas.openxmlformats.org/drawingml/2006/main" xmlns:p="http://schemas.openxmlformats.org/presentationml/2006/main" xmlns:r="http://schemas.openxmlformats.org/officeDocument/2006/relationships">
+  <p:cSld>
+    <p:bg>
+      <p:bgPr>
+        <a:solidFill>
+          <a:srgbClr val="FFFFFF"/>
+        </a:solidFill>
+        <a:effectLst/>
+      </p:bgPr>
+    </p:bg>
+    <p:spTree>
+      <p:nvGrpSpPr>
+        <p:cNvPr id="1" name=""/>
+        <p:cNvGrpSpPr/>
+        <p:nvPr/>
+      </p:nvGrpSpPr>
+      <p:grpSpPr/>
+      <p:sp>
+        <p:nvSpPr>
+          <p:cNvPr id="2" name="Rectangle 1"/>
+          <p:cNvSpPr/>
+          <p:nvPr/>
+        </p:nvSpPr>
+        <p:spPr>
+          <a:xfrm>
+            <a:off x="0" y="0"/>
             <a:ext cx="12191695" cy="164592"/>
           </a:xfrm>
           <a:prstGeom prst="rect">
@@ -9668,7 +13704,7 @@
                 </a:solidFill>
                 <a:latin typeface="Calibri"/>
               </a:rPr>
-              <a:t>Una revisión de código es la lectura sistemática del código de otra...</a:t>
+              <a:t>Una revisión de código es la lectura sistemática del código de otra... (1/2)</a:t>
             </a:r>
           </a:p>
         </p:txBody>
@@ -9772,38 +13808,6 @@
                 <a:latin typeface="Calibri"/>
               </a:rPr>
               <a:t>–   Encontrarlo el día de la sustentación, con la ventana de VetCare congelada y la clínica Huellitas sin poder mostrar el expediente de Firulais, cuesta la nota y la credibilidad.</a:t>
-            </a:r>
-          </a:p>
-          <a:p>
-            <a:pPr>
-              <a:spcAft>
-                <a:spcPts val="800"/>
-              </a:spcAft>
-            </a:pPr>
-            <a:r>
-              <a:rPr sz="2000" b="0" i="0">
-                <a:solidFill>
-                  <a:srgbClr val="333333"/>
-                </a:solidFill>
-                <a:latin typeface="Calibri"/>
-              </a:rPr>
-              <a:t>–   Además la revisión enseña: quien lee el proyecto ajeno descubre una forma distinta de organizar el repositorio o de validar la edad, y se la lleva para el suyo.</a:t>
-            </a:r>
-          </a:p>
-          <a:p>
-            <a:pPr>
-              <a:spcAft>
-                <a:spcPts val="800"/>
-              </a:spcAft>
-            </a:pPr>
-            <a:r>
-              <a:rPr sz="2000" b="0" i="0">
-                <a:solidFill>
-                  <a:srgbClr val="333333"/>
-                </a:solidFill>
-                <a:latin typeface="Calibri"/>
-              </a:rPr>
-              <a:t>–   Hoy no hay tema técnico nuevo; hoy se entrena criterio, que es la habilidad que separa a alguien que escribe código de alguien que responde por él.</a:t>
             </a:r>
           </a:p>
         </p:txBody>
@@ -9984,7 +13988,7 @@
                 </a:solidFill>
                 <a:latin typeface="Calibri"/>
               </a:rPr>
-              <a:t>Revisar no es leer de arriba a abajo a ver qué salta: se revisa por... (1/2)</a:t>
+              <a:t>Una revisión de código es la lectura sistemática del código de otra... (2/2)</a:t>
             </a:r>
           </a:p>
         </p:txBody>
@@ -10023,7 +14027,7 @@
                 </a:solidFill>
                 <a:latin typeface="Calibri"/>
               </a:rPr>
-              <a:t>–   Revisar no es leer de arriba a abajo a ver qué salta: se revisa por capas y en orden de importancia, porque el tiempo es finito y el detalle cosmético es el que más tienta.</a:t>
+              <a:t>–   Además la revisión enseña: quien lee el proyecto ajeno descubre una forma distinta de organizar el repositorio o de validar la edad, y se la lleva para el suyo.</a:t>
             </a:r>
           </a:p>
           <a:p>
@@ -10039,71 +14043,7 @@
                 </a:solidFill>
                 <a:latin typeface="Calibri"/>
               </a:rPr>
-              <a:t>–   Primera capa: ¿el proyecto abre y hace lo que dice hacer?</a:t>
-            </a:r>
-          </a:p>
-          <a:p>
-            <a:pPr>
-              <a:spcAft>
-                <a:spcPts val="800"/>
-              </a:spcAft>
-            </a:pPr>
-            <a:r>
-              <a:rPr sz="2000" b="0" i="0">
-                <a:solidFill>
-                  <a:srgbClr val="333333"/>
-                </a:solidFill>
-                <a:latin typeface="Calibri"/>
-              </a:rPr>
-              <a:t>–   Se ejecuta antes de opinar.</a:t>
-            </a:r>
-          </a:p>
-          <a:p>
-            <a:pPr>
-              <a:spcAft>
-                <a:spcPts val="800"/>
-              </a:spcAft>
-            </a:pPr>
-            <a:r>
-              <a:rPr sz="2000" b="0" i="0">
-                <a:solidFill>
-                  <a:srgbClr val="333333"/>
-                </a:solidFill>
-                <a:latin typeface="Calibri"/>
-              </a:rPr>
-              <a:t>–   Segunda capa: corrección y casos borde, que en VetCare son siempre los mismos y hay que buscarlos a propósito: edad negativa o con letras</a:t>
-            </a:r>
-          </a:p>
-          <a:p>
-            <a:pPr>
-              <a:spcAft>
-                <a:spcPts val="800"/>
-              </a:spcAft>
-            </a:pPr>
-            <a:r>
-              <a:rPr sz="2000" b="0" i="0">
-                <a:solidFill>
-                  <a:srgbClr val="333333"/>
-                </a:solidFill>
-                <a:latin typeface="Calibri"/>
-              </a:rPr>
-              <a:t>–   Campos vacíos, ID repetido, buscar un ID que no existe, cerrar sin haber registrado nada, archivo mascotas.csv inexistente o con una línea dañada.</a:t>
-            </a:r>
-          </a:p>
-          <a:p>
-            <a:pPr>
-              <a:spcAft>
-                <a:spcPts val="800"/>
-              </a:spcAft>
-            </a:pPr>
-            <a:r>
-              <a:rPr sz="2000" b="0" i="0">
-                <a:solidFill>
-                  <a:srgbClr val="333333"/>
-                </a:solidFill>
-                <a:latin typeface="Calibri"/>
-              </a:rPr>
-              <a:t>–   Tercera capa: diseño y responsabilidades, es decir si hay clases de verdad o solo arreglos de String, si los atributos son privados, y si la ventana está haciendo de repositorio escribiendo archivos por su cuenta.</a:t>
+              <a:t>–   Hoy no hay tema técnico nuevo; hoy se entrena criterio, que es la habilidad que separa a alguien que escribe código de alguien que responde por él.</a:t>
             </a:r>
           </a:p>
         </p:txBody>
@@ -10284,7 +14224,7 @@
                 </a:solidFill>
                 <a:latin typeface="Calibri"/>
               </a:rPr>
-              <a:t>Revisar no es leer de arriba a abajo a ver qué salta: se revisa por... (2/2)</a:t>
+              <a:t>Revisar no es leer de arriba a abajo a ver qué salta: se revisa por... (1/2)</a:t>
             </a:r>
           </a:p>
         </p:txBody>
@@ -10323,7 +14263,7 @@
                 </a:solidFill>
                 <a:latin typeface="Calibri"/>
               </a:rPr>
-              <a:t>–   Cuarta capa: manejo de errores, con el catch vacío como sospechoso número uno.</a:t>
+              <a:t>–   Revisar no es leer de arriba a abajo a ver qué salta: se revisa por capas y en orden de importancia, porque el tiempo es finito y el detalle cosmético es el que más tienta.</a:t>
             </a:r>
           </a:p>
           <a:p>
@@ -10339,7 +14279,7 @@
                 </a:solidFill>
                 <a:latin typeface="Calibri"/>
               </a:rPr>
-              <a:t>–   Quinta capa: legibilidad, o sea nombres, métodos largos y duplicación.</a:t>
+              <a:t>–   Primera capa: ¿el proyecto abre y hace lo que dice hacer?</a:t>
             </a:r>
           </a:p>
           <a:p>
@@ -10355,7 +14295,7 @@
                 </a:solidFill>
                 <a:latin typeface="Calibri"/>
               </a:rPr>
-              <a:t>–   Y solo al final, la sexta: formato e indentación, que es la que menos vale y la que todo el mundo comenta primero.</a:t>
+              <a:t>–   Segunda capa: corrección y casos borde, que en VetCare son siempre los mismos y hay que buscarlos a propósito: edad negativa o con letras</a:t>
             </a:r>
           </a:p>
           <a:p>
@@ -10371,7 +14311,7 @@
                 </a:solidFill>
                 <a:latin typeface="Calibri"/>
               </a:rPr>
-              <a:t>–   Si un informe de revisión de VetCare tiene ocho comentarios de espacios y ninguno sobre el NullPointerException al buscar un ID inexistente, esa revisión no sirvió.</a:t>
+              <a:t>–   Campos vacíos, ID repetido, buscar un ID que no existe, cerrar sin haber registrado nada, archivo mascotas.csv inexistente o con una línea dañada.</a:t>
             </a:r>
           </a:p>
         </p:txBody>
@@ -10552,7 +14492,7 @@
                 </a:solidFill>
                 <a:latin typeface="Calibri"/>
               </a:rPr>
-              <a:t>La retroalimentación útil tiene una estructura, y esa estructura se... (1/2)</a:t>
+              <a:t>Revisar no es leer de arriba a abajo a ver qué salta: se revisa por... (2/2)</a:t>
             </a:r>
           </a:p>
         </p:txBody>
@@ -10591,7 +14531,7 @@
                 </a:solidFill>
                 <a:latin typeface="Calibri"/>
               </a:rPr>
-              <a:t>–   La retroalimentación útil tiene una estructura, y esa estructura se enseña con plantilla porque a punta de buena intención no sale.</a:t>
+              <a:t>–   Tercera capa: diseño y responsabilidades, es decir si hay clases de verdad o solo arreglos de String, si los atributos son privados, y si la ventana está haciendo de repositorio escribiendo archivos por su cuenta.</a:t>
             </a:r>
           </a:p>
           <a:p>
@@ -10607,7 +14547,7 @@
                 </a:solidFill>
                 <a:latin typeface="Calibri"/>
               </a:rPr>
-              <a:t>–   Primero, se habla del código y nunca de la persona: 'el método guarda sin validar' y jamás 'usted no valida nada'.</a:t>
+              <a:t>–   Cuarta capa: manejo de errores, con el catch vacío como sospechoso número uno.</a:t>
             </a:r>
           </a:p>
           <a:p>
@@ -10623,87 +14563,7 @@
                 </a:solidFill>
                 <a:latin typeface="Calibri"/>
               </a:rPr>
-              <a:t>–   Segundo, se aporta evidencia localizable: archivo y línea, o el paso exacto para reproducirlo.</a:t>
-            </a:r>
-          </a:p>
-          <a:p>
-            <a:pPr>
-              <a:spcAft>
-                <a:spcPts val="800"/>
-              </a:spcAft>
-            </a:pPr>
-            <a:r>
-              <a:rPr sz="2000" b="0" i="0">
-                <a:solidFill>
-                  <a:srgbClr val="333333"/>
-                </a:solidFill>
-                <a:latin typeface="Calibri"/>
-              </a:rPr>
-              <a:t>–   Tercero, se explica el impacto, es decir qué se rompe y cuándo, porque un hallazgo sin consecuencia no convence a nadie.</a:t>
-            </a:r>
-          </a:p>
-          <a:p>
-            <a:pPr>
-              <a:spcAft>
-                <a:spcPts val="800"/>
-              </a:spcAft>
-            </a:pPr>
-            <a:r>
-              <a:rPr sz="2000" b="0" i="0">
-                <a:solidFill>
-                  <a:srgbClr val="333333"/>
-                </a:solidFill>
-                <a:latin typeface="Calibri"/>
-              </a:rPr>
-              <a:t>–   Cuarto, se propone una salida concreta.</a:t>
-            </a:r>
-          </a:p>
-          <a:p>
-            <a:pPr>
-              <a:spcAft>
-                <a:spcPts val="800"/>
-              </a:spcAft>
-            </a:pPr>
-            <a:r>
-              <a:rPr sz="2000" b="0" i="0">
-                <a:solidFill>
-                  <a:srgbClr val="333333"/>
-                </a:solidFill>
-                <a:latin typeface="Calibri"/>
-              </a:rPr>
-              <a:t>–   Compare las dos versiones.</a:t>
-            </a:r>
-          </a:p>
-          <a:p>
-            <a:pPr>
-              <a:spcAft>
-                <a:spcPts val="800"/>
-              </a:spcAft>
-            </a:pPr>
-            <a:r>
-              <a:rPr sz="2000" b="0" i="0">
-                <a:solidFill>
-                  <a:srgbClr val="333333"/>
-                </a:solidFill>
-                <a:latin typeface="Calibri"/>
-              </a:rPr>
-              <a:t>–   Mala: 'el manejo de errores está horrible'.</a:t>
-            </a:r>
-          </a:p>
-          <a:p>
-            <a:pPr>
-              <a:spcAft>
-                <a:spcPts val="800"/>
-              </a:spcAft>
-            </a:pPr>
-            <a:r>
-              <a:rPr sz="2000" b="0" i="0">
-                <a:solidFill>
-                  <a:srgbClr val="333333"/>
-                </a:solidFill>
-                <a:latin typeface="Calibri"/>
-              </a:rPr>
-              <a:t>–   Buena: 'En VentanaPrincipal.java línea 84 el catch (Exception e) está vacío; si el disco está lleno la mascota registrada se pierde y el usuario ve el mensaje de éxito igual.</a:t>
+              <a:t>–   Quinta capa: legibilidad, o sea nombres, métodos largos y duplicación.</a:t>
             </a:r>
           </a:p>
         </p:txBody>
@@ -10884,7 +14744,7 @@
                 </a:solidFill>
                 <a:latin typeface="Calibri"/>
               </a:rPr>
-              <a:t>La retroalimentación útil tiene una estructura, y esa estructura se... (2/2)</a:t>
+              <a:t>La retroalimentación útil tiene una estructura, y esa estructura se... (1/2)</a:t>
             </a:r>
           </a:p>
         </p:txBody>
@@ -10923,7 +14783,7 @@
                 </a:solidFill>
                 <a:latin typeface="Calibri"/>
               </a:rPr>
-              <a:t>–   Sugerencia: mostrar un JOptionPane con e.getMessage() y no limpiar el formulario hasta confirmar el guardado'.</a:t>
+              <a:t>–   Primero, se habla del código y nunca de la persona: 'el método guarda sin validar' y jamás 'usted no valida nada'.</a:t>
             </a:r>
           </a:p>
           <a:p>
@@ -10939,7 +14799,7 @@
                 </a:solidFill>
                 <a:latin typeface="Calibri"/>
               </a:rPr>
-              <a:t>–   La segunda se puede atender esta tarde; la primera solo produce rabia.</a:t>
+              <a:t>–   Segundo, se aporta evidencia localizable: archivo y línea, o el paso exacto para reproducirlo.</a:t>
             </a:r>
           </a:p>
           <a:p>
@@ -10955,7 +14815,39 @@
                 </a:solidFill>
                 <a:latin typeface="Calibri"/>
               </a:rPr>
-              <a:t>–   Dos reglas más: cuando hay duda se pregunta en vez de afirmar ('¿qué pasa si el usuario deja la edad vacía?'), y cada hallazgo se etiqueta como bloqueante, mayor o menor, porque un informe con cuarenta comentarios del mismo peso no lo atiende nadie.</a:t>
+              <a:t>–   Tercero, se explica el impacto, es decir qué se rompe y cuándo, porque un hallazgo sin consecuencia no convence a nadie.</a:t>
+            </a:r>
+          </a:p>
+          <a:p>
+            <a:pPr>
+              <a:spcAft>
+                <a:spcPts val="800"/>
+              </a:spcAft>
+            </a:pPr>
+            <a:r>
+              <a:rPr sz="2000" b="0" i="0">
+                <a:solidFill>
+                  <a:srgbClr val="333333"/>
+                </a:solidFill>
+                <a:latin typeface="Calibri"/>
+              </a:rPr>
+              <a:t>–   Mala: 'el manejo de errores está horrible'.</a:t>
+            </a:r>
+          </a:p>
+          <a:p>
+            <a:pPr>
+              <a:spcAft>
+                <a:spcPts val="800"/>
+              </a:spcAft>
+            </a:pPr>
+            <a:r>
+              <a:rPr sz="2000" b="0" i="0">
+                <a:solidFill>
+                  <a:srgbClr val="333333"/>
+                </a:solidFill>
+                <a:latin typeface="Calibri"/>
+              </a:rPr>
+              <a:t>–   Buena: 'En VentanaPrincipal.java línea 84 el catch (Exception e) está vacío; si el disco está lleno la mascota registrada se pierde y el usuario ve el mensaje de éxito igual.</a:t>
             </a:r>
           </a:p>
         </p:txBody>
@@ -11136,7 +15028,7 @@
                 </a:solidFill>
                 <a:latin typeface="Calibri"/>
               </a:rPr>
-              <a:t>El checklist es lo que impide que la revisión se vuelva una... (1/2)</a:t>
+              <a:t>La retroalimentación útil tiene una estructura, y esa estructura se... (2/2)</a:t>
             </a:r>
           </a:p>
         </p:txBody>
@@ -11175,7 +15067,7 @@
                 </a:solidFill>
                 <a:latin typeface="Calibri"/>
               </a:rPr>
-              <a:t>–   El checklist es lo que impide que la revisión se vuelva una conversación de gustos.</a:t>
+              <a:t>–   Sugerencia: mostrar un JOptionPane con e.getMessage() y no limpiar el formulario hasta confirmar el guardado'.</a:t>
             </a:r>
           </a:p>
           <a:p>
@@ -11191,71 +15083,7 @@
                 </a:solidFill>
                 <a:latin typeface="Calibri"/>
               </a:rPr>
-              <a:t>–   Se construye directamente con los requisitos del PI de VetCare, y sus ítems son binarios y verificables: ¿existe al menos una clase del dominio con atributos privados y getters, o los datos andan sueltos en arreglos de String?</a:t>
-            </a:r>
-          </a:p>
-          <a:p>
-            <a:pPr>
-              <a:spcAft>
-                <a:spcPts val="800"/>
-              </a:spcAft>
-            </a:pPr>
-            <a:r>
-              <a:rPr sz="2000" b="0" i="0">
-                <a:solidFill>
-                  <a:srgbClr val="333333"/>
-                </a:solidFill>
-                <a:latin typeface="Calibri"/>
-              </a:rPr>
-              <a:t>–   ¿se usa una colección de Java para administrar las mascotas?</a:t>
-            </a:r>
-          </a:p>
-          <a:p>
-            <a:pPr>
-              <a:spcAft>
-                <a:spcPts val="800"/>
-              </a:spcAft>
-            </a:pPr>
-            <a:r>
-              <a:rPr sz="2000" b="0" i="0">
-                <a:solidFill>
-                  <a:srgbClr val="333333"/>
-                </a:solidFill>
-                <a:latin typeface="Calibri"/>
-              </a:rPr>
-              <a:t>–   ¿la interfaz gráfica muestra la lista y permite registrar y buscar?</a:t>
-            </a:r>
-          </a:p>
-          <a:p>
-            <a:pPr>
-              <a:spcAft>
-                <a:spcPts val="800"/>
-              </a:spcAft>
-            </a:pPr>
-            <a:r>
-              <a:rPr sz="2000" b="0" i="0">
-                <a:solidFill>
-                  <a:srgbClr val="333333"/>
-                </a:solidFill>
-                <a:latin typeface="Calibri"/>
-              </a:rPr>
-              <a:t>–   ¿hay try-catch en las fronteras, es decir donde entra texto del usuario y donde se toca el archivo?</a:t>
-            </a:r>
-          </a:p>
-          <a:p>
-            <a:pPr>
-              <a:spcAft>
-                <a:spcPts val="800"/>
-              </a:spcAft>
-            </a:pPr>
-            <a:r>
-              <a:rPr sz="2000" b="0" i="0">
-                <a:solidFill>
-                  <a:srgbClr val="333333"/>
-                </a:solidFill>
-                <a:latin typeface="Calibri"/>
-              </a:rPr>
-              <a:t>–   ¿el proyecto guarda y recupera datos de un.txt o.csv?</a:t>
+              <a:t>–   Dos reglas más: cuando hay duda se pregunta en vez de afirmar ('¿qué pasa si el usuario deja la edad vacía?'), y cada hallazgo se etiqueta como bloqueante, mayor o menor, porque un informe con cuarenta comentarios del mismo peso no lo atiende nadie.</a:t>
             </a:r>
           </a:p>
         </p:txBody>

--- a/Programacion II/Clases/Clase 11 - Revision de codigo cruzada/Presentacion.pptx
+++ b/Programacion II/Clases/Clase 11 - Revision de codigo cruzada/Presentacion.pptx
@@ -9,31 +9,25 @@
     <p:sldId id="257" r:id="rId8"/>
     <p:sldId id="258" r:id="rId9"/>
     <p:sldId id="259" r:id="rId10"/>
-    <p:sldId id="260" r:id="rId11"/>
-    <p:sldId id="261" r:id="rId12"/>
-    <p:sldId id="262" r:id="rId13"/>
-    <p:sldId id="263" r:id="rId14"/>
-    <p:sldId id="264" r:id="rId15"/>
-    <p:sldId id="265" r:id="rId16"/>
-    <p:sldId id="266" r:id="rId17"/>
-    <p:sldId id="267" r:id="rId18"/>
-    <p:sldId id="268" r:id="rId19"/>
-    <p:sldId id="269" r:id="rId20"/>
-    <p:sldId id="270" r:id="rId21"/>
-    <p:sldId id="271" r:id="rId22"/>
-    <p:sldId id="272" r:id="rId23"/>
-    <p:sldId id="273" r:id="rId24"/>
-    <p:sldId id="274" r:id="rId25"/>
-    <p:sldId id="275" r:id="rId26"/>
-    <p:sldId id="276" r:id="rId27"/>
-    <p:sldId id="277" r:id="rId28"/>
-    <p:sldId id="278" r:id="rId29"/>
-    <p:sldId id="279" r:id="rId30"/>
-    <p:sldId id="280" r:id="rId31"/>
-    <p:sldId id="281" r:id="rId32"/>
-    <p:sldId id="282" r:id="rId33"/>
-    <p:sldId id="283" r:id="rId34"/>
-    <p:sldId id="284" r:id="rId35"/>
+    <p:sldId id="260" r:id="rId12"/>
+    <p:sldId id="261" r:id="rId13"/>
+    <p:sldId id="262" r:id="rId14"/>
+    <p:sldId id="263" r:id="rId15"/>
+    <p:sldId id="264" r:id="rId16"/>
+    <p:sldId id="265" r:id="rId17"/>
+    <p:sldId id="266" r:id="rId18"/>
+    <p:sldId id="267" r:id="rId19"/>
+    <p:sldId id="268" r:id="rId20"/>
+    <p:sldId id="269" r:id="rId21"/>
+    <p:sldId id="270" r:id="rId22"/>
+    <p:sldId id="271" r:id="rId23"/>
+    <p:sldId id="272" r:id="rId24"/>
+    <p:sldId id="273" r:id="rId25"/>
+    <p:sldId id="274" r:id="rId26"/>
+    <p:sldId id="275" r:id="rId27"/>
+    <p:sldId id="276" r:id="rId28"/>
+    <p:sldId id="277" r:id="rId29"/>
+    <p:sldId id="278" r:id="rId30"/>
   </p:sldIdLst>
   <p:sldSz cx="12191695" cy="6858000" type="screen4x3"/>
   <p:notesSz cx="6858000" cy="9144000"/>
@@ -133,6 +127,684 @@
     </a:lvl9pPr>
   </p:defaultTextStyle>
 </p:presentation>
+</file>
+
+<file path=ppt/notesMasters/notesMaster1.xml><?xml version="1.0" encoding="utf-8"?>
+<p:notesMaster xmlns:a="http://schemas.openxmlformats.org/drawingml/2006/main" xmlns:p="http://schemas.openxmlformats.org/presentationml/2006/main" xmlns:r="http://schemas.openxmlformats.org/officeDocument/2006/relationships">
+  <p:cSld>
+    <p:bg>
+      <p:bgRef idx="1001">
+        <a:schemeClr val="bg1"/>
+      </p:bgRef>
+    </p:bg>
+    <p:spTree>
+      <p:nvGrpSpPr>
+        <p:cNvPr id="1" name=""/>
+        <p:cNvGrpSpPr/>
+        <p:nvPr/>
+      </p:nvGrpSpPr>
+      <p:grpSpPr>
+        <a:xfrm>
+          <a:off x="0" y="0"/>
+          <a:ext cx="0" cy="0"/>
+          <a:chOff x="0" y="0"/>
+          <a:chExt cx="0" cy="0"/>
+        </a:xfrm>
+      </p:grpSpPr>
+      <p:sp>
+        <p:nvSpPr>
+          <p:cNvPr id="2" name="Header Placeholder 1"/>
+          <p:cNvSpPr>
+            <a:spLocks noGrp="1"/>
+          </p:cNvSpPr>
+          <p:nvPr>
+            <p:ph type="hdr" sz="quarter"/>
+          </p:nvPr>
+        </p:nvSpPr>
+        <p:spPr>
+          <a:xfrm>
+            <a:off x="0" y="0"/>
+            <a:ext cx="2971800" cy="457200"/>
+          </a:xfrm>
+          <a:prstGeom prst="rect">
+            <a:avLst/>
+          </a:prstGeom>
+        </p:spPr>
+        <p:txBody>
+          <a:bodyPr vert="horz" lIns="91440" tIns="45720" rIns="91440" bIns="45720" rtlCol="0"/>
+          <a:lstStyle>
+            <a:lvl1pPr algn="l">
+              <a:defRPr sz="1200"/>
+            </a:lvl1pPr>
+          </a:lstStyle>
+          <a:p>
+            <a:endParaRPr lang="en-US"/>
+          </a:p>
+        </p:txBody>
+      </p:sp>
+      <p:sp>
+        <p:nvSpPr>
+          <p:cNvPr id="3" name="Date Placeholder 2"/>
+          <p:cNvSpPr>
+            <a:spLocks noGrp="1"/>
+          </p:cNvSpPr>
+          <p:nvPr>
+            <p:ph type="dt" idx="1"/>
+          </p:nvPr>
+        </p:nvSpPr>
+        <p:spPr>
+          <a:xfrm>
+            <a:off x="3884613" y="0"/>
+            <a:ext cx="2971800" cy="457200"/>
+          </a:xfrm>
+          <a:prstGeom prst="rect">
+            <a:avLst/>
+          </a:prstGeom>
+        </p:spPr>
+        <p:txBody>
+          <a:bodyPr vert="horz" lIns="91440" tIns="45720" rIns="91440" bIns="45720" rtlCol="0"/>
+          <a:lstStyle>
+            <a:lvl1pPr algn="r">
+              <a:defRPr sz="1200"/>
+            </a:lvl1pPr>
+          </a:lstStyle>
+          <a:p>
+            <a:fld id="{0F89C1C7-3DCD-1040-A9CF-14679D8B5DDD}" type="datetimeFigureOut">
+              <a:rPr lang="en-US" smtClean="0"/>
+              <a:t>10/17/16</a:t>
+            </a:fld>
+            <a:endParaRPr lang="en-US"/>
+          </a:p>
+        </p:txBody>
+      </p:sp>
+      <p:sp>
+        <p:nvSpPr>
+          <p:cNvPr id="4" name="Slide Image Placeholder 3"/>
+          <p:cNvSpPr>
+            <a:spLocks noGrp="1" noRot="1" noChangeAspect="1"/>
+          </p:cNvSpPr>
+          <p:nvPr>
+            <p:ph type="sldImg" idx="2"/>
+          </p:nvPr>
+        </p:nvSpPr>
+        <p:spPr>
+          <a:xfrm>
+            <a:off x="1143000" y="685800"/>
+            <a:ext cx="4572000" cy="3429000"/>
+          </a:xfrm>
+          <a:prstGeom prst="rect">
+            <a:avLst/>
+          </a:prstGeom>
+          <a:noFill/>
+          <a:ln w="12700">
+            <a:solidFill>
+              <a:prstClr val="black"/>
+            </a:solidFill>
+          </a:ln>
+        </p:spPr>
+        <p:txBody>
+          <a:bodyPr vert="horz" lIns="91440" tIns="45720" rIns="91440" bIns="45720" rtlCol="0" anchor="ctr"/>
+          <a:lstStyle/>
+          <a:p>
+            <a:endParaRPr lang="en-US"/>
+          </a:p>
+        </p:txBody>
+      </p:sp>
+      <p:sp>
+        <p:nvSpPr>
+          <p:cNvPr id="5" name="Notes Placeholder 4"/>
+          <p:cNvSpPr>
+            <a:spLocks noGrp="1"/>
+          </p:cNvSpPr>
+          <p:nvPr>
+            <p:ph type="body" sz="quarter" idx="3"/>
+          </p:nvPr>
+        </p:nvSpPr>
+        <p:spPr>
+          <a:xfrm>
+            <a:off x="685800" y="4343400"/>
+            <a:ext cx="5486400" cy="4114800"/>
+          </a:xfrm>
+          <a:prstGeom prst="rect">
+            <a:avLst/>
+          </a:prstGeom>
+        </p:spPr>
+        <p:txBody>
+          <a:bodyPr vert="horz" lIns="91440" tIns="45720" rIns="91440" bIns="45720" rtlCol="0"/>
+          <a:lstStyle/>
+          <a:p>
+            <a:pPr lvl="0"/>
+            <a:r>
+              <a:rPr lang="en-US" smtClean="0"/>
+              <a:t>Click to edit Master text styles</a:t>
+            </a:r>
+          </a:p>
+          <a:p>
+            <a:pPr lvl="1"/>
+            <a:r>
+              <a:rPr lang="en-US" smtClean="0"/>
+              <a:t>Second level</a:t>
+            </a:r>
+          </a:p>
+          <a:p>
+            <a:pPr lvl="2"/>
+            <a:r>
+              <a:rPr lang="en-US" smtClean="0"/>
+              <a:t>Third level</a:t>
+            </a:r>
+          </a:p>
+          <a:p>
+            <a:pPr lvl="3"/>
+            <a:r>
+              <a:rPr lang="en-US" smtClean="0"/>
+              <a:t>Fourth level</a:t>
+            </a:r>
+          </a:p>
+          <a:p>
+            <a:pPr lvl="4"/>
+            <a:r>
+              <a:rPr lang="en-US" smtClean="0"/>
+              <a:t>Fifth level</a:t>
+            </a:r>
+            <a:endParaRPr lang="en-US"/>
+          </a:p>
+        </p:txBody>
+      </p:sp>
+      <p:sp>
+        <p:nvSpPr>
+          <p:cNvPr id="6" name="Footer Placeholder 5"/>
+          <p:cNvSpPr>
+            <a:spLocks noGrp="1"/>
+          </p:cNvSpPr>
+          <p:nvPr>
+            <p:ph type="ftr" sz="quarter" idx="4"/>
+          </p:nvPr>
+        </p:nvSpPr>
+        <p:spPr>
+          <a:xfrm>
+            <a:off x="0" y="8685213"/>
+            <a:ext cx="2971800" cy="457200"/>
+          </a:xfrm>
+          <a:prstGeom prst="rect">
+            <a:avLst/>
+          </a:prstGeom>
+        </p:spPr>
+        <p:txBody>
+          <a:bodyPr vert="horz" lIns="91440" tIns="45720" rIns="91440" bIns="45720" rtlCol="0" anchor="b"/>
+          <a:lstStyle>
+            <a:lvl1pPr algn="l">
+              <a:defRPr sz="1200"/>
+            </a:lvl1pPr>
+          </a:lstStyle>
+          <a:p>
+            <a:endParaRPr lang="en-US"/>
+          </a:p>
+        </p:txBody>
+      </p:sp>
+      <p:sp>
+        <p:nvSpPr>
+          <p:cNvPr id="7" name="Slide Number Placeholder 6"/>
+          <p:cNvSpPr>
+            <a:spLocks noGrp="1"/>
+          </p:cNvSpPr>
+          <p:nvPr>
+            <p:ph type="sldNum" sz="quarter" idx="5"/>
+          </p:nvPr>
+        </p:nvSpPr>
+        <p:spPr>
+          <a:xfrm>
+            <a:off x="3884613" y="8685213"/>
+            <a:ext cx="2971800" cy="457200"/>
+          </a:xfrm>
+          <a:prstGeom prst="rect">
+            <a:avLst/>
+          </a:prstGeom>
+        </p:spPr>
+        <p:txBody>
+          <a:bodyPr vert="horz" lIns="91440" tIns="45720" rIns="91440" bIns="45720" rtlCol="0" anchor="b"/>
+          <a:lstStyle>
+            <a:lvl1pPr algn="r">
+              <a:defRPr sz="1200"/>
+            </a:lvl1pPr>
+          </a:lstStyle>
+          <a:p>
+            <a:fld id="{BB5E49A5-4136-284D-997B-48E1D791AD67}" type="slidenum">
+              <a:rPr lang="en-US" smtClean="0"/>
+              <a:t>‹#›</a:t>
+            </a:fld>
+            <a:endParaRPr lang="en-US"/>
+          </a:p>
+        </p:txBody>
+      </p:sp>
+    </p:spTree>
+    <p:extLst>
+      <p:ext uri="{BB962C8B-B14F-4D97-AF65-F5344CB8AC3E}">
+        <p14:creationId xmlns:p14="http://schemas.microsoft.com/office/powerpoint/2010/main" val="2623252185"/>
+      </p:ext>
+    </p:extLst>
+  </p:cSld>
+  <p:clrMap bg1="lt1" tx1="dk1" bg2="lt2" tx2="dk2" accent1="accent1" accent2="accent2" accent3="accent3" accent4="accent4" accent5="accent5" accent6="accent6" hlink="hlink" folHlink="folHlink"/>
+  <p:notesStyle>
+    <a:lvl1pPr marL="0" algn="l" defTabSz="457200" rtl="0" eaLnBrk="1" latinLnBrk="0" hangingPunct="1">
+      <a:defRPr sz="1200" kern="1200">
+        <a:solidFill>
+          <a:schemeClr val="tx1"/>
+        </a:solidFill>
+        <a:latin typeface="+mn-lt"/>
+        <a:ea typeface="+mn-ea"/>
+        <a:cs typeface="+mn-cs"/>
+      </a:defRPr>
+    </a:lvl1pPr>
+    <a:lvl2pPr marL="457200" algn="l" defTabSz="457200" rtl="0" eaLnBrk="1" latinLnBrk="0" hangingPunct="1">
+      <a:defRPr sz="1200" kern="1200">
+        <a:solidFill>
+          <a:schemeClr val="tx1"/>
+        </a:solidFill>
+        <a:latin typeface="+mn-lt"/>
+        <a:ea typeface="+mn-ea"/>
+        <a:cs typeface="+mn-cs"/>
+      </a:defRPr>
+    </a:lvl2pPr>
+    <a:lvl3pPr marL="914400" algn="l" defTabSz="457200" rtl="0" eaLnBrk="1" latinLnBrk="0" hangingPunct="1">
+      <a:defRPr sz="1200" kern="1200">
+        <a:solidFill>
+          <a:schemeClr val="tx1"/>
+        </a:solidFill>
+        <a:latin typeface="+mn-lt"/>
+        <a:ea typeface="+mn-ea"/>
+        <a:cs typeface="+mn-cs"/>
+      </a:defRPr>
+    </a:lvl3pPr>
+    <a:lvl4pPr marL="1371600" algn="l" defTabSz="457200" rtl="0" eaLnBrk="1" latinLnBrk="0" hangingPunct="1">
+      <a:defRPr sz="1200" kern="1200">
+        <a:solidFill>
+          <a:schemeClr val="tx1"/>
+        </a:solidFill>
+        <a:latin typeface="+mn-lt"/>
+        <a:ea typeface="+mn-ea"/>
+        <a:cs typeface="+mn-cs"/>
+      </a:defRPr>
+    </a:lvl4pPr>
+    <a:lvl5pPr marL="1828800" algn="l" defTabSz="457200" rtl="0" eaLnBrk="1" latinLnBrk="0" hangingPunct="1">
+      <a:defRPr sz="1200" kern="1200">
+        <a:solidFill>
+          <a:schemeClr val="tx1"/>
+        </a:solidFill>
+        <a:latin typeface="+mn-lt"/>
+        <a:ea typeface="+mn-ea"/>
+        <a:cs typeface="+mn-cs"/>
+      </a:defRPr>
+    </a:lvl5pPr>
+    <a:lvl6pPr marL="2286000" algn="l" defTabSz="457200" rtl="0" eaLnBrk="1" latinLnBrk="0" hangingPunct="1">
+      <a:defRPr sz="1200" kern="1200">
+        <a:solidFill>
+          <a:schemeClr val="tx1"/>
+        </a:solidFill>
+        <a:latin typeface="+mn-lt"/>
+        <a:ea typeface="+mn-ea"/>
+        <a:cs typeface="+mn-cs"/>
+      </a:defRPr>
+    </a:lvl6pPr>
+    <a:lvl7pPr marL="2743200" algn="l" defTabSz="457200" rtl="0" eaLnBrk="1" latinLnBrk="0" hangingPunct="1">
+      <a:defRPr sz="1200" kern="1200">
+        <a:solidFill>
+          <a:schemeClr val="tx1"/>
+        </a:solidFill>
+        <a:latin typeface="+mn-lt"/>
+        <a:ea typeface="+mn-ea"/>
+        <a:cs typeface="+mn-cs"/>
+      </a:defRPr>
+    </a:lvl7pPr>
+    <a:lvl8pPr marL="3200400" algn="l" defTabSz="457200" rtl="0" eaLnBrk="1" latinLnBrk="0" hangingPunct="1">
+      <a:defRPr sz="1200" kern="1200">
+        <a:solidFill>
+          <a:schemeClr val="tx1"/>
+        </a:solidFill>
+        <a:latin typeface="+mn-lt"/>
+        <a:ea typeface="+mn-ea"/>
+        <a:cs typeface="+mn-cs"/>
+      </a:defRPr>
+    </a:lvl8pPr>
+    <a:lvl9pPr marL="3657600" algn="l" defTabSz="457200" rtl="0" eaLnBrk="1" latinLnBrk="0" hangingPunct="1">
+      <a:defRPr sz="1200" kern="1200">
+        <a:solidFill>
+          <a:schemeClr val="tx1"/>
+        </a:solidFill>
+        <a:latin typeface="+mn-lt"/>
+        <a:ea typeface="+mn-ea"/>
+        <a:cs typeface="+mn-cs"/>
+      </a:defRPr>
+    </a:lvl9pPr>
+  </p:notesStyle>
+</p:notesMaster>
+</file>
+
+<file path=ppt/notesSlides/notesSlide1.xml><?xml version="1.0" encoding="utf-8"?>
+<p:notes xmlns:a="http://schemas.openxmlformats.org/drawingml/2006/main" xmlns:p="http://schemas.openxmlformats.org/presentationml/2006/main" xmlns:r="http://schemas.openxmlformats.org/officeDocument/2006/relationships">
+  <p:cSld>
+    <p:spTree>
+      <p:nvGrpSpPr>
+        <p:cNvPr id="1" name=""/>
+        <p:cNvGrpSpPr/>
+        <p:nvPr/>
+      </p:nvGrpSpPr>
+      <p:grpSpPr>
+        <a:xfrm>
+          <a:off x="0" y="0"/>
+          <a:ext cx="0" cy="0"/>
+          <a:chOff x="0" y="0"/>
+          <a:chExt cx="0" cy="0"/>
+        </a:xfrm>
+      </p:grpSpPr>
+      <p:sp>
+        <p:nvSpPr>
+          <p:cNvPr id="2" name="Slide Image Placeholder 1"/>
+          <p:cNvSpPr>
+            <a:spLocks noGrp="1"/>
+          </p:cNvSpPr>
+          <p:nvPr>
+            <p:ph type="sldImg" idx="2"/>
+          </p:nvPr>
+        </p:nvSpPr>
+        <p:spPr/>
+      </p:sp>
+      <p:sp>
+        <p:nvSpPr>
+          <p:cNvPr id="3" name="Notes Placeholder 2"/>
+          <p:cNvSpPr>
+            <a:spLocks noGrp="1"/>
+          </p:cNvSpPr>
+          <p:nvPr>
+            <p:ph type="body" idx="3" sz="quarter"/>
+          </p:nvPr>
+        </p:nvSpPr>
+        <p:spPr/>
+        <p:txBody>
+          <a:bodyPr/>
+          <a:lstStyle/>
+          <a:p>
+            <a:r>
+              <a:t>Conviene decirlo claro porque el estudiante llega con dos ideas equivocadas: que la revisión es un examen donde lo van a rajar, o que es un trámite para poner 'todo bien' y salir rápido.</a:t>
+            </a:r>
+          </a:p>
+        </p:txBody>
+      </p:sp>
+      <p:sp>
+        <p:nvSpPr>
+          <p:cNvPr id="4" name="Slide Number Placeholder 3"/>
+          <p:cNvSpPr>
+            <a:spLocks noGrp="1"/>
+          </p:cNvSpPr>
+          <p:nvPr>
+            <p:ph type="sldNum" idx="5" sz="quarter"/>
+          </p:nvPr>
+        </p:nvSpPr>
+        <p:spPr/>
+      </p:sp>
+    </p:spTree>
+  </p:cSld>
+  <p:clrMapOvr>
+    <a:masterClrMapping/>
+  </p:clrMapOvr>
+</p:notes>
+</file>
+
+<file path=ppt/notesSlides/notesSlide2.xml><?xml version="1.0" encoding="utf-8"?>
+<p:notes xmlns:a="http://schemas.openxmlformats.org/drawingml/2006/main" xmlns:p="http://schemas.openxmlformats.org/presentationml/2006/main" xmlns:r="http://schemas.openxmlformats.org/officeDocument/2006/relationships">
+  <p:cSld>
+    <p:spTree>
+      <p:nvGrpSpPr>
+        <p:cNvPr id="1" name=""/>
+        <p:cNvGrpSpPr/>
+        <p:nvPr/>
+      </p:nvGrpSpPr>
+      <p:grpSpPr>
+        <a:xfrm>
+          <a:off x="0" y="0"/>
+          <a:ext cx="0" cy="0"/>
+          <a:chOff x="0" y="0"/>
+          <a:chExt cx="0" cy="0"/>
+        </a:xfrm>
+      </p:grpSpPr>
+      <p:sp>
+        <p:nvSpPr>
+          <p:cNvPr id="2" name="Slide Image Placeholder 1"/>
+          <p:cNvSpPr>
+            <a:spLocks noGrp="1"/>
+          </p:cNvSpPr>
+          <p:nvPr>
+            <p:ph type="sldImg" idx="2"/>
+          </p:nvPr>
+        </p:nvSpPr>
+        <p:spPr/>
+      </p:sp>
+      <p:sp>
+        <p:nvSpPr>
+          <p:cNvPr id="3" name="Notes Placeholder 2"/>
+          <p:cNvSpPr>
+            <a:spLocks noGrp="1"/>
+          </p:cNvSpPr>
+          <p:nvPr>
+            <p:ph type="body" idx="3" sz="quarter"/>
+          </p:nvPr>
+        </p:nvSpPr>
+        <p:spPr/>
+        <p:txBody>
+          <a:bodyPr/>
+          <a:lstStyle/>
+          <a:p>
+            <a:r>
+              <a:t>Se ejecuta antes de opinar.</a:t>
+            </a:r>
+          </a:p>
+          <a:p/>
+          <a:p>
+            <a:r>
+              <a:t>Y solo al final, la sexta: formato e indentación, que es la que menos vale y la que todo el mundo comenta primero.</a:t>
+            </a:r>
+          </a:p>
+          <a:p/>
+          <a:p>
+            <a:r>
+              <a:t>Si un informe de revisión de VetCare tiene ocho comentarios de espacios y ninguno sobre el NullPointerException al buscar un ID inexistente, esa revisión no sirvió.</a:t>
+            </a:r>
+          </a:p>
+        </p:txBody>
+      </p:sp>
+      <p:sp>
+        <p:nvSpPr>
+          <p:cNvPr id="4" name="Slide Number Placeholder 3"/>
+          <p:cNvSpPr>
+            <a:spLocks noGrp="1"/>
+          </p:cNvSpPr>
+          <p:nvPr>
+            <p:ph type="sldNum" idx="5" sz="quarter"/>
+          </p:nvPr>
+        </p:nvSpPr>
+        <p:spPr/>
+      </p:sp>
+    </p:spTree>
+  </p:cSld>
+  <p:clrMapOvr>
+    <a:masterClrMapping/>
+  </p:clrMapOvr>
+</p:notes>
+</file>
+
+<file path=ppt/notesSlides/notesSlide3.xml><?xml version="1.0" encoding="utf-8"?>
+<p:notes xmlns:a="http://schemas.openxmlformats.org/drawingml/2006/main" xmlns:p="http://schemas.openxmlformats.org/presentationml/2006/main" xmlns:r="http://schemas.openxmlformats.org/officeDocument/2006/relationships">
+  <p:cSld>
+    <p:spTree>
+      <p:nvGrpSpPr>
+        <p:cNvPr id="1" name=""/>
+        <p:cNvGrpSpPr/>
+        <p:nvPr/>
+      </p:nvGrpSpPr>
+      <p:grpSpPr>
+        <a:xfrm>
+          <a:off x="0" y="0"/>
+          <a:ext cx="0" cy="0"/>
+          <a:chOff x="0" y="0"/>
+          <a:chExt cx="0" cy="0"/>
+        </a:xfrm>
+      </p:grpSpPr>
+      <p:sp>
+        <p:nvSpPr>
+          <p:cNvPr id="2" name="Slide Image Placeholder 1"/>
+          <p:cNvSpPr>
+            <a:spLocks noGrp="1"/>
+          </p:cNvSpPr>
+          <p:nvPr>
+            <p:ph type="sldImg" idx="2"/>
+          </p:nvPr>
+        </p:nvSpPr>
+        <p:spPr/>
+      </p:sp>
+      <p:sp>
+        <p:nvSpPr>
+          <p:cNvPr id="3" name="Notes Placeholder 2"/>
+          <p:cNvSpPr>
+            <a:spLocks noGrp="1"/>
+          </p:cNvSpPr>
+          <p:nvPr>
+            <p:ph type="body" idx="3" sz="quarter"/>
+          </p:nvPr>
+        </p:nvSpPr>
+        <p:spPr/>
+        <p:txBody>
+          <a:bodyPr/>
+          <a:lstStyle/>
+          <a:p>
+            <a:r>
+              <a:t>La retroalimentación útil tiene una estructura, y esa estructura se enseña con plantilla porque a punta de buena intención no sale.</a:t>
+            </a:r>
+          </a:p>
+          <a:p/>
+          <a:p>
+            <a:r>
+              <a:t>Cuarto, se propone una salida concreta.</a:t>
+            </a:r>
+          </a:p>
+          <a:p/>
+          <a:p>
+            <a:r>
+              <a:t>Compare las dos versiones.</a:t>
+            </a:r>
+          </a:p>
+          <a:p/>
+          <a:p>
+            <a:r>
+              <a:t>La segunda se puede atender esta tarde; la primera solo produce rabia.</a:t>
+            </a:r>
+          </a:p>
+        </p:txBody>
+      </p:sp>
+      <p:sp>
+        <p:nvSpPr>
+          <p:cNvPr id="4" name="Slide Number Placeholder 3"/>
+          <p:cNvSpPr>
+            <a:spLocks noGrp="1"/>
+          </p:cNvSpPr>
+          <p:nvPr>
+            <p:ph type="sldNum" idx="5" sz="quarter"/>
+          </p:nvPr>
+        </p:nvSpPr>
+        <p:spPr/>
+      </p:sp>
+    </p:spTree>
+  </p:cSld>
+  <p:clrMapOvr>
+    <a:masterClrMapping/>
+  </p:clrMapOvr>
+</p:notes>
+</file>
+
+<file path=ppt/notesSlides/notesSlide4.xml><?xml version="1.0" encoding="utf-8"?>
+<p:notes xmlns:a="http://schemas.openxmlformats.org/drawingml/2006/main" xmlns:p="http://schemas.openxmlformats.org/presentationml/2006/main" xmlns:r="http://schemas.openxmlformats.org/officeDocument/2006/relationships">
+  <p:cSld>
+    <p:spTree>
+      <p:nvGrpSpPr>
+        <p:cNvPr id="1" name=""/>
+        <p:cNvGrpSpPr/>
+        <p:nvPr/>
+      </p:nvGrpSpPr>
+      <p:grpSpPr>
+        <a:xfrm>
+          <a:off x="0" y="0"/>
+          <a:ext cx="0" cy="0"/>
+          <a:chOff x="0" y="0"/>
+          <a:chExt cx="0" cy="0"/>
+        </a:xfrm>
+      </p:grpSpPr>
+      <p:sp>
+        <p:nvSpPr>
+          <p:cNvPr id="2" name="Slide Image Placeholder 1"/>
+          <p:cNvSpPr>
+            <a:spLocks noGrp="1"/>
+          </p:cNvSpPr>
+          <p:nvPr>
+            <p:ph type="sldImg" idx="2"/>
+          </p:nvPr>
+        </p:nvSpPr>
+        <p:spPr/>
+      </p:sp>
+      <p:sp>
+        <p:nvSpPr>
+          <p:cNvPr id="3" name="Notes Placeholder 2"/>
+          <p:cNvSpPr>
+            <a:spLocks noGrp="1"/>
+          </p:cNvSpPr>
+          <p:nvPr>
+            <p:ph type="body" idx="3" sz="quarter"/>
+          </p:nvPr>
+        </p:nvSpPr>
+        <p:spPr/>
+        <p:txBody>
+          <a:bodyPr/>
+          <a:lstStyle/>
+          <a:p>
+            <a:r>
+              <a:t>¿la interfaz gráfica muestra la lista y permite registrar y buscar?</a:t>
+            </a:r>
+          </a:p>
+          <a:p/>
+          <a:p>
+            <a:r>
+              <a:t>¿hay algún catch vacío?</a:t>
+            </a:r>
+          </a:p>
+          <a:p/>
+          <a:p>
+            <a:r>
+              <a:t>¿algún método pasa de cincuenta líneas?</a:t>
+            </a:r>
+          </a:p>
+          <a:p/>
+          <a:p>
+            <a:r>
+              <a:t>¿hay bloques duplicados?</a:t>
+            </a:r>
+          </a:p>
+        </p:txBody>
+      </p:sp>
+      <p:sp>
+        <p:nvSpPr>
+          <p:cNvPr id="4" name="Slide Number Placeholder 3"/>
+          <p:cNvSpPr>
+            <a:spLocks noGrp="1"/>
+          </p:cNvSpPr>
+          <p:nvPr>
+            <p:ph type="sldNum" idx="5" sz="quarter"/>
+          </p:nvPr>
+        </p:nvSpPr>
+        <p:spPr/>
+      </p:sp>
+    </p:spTree>
+  </p:cSld>
+  <p:clrMapOvr>
+    <a:masterClrMapping/>
+  </p:clrMapOvr>
+</p:notes>
 </file>
 
 <file path=ppt/slideLayouts/slideLayout1.xml><?xml version="1.0" encoding="utf-8"?>
@@ -7793,7 +8465,7 @@
                 </a:solidFill>
                 <a:latin typeface="Calibri"/>
               </a:rPr>
-              <a:t>Encuadre de hoy · Objetivo del PI</a:t>
+              <a:t>Encuadre de hoy</a:t>
             </a:r>
           </a:p>
         </p:txBody>
@@ -7841,7 +8513,7 @@
                 </a:solidFill>
                 <a:latin typeface="Calibri"/>
               </a:rPr>
-              <a:t>Hoy avanzamos VetCare en:</a:t>
+              <a:t>Tema de hoy:</a:t>
             </a:r>
             <a:r>
               <a:rPr sz="2000" b="0" i="0">
@@ -7850,7 +8522,7 @@
                 </a:solidFill>
                 <a:latin typeface="Calibri"/>
               </a:rPr>
-              <a:t> Cada estudiante recibe un informe externo con hallazgos priorizados y deja escrito su plan de corrección de VetCare antes de la integración final.</a:t>
+              <a:t> Revisión de código cruzada — Leer el código de otro estudiante y devolver una crítica que sirva</a:t>
             </a:r>
           </a:p>
           <a:p>
@@ -7909,41 +8581,23 @@
                 </a:solidFill>
                 <a:latin typeface="Calibri"/>
               </a:rPr>
-              <a:t>–   </a:t>
-            </a:r>
-            <a:r>
-              <a:rPr sz="2000" b="1" i="0">
+              <a:t>–   Primero el concepto, despues el codigo que lo muestra y la demo en vivo.</a:t>
+            </a:r>
+          </a:p>
+          <a:p>
+            <a:pPr>
+              <a:spcAft>
+                <a:spcPts val="800"/>
+              </a:spcAft>
+            </a:pPr>
+            <a:r>
+              <a:rPr sz="2000" b="0" i="0">
                 <a:solidFill>
                   <a:srgbClr val="333333"/>
                 </a:solidFill>
                 <a:latin typeface="Calibri"/>
               </a:rPr>
-              <a:t>Entregable de hoy:</a:t>
-            </a:r>
-            <a:r>
-              <a:rPr sz="2000" b="0" i="0">
-                <a:solidFill>
-                  <a:srgbClr val="333333"/>
-                </a:solidFill>
-                <a:latin typeface="Calibri"/>
-              </a:rPr>
-              <a:t> Informe de revisión de una página sobre el proyecto asignado (el de otro estudiante; si el docente autorizó equipos, el de otro equipo): checklist diligenciado con evidencia archivo:línea y cinco hallazgos priorizados con formato Evidencia + Impacto + Sugerencia, subido a la plataforma del curso.</a:t>
-            </a:r>
-          </a:p>
-          <a:p>
-            <a:pPr>
-              <a:spcAft>
-                <a:spcPts val="800"/>
-              </a:spcAft>
-            </a:pPr>
-            <a:r>
-              <a:rPr sz="2000" b="0" i="0">
-                <a:solidFill>
-                  <a:srgbClr val="333333"/>
-                </a:solidFill>
-                <a:latin typeface="Calibri"/>
-              </a:rPr>
-              <a:t>–   La teoria esta al servicio del producto: al salir, VetCare avanzo.</a:t>
+              <a:t>–   Todo con el mismo dominio: la clinica veterinaria Huellitas (VetCare).</a:t>
             </a:r>
           </a:p>
         </p:txBody>
@@ -9357,3163 +10011,6 @@
         <p:spPr>
           <a:xfrm>
             <a:off x="0" y="0"/>
-            <a:ext cx="12191695" cy="960120"/>
-          </a:xfrm>
-          <a:prstGeom prst="rect">
-            <a:avLst/>
-          </a:prstGeom>
-          <a:solidFill>
-            <a:srgbClr val="095292"/>
-          </a:solidFill>
-          <a:ln>
-            <a:noFill/>
-          </a:ln>
-        </p:spPr>
-        <p:style>
-          <a:lnRef idx="1">
-            <a:schemeClr val="accent1"/>
-          </a:lnRef>
-          <a:fillRef idx="3">
-            <a:schemeClr val="accent1"/>
-          </a:fillRef>
-          <a:effectRef idx="2">
-            <a:schemeClr val="accent1"/>
-          </a:effectRef>
-          <a:fontRef idx="minor">
-            <a:schemeClr val="lt1"/>
-          </a:fontRef>
-        </p:style>
-        <p:txBody>
-          <a:bodyPr rtlCol="0" anchor="ctr"/>
-          <a:lstStyle/>
-          <a:p>
-            <a:pPr algn="ctr"/>
-          </a:p>
-        </p:txBody>
-      </p:sp>
-      <p:sp>
-        <p:nvSpPr>
-          <p:cNvPr id="3" name="Rectangle 2"/>
-          <p:cNvSpPr/>
-          <p:nvPr/>
-        </p:nvSpPr>
-        <p:spPr>
-          <a:xfrm>
-            <a:off x="0" y="960120"/>
-            <a:ext cx="12191695" cy="41148"/>
-          </a:xfrm>
-          <a:prstGeom prst="rect">
-            <a:avLst/>
-          </a:prstGeom>
-          <a:solidFill>
-            <a:srgbClr val="FFD000"/>
-          </a:solidFill>
-          <a:ln>
-            <a:noFill/>
-          </a:ln>
-        </p:spPr>
-        <p:style>
-          <a:lnRef idx="1">
-            <a:schemeClr val="accent1"/>
-          </a:lnRef>
-          <a:fillRef idx="3">
-            <a:schemeClr val="accent1"/>
-          </a:fillRef>
-          <a:effectRef idx="2">
-            <a:schemeClr val="accent1"/>
-          </a:effectRef>
-          <a:fontRef idx="minor">
-            <a:schemeClr val="lt1"/>
-          </a:fontRef>
-        </p:style>
-        <p:txBody>
-          <a:bodyPr rtlCol="0" anchor="ctr"/>
-          <a:lstStyle/>
-          <a:p>
-            <a:pPr algn="ctr"/>
-          </a:p>
-        </p:txBody>
-      </p:sp>
-      <p:sp>
-        <p:nvSpPr>
-          <p:cNvPr id="4" name="TextBox 3"/>
-          <p:cNvSpPr txBox="1"/>
-          <p:nvPr/>
-        </p:nvSpPr>
-        <p:spPr>
-          <a:xfrm>
-            <a:off x="457200" y="164592"/>
-            <a:ext cx="11277295" cy="502920"/>
-          </a:xfrm>
-          <a:prstGeom prst="rect">
-            <a:avLst/>
-          </a:prstGeom>
-          <a:noFill/>
-        </p:spPr>
-        <p:txBody>
-          <a:bodyPr wrap="square">
-            <a:spAutoFit/>
-          </a:bodyPr>
-          <a:lstStyle/>
-          <a:p>
-            <a:r>
-              <a:rPr sz="2600" b="1" i="0">
-                <a:solidFill>
-                  <a:srgbClr val="FFFFFF"/>
-                </a:solidFill>
-                <a:latin typeface="Calibri"/>
-              </a:rPr>
-              <a:t>Taller PI — por que importa</a:t>
-            </a:r>
-          </a:p>
-        </p:txBody>
-      </p:sp>
-      <p:sp>
-        <p:nvSpPr>
-          <p:cNvPr id="5" name="TextBox 4"/>
-          <p:cNvSpPr txBox="1"/>
-          <p:nvPr/>
-        </p:nvSpPr>
-        <p:spPr>
-          <a:xfrm>
-            <a:off x="457200" y="1170432"/>
-            <a:ext cx="11277295" cy="5230368"/>
-          </a:xfrm>
-          <a:prstGeom prst="rect">
-            <a:avLst/>
-          </a:prstGeom>
-          <a:noFill/>
-        </p:spPr>
-        <p:txBody>
-          <a:bodyPr wrap="square">
-            <a:spAutoFit/>
-          </a:bodyPr>
-          <a:lstStyle/>
-          <a:p>
-            <a:pPr>
-              <a:spcAft>
-                <a:spcPts val="800"/>
-              </a:spcAft>
-            </a:pPr>
-            <a:r>
-              <a:rPr sz="2000" b="0" i="0">
-                <a:solidFill>
-                  <a:srgbClr val="333333"/>
-                </a:solidFill>
-                <a:latin typeface="Calibri"/>
-              </a:rPr>
-              <a:t>–   </a:t>
-            </a:r>
-            <a:r>
-              <a:rPr sz="2000" b="1" i="0">
-                <a:solidFill>
-                  <a:srgbClr val="333333"/>
-                </a:solidFill>
-                <a:latin typeface="Calibri"/>
-              </a:rPr>
-              <a:t>Por que importa al PI:</a:t>
-            </a:r>
-            <a:r>
-              <a:rPr sz="2000" b="0" i="0">
-                <a:solidFill>
-                  <a:srgbClr val="333333"/>
-                </a:solidFill>
-                <a:latin typeface="Calibri"/>
-              </a:rPr>
-              <a:t> la semana entrante se integran los módulos, y un defecto que entra a la integración cuesta el triple de encontrar; esta revisión es el filtro que deja entrar solo código que otro humano ya leyó.</a:t>
-            </a:r>
-          </a:p>
-          <a:p>
-            <a:pPr>
-              <a:spcAft>
-                <a:spcPts val="800"/>
-              </a:spcAft>
-            </a:pPr>
-            <a:r>
-              <a:rPr sz="2000" b="0" i="0">
-                <a:solidFill>
-                  <a:srgbClr val="333333"/>
-                </a:solidFill>
-                <a:latin typeface="Calibri"/>
-              </a:rPr>
-              <a:t>–   El informe que reciba cada uno es la lista de tareas real con la que va a llegar a la entrega final: deja de adivinar qué le falta a VetCare porque alguien externo se lo escribió con evidencia.</a:t>
-            </a:r>
-          </a:p>
-          <a:p>
-            <a:pPr>
-              <a:spcAft>
-                <a:spcPts val="800"/>
-              </a:spcAft>
-            </a:pPr>
-            <a:r>
-              <a:rPr sz="2000" b="0" i="0">
-                <a:solidFill>
-                  <a:srgbClr val="333333"/>
-                </a:solidFill>
-                <a:latin typeface="Calibri"/>
-              </a:rPr>
-              <a:t>–   Saber dar y recibir retroalimentación técnica es exactamente lo que se le va a exigir en el primer empleo, donde nadie mezcla código sin la aprobación de otro.</a:t>
-            </a:r>
-          </a:p>
-        </p:txBody>
-      </p:sp>
-      <p:sp>
-        <p:nvSpPr>
-          <p:cNvPr id="6" name="TextBox 5"/>
-          <p:cNvSpPr txBox="1"/>
-          <p:nvPr/>
-        </p:nvSpPr>
-        <p:spPr>
-          <a:xfrm>
-            <a:off x="11185855" y="6473952"/>
-            <a:ext cx="640080" cy="274320"/>
-          </a:xfrm>
-          <a:prstGeom prst="rect">
-            <a:avLst/>
-          </a:prstGeom>
-          <a:noFill/>
-        </p:spPr>
-        <p:txBody>
-          <a:bodyPr wrap="square">
-            <a:spAutoFit/>
-          </a:bodyPr>
-          <a:lstStyle/>
-          <a:p>
-            <a:pPr algn="r"/>
-            <a:r>
-              <a:rPr sz="1100" b="0" i="0">
-                <a:solidFill>
-                  <a:srgbClr val="666666"/>
-                </a:solidFill>
-                <a:latin typeface="Calibri"/>
-              </a:rPr>
-              <a:t>23</a:t>
-            </a:r>
-          </a:p>
-        </p:txBody>
-      </p:sp>
-    </p:spTree>
-  </p:cSld>
-  <p:clrMapOvr>
-    <a:masterClrMapping/>
-  </p:clrMapOvr>
-</p:sld>
-</file>
-
-<file path=ppt/slides/slide24.xml><?xml version="1.0" encoding="utf-8"?>
-<p:sld xmlns:a="http://schemas.openxmlformats.org/drawingml/2006/main" xmlns:p="http://schemas.openxmlformats.org/presentationml/2006/main" xmlns:r="http://schemas.openxmlformats.org/officeDocument/2006/relationships">
-  <p:cSld>
-    <p:bg>
-      <p:bgPr>
-        <a:solidFill>
-          <a:srgbClr val="FFFFFF"/>
-        </a:solidFill>
-        <a:effectLst/>
-      </p:bgPr>
-    </p:bg>
-    <p:spTree>
-      <p:nvGrpSpPr>
-        <p:cNvPr id="1" name=""/>
-        <p:cNvGrpSpPr/>
-        <p:nvPr/>
-      </p:nvGrpSpPr>
-      <p:grpSpPr/>
-      <p:sp>
-        <p:nvSpPr>
-          <p:cNvPr id="2" name="Rectangle 1"/>
-          <p:cNvSpPr/>
-          <p:nvPr/>
-        </p:nvSpPr>
-        <p:spPr>
-          <a:xfrm>
-            <a:off x="0" y="0"/>
-            <a:ext cx="12191695" cy="960120"/>
-          </a:xfrm>
-          <a:prstGeom prst="rect">
-            <a:avLst/>
-          </a:prstGeom>
-          <a:solidFill>
-            <a:srgbClr val="095292"/>
-          </a:solidFill>
-          <a:ln>
-            <a:noFill/>
-          </a:ln>
-        </p:spPr>
-        <p:style>
-          <a:lnRef idx="1">
-            <a:schemeClr val="accent1"/>
-          </a:lnRef>
-          <a:fillRef idx="3">
-            <a:schemeClr val="accent1"/>
-          </a:fillRef>
-          <a:effectRef idx="2">
-            <a:schemeClr val="accent1"/>
-          </a:effectRef>
-          <a:fontRef idx="minor">
-            <a:schemeClr val="lt1"/>
-          </a:fontRef>
-        </p:style>
-        <p:txBody>
-          <a:bodyPr rtlCol="0" anchor="ctr"/>
-          <a:lstStyle/>
-          <a:p>
-            <a:pPr algn="ctr"/>
-          </a:p>
-        </p:txBody>
-      </p:sp>
-      <p:sp>
-        <p:nvSpPr>
-          <p:cNvPr id="3" name="Rectangle 2"/>
-          <p:cNvSpPr/>
-          <p:nvPr/>
-        </p:nvSpPr>
-        <p:spPr>
-          <a:xfrm>
-            <a:off x="0" y="960120"/>
-            <a:ext cx="12191695" cy="41148"/>
-          </a:xfrm>
-          <a:prstGeom prst="rect">
-            <a:avLst/>
-          </a:prstGeom>
-          <a:solidFill>
-            <a:srgbClr val="FFD000"/>
-          </a:solidFill>
-          <a:ln>
-            <a:noFill/>
-          </a:ln>
-        </p:spPr>
-        <p:style>
-          <a:lnRef idx="1">
-            <a:schemeClr val="accent1"/>
-          </a:lnRef>
-          <a:fillRef idx="3">
-            <a:schemeClr val="accent1"/>
-          </a:fillRef>
-          <a:effectRef idx="2">
-            <a:schemeClr val="accent1"/>
-          </a:effectRef>
-          <a:fontRef idx="minor">
-            <a:schemeClr val="lt1"/>
-          </a:fontRef>
-        </p:style>
-        <p:txBody>
-          <a:bodyPr rtlCol="0" anchor="ctr"/>
-          <a:lstStyle/>
-          <a:p>
-            <a:pPr algn="ctr"/>
-          </a:p>
-        </p:txBody>
-      </p:sp>
-      <p:sp>
-        <p:nvSpPr>
-          <p:cNvPr id="4" name="TextBox 3"/>
-          <p:cNvSpPr txBox="1"/>
-          <p:nvPr/>
-        </p:nvSpPr>
-        <p:spPr>
-          <a:xfrm>
-            <a:off x="457200" y="164592"/>
-            <a:ext cx="11277295" cy="502920"/>
-          </a:xfrm>
-          <a:prstGeom prst="rect">
-            <a:avLst/>
-          </a:prstGeom>
-          <a:noFill/>
-        </p:spPr>
-        <p:txBody>
-          <a:bodyPr wrap="square">
-            <a:spAutoFit/>
-          </a:bodyPr>
-          <a:lstStyle/>
-          <a:p>
-            <a:r>
-              <a:rPr sz="2600" b="1" i="0">
-                <a:solidFill>
-                  <a:srgbClr val="FFFFFF"/>
-                </a:solidFill>
-                <a:latin typeface="Calibri"/>
-              </a:rPr>
-              <a:t>Taller PI — punto de partida</a:t>
-            </a:r>
-          </a:p>
-        </p:txBody>
-      </p:sp>
-      <p:sp>
-        <p:nvSpPr>
-          <p:cNvPr id="5" name="TextBox 4"/>
-          <p:cNvSpPr txBox="1"/>
-          <p:nvPr/>
-        </p:nvSpPr>
-        <p:spPr>
-          <a:xfrm>
-            <a:off x="457200" y="1170432"/>
-            <a:ext cx="11277295" cy="5230368"/>
-          </a:xfrm>
-          <a:prstGeom prst="rect">
-            <a:avLst/>
-          </a:prstGeom>
-          <a:noFill/>
-        </p:spPr>
-        <p:txBody>
-          <a:bodyPr wrap="square">
-            <a:spAutoFit/>
-          </a:bodyPr>
-          <a:lstStyle/>
-          <a:p>
-            <a:pPr>
-              <a:spcAft>
-                <a:spcPts val="800"/>
-              </a:spcAft>
-            </a:pPr>
-            <a:r>
-              <a:rPr sz="2000" b="0" i="0">
-                <a:solidFill>
-                  <a:srgbClr val="333333"/>
-                </a:solidFill>
-                <a:latin typeface="Calibri"/>
-              </a:rPr>
-              <a:t>–   Cada estudiante llega con su versión de VetCare hasta la clase 9: dominio, colección, ventana Swing y persistencia en .csv, en distinto grado de avance.</a:t>
-            </a:r>
-          </a:p>
-          <a:p>
-            <a:pPr>
-              <a:spcAft>
-                <a:spcPts val="800"/>
-              </a:spcAft>
-            </a:pPr>
-            <a:r>
-              <a:rPr sz="2000" b="0" i="0">
-                <a:solidFill>
-                  <a:srgbClr val="333333"/>
-                </a:solidFill>
-                <a:latin typeface="Calibri"/>
-              </a:rPr>
-              <a:t>–   El docente proyecta el archivo VetCareParaRevisar.java, que compila y arranca pero termina con una excepción en tiempo de ejecución y contiene al menos siete hallazgos sembrados a propósito.</a:t>
-            </a:r>
-          </a:p>
-          <a:p>
-            <a:pPr>
-              <a:spcAft>
-                <a:spcPts val="800"/>
-              </a:spcAft>
-            </a:pPr>
-            <a:r>
-              <a:rPr sz="2000" b="0" i="0">
-                <a:solidFill>
-                  <a:srgbClr val="333333"/>
-                </a:solidFill>
-                <a:latin typeface="Calibri"/>
-              </a:rPr>
-              <a:t>–   Los estudiantes se cruzan en cadena (el 1 revisa al 2, el 2 al 3 y así hasta cerrar el círculo) y nadie revisa a quien lo está revisando (si el docente autorizó equipos, la cadena se arma entre equipos).</a:t>
-            </a:r>
-          </a:p>
-        </p:txBody>
-      </p:sp>
-      <p:sp>
-        <p:nvSpPr>
-          <p:cNvPr id="6" name="TextBox 5"/>
-          <p:cNvSpPr txBox="1"/>
-          <p:nvPr/>
-        </p:nvSpPr>
-        <p:spPr>
-          <a:xfrm>
-            <a:off x="11185855" y="6473952"/>
-            <a:ext cx="640080" cy="274320"/>
-          </a:xfrm>
-          <a:prstGeom prst="rect">
-            <a:avLst/>
-          </a:prstGeom>
-          <a:noFill/>
-        </p:spPr>
-        <p:txBody>
-          <a:bodyPr wrap="square">
-            <a:spAutoFit/>
-          </a:bodyPr>
-          <a:lstStyle/>
-          <a:p>
-            <a:pPr algn="r"/>
-            <a:r>
-              <a:rPr sz="1100" b="0" i="0">
-                <a:solidFill>
-                  <a:srgbClr val="666666"/>
-                </a:solidFill>
-                <a:latin typeface="Calibri"/>
-              </a:rPr>
-              <a:t>24</a:t>
-            </a:r>
-          </a:p>
-        </p:txBody>
-      </p:sp>
-    </p:spTree>
-  </p:cSld>
-  <p:clrMapOvr>
-    <a:masterClrMapping/>
-  </p:clrMapOvr>
-</p:sld>
-</file>
-
-<file path=ppt/slides/slide25.xml><?xml version="1.0" encoding="utf-8"?>
-<p:sld xmlns:a="http://schemas.openxmlformats.org/drawingml/2006/main" xmlns:p="http://schemas.openxmlformats.org/presentationml/2006/main" xmlns:r="http://schemas.openxmlformats.org/officeDocument/2006/relationships">
-  <p:cSld>
-    <p:bg>
-      <p:bgPr>
-        <a:solidFill>
-          <a:srgbClr val="FFFFFF"/>
-        </a:solidFill>
-        <a:effectLst/>
-      </p:bgPr>
-    </p:bg>
-    <p:spTree>
-      <p:nvGrpSpPr>
-        <p:cNvPr id="1" name=""/>
-        <p:cNvGrpSpPr/>
-        <p:nvPr/>
-      </p:nvGrpSpPr>
-      <p:grpSpPr/>
-      <p:sp>
-        <p:nvSpPr>
-          <p:cNvPr id="2" name="Rectangle 1"/>
-          <p:cNvSpPr/>
-          <p:nvPr/>
-        </p:nvSpPr>
-        <p:spPr>
-          <a:xfrm>
-            <a:off x="0" y="0"/>
-            <a:ext cx="12191695" cy="960120"/>
-          </a:xfrm>
-          <a:prstGeom prst="rect">
-            <a:avLst/>
-          </a:prstGeom>
-          <a:solidFill>
-            <a:srgbClr val="095292"/>
-          </a:solidFill>
-          <a:ln>
-            <a:noFill/>
-          </a:ln>
-        </p:spPr>
-        <p:style>
-          <a:lnRef idx="1">
-            <a:schemeClr val="accent1"/>
-          </a:lnRef>
-          <a:fillRef idx="3">
-            <a:schemeClr val="accent1"/>
-          </a:fillRef>
-          <a:effectRef idx="2">
-            <a:schemeClr val="accent1"/>
-          </a:effectRef>
-          <a:fontRef idx="minor">
-            <a:schemeClr val="lt1"/>
-          </a:fontRef>
-        </p:style>
-        <p:txBody>
-          <a:bodyPr rtlCol="0" anchor="ctr"/>
-          <a:lstStyle/>
-          <a:p>
-            <a:pPr algn="ctr"/>
-          </a:p>
-        </p:txBody>
-      </p:sp>
-      <p:sp>
-        <p:nvSpPr>
-          <p:cNvPr id="3" name="Rectangle 2"/>
-          <p:cNvSpPr/>
-          <p:nvPr/>
-        </p:nvSpPr>
-        <p:spPr>
-          <a:xfrm>
-            <a:off x="0" y="960120"/>
-            <a:ext cx="12191695" cy="41148"/>
-          </a:xfrm>
-          <a:prstGeom prst="rect">
-            <a:avLst/>
-          </a:prstGeom>
-          <a:solidFill>
-            <a:srgbClr val="FFD000"/>
-          </a:solidFill>
-          <a:ln>
-            <a:noFill/>
-          </a:ln>
-        </p:spPr>
-        <p:style>
-          <a:lnRef idx="1">
-            <a:schemeClr val="accent1"/>
-          </a:lnRef>
-          <a:fillRef idx="3">
-            <a:schemeClr val="accent1"/>
-          </a:fillRef>
-          <a:effectRef idx="2">
-            <a:schemeClr val="accent1"/>
-          </a:effectRef>
-          <a:fontRef idx="minor">
-            <a:schemeClr val="lt1"/>
-          </a:fontRef>
-        </p:style>
-        <p:txBody>
-          <a:bodyPr rtlCol="0" anchor="ctr"/>
-          <a:lstStyle/>
-          <a:p>
-            <a:pPr algn="ctr"/>
-          </a:p>
-        </p:txBody>
-      </p:sp>
-      <p:sp>
-        <p:nvSpPr>
-          <p:cNvPr id="4" name="TextBox 3"/>
-          <p:cNvSpPr txBox="1"/>
-          <p:nvPr/>
-        </p:nvSpPr>
-        <p:spPr>
-          <a:xfrm>
-            <a:off x="457200" y="164592"/>
-            <a:ext cx="11277295" cy="502920"/>
-          </a:xfrm>
-          <a:prstGeom prst="rect">
-            <a:avLst/>
-          </a:prstGeom>
-          <a:noFill/>
-        </p:spPr>
-        <p:txBody>
-          <a:bodyPr wrap="square">
-            <a:spAutoFit/>
-          </a:bodyPr>
-          <a:lstStyle/>
-          <a:p>
-            <a:r>
-              <a:rPr sz="2600" b="1" i="0">
-                <a:solidFill>
-                  <a:srgbClr val="FFFFFF"/>
-                </a:solidFill>
-                <a:latin typeface="Calibri"/>
-              </a:rPr>
-              <a:t>Taller PI — pasos guiados</a:t>
-            </a:r>
-          </a:p>
-        </p:txBody>
-      </p:sp>
-      <p:sp>
-        <p:nvSpPr>
-          <p:cNvPr id="5" name="Rounded Rectangle 4"/>
-          <p:cNvSpPr/>
-          <p:nvPr/>
-        </p:nvSpPr>
-        <p:spPr>
-          <a:xfrm>
-            <a:off x="457200" y="1234440"/>
-            <a:ext cx="11277295" cy="950976"/>
-          </a:xfrm>
-          <a:prstGeom prst="roundRect">
-            <a:avLst>
-              <a:gd name="adj" fmla="val 12000"/>
-            </a:avLst>
-          </a:prstGeom>
-          <a:solidFill>
-            <a:srgbClr val="F2F2F2"/>
-          </a:solidFill>
-          <a:ln>
-            <a:noFill/>
-          </a:ln>
-        </p:spPr>
-        <p:style>
-          <a:lnRef idx="1">
-            <a:schemeClr val="accent1"/>
-          </a:lnRef>
-          <a:fillRef idx="3">
-            <a:schemeClr val="accent1"/>
-          </a:fillRef>
-          <a:effectRef idx="2">
-            <a:schemeClr val="accent1"/>
-          </a:effectRef>
-          <a:fontRef idx="minor">
-            <a:schemeClr val="lt1"/>
-          </a:fontRef>
-        </p:style>
-        <p:txBody>
-          <a:bodyPr rtlCol="0" anchor="ctr"/>
-          <a:lstStyle/>
-          <a:p>
-            <a:pPr algn="ctr"/>
-          </a:p>
-        </p:txBody>
-      </p:sp>
-      <p:sp>
-        <p:nvSpPr>
-          <p:cNvPr id="6" name="Rounded Rectangle 5"/>
-          <p:cNvSpPr/>
-          <p:nvPr/>
-        </p:nvSpPr>
-        <p:spPr>
-          <a:xfrm>
-            <a:off x="594360" y="1490472"/>
-            <a:ext cx="438912" cy="438912"/>
-          </a:xfrm>
-          <a:prstGeom prst="roundRect">
-            <a:avLst>
-              <a:gd name="adj" fmla="val 12000"/>
-            </a:avLst>
-          </a:prstGeom>
-          <a:solidFill>
-            <a:srgbClr val="095292"/>
-          </a:solidFill>
-          <a:ln>
-            <a:noFill/>
-          </a:ln>
-        </p:spPr>
-        <p:style>
-          <a:lnRef idx="1">
-            <a:schemeClr val="accent1"/>
-          </a:lnRef>
-          <a:fillRef idx="3">
-            <a:schemeClr val="accent1"/>
-          </a:fillRef>
-          <a:effectRef idx="2">
-            <a:schemeClr val="accent1"/>
-          </a:effectRef>
-          <a:fontRef idx="minor">
-            <a:schemeClr val="lt1"/>
-          </a:fontRef>
-        </p:style>
-        <p:txBody>
-          <a:bodyPr rtlCol="0" anchor="ctr"/>
-          <a:lstStyle/>
-          <a:p>
-            <a:pPr algn="ctr"/>
-          </a:p>
-        </p:txBody>
-      </p:sp>
-      <p:sp>
-        <p:nvSpPr>
-          <p:cNvPr id="7" name="TextBox 6"/>
-          <p:cNvSpPr txBox="1"/>
-          <p:nvPr/>
-        </p:nvSpPr>
-        <p:spPr>
-          <a:xfrm>
-            <a:off x="594360" y="1490472"/>
-            <a:ext cx="438912" cy="438912"/>
-          </a:xfrm>
-          <a:prstGeom prst="rect">
-            <a:avLst/>
-          </a:prstGeom>
-          <a:noFill/>
-        </p:spPr>
-        <p:txBody>
-          <a:bodyPr wrap="square" anchor="ctr"/>
-          <a:lstStyle/>
-          <a:p>
-            <a:pPr algn="ctr"/>
-            <a:r>
-              <a:rPr sz="1600" b="1" i="0">
-                <a:solidFill>
-                  <a:srgbClr val="FFFFFF"/>
-                </a:solidFill>
-                <a:latin typeface="Calibri"/>
-              </a:rPr>
-              <a:t>1</a:t>
-            </a:r>
-          </a:p>
-        </p:txBody>
-      </p:sp>
-      <p:sp>
-        <p:nvSpPr>
-          <p:cNvPr id="8" name="TextBox 7"/>
-          <p:cNvSpPr txBox="1"/>
-          <p:nvPr/>
-        </p:nvSpPr>
-        <p:spPr>
-          <a:xfrm>
-            <a:off x="1188720" y="1325880"/>
-            <a:ext cx="10271455" cy="786384"/>
-          </a:xfrm>
-          <a:prstGeom prst="rect">
-            <a:avLst/>
-          </a:prstGeom>
-          <a:noFill/>
-        </p:spPr>
-        <p:txBody>
-          <a:bodyPr wrap="square" anchor="ctr"/>
-          <a:lstStyle/>
-          <a:p>
-            <a:r>
-              <a:rPr sz="1400" b="1" i="0">
-                <a:solidFill>
-                  <a:srgbClr val="095292"/>
-                </a:solidFill>
-                <a:latin typeface="Calibri"/>
-              </a:rPr>
-              <a:t>Intercambien proyectos: cada estudiante entrega su carpeta comprimida más un archivo de tres líneas con las instrucciones de ejecución, y recibe el proyecto de otro compañero (si el docente autorizó equipos, el de otro equipo; la revisión funciona igual); lo primero es abrirlo en VS Code y ejecutarlo, anotando si arrancó y, si no, el mensaje de error exacto copiado tal cual.</a:t>
-            </a:r>
-          </a:p>
-        </p:txBody>
-      </p:sp>
-      <p:sp>
-        <p:nvSpPr>
-          <p:cNvPr id="9" name="Rounded Rectangle 8"/>
-          <p:cNvSpPr/>
-          <p:nvPr/>
-        </p:nvSpPr>
-        <p:spPr>
-          <a:xfrm>
-            <a:off x="457200" y="2276856"/>
-            <a:ext cx="11277295" cy="950976"/>
-          </a:xfrm>
-          <a:prstGeom prst="roundRect">
-            <a:avLst>
-              <a:gd name="adj" fmla="val 12000"/>
-            </a:avLst>
-          </a:prstGeom>
-          <a:solidFill>
-            <a:srgbClr val="E8F4FA"/>
-          </a:solidFill>
-          <a:ln>
-            <a:noFill/>
-          </a:ln>
-        </p:spPr>
-        <p:style>
-          <a:lnRef idx="1">
-            <a:schemeClr val="accent1"/>
-          </a:lnRef>
-          <a:fillRef idx="3">
-            <a:schemeClr val="accent1"/>
-          </a:fillRef>
-          <a:effectRef idx="2">
-            <a:schemeClr val="accent1"/>
-          </a:effectRef>
-          <a:fontRef idx="minor">
-            <a:schemeClr val="lt1"/>
-          </a:fontRef>
-        </p:style>
-        <p:txBody>
-          <a:bodyPr rtlCol="0" anchor="ctr"/>
-          <a:lstStyle/>
-          <a:p>
-            <a:pPr algn="ctr"/>
-          </a:p>
-        </p:txBody>
-      </p:sp>
-      <p:sp>
-        <p:nvSpPr>
-          <p:cNvPr id="10" name="Rounded Rectangle 9"/>
-          <p:cNvSpPr/>
-          <p:nvPr/>
-        </p:nvSpPr>
-        <p:spPr>
-          <a:xfrm>
-            <a:off x="594360" y="2532888"/>
-            <a:ext cx="438912" cy="438912"/>
-          </a:xfrm>
-          <a:prstGeom prst="roundRect">
-            <a:avLst>
-              <a:gd name="adj" fmla="val 12000"/>
-            </a:avLst>
-          </a:prstGeom>
-          <a:solidFill>
-            <a:srgbClr val="095292"/>
-          </a:solidFill>
-          <a:ln>
-            <a:noFill/>
-          </a:ln>
-        </p:spPr>
-        <p:style>
-          <a:lnRef idx="1">
-            <a:schemeClr val="accent1"/>
-          </a:lnRef>
-          <a:fillRef idx="3">
-            <a:schemeClr val="accent1"/>
-          </a:fillRef>
-          <a:effectRef idx="2">
-            <a:schemeClr val="accent1"/>
-          </a:effectRef>
-          <a:fontRef idx="minor">
-            <a:schemeClr val="lt1"/>
-          </a:fontRef>
-        </p:style>
-        <p:txBody>
-          <a:bodyPr rtlCol="0" anchor="ctr"/>
-          <a:lstStyle/>
-          <a:p>
-            <a:pPr algn="ctr"/>
-          </a:p>
-        </p:txBody>
-      </p:sp>
-      <p:sp>
-        <p:nvSpPr>
-          <p:cNvPr id="11" name="TextBox 10"/>
-          <p:cNvSpPr txBox="1"/>
-          <p:nvPr/>
-        </p:nvSpPr>
-        <p:spPr>
-          <a:xfrm>
-            <a:off x="594360" y="2532888"/>
-            <a:ext cx="438912" cy="438912"/>
-          </a:xfrm>
-          <a:prstGeom prst="rect">
-            <a:avLst/>
-          </a:prstGeom>
-          <a:noFill/>
-        </p:spPr>
-        <p:txBody>
-          <a:bodyPr wrap="square" anchor="ctr"/>
-          <a:lstStyle/>
-          <a:p>
-            <a:pPr algn="ctr"/>
-            <a:r>
-              <a:rPr sz="1600" b="1" i="0">
-                <a:solidFill>
-                  <a:srgbClr val="FFFFFF"/>
-                </a:solidFill>
-                <a:latin typeface="Calibri"/>
-              </a:rPr>
-              <a:t>2</a:t>
-            </a:r>
-          </a:p>
-        </p:txBody>
-      </p:sp>
-      <p:sp>
-        <p:nvSpPr>
-          <p:cNvPr id="12" name="TextBox 11"/>
-          <p:cNvSpPr txBox="1"/>
-          <p:nvPr/>
-        </p:nvSpPr>
-        <p:spPr>
-          <a:xfrm>
-            <a:off x="1188720" y="2368296"/>
-            <a:ext cx="10271455" cy="786384"/>
-          </a:xfrm>
-          <a:prstGeom prst="rect">
-            <a:avLst/>
-          </a:prstGeom>
-          <a:noFill/>
-        </p:spPr>
-        <p:txBody>
-          <a:bodyPr wrap="square" anchor="ctr"/>
-          <a:lstStyle/>
-          <a:p>
-            <a:r>
-              <a:rPr sz="1400" b="1" i="0">
-                <a:solidFill>
-                  <a:srgbClr val="095292"/>
-                </a:solidFill>
-                <a:latin typeface="Calibri"/>
-              </a:rPr>
-              <a:t>Recorran el proyecto recibido con el checklist de doce ítems (clase de dominio, encapsulamiento, colección, interfaz gráfica, try-catch en fronteras, persistencia, catch vacío, métodos largos, duplicación, nombres, números mágicos, validación de casos borde) marcando cumple / no cumple / no aplica y escribiendo la evidencia archivo:línea en cada 'no cumple'.</a:t>
-            </a:r>
-          </a:p>
-        </p:txBody>
-      </p:sp>
-      <p:sp>
-        <p:nvSpPr>
-          <p:cNvPr id="13" name="Rounded Rectangle 12"/>
-          <p:cNvSpPr/>
-          <p:nvPr/>
-        </p:nvSpPr>
-        <p:spPr>
-          <a:xfrm>
-            <a:off x="457200" y="3319272"/>
-            <a:ext cx="11277295" cy="950976"/>
-          </a:xfrm>
-          <a:prstGeom prst="roundRect">
-            <a:avLst>
-              <a:gd name="adj" fmla="val 12000"/>
-            </a:avLst>
-          </a:prstGeom>
-          <a:solidFill>
-            <a:srgbClr val="F2F2F2"/>
-          </a:solidFill>
-          <a:ln>
-            <a:noFill/>
-          </a:ln>
-        </p:spPr>
-        <p:style>
-          <a:lnRef idx="1">
-            <a:schemeClr val="accent1"/>
-          </a:lnRef>
-          <a:fillRef idx="3">
-            <a:schemeClr val="accent1"/>
-          </a:fillRef>
-          <a:effectRef idx="2">
-            <a:schemeClr val="accent1"/>
-          </a:effectRef>
-          <a:fontRef idx="minor">
-            <a:schemeClr val="lt1"/>
-          </a:fontRef>
-        </p:style>
-        <p:txBody>
-          <a:bodyPr rtlCol="0" anchor="ctr"/>
-          <a:lstStyle/>
-          <a:p>
-            <a:pPr algn="ctr"/>
-          </a:p>
-        </p:txBody>
-      </p:sp>
-      <p:sp>
-        <p:nvSpPr>
-          <p:cNvPr id="14" name="Rounded Rectangle 13"/>
-          <p:cNvSpPr/>
-          <p:nvPr/>
-        </p:nvSpPr>
-        <p:spPr>
-          <a:xfrm>
-            <a:off x="594360" y="3575304"/>
-            <a:ext cx="438912" cy="438912"/>
-          </a:xfrm>
-          <a:prstGeom prst="roundRect">
-            <a:avLst>
-              <a:gd name="adj" fmla="val 12000"/>
-            </a:avLst>
-          </a:prstGeom>
-          <a:solidFill>
-            <a:srgbClr val="095292"/>
-          </a:solidFill>
-          <a:ln>
-            <a:noFill/>
-          </a:ln>
-        </p:spPr>
-        <p:style>
-          <a:lnRef idx="1">
-            <a:schemeClr val="accent1"/>
-          </a:lnRef>
-          <a:fillRef idx="3">
-            <a:schemeClr val="accent1"/>
-          </a:fillRef>
-          <a:effectRef idx="2">
-            <a:schemeClr val="accent1"/>
-          </a:effectRef>
-          <a:fontRef idx="minor">
-            <a:schemeClr val="lt1"/>
-          </a:fontRef>
-        </p:style>
-        <p:txBody>
-          <a:bodyPr rtlCol="0" anchor="ctr"/>
-          <a:lstStyle/>
-          <a:p>
-            <a:pPr algn="ctr"/>
-          </a:p>
-        </p:txBody>
-      </p:sp>
-      <p:sp>
-        <p:nvSpPr>
-          <p:cNvPr id="15" name="TextBox 14"/>
-          <p:cNvSpPr txBox="1"/>
-          <p:nvPr/>
-        </p:nvSpPr>
-        <p:spPr>
-          <a:xfrm>
-            <a:off x="594360" y="3575304"/>
-            <a:ext cx="438912" cy="438912"/>
-          </a:xfrm>
-          <a:prstGeom prst="rect">
-            <a:avLst/>
-          </a:prstGeom>
-          <a:noFill/>
-        </p:spPr>
-        <p:txBody>
-          <a:bodyPr wrap="square" anchor="ctr"/>
-          <a:lstStyle/>
-          <a:p>
-            <a:pPr algn="ctr"/>
-            <a:r>
-              <a:rPr sz="1600" b="1" i="0">
-                <a:solidFill>
-                  <a:srgbClr val="FFFFFF"/>
-                </a:solidFill>
-                <a:latin typeface="Calibri"/>
-              </a:rPr>
-              <a:t>3</a:t>
-            </a:r>
-          </a:p>
-        </p:txBody>
-      </p:sp>
-      <p:sp>
-        <p:nvSpPr>
-          <p:cNvPr id="16" name="TextBox 15"/>
-          <p:cNvSpPr txBox="1"/>
-          <p:nvPr/>
-        </p:nvSpPr>
-        <p:spPr>
-          <a:xfrm>
-            <a:off x="1188720" y="3410712"/>
-            <a:ext cx="10271455" cy="786384"/>
-          </a:xfrm>
-          <a:prstGeom prst="rect">
-            <a:avLst/>
-          </a:prstGeom>
-          <a:noFill/>
-        </p:spPr>
-        <p:txBody>
-          <a:bodyPr wrap="square" anchor="ctr"/>
-          <a:lstStyle/>
-          <a:p>
-            <a:r>
-              <a:rPr sz="1500" b="1" i="0">
-                <a:solidFill>
-                  <a:srgbClr val="095292"/>
-                </a:solidFill>
-                <a:latin typeface="Calibri"/>
-              </a:rPr>
-              <a:t>Provoquen a propósito los cuatro casos borde de VetCare (edad con letras, campos vacíos, buscar un ID inexistente, borrar o dañar una línea de mascotas.csv) y registren qué hizo la aplicación en cada uno, con el texto del mensaje o de la excepción.</a:t>
-            </a:r>
-          </a:p>
-        </p:txBody>
-      </p:sp>
-      <p:sp>
-        <p:nvSpPr>
-          <p:cNvPr id="17" name="Rounded Rectangle 16"/>
-          <p:cNvSpPr/>
-          <p:nvPr/>
-        </p:nvSpPr>
-        <p:spPr>
-          <a:xfrm>
-            <a:off x="457200" y="4361688"/>
-            <a:ext cx="11277295" cy="950976"/>
-          </a:xfrm>
-          <a:prstGeom prst="roundRect">
-            <a:avLst>
-              <a:gd name="adj" fmla="val 12000"/>
-            </a:avLst>
-          </a:prstGeom>
-          <a:solidFill>
-            <a:srgbClr val="E8F4FA"/>
-          </a:solidFill>
-          <a:ln>
-            <a:noFill/>
-          </a:ln>
-        </p:spPr>
-        <p:style>
-          <a:lnRef idx="1">
-            <a:schemeClr val="accent1"/>
-          </a:lnRef>
-          <a:fillRef idx="3">
-            <a:schemeClr val="accent1"/>
-          </a:fillRef>
-          <a:effectRef idx="2">
-            <a:schemeClr val="accent1"/>
-          </a:effectRef>
-          <a:fontRef idx="minor">
-            <a:schemeClr val="lt1"/>
-          </a:fontRef>
-        </p:style>
-        <p:txBody>
-          <a:bodyPr rtlCol="0" anchor="ctr"/>
-          <a:lstStyle/>
-          <a:p>
-            <a:pPr algn="ctr"/>
-          </a:p>
-        </p:txBody>
-      </p:sp>
-      <p:sp>
-        <p:nvSpPr>
-          <p:cNvPr id="18" name="Rounded Rectangle 17"/>
-          <p:cNvSpPr/>
-          <p:nvPr/>
-        </p:nvSpPr>
-        <p:spPr>
-          <a:xfrm>
-            <a:off x="594360" y="4617720"/>
-            <a:ext cx="438912" cy="438912"/>
-          </a:xfrm>
-          <a:prstGeom prst="roundRect">
-            <a:avLst>
-              <a:gd name="adj" fmla="val 12000"/>
-            </a:avLst>
-          </a:prstGeom>
-          <a:solidFill>
-            <a:srgbClr val="095292"/>
-          </a:solidFill>
-          <a:ln>
-            <a:noFill/>
-          </a:ln>
-        </p:spPr>
-        <p:style>
-          <a:lnRef idx="1">
-            <a:schemeClr val="accent1"/>
-          </a:lnRef>
-          <a:fillRef idx="3">
-            <a:schemeClr val="accent1"/>
-          </a:fillRef>
-          <a:effectRef idx="2">
-            <a:schemeClr val="accent1"/>
-          </a:effectRef>
-          <a:fontRef idx="minor">
-            <a:schemeClr val="lt1"/>
-          </a:fontRef>
-        </p:style>
-        <p:txBody>
-          <a:bodyPr rtlCol="0" anchor="ctr"/>
-          <a:lstStyle/>
-          <a:p>
-            <a:pPr algn="ctr"/>
-          </a:p>
-        </p:txBody>
-      </p:sp>
-      <p:sp>
-        <p:nvSpPr>
-          <p:cNvPr id="19" name="TextBox 18"/>
-          <p:cNvSpPr txBox="1"/>
-          <p:nvPr/>
-        </p:nvSpPr>
-        <p:spPr>
-          <a:xfrm>
-            <a:off x="594360" y="4617720"/>
-            <a:ext cx="438912" cy="438912"/>
-          </a:xfrm>
-          <a:prstGeom prst="rect">
-            <a:avLst/>
-          </a:prstGeom>
-          <a:noFill/>
-        </p:spPr>
-        <p:txBody>
-          <a:bodyPr wrap="square" anchor="ctr"/>
-          <a:lstStyle/>
-          <a:p>
-            <a:pPr algn="ctr"/>
-            <a:r>
-              <a:rPr sz="1600" b="1" i="0">
-                <a:solidFill>
-                  <a:srgbClr val="FFFFFF"/>
-                </a:solidFill>
-                <a:latin typeface="Calibri"/>
-              </a:rPr>
-              <a:t>4</a:t>
-            </a:r>
-          </a:p>
-        </p:txBody>
-      </p:sp>
-      <p:sp>
-        <p:nvSpPr>
-          <p:cNvPr id="20" name="TextBox 19"/>
-          <p:cNvSpPr txBox="1"/>
-          <p:nvPr/>
-        </p:nvSpPr>
-        <p:spPr>
-          <a:xfrm>
-            <a:off x="1188720" y="4453128"/>
-            <a:ext cx="10271455" cy="786384"/>
-          </a:xfrm>
-          <a:prstGeom prst="rect">
-            <a:avLst/>
-          </a:prstGeom>
-          <a:noFill/>
-        </p:spPr>
-        <p:txBody>
-          <a:bodyPr wrap="square" anchor="ctr"/>
-          <a:lstStyle/>
-          <a:p>
-            <a:r>
-              <a:rPr sz="1500" b="1" i="0">
-                <a:solidFill>
-                  <a:srgbClr val="095292"/>
-                </a:solidFill>
-                <a:latin typeface="Calibri"/>
-              </a:rPr>
-              <a:t>Redacten cinco hallazgos priorizados como bloqueante, mayor o menor, cada uno con el formato Evidencia + Impacto + Sugerencia, todos referidos al código y ninguno a la persona; incluyan al menos un bloqueante si existe.</a:t>
-            </a:r>
-          </a:p>
-        </p:txBody>
-      </p:sp>
-      <p:sp>
-        <p:nvSpPr>
-          <p:cNvPr id="21" name="Rounded Rectangle 20"/>
-          <p:cNvSpPr/>
-          <p:nvPr/>
-        </p:nvSpPr>
-        <p:spPr>
-          <a:xfrm>
-            <a:off x="457200" y="5404104"/>
-            <a:ext cx="11277295" cy="950976"/>
-          </a:xfrm>
-          <a:prstGeom prst="roundRect">
-            <a:avLst>
-              <a:gd name="adj" fmla="val 12000"/>
-            </a:avLst>
-          </a:prstGeom>
-          <a:solidFill>
-            <a:srgbClr val="F2F2F2"/>
-          </a:solidFill>
-          <a:ln>
-            <a:noFill/>
-          </a:ln>
-        </p:spPr>
-        <p:style>
-          <a:lnRef idx="1">
-            <a:schemeClr val="accent1"/>
-          </a:lnRef>
-          <a:fillRef idx="3">
-            <a:schemeClr val="accent1"/>
-          </a:fillRef>
-          <a:effectRef idx="2">
-            <a:schemeClr val="accent1"/>
-          </a:effectRef>
-          <a:fontRef idx="minor">
-            <a:schemeClr val="lt1"/>
-          </a:fontRef>
-        </p:style>
-        <p:txBody>
-          <a:bodyPr rtlCol="0" anchor="ctr"/>
-          <a:lstStyle/>
-          <a:p>
-            <a:pPr algn="ctr"/>
-          </a:p>
-        </p:txBody>
-      </p:sp>
-      <p:sp>
-        <p:nvSpPr>
-          <p:cNvPr id="22" name="Rounded Rectangle 21"/>
-          <p:cNvSpPr/>
-          <p:nvPr/>
-        </p:nvSpPr>
-        <p:spPr>
-          <a:xfrm>
-            <a:off x="594360" y="5660136"/>
-            <a:ext cx="438912" cy="438912"/>
-          </a:xfrm>
-          <a:prstGeom prst="roundRect">
-            <a:avLst>
-              <a:gd name="adj" fmla="val 12000"/>
-            </a:avLst>
-          </a:prstGeom>
-          <a:solidFill>
-            <a:srgbClr val="095292"/>
-          </a:solidFill>
-          <a:ln>
-            <a:noFill/>
-          </a:ln>
-        </p:spPr>
-        <p:style>
-          <a:lnRef idx="1">
-            <a:schemeClr val="accent1"/>
-          </a:lnRef>
-          <a:fillRef idx="3">
-            <a:schemeClr val="accent1"/>
-          </a:fillRef>
-          <a:effectRef idx="2">
-            <a:schemeClr val="accent1"/>
-          </a:effectRef>
-          <a:fontRef idx="minor">
-            <a:schemeClr val="lt1"/>
-          </a:fontRef>
-        </p:style>
-        <p:txBody>
-          <a:bodyPr rtlCol="0" anchor="ctr"/>
-          <a:lstStyle/>
-          <a:p>
-            <a:pPr algn="ctr"/>
-          </a:p>
-        </p:txBody>
-      </p:sp>
-      <p:sp>
-        <p:nvSpPr>
-          <p:cNvPr id="23" name="TextBox 22"/>
-          <p:cNvSpPr txBox="1"/>
-          <p:nvPr/>
-        </p:nvSpPr>
-        <p:spPr>
-          <a:xfrm>
-            <a:off x="594360" y="5660136"/>
-            <a:ext cx="438912" cy="438912"/>
-          </a:xfrm>
-          <a:prstGeom prst="rect">
-            <a:avLst/>
-          </a:prstGeom>
-          <a:noFill/>
-        </p:spPr>
-        <p:txBody>
-          <a:bodyPr wrap="square" anchor="ctr"/>
-          <a:lstStyle/>
-          <a:p>
-            <a:pPr algn="ctr"/>
-            <a:r>
-              <a:rPr sz="1600" b="1" i="0">
-                <a:solidFill>
-                  <a:srgbClr val="FFFFFF"/>
-                </a:solidFill>
-                <a:latin typeface="Calibri"/>
-              </a:rPr>
-              <a:t>5</a:t>
-            </a:r>
-          </a:p>
-        </p:txBody>
-      </p:sp>
-      <p:sp>
-        <p:nvSpPr>
-          <p:cNvPr id="24" name="TextBox 23"/>
-          <p:cNvSpPr txBox="1"/>
-          <p:nvPr/>
-        </p:nvSpPr>
-        <p:spPr>
-          <a:xfrm>
-            <a:off x="1188720" y="5495544"/>
-            <a:ext cx="10271455" cy="786384"/>
-          </a:xfrm>
-          <a:prstGeom prst="rect">
-            <a:avLst/>
-          </a:prstGeom>
-          <a:noFill/>
-        </p:spPr>
-        <p:txBody>
-          <a:bodyPr wrap="square" anchor="ctr"/>
-          <a:lstStyle/>
-          <a:p>
-            <a:r>
-              <a:rPr sz="1500" b="1" i="0">
-                <a:solidFill>
-                  <a:srgbClr val="095292"/>
-                </a:solidFill>
-                <a:latin typeface="Calibri"/>
-              </a:rPr>
-              <a:t>Hagan la devolución cruzada de ocho minutos por proyecto revisado y cierren con el plan de corrección escrito por su autor: qué acepta y corrige, qué justifica y deja igual, y qué difiere, con responsable en cada línea.</a:t>
-            </a:r>
-          </a:p>
-        </p:txBody>
-      </p:sp>
-      <p:sp>
-        <p:nvSpPr>
-          <p:cNvPr id="25" name="TextBox 24"/>
-          <p:cNvSpPr txBox="1"/>
-          <p:nvPr/>
-        </p:nvSpPr>
-        <p:spPr>
-          <a:xfrm>
-            <a:off x="11185855" y="6473952"/>
-            <a:ext cx="640080" cy="274320"/>
-          </a:xfrm>
-          <a:prstGeom prst="rect">
-            <a:avLst/>
-          </a:prstGeom>
-          <a:noFill/>
-        </p:spPr>
-        <p:txBody>
-          <a:bodyPr wrap="square">
-            <a:spAutoFit/>
-          </a:bodyPr>
-          <a:lstStyle/>
-          <a:p>
-            <a:pPr algn="r"/>
-            <a:r>
-              <a:rPr sz="1100" b="0" i="0">
-                <a:solidFill>
-                  <a:srgbClr val="666666"/>
-                </a:solidFill>
-                <a:latin typeface="Calibri"/>
-              </a:rPr>
-              <a:t>25</a:t>
-            </a:r>
-          </a:p>
-        </p:txBody>
-      </p:sp>
-    </p:spTree>
-  </p:cSld>
-  <p:clrMapOvr>
-    <a:masterClrMapping/>
-  </p:clrMapOvr>
-</p:sld>
-</file>
-
-<file path=ppt/slides/slide26.xml><?xml version="1.0" encoding="utf-8"?>
-<p:sld xmlns:a="http://schemas.openxmlformats.org/drawingml/2006/main" xmlns:p="http://schemas.openxmlformats.org/presentationml/2006/main" xmlns:r="http://schemas.openxmlformats.org/officeDocument/2006/relationships">
-  <p:cSld>
-    <p:bg>
-      <p:bgPr>
-        <a:solidFill>
-          <a:srgbClr val="FFFFFF"/>
-        </a:solidFill>
-        <a:effectLst/>
-      </p:bgPr>
-    </p:bg>
-    <p:spTree>
-      <p:nvGrpSpPr>
-        <p:cNvPr id="1" name=""/>
-        <p:cNvGrpSpPr/>
-        <p:nvPr/>
-      </p:nvGrpSpPr>
-      <p:grpSpPr/>
-      <p:sp>
-        <p:nvSpPr>
-          <p:cNvPr id="2" name="Rectangle 1"/>
-          <p:cNvSpPr/>
-          <p:nvPr/>
-        </p:nvSpPr>
-        <p:spPr>
-          <a:xfrm>
-            <a:off x="0" y="0"/>
-            <a:ext cx="12191695" cy="960120"/>
-          </a:xfrm>
-          <a:prstGeom prst="rect">
-            <a:avLst/>
-          </a:prstGeom>
-          <a:solidFill>
-            <a:srgbClr val="095292"/>
-          </a:solidFill>
-          <a:ln>
-            <a:noFill/>
-          </a:ln>
-        </p:spPr>
-        <p:style>
-          <a:lnRef idx="1">
-            <a:schemeClr val="accent1"/>
-          </a:lnRef>
-          <a:fillRef idx="3">
-            <a:schemeClr val="accent1"/>
-          </a:fillRef>
-          <a:effectRef idx="2">
-            <a:schemeClr val="accent1"/>
-          </a:effectRef>
-          <a:fontRef idx="minor">
-            <a:schemeClr val="lt1"/>
-          </a:fontRef>
-        </p:style>
-        <p:txBody>
-          <a:bodyPr rtlCol="0" anchor="ctr"/>
-          <a:lstStyle/>
-          <a:p>
-            <a:pPr algn="ctr"/>
-          </a:p>
-        </p:txBody>
-      </p:sp>
-      <p:sp>
-        <p:nvSpPr>
-          <p:cNvPr id="3" name="Rectangle 2"/>
-          <p:cNvSpPr/>
-          <p:nvPr/>
-        </p:nvSpPr>
-        <p:spPr>
-          <a:xfrm>
-            <a:off x="0" y="960120"/>
-            <a:ext cx="12191695" cy="41148"/>
-          </a:xfrm>
-          <a:prstGeom prst="rect">
-            <a:avLst/>
-          </a:prstGeom>
-          <a:solidFill>
-            <a:srgbClr val="FFD000"/>
-          </a:solidFill>
-          <a:ln>
-            <a:noFill/>
-          </a:ln>
-        </p:spPr>
-        <p:style>
-          <a:lnRef idx="1">
-            <a:schemeClr val="accent1"/>
-          </a:lnRef>
-          <a:fillRef idx="3">
-            <a:schemeClr val="accent1"/>
-          </a:fillRef>
-          <a:effectRef idx="2">
-            <a:schemeClr val="accent1"/>
-          </a:effectRef>
-          <a:fontRef idx="minor">
-            <a:schemeClr val="lt1"/>
-          </a:fontRef>
-        </p:style>
-        <p:txBody>
-          <a:bodyPr rtlCol="0" anchor="ctr"/>
-          <a:lstStyle/>
-          <a:p>
-            <a:pPr algn="ctr"/>
-          </a:p>
-        </p:txBody>
-      </p:sp>
-      <p:sp>
-        <p:nvSpPr>
-          <p:cNvPr id="4" name="TextBox 3"/>
-          <p:cNvSpPr txBox="1"/>
-          <p:nvPr/>
-        </p:nvSpPr>
-        <p:spPr>
-          <a:xfrm>
-            <a:off x="457200" y="164592"/>
-            <a:ext cx="11277295" cy="502920"/>
-          </a:xfrm>
-          <a:prstGeom prst="rect">
-            <a:avLst/>
-          </a:prstGeom>
-          <a:noFill/>
-        </p:spPr>
-        <p:txBody>
-          <a:bodyPr wrap="square">
-            <a:spAutoFit/>
-          </a:bodyPr>
-          <a:lstStyle/>
-          <a:p>
-            <a:r>
-              <a:rPr sz="2600" b="1" i="0">
-                <a:solidFill>
-                  <a:srgbClr val="FFFFFF"/>
-                </a:solidFill>
-                <a:latin typeface="Calibri"/>
-              </a:rPr>
-              <a:t>Antes de entregar — autochequeo</a:t>
-            </a:r>
-          </a:p>
-        </p:txBody>
-      </p:sp>
-      <p:sp>
-        <p:nvSpPr>
-          <p:cNvPr id="5" name="Rounded Rectangle 4"/>
-          <p:cNvSpPr/>
-          <p:nvPr/>
-        </p:nvSpPr>
-        <p:spPr>
-          <a:xfrm>
-            <a:off x="457200" y="1261872"/>
-            <a:ext cx="11277295" cy="566928"/>
-          </a:xfrm>
-          <a:prstGeom prst="roundRect">
-            <a:avLst>
-              <a:gd name="adj" fmla="val 12000"/>
-            </a:avLst>
-          </a:prstGeom>
-          <a:solidFill>
-            <a:srgbClr val="F2F2F2"/>
-          </a:solidFill>
-          <a:ln>
-            <a:noFill/>
-          </a:ln>
-        </p:spPr>
-        <p:style>
-          <a:lnRef idx="1">
-            <a:schemeClr val="accent1"/>
-          </a:lnRef>
-          <a:fillRef idx="3">
-            <a:schemeClr val="accent1"/>
-          </a:fillRef>
-          <a:effectRef idx="2">
-            <a:schemeClr val="accent1"/>
-          </a:effectRef>
-          <a:fontRef idx="minor">
-            <a:schemeClr val="lt1"/>
-          </a:fontRef>
-        </p:style>
-        <p:txBody>
-          <a:bodyPr rtlCol="0" anchor="ctr"/>
-          <a:lstStyle/>
-          <a:p>
-            <a:pPr algn="ctr"/>
-          </a:p>
-        </p:txBody>
-      </p:sp>
-      <p:sp>
-        <p:nvSpPr>
-          <p:cNvPr id="6" name="Rectangle 5"/>
-          <p:cNvSpPr/>
-          <p:nvPr/>
-        </p:nvSpPr>
-        <p:spPr>
-          <a:xfrm>
-            <a:off x="640080" y="1408175"/>
-            <a:ext cx="274320" cy="274320"/>
-          </a:xfrm>
-          <a:prstGeom prst="rect">
-            <a:avLst/>
-          </a:prstGeom>
-          <a:solidFill>
-            <a:srgbClr val="FFFFFF"/>
-          </a:solidFill>
-          <a:ln>
-            <a:solidFill>
-              <a:srgbClr val="333333"/>
-            </a:solidFill>
-          </a:ln>
-        </p:spPr>
-        <p:style>
-          <a:lnRef idx="1">
-            <a:schemeClr val="accent1"/>
-          </a:lnRef>
-          <a:fillRef idx="3">
-            <a:schemeClr val="accent1"/>
-          </a:fillRef>
-          <a:effectRef idx="2">
-            <a:schemeClr val="accent1"/>
-          </a:effectRef>
-          <a:fontRef idx="minor">
-            <a:schemeClr val="lt1"/>
-          </a:fontRef>
-        </p:style>
-        <p:txBody>
-          <a:bodyPr rtlCol="0" anchor="ctr"/>
-          <a:lstStyle/>
-          <a:p>
-            <a:pPr algn="ctr"/>
-          </a:p>
-        </p:txBody>
-      </p:sp>
-      <p:sp>
-        <p:nvSpPr>
-          <p:cNvPr id="7" name="Rectangle 6"/>
-          <p:cNvSpPr/>
-          <p:nvPr/>
-        </p:nvSpPr>
-        <p:spPr>
-          <a:xfrm>
-            <a:off x="640080" y="1408175"/>
-            <a:ext cx="73152" cy="274320"/>
-          </a:xfrm>
-          <a:prstGeom prst="rect">
-            <a:avLst/>
-          </a:prstGeom>
-          <a:solidFill>
-            <a:srgbClr val="269CCB"/>
-          </a:solidFill>
-          <a:ln>
-            <a:noFill/>
-          </a:ln>
-        </p:spPr>
-        <p:style>
-          <a:lnRef idx="1">
-            <a:schemeClr val="accent1"/>
-          </a:lnRef>
-          <a:fillRef idx="3">
-            <a:schemeClr val="accent1"/>
-          </a:fillRef>
-          <a:effectRef idx="2">
-            <a:schemeClr val="accent1"/>
-          </a:effectRef>
-          <a:fontRef idx="minor">
-            <a:schemeClr val="lt1"/>
-          </a:fontRef>
-        </p:style>
-        <p:txBody>
-          <a:bodyPr rtlCol="0" anchor="ctr"/>
-          <a:lstStyle/>
-          <a:p>
-            <a:pPr algn="ctr"/>
-          </a:p>
-        </p:txBody>
-      </p:sp>
-      <p:sp>
-        <p:nvSpPr>
-          <p:cNvPr id="8" name="TextBox 7"/>
-          <p:cNvSpPr txBox="1"/>
-          <p:nvPr/>
-        </p:nvSpPr>
-        <p:spPr>
-          <a:xfrm>
-            <a:off x="1097280" y="1353312"/>
-            <a:ext cx="10362895" cy="402336"/>
-          </a:xfrm>
-          <a:prstGeom prst="rect">
-            <a:avLst/>
-          </a:prstGeom>
-          <a:noFill/>
-        </p:spPr>
-        <p:txBody>
-          <a:bodyPr wrap="square" anchor="ctr"/>
-          <a:lstStyle/>
-          <a:p>
-            <a:r>
-              <a:rPr sz="1500" b="0" i="0">
-                <a:solidFill>
-                  <a:srgbClr val="333333"/>
-                </a:solidFill>
-                <a:latin typeface="Calibri"/>
-              </a:rPr>
-              <a:t>¿Su informe le sirve al otro estudiante para trabajar esta misma tarde, o solo le dice que algo está mal sin decirle dónde ni qué hacer?</a:t>
-            </a:r>
-          </a:p>
-        </p:txBody>
-      </p:sp>
-      <p:sp>
-        <p:nvSpPr>
-          <p:cNvPr id="9" name="Rounded Rectangle 8"/>
-          <p:cNvSpPr/>
-          <p:nvPr/>
-        </p:nvSpPr>
-        <p:spPr>
-          <a:xfrm>
-            <a:off x="457200" y="1938528"/>
-            <a:ext cx="11277295" cy="566928"/>
-          </a:xfrm>
-          <a:prstGeom prst="roundRect">
-            <a:avLst>
-              <a:gd name="adj" fmla="val 12000"/>
-            </a:avLst>
-          </a:prstGeom>
-          <a:solidFill>
-            <a:srgbClr val="F2F2F2"/>
-          </a:solidFill>
-          <a:ln>
-            <a:noFill/>
-          </a:ln>
-        </p:spPr>
-        <p:style>
-          <a:lnRef idx="1">
-            <a:schemeClr val="accent1"/>
-          </a:lnRef>
-          <a:fillRef idx="3">
-            <a:schemeClr val="accent1"/>
-          </a:fillRef>
-          <a:effectRef idx="2">
-            <a:schemeClr val="accent1"/>
-          </a:effectRef>
-          <a:fontRef idx="minor">
-            <a:schemeClr val="lt1"/>
-          </a:fontRef>
-        </p:style>
-        <p:txBody>
-          <a:bodyPr rtlCol="0" anchor="ctr"/>
-          <a:lstStyle/>
-          <a:p>
-            <a:pPr algn="ctr"/>
-          </a:p>
-        </p:txBody>
-      </p:sp>
-      <p:sp>
-        <p:nvSpPr>
-          <p:cNvPr id="10" name="Rectangle 9"/>
-          <p:cNvSpPr/>
-          <p:nvPr/>
-        </p:nvSpPr>
-        <p:spPr>
-          <a:xfrm>
-            <a:off x="640080" y="2084832"/>
-            <a:ext cx="274320" cy="274320"/>
-          </a:xfrm>
-          <a:prstGeom prst="rect">
-            <a:avLst/>
-          </a:prstGeom>
-          <a:solidFill>
-            <a:srgbClr val="FFFFFF"/>
-          </a:solidFill>
-          <a:ln>
-            <a:solidFill>
-              <a:srgbClr val="333333"/>
-            </a:solidFill>
-          </a:ln>
-        </p:spPr>
-        <p:style>
-          <a:lnRef idx="1">
-            <a:schemeClr val="accent1"/>
-          </a:lnRef>
-          <a:fillRef idx="3">
-            <a:schemeClr val="accent1"/>
-          </a:fillRef>
-          <a:effectRef idx="2">
-            <a:schemeClr val="accent1"/>
-          </a:effectRef>
-          <a:fontRef idx="minor">
-            <a:schemeClr val="lt1"/>
-          </a:fontRef>
-        </p:style>
-        <p:txBody>
-          <a:bodyPr rtlCol="0" anchor="ctr"/>
-          <a:lstStyle/>
-          <a:p>
-            <a:pPr algn="ctr"/>
-          </a:p>
-        </p:txBody>
-      </p:sp>
-      <p:sp>
-        <p:nvSpPr>
-          <p:cNvPr id="11" name="Rectangle 10"/>
-          <p:cNvSpPr/>
-          <p:nvPr/>
-        </p:nvSpPr>
-        <p:spPr>
-          <a:xfrm>
-            <a:off x="640080" y="2084832"/>
-            <a:ext cx="73152" cy="274320"/>
-          </a:xfrm>
-          <a:prstGeom prst="rect">
-            <a:avLst/>
-          </a:prstGeom>
-          <a:solidFill>
-            <a:srgbClr val="269CCB"/>
-          </a:solidFill>
-          <a:ln>
-            <a:noFill/>
-          </a:ln>
-        </p:spPr>
-        <p:style>
-          <a:lnRef idx="1">
-            <a:schemeClr val="accent1"/>
-          </a:lnRef>
-          <a:fillRef idx="3">
-            <a:schemeClr val="accent1"/>
-          </a:fillRef>
-          <a:effectRef idx="2">
-            <a:schemeClr val="accent1"/>
-          </a:effectRef>
-          <a:fontRef idx="minor">
-            <a:schemeClr val="lt1"/>
-          </a:fontRef>
-        </p:style>
-        <p:txBody>
-          <a:bodyPr rtlCol="0" anchor="ctr"/>
-          <a:lstStyle/>
-          <a:p>
-            <a:pPr algn="ctr"/>
-          </a:p>
-        </p:txBody>
-      </p:sp>
-      <p:sp>
-        <p:nvSpPr>
-          <p:cNvPr id="12" name="TextBox 11"/>
-          <p:cNvSpPr txBox="1"/>
-          <p:nvPr/>
-        </p:nvSpPr>
-        <p:spPr>
-          <a:xfrm>
-            <a:off x="1097280" y="2029968"/>
-            <a:ext cx="10362895" cy="402336"/>
-          </a:xfrm>
-          <a:prstGeom prst="rect">
-            <a:avLst/>
-          </a:prstGeom>
-          <a:noFill/>
-        </p:spPr>
-        <p:txBody>
-          <a:bodyPr wrap="square" anchor="ctr"/>
-          <a:lstStyle/>
-          <a:p>
-            <a:r>
-              <a:rPr sz="1500" b="0" i="0">
-                <a:solidFill>
-                  <a:srgbClr val="333333"/>
-                </a:solidFill>
-                <a:latin typeface="Calibri"/>
-              </a:rPr>
-              <a:t>Si tuviera que borrar todos sus comentarios menos uno, ¿cuál dejaría, y por qué ese es más importante que los otros cuatro?</a:t>
-            </a:r>
-          </a:p>
-        </p:txBody>
-      </p:sp>
-      <p:sp>
-        <p:nvSpPr>
-          <p:cNvPr id="13" name="Rounded Rectangle 12"/>
-          <p:cNvSpPr/>
-          <p:nvPr/>
-        </p:nvSpPr>
-        <p:spPr>
-          <a:xfrm>
-            <a:off x="457200" y="2615184"/>
-            <a:ext cx="11277295" cy="566928"/>
-          </a:xfrm>
-          <a:prstGeom prst="roundRect">
-            <a:avLst>
-              <a:gd name="adj" fmla="val 12000"/>
-            </a:avLst>
-          </a:prstGeom>
-          <a:solidFill>
-            <a:srgbClr val="F2F2F2"/>
-          </a:solidFill>
-          <a:ln>
-            <a:noFill/>
-          </a:ln>
-        </p:spPr>
-        <p:style>
-          <a:lnRef idx="1">
-            <a:schemeClr val="accent1"/>
-          </a:lnRef>
-          <a:fillRef idx="3">
-            <a:schemeClr val="accent1"/>
-          </a:fillRef>
-          <a:effectRef idx="2">
-            <a:schemeClr val="accent1"/>
-          </a:effectRef>
-          <a:fontRef idx="minor">
-            <a:schemeClr val="lt1"/>
-          </a:fontRef>
-        </p:style>
-        <p:txBody>
-          <a:bodyPr rtlCol="0" anchor="ctr"/>
-          <a:lstStyle/>
-          <a:p>
-            <a:pPr algn="ctr"/>
-          </a:p>
-        </p:txBody>
-      </p:sp>
-      <p:sp>
-        <p:nvSpPr>
-          <p:cNvPr id="14" name="Rectangle 13"/>
-          <p:cNvSpPr/>
-          <p:nvPr/>
-        </p:nvSpPr>
-        <p:spPr>
-          <a:xfrm>
-            <a:off x="640080" y="2761488"/>
-            <a:ext cx="274320" cy="274320"/>
-          </a:xfrm>
-          <a:prstGeom prst="rect">
-            <a:avLst/>
-          </a:prstGeom>
-          <a:solidFill>
-            <a:srgbClr val="FFFFFF"/>
-          </a:solidFill>
-          <a:ln>
-            <a:solidFill>
-              <a:srgbClr val="333333"/>
-            </a:solidFill>
-          </a:ln>
-        </p:spPr>
-        <p:style>
-          <a:lnRef idx="1">
-            <a:schemeClr val="accent1"/>
-          </a:lnRef>
-          <a:fillRef idx="3">
-            <a:schemeClr val="accent1"/>
-          </a:fillRef>
-          <a:effectRef idx="2">
-            <a:schemeClr val="accent1"/>
-          </a:effectRef>
-          <a:fontRef idx="minor">
-            <a:schemeClr val="lt1"/>
-          </a:fontRef>
-        </p:style>
-        <p:txBody>
-          <a:bodyPr rtlCol="0" anchor="ctr"/>
-          <a:lstStyle/>
-          <a:p>
-            <a:pPr algn="ctr"/>
-          </a:p>
-        </p:txBody>
-      </p:sp>
-      <p:sp>
-        <p:nvSpPr>
-          <p:cNvPr id="15" name="Rectangle 14"/>
-          <p:cNvSpPr/>
-          <p:nvPr/>
-        </p:nvSpPr>
-        <p:spPr>
-          <a:xfrm>
-            <a:off x="640080" y="2761488"/>
-            <a:ext cx="73152" cy="274320"/>
-          </a:xfrm>
-          <a:prstGeom prst="rect">
-            <a:avLst/>
-          </a:prstGeom>
-          <a:solidFill>
-            <a:srgbClr val="269CCB"/>
-          </a:solidFill>
-          <a:ln>
-            <a:noFill/>
-          </a:ln>
-        </p:spPr>
-        <p:style>
-          <a:lnRef idx="1">
-            <a:schemeClr val="accent1"/>
-          </a:lnRef>
-          <a:fillRef idx="3">
-            <a:schemeClr val="accent1"/>
-          </a:fillRef>
-          <a:effectRef idx="2">
-            <a:schemeClr val="accent1"/>
-          </a:effectRef>
-          <a:fontRef idx="minor">
-            <a:schemeClr val="lt1"/>
-          </a:fontRef>
-        </p:style>
-        <p:txBody>
-          <a:bodyPr rtlCol="0" anchor="ctr"/>
-          <a:lstStyle/>
-          <a:p>
-            <a:pPr algn="ctr"/>
-          </a:p>
-        </p:txBody>
-      </p:sp>
-      <p:sp>
-        <p:nvSpPr>
-          <p:cNvPr id="16" name="TextBox 15"/>
-          <p:cNvSpPr txBox="1"/>
-          <p:nvPr/>
-        </p:nvSpPr>
-        <p:spPr>
-          <a:xfrm>
-            <a:off x="1097280" y="2706624"/>
-            <a:ext cx="10362895" cy="402336"/>
-          </a:xfrm>
-          <a:prstGeom prst="rect">
-            <a:avLst/>
-          </a:prstGeom>
-          <a:noFill/>
-        </p:spPr>
-        <p:txBody>
-          <a:bodyPr wrap="square" anchor="ctr"/>
-          <a:lstStyle/>
-          <a:p>
-            <a:r>
-              <a:rPr sz="1500" b="0" i="0">
-                <a:solidFill>
-                  <a:srgbClr val="333333"/>
-                </a:solidFill>
-                <a:latin typeface="Calibri"/>
-              </a:rPr>
-              <a:t>¿Cuántos de sus hallazgos los comprobó ejecutando y cuántos los está suponiendo por haber leído el código?</a:t>
-            </a:r>
-          </a:p>
-        </p:txBody>
-      </p:sp>
-      <p:sp>
-        <p:nvSpPr>
-          <p:cNvPr id="17" name="TextBox 16"/>
-          <p:cNvSpPr txBox="1"/>
-          <p:nvPr/>
-        </p:nvSpPr>
-        <p:spPr>
-          <a:xfrm>
-            <a:off x="11185855" y="6473952"/>
-            <a:ext cx="640080" cy="274320"/>
-          </a:xfrm>
-          <a:prstGeom prst="rect">
-            <a:avLst/>
-          </a:prstGeom>
-          <a:noFill/>
-        </p:spPr>
-        <p:txBody>
-          <a:bodyPr wrap="square">
-            <a:spAutoFit/>
-          </a:bodyPr>
-          <a:lstStyle/>
-          <a:p>
-            <a:pPr algn="r"/>
-            <a:r>
-              <a:rPr sz="1100" b="0" i="0">
-                <a:solidFill>
-                  <a:srgbClr val="666666"/>
-                </a:solidFill>
-                <a:latin typeface="Calibri"/>
-              </a:rPr>
-              <a:t>26</a:t>
-            </a:r>
-          </a:p>
-        </p:txBody>
-      </p:sp>
-    </p:spTree>
-  </p:cSld>
-  <p:clrMapOvr>
-    <a:masterClrMapping/>
-  </p:clrMapOvr>
-</p:sld>
-</file>
-
-<file path=ppt/slides/slide27.xml><?xml version="1.0" encoding="utf-8"?>
-<p:sld xmlns:a="http://schemas.openxmlformats.org/drawingml/2006/main" xmlns:p="http://schemas.openxmlformats.org/presentationml/2006/main" xmlns:r="http://schemas.openxmlformats.org/officeDocument/2006/relationships">
-  <p:cSld>
-    <p:bg>
-      <p:bgPr>
-        <a:solidFill>
-          <a:srgbClr val="FFFFFF"/>
-        </a:solidFill>
-        <a:effectLst/>
-      </p:bgPr>
-    </p:bg>
-    <p:spTree>
-      <p:nvGrpSpPr>
-        <p:cNvPr id="1" name=""/>
-        <p:cNvGrpSpPr/>
-        <p:nvPr/>
-      </p:nvGrpSpPr>
-      <p:grpSpPr/>
-      <p:sp>
-        <p:nvSpPr>
-          <p:cNvPr id="2" name="Rectangle 1"/>
-          <p:cNvSpPr/>
-          <p:nvPr/>
-        </p:nvSpPr>
-        <p:spPr>
-          <a:xfrm>
-            <a:off x="0" y="0"/>
-            <a:ext cx="12191695" cy="960120"/>
-          </a:xfrm>
-          <a:prstGeom prst="rect">
-            <a:avLst/>
-          </a:prstGeom>
-          <a:solidFill>
-            <a:srgbClr val="095292"/>
-          </a:solidFill>
-          <a:ln>
-            <a:noFill/>
-          </a:ln>
-        </p:spPr>
-        <p:style>
-          <a:lnRef idx="1">
-            <a:schemeClr val="accent1"/>
-          </a:lnRef>
-          <a:fillRef idx="3">
-            <a:schemeClr val="accent1"/>
-          </a:fillRef>
-          <a:effectRef idx="2">
-            <a:schemeClr val="accent1"/>
-          </a:effectRef>
-          <a:fontRef idx="minor">
-            <a:schemeClr val="lt1"/>
-          </a:fontRef>
-        </p:style>
-        <p:txBody>
-          <a:bodyPr rtlCol="0" anchor="ctr"/>
-          <a:lstStyle/>
-          <a:p>
-            <a:pPr algn="ctr"/>
-          </a:p>
-        </p:txBody>
-      </p:sp>
-      <p:sp>
-        <p:nvSpPr>
-          <p:cNvPr id="3" name="Rectangle 2"/>
-          <p:cNvSpPr/>
-          <p:nvPr/>
-        </p:nvSpPr>
-        <p:spPr>
-          <a:xfrm>
-            <a:off x="0" y="960120"/>
-            <a:ext cx="12191695" cy="41148"/>
-          </a:xfrm>
-          <a:prstGeom prst="rect">
-            <a:avLst/>
-          </a:prstGeom>
-          <a:solidFill>
-            <a:srgbClr val="FFD000"/>
-          </a:solidFill>
-          <a:ln>
-            <a:noFill/>
-          </a:ln>
-        </p:spPr>
-        <p:style>
-          <a:lnRef idx="1">
-            <a:schemeClr val="accent1"/>
-          </a:lnRef>
-          <a:fillRef idx="3">
-            <a:schemeClr val="accent1"/>
-          </a:fillRef>
-          <a:effectRef idx="2">
-            <a:schemeClr val="accent1"/>
-          </a:effectRef>
-          <a:fontRef idx="minor">
-            <a:schemeClr val="lt1"/>
-          </a:fontRef>
-        </p:style>
-        <p:txBody>
-          <a:bodyPr rtlCol="0" anchor="ctr"/>
-          <a:lstStyle/>
-          <a:p>
-            <a:pPr algn="ctr"/>
-          </a:p>
-        </p:txBody>
-      </p:sp>
-      <p:sp>
-        <p:nvSpPr>
-          <p:cNvPr id="4" name="TextBox 3"/>
-          <p:cNvSpPr txBox="1"/>
-          <p:nvPr/>
-        </p:nvSpPr>
-        <p:spPr>
-          <a:xfrm>
-            <a:off x="457200" y="164592"/>
-            <a:ext cx="11277295" cy="502920"/>
-          </a:xfrm>
-          <a:prstGeom prst="rect">
-            <a:avLst/>
-          </a:prstGeom>
-          <a:noFill/>
-        </p:spPr>
-        <p:txBody>
-          <a:bodyPr wrap="square">
-            <a:spAutoFit/>
-          </a:bodyPr>
-          <a:lstStyle/>
-          <a:p>
-            <a:r>
-              <a:rPr sz="2600" b="1" i="0">
-                <a:solidFill>
-                  <a:srgbClr val="FFFFFF"/>
-                </a:solidFill>
-                <a:latin typeface="Calibri"/>
-              </a:rPr>
-              <a:t>Criterios de exito / entregable</a:t>
-            </a:r>
-          </a:p>
-        </p:txBody>
-      </p:sp>
-      <p:sp>
-        <p:nvSpPr>
-          <p:cNvPr id="5" name="TextBox 4"/>
-          <p:cNvSpPr txBox="1"/>
-          <p:nvPr/>
-        </p:nvSpPr>
-        <p:spPr>
-          <a:xfrm>
-            <a:off x="457200" y="1170432"/>
-            <a:ext cx="11277295" cy="5230368"/>
-          </a:xfrm>
-          <a:prstGeom prst="rect">
-            <a:avLst/>
-          </a:prstGeom>
-          <a:noFill/>
-        </p:spPr>
-        <p:txBody>
-          <a:bodyPr wrap="square">
-            <a:spAutoFit/>
-          </a:bodyPr>
-          <a:lstStyle/>
-          <a:p>
-            <a:pPr>
-              <a:spcAft>
-                <a:spcPts val="800"/>
-              </a:spcAft>
-            </a:pPr>
-            <a:r>
-              <a:rPr sz="2000" b="0" i="0">
-                <a:solidFill>
-                  <a:srgbClr val="333333"/>
-                </a:solidFill>
-                <a:latin typeface="Calibri"/>
-              </a:rPr>
-              <a:t>–   </a:t>
-            </a:r>
-            <a:r>
-              <a:rPr sz="2000" b="1" i="0">
-                <a:solidFill>
-                  <a:srgbClr val="333333"/>
-                </a:solidFill>
-                <a:latin typeface="Calibri"/>
-              </a:rPr>
-              <a:t>Entregable:</a:t>
-            </a:r>
-            <a:r>
-              <a:rPr sz="2000" b="0" i="0">
-                <a:solidFill>
-                  <a:srgbClr val="333333"/>
-                </a:solidFill>
-                <a:latin typeface="Calibri"/>
-              </a:rPr>
-              <a:t> Informe de revisión de una página sobre el proyecto asignado (el de otro estudiante; si el docente autorizó equipos, el de otro equipo): checklist diligenciado con evidencia archivo:línea y cinco hallazgos priorizados con formato Evidencia + Impacto + Sugerencia, subido a la plataforma del curso.</a:t>
-            </a:r>
-          </a:p>
-          <a:p>
-            <a:pPr>
-              <a:spcAft>
-                <a:spcPts val="800"/>
-              </a:spcAft>
-            </a:pPr>
-            <a:r>
-              <a:rPr sz="2000" b="0" i="0">
-                <a:solidFill>
-                  <a:srgbClr val="333333"/>
-                </a:solidFill>
-                <a:latin typeface="Calibri"/>
-              </a:rPr>
-              <a:t>–   </a:t>
-            </a:r>
-            <a:r>
-              <a:rPr sz="2000" b="1" i="0">
-                <a:solidFill>
-                  <a:srgbClr val="333333"/>
-                </a:solidFill>
-                <a:latin typeface="Calibri"/>
-              </a:rPr>
-              <a:t>Exito:</a:t>
-            </a:r>
-            <a:r>
-              <a:rPr sz="2000" b="0" i="0">
-                <a:solidFill>
-                  <a:srgbClr val="333333"/>
-                </a:solidFill>
-                <a:latin typeface="Calibri"/>
-              </a:rPr>
-              <a:t> El informe demuestra que el proyecto fue ejecutado: incluye el resultado de los cuatro casos borde con el mensaje o la excepción textual observada.</a:t>
-            </a:r>
-          </a:p>
-          <a:p>
-            <a:pPr>
-              <a:spcAft>
-                <a:spcPts val="800"/>
-              </a:spcAft>
-            </a:pPr>
-            <a:r>
-              <a:rPr sz="2000" b="0" i="0">
-                <a:solidFill>
-                  <a:srgbClr val="333333"/>
-                </a:solidFill>
-                <a:latin typeface="Calibri"/>
-              </a:rPr>
-              <a:t>–   </a:t>
-            </a:r>
-            <a:r>
-              <a:rPr sz="2000" b="1" i="0">
-                <a:solidFill>
-                  <a:srgbClr val="333333"/>
-                </a:solidFill>
-                <a:latin typeface="Calibri"/>
-              </a:rPr>
-              <a:t>Exito:</a:t>
-            </a:r>
-            <a:r>
-              <a:rPr sz="2000" b="0" i="0">
-                <a:solidFill>
-                  <a:srgbClr val="333333"/>
-                </a:solidFill>
-                <a:latin typeface="Calibri"/>
-              </a:rPr>
-              <a:t> El checklist está completo y todo ítem marcado 'no cumple' trae evidencia localizable en formato archivo:línea o pasos para reproducir.</a:t>
-            </a:r>
-          </a:p>
-          <a:p>
-            <a:pPr>
-              <a:spcAft>
-                <a:spcPts val="800"/>
-              </a:spcAft>
-            </a:pPr>
-            <a:r>
-              <a:rPr sz="2000" b="0" i="0">
-                <a:solidFill>
-                  <a:srgbClr val="333333"/>
-                </a:solidFill>
-                <a:latin typeface="Calibri"/>
-              </a:rPr>
-              <a:t>–   </a:t>
-            </a:r>
-            <a:r>
-              <a:rPr sz="2000" b="1" i="0">
-                <a:solidFill>
-                  <a:srgbClr val="333333"/>
-                </a:solidFill>
-                <a:latin typeface="Calibri"/>
-              </a:rPr>
-              <a:t>Exito:</a:t>
-            </a:r>
-            <a:r>
-              <a:rPr sz="2000" b="0" i="0">
-                <a:solidFill>
-                  <a:srgbClr val="333333"/>
-                </a:solidFill>
-                <a:latin typeface="Calibri"/>
-              </a:rPr>
-              <a:t> Los cinco hallazgos están priorizados y redactados con Evidencia + Impacto + Sugerencia; ninguno se refiere a la persona ni al esfuerzo que puso el otro estudiante.</a:t>
-            </a:r>
-          </a:p>
-          <a:p>
-            <a:pPr>
-              <a:spcAft>
-                <a:spcPts val="800"/>
-              </a:spcAft>
-            </a:pPr>
-            <a:r>
-              <a:rPr sz="2000" b="0" i="0">
-                <a:solidFill>
-                  <a:srgbClr val="333333"/>
-                </a:solidFill>
-                <a:latin typeface="Calibri"/>
-              </a:rPr>
-              <a:t>–   </a:t>
-            </a:r>
-            <a:r>
-              <a:rPr sz="2000" b="1" i="0">
-                <a:solidFill>
-                  <a:srgbClr val="333333"/>
-                </a:solidFill>
-                <a:latin typeface="Calibri"/>
-              </a:rPr>
-              <a:t>Exito:</a:t>
-            </a:r>
-            <a:r>
-              <a:rPr sz="2000" b="0" i="0">
-                <a:solidFill>
-                  <a:srgbClr val="333333"/>
-                </a:solidFill>
-                <a:latin typeface="Calibri"/>
-              </a:rPr>
-              <a:t> El autor del proyecto entrega su plan de corrección con las tres decisiones posibles (acepto, justifico, difiero) y un responsable por línea.</a:t>
-            </a:r>
-          </a:p>
-          <a:p>
-            <a:pPr>
-              <a:spcAft>
-                <a:spcPts val="800"/>
-              </a:spcAft>
-            </a:pPr>
-            <a:r>
-              <a:rPr sz="2000" b="0" i="0">
-                <a:solidFill>
-                  <a:srgbClr val="333333"/>
-                </a:solidFill>
-                <a:latin typeface="Calibri"/>
-              </a:rPr>
-              <a:t>–   </a:t>
-            </a:r>
-            <a:r>
-              <a:rPr sz="2000" b="1" i="0">
-                <a:solidFill>
-                  <a:srgbClr val="333333"/>
-                </a:solidFill>
-                <a:latin typeface="Calibri"/>
-              </a:rPr>
-              <a:t>Entrega en la plataforma del curso</a:t>
-            </a:r>
-            <a:r>
-              <a:rPr sz="2000" b="0" i="0">
-                <a:solidFill>
-                  <a:srgbClr val="333333"/>
-                </a:solidFill>
-                <a:latin typeface="Calibri"/>
-              </a:rPr>
-              <a:t> — en la fecha que indique el docente.</a:t>
-            </a:r>
-          </a:p>
-        </p:txBody>
-      </p:sp>
-      <p:sp>
-        <p:nvSpPr>
-          <p:cNvPr id="6" name="TextBox 5"/>
-          <p:cNvSpPr txBox="1"/>
-          <p:nvPr/>
-        </p:nvSpPr>
-        <p:spPr>
-          <a:xfrm>
-            <a:off x="11185855" y="6473952"/>
-            <a:ext cx="640080" cy="274320"/>
-          </a:xfrm>
-          <a:prstGeom prst="rect">
-            <a:avLst/>
-          </a:prstGeom>
-          <a:noFill/>
-        </p:spPr>
-        <p:txBody>
-          <a:bodyPr wrap="square">
-            <a:spAutoFit/>
-          </a:bodyPr>
-          <a:lstStyle/>
-          <a:p>
-            <a:pPr algn="r"/>
-            <a:r>
-              <a:rPr sz="1100" b="0" i="0">
-                <a:solidFill>
-                  <a:srgbClr val="666666"/>
-                </a:solidFill>
-                <a:latin typeface="Calibri"/>
-              </a:rPr>
-              <a:t>27</a:t>
-            </a:r>
-          </a:p>
-        </p:txBody>
-      </p:sp>
-    </p:spTree>
-  </p:cSld>
-  <p:clrMapOvr>
-    <a:masterClrMapping/>
-  </p:clrMapOvr>
-</p:sld>
-</file>
-
-<file path=ppt/slides/slide28.xml><?xml version="1.0" encoding="utf-8"?>
-<p:sld xmlns:a="http://schemas.openxmlformats.org/drawingml/2006/main" xmlns:p="http://schemas.openxmlformats.org/presentationml/2006/main" xmlns:r="http://schemas.openxmlformats.org/officeDocument/2006/relationships">
-  <p:cSld>
-    <p:bg>
-      <p:bgPr>
-        <a:solidFill>
-          <a:srgbClr val="FFFFFF"/>
-        </a:solidFill>
-        <a:effectLst/>
-      </p:bgPr>
-    </p:bg>
-    <p:spTree>
-      <p:nvGrpSpPr>
-        <p:cNvPr id="1" name=""/>
-        <p:cNvGrpSpPr/>
-        <p:nvPr/>
-      </p:nvGrpSpPr>
-      <p:grpSpPr/>
-      <p:sp>
-        <p:nvSpPr>
-          <p:cNvPr id="2" name="Rectangle 1"/>
-          <p:cNvSpPr/>
-          <p:nvPr/>
-        </p:nvSpPr>
-        <p:spPr>
-          <a:xfrm>
-            <a:off x="0" y="0"/>
-            <a:ext cx="12191695" cy="960120"/>
-          </a:xfrm>
-          <a:prstGeom prst="rect">
-            <a:avLst/>
-          </a:prstGeom>
-          <a:solidFill>
-            <a:srgbClr val="095292"/>
-          </a:solidFill>
-          <a:ln>
-            <a:noFill/>
-          </a:ln>
-        </p:spPr>
-        <p:style>
-          <a:lnRef idx="1">
-            <a:schemeClr val="accent1"/>
-          </a:lnRef>
-          <a:fillRef idx="3">
-            <a:schemeClr val="accent1"/>
-          </a:fillRef>
-          <a:effectRef idx="2">
-            <a:schemeClr val="accent1"/>
-          </a:effectRef>
-          <a:fontRef idx="minor">
-            <a:schemeClr val="lt1"/>
-          </a:fontRef>
-        </p:style>
-        <p:txBody>
-          <a:bodyPr rtlCol="0" anchor="ctr"/>
-          <a:lstStyle/>
-          <a:p>
-            <a:pPr algn="ctr"/>
-          </a:p>
-        </p:txBody>
-      </p:sp>
-      <p:sp>
-        <p:nvSpPr>
-          <p:cNvPr id="3" name="Rectangle 2"/>
-          <p:cNvSpPr/>
-          <p:nvPr/>
-        </p:nvSpPr>
-        <p:spPr>
-          <a:xfrm>
-            <a:off x="0" y="960120"/>
-            <a:ext cx="12191695" cy="41148"/>
-          </a:xfrm>
-          <a:prstGeom prst="rect">
-            <a:avLst/>
-          </a:prstGeom>
-          <a:solidFill>
-            <a:srgbClr val="FFD000"/>
-          </a:solidFill>
-          <a:ln>
-            <a:noFill/>
-          </a:ln>
-        </p:spPr>
-        <p:style>
-          <a:lnRef idx="1">
-            <a:schemeClr val="accent1"/>
-          </a:lnRef>
-          <a:fillRef idx="3">
-            <a:schemeClr val="accent1"/>
-          </a:fillRef>
-          <a:effectRef idx="2">
-            <a:schemeClr val="accent1"/>
-          </a:effectRef>
-          <a:fontRef idx="minor">
-            <a:schemeClr val="lt1"/>
-          </a:fontRef>
-        </p:style>
-        <p:txBody>
-          <a:bodyPr rtlCol="0" anchor="ctr"/>
-          <a:lstStyle/>
-          <a:p>
-            <a:pPr algn="ctr"/>
-          </a:p>
-        </p:txBody>
-      </p:sp>
-      <p:sp>
-        <p:nvSpPr>
-          <p:cNvPr id="4" name="TextBox 3"/>
-          <p:cNvSpPr txBox="1"/>
-          <p:nvPr/>
-        </p:nvSpPr>
-        <p:spPr>
-          <a:xfrm>
-            <a:off x="457200" y="164592"/>
-            <a:ext cx="11277295" cy="502920"/>
-          </a:xfrm>
-          <a:prstGeom prst="rect">
-            <a:avLst/>
-          </a:prstGeom>
-          <a:noFill/>
-        </p:spPr>
-        <p:txBody>
-          <a:bodyPr wrap="square">
-            <a:spAutoFit/>
-          </a:bodyPr>
-          <a:lstStyle/>
-          <a:p>
-            <a:r>
-              <a:rPr sz="2600" b="1" i="0">
-                <a:solidFill>
-                  <a:srgbClr val="FFFFFF"/>
-                </a:solidFill>
-                <a:latin typeface="Calibri"/>
-              </a:rPr>
-              <a:t>Para el PI esta semana</a:t>
-            </a:r>
-          </a:p>
-        </p:txBody>
-      </p:sp>
-      <p:sp>
-        <p:nvSpPr>
-          <p:cNvPr id="5" name="Rounded Rectangle 4"/>
-          <p:cNvSpPr/>
-          <p:nvPr/>
-        </p:nvSpPr>
-        <p:spPr>
-          <a:xfrm>
-            <a:off x="457200" y="1261872"/>
-            <a:ext cx="11277295" cy="1051560"/>
-          </a:xfrm>
-          <a:prstGeom prst="roundRect">
-            <a:avLst>
-              <a:gd name="adj" fmla="val 12000"/>
-            </a:avLst>
-          </a:prstGeom>
-          <a:solidFill>
-            <a:srgbClr val="E8F4FA"/>
-          </a:solidFill>
-          <a:ln>
-            <a:noFill/>
-          </a:ln>
-        </p:spPr>
-        <p:style>
-          <a:lnRef idx="1">
-            <a:schemeClr val="accent1"/>
-          </a:lnRef>
-          <a:fillRef idx="3">
-            <a:schemeClr val="accent1"/>
-          </a:fillRef>
-          <a:effectRef idx="2">
-            <a:schemeClr val="accent1"/>
-          </a:effectRef>
-          <a:fontRef idx="minor">
-            <a:schemeClr val="lt1"/>
-          </a:fontRef>
-        </p:style>
-        <p:txBody>
-          <a:bodyPr rtlCol="0" anchor="ctr"/>
-          <a:lstStyle/>
-          <a:p>
-            <a:pPr algn="ctr"/>
-          </a:p>
-        </p:txBody>
-      </p:sp>
-      <p:sp>
-        <p:nvSpPr>
-          <p:cNvPr id="6" name="Rectangle 5"/>
-          <p:cNvSpPr/>
-          <p:nvPr/>
-        </p:nvSpPr>
-        <p:spPr>
-          <a:xfrm>
-            <a:off x="457200" y="1261872"/>
-            <a:ext cx="128016" cy="1051560"/>
-          </a:xfrm>
-          <a:prstGeom prst="rect">
-            <a:avLst/>
-          </a:prstGeom>
-          <a:solidFill>
-            <a:srgbClr val="269CCB"/>
-          </a:solidFill>
-          <a:ln>
-            <a:noFill/>
-          </a:ln>
-        </p:spPr>
-        <p:style>
-          <a:lnRef idx="1">
-            <a:schemeClr val="accent1"/>
-          </a:lnRef>
-          <a:fillRef idx="3">
-            <a:schemeClr val="accent1"/>
-          </a:fillRef>
-          <a:effectRef idx="2">
-            <a:schemeClr val="accent1"/>
-          </a:effectRef>
-          <a:fontRef idx="minor">
-            <a:schemeClr val="lt1"/>
-          </a:fontRef>
-        </p:style>
-        <p:txBody>
-          <a:bodyPr rtlCol="0" anchor="ctr"/>
-          <a:lstStyle/>
-          <a:p>
-            <a:pPr algn="ctr"/>
-          </a:p>
-        </p:txBody>
-      </p:sp>
-      <p:sp>
-        <p:nvSpPr>
-          <p:cNvPr id="7" name="TextBox 6"/>
-          <p:cNvSpPr txBox="1"/>
-          <p:nvPr/>
-        </p:nvSpPr>
-        <p:spPr>
-          <a:xfrm>
-            <a:off x="777240" y="1399031"/>
-            <a:ext cx="10774375" cy="822959"/>
-          </a:xfrm>
-          <a:prstGeom prst="rect">
-            <a:avLst/>
-          </a:prstGeom>
-          <a:noFill/>
-        </p:spPr>
-        <p:txBody>
-          <a:bodyPr wrap="square">
-            <a:spAutoFit/>
-          </a:bodyPr>
-          <a:lstStyle/>
-          <a:p>
-            <a:r>
-              <a:rPr sz="1200" b="1" i="0">
-                <a:solidFill>
-                  <a:srgbClr val="269CCB"/>
-                </a:solidFill>
-                <a:latin typeface="Calibri"/>
-              </a:rPr>
-              <a:t>Info</a:t>
-            </a:r>
-          </a:p>
-          <a:p>
-            <a:pPr>
-              <a:spcBef>
-                <a:spcPts val="400"/>
-              </a:spcBef>
-            </a:pPr>
-            <a:r>
-              <a:rPr sz="1400" b="0" i="0">
-                <a:solidFill>
-                  <a:srgbClr val="333333"/>
-                </a:solidFill>
-                <a:latin typeface="Calibri"/>
-              </a:rPr>
-              <a:t>Hito: Cada estudiante recibe un informe externo con hallazgos priorizados y deja escrito su plan de corrección de VetCare antes de la integración final.</a:t>
-            </a:r>
-          </a:p>
-        </p:txBody>
-      </p:sp>
-      <p:sp>
-        <p:nvSpPr>
-          <p:cNvPr id="8" name="Rounded Rectangle 7"/>
-          <p:cNvSpPr/>
-          <p:nvPr/>
-        </p:nvSpPr>
-        <p:spPr>
-          <a:xfrm>
-            <a:off x="457200" y="2478024"/>
-            <a:ext cx="11277295" cy="1051560"/>
-          </a:xfrm>
-          <a:prstGeom prst="roundRect">
-            <a:avLst>
-              <a:gd name="adj" fmla="val 12000"/>
-            </a:avLst>
-          </a:prstGeom>
-          <a:solidFill>
-            <a:srgbClr val="FFF8E1"/>
-          </a:solidFill>
-          <a:ln>
-            <a:noFill/>
-          </a:ln>
-        </p:spPr>
-        <p:style>
-          <a:lnRef idx="1">
-            <a:schemeClr val="accent1"/>
-          </a:lnRef>
-          <a:fillRef idx="3">
-            <a:schemeClr val="accent1"/>
-          </a:fillRef>
-          <a:effectRef idx="2">
-            <a:schemeClr val="accent1"/>
-          </a:effectRef>
-          <a:fontRef idx="minor">
-            <a:schemeClr val="lt1"/>
-          </a:fontRef>
-        </p:style>
-        <p:txBody>
-          <a:bodyPr rtlCol="0" anchor="ctr"/>
-          <a:lstStyle/>
-          <a:p>
-            <a:pPr algn="ctr"/>
-          </a:p>
-        </p:txBody>
-      </p:sp>
-      <p:sp>
-        <p:nvSpPr>
-          <p:cNvPr id="9" name="Rectangle 8"/>
-          <p:cNvSpPr/>
-          <p:nvPr/>
-        </p:nvSpPr>
-        <p:spPr>
-          <a:xfrm>
-            <a:off x="457200" y="2478024"/>
-            <a:ext cx="128016" cy="1051560"/>
-          </a:xfrm>
-          <a:prstGeom prst="rect">
-            <a:avLst/>
-          </a:prstGeom>
-          <a:solidFill>
-            <a:srgbClr val="FFD000"/>
-          </a:solidFill>
-          <a:ln>
-            <a:noFill/>
-          </a:ln>
-        </p:spPr>
-        <p:style>
-          <a:lnRef idx="1">
-            <a:schemeClr val="accent1"/>
-          </a:lnRef>
-          <a:fillRef idx="3">
-            <a:schemeClr val="accent1"/>
-          </a:fillRef>
-          <a:effectRef idx="2">
-            <a:schemeClr val="accent1"/>
-          </a:effectRef>
-          <a:fontRef idx="minor">
-            <a:schemeClr val="lt1"/>
-          </a:fontRef>
-        </p:style>
-        <p:txBody>
-          <a:bodyPr rtlCol="0" anchor="ctr"/>
-          <a:lstStyle/>
-          <a:p>
-            <a:pPr algn="ctr"/>
-          </a:p>
-        </p:txBody>
-      </p:sp>
-      <p:sp>
-        <p:nvSpPr>
-          <p:cNvPr id="10" name="TextBox 9"/>
-          <p:cNvSpPr txBox="1"/>
-          <p:nvPr/>
-        </p:nvSpPr>
-        <p:spPr>
-          <a:xfrm>
-            <a:off x="777240" y="2615184"/>
-            <a:ext cx="10774375" cy="822959"/>
-          </a:xfrm>
-          <a:prstGeom prst="rect">
-            <a:avLst/>
-          </a:prstGeom>
-          <a:noFill/>
-        </p:spPr>
-        <p:txBody>
-          <a:bodyPr wrap="square">
-            <a:spAutoFit/>
-          </a:bodyPr>
-          <a:lstStyle/>
-          <a:p>
-            <a:r>
-              <a:rPr sz="1200" b="1" i="0">
-                <a:solidFill>
-                  <a:srgbClr val="FFD000"/>
-                </a:solidFill>
-                <a:latin typeface="Calibri"/>
-              </a:rPr>
-              <a:t>Aclaración</a:t>
-            </a:r>
-          </a:p>
-          <a:p>
-            <a:pPr>
-              <a:spcBef>
-                <a:spcPts val="400"/>
-              </a:spcBef>
-            </a:pPr>
-            <a:r>
-              <a:rPr sz="1400" b="0" i="0">
-                <a:solidFill>
-                  <a:srgbClr val="333333"/>
-                </a:solidFill>
-                <a:latin typeface="Calibri"/>
-              </a:rPr>
-              <a:t>Enunciado completo: Clases/Proyecto Integrador/ (VetCare).</a:t>
-            </a:r>
-          </a:p>
-        </p:txBody>
-      </p:sp>
-      <p:sp>
-        <p:nvSpPr>
-          <p:cNvPr id="11" name="Rounded Rectangle 10"/>
-          <p:cNvSpPr/>
-          <p:nvPr/>
-        </p:nvSpPr>
-        <p:spPr>
-          <a:xfrm>
-            <a:off x="457200" y="3694176"/>
-            <a:ext cx="11277295" cy="1051560"/>
-          </a:xfrm>
-          <a:prstGeom prst="roundRect">
-            <a:avLst>
-              <a:gd name="adj" fmla="val 12000"/>
-            </a:avLst>
-          </a:prstGeom>
-          <a:solidFill>
-            <a:srgbClr val="FBE4E4"/>
-          </a:solidFill>
-          <a:ln>
-            <a:noFill/>
-          </a:ln>
-        </p:spPr>
-        <p:style>
-          <a:lnRef idx="1">
-            <a:schemeClr val="accent1"/>
-          </a:lnRef>
-          <a:fillRef idx="3">
-            <a:schemeClr val="accent1"/>
-          </a:fillRef>
-          <a:effectRef idx="2">
-            <a:schemeClr val="accent1"/>
-          </a:effectRef>
-          <a:fontRef idx="minor">
-            <a:schemeClr val="lt1"/>
-          </a:fontRef>
-        </p:style>
-        <p:txBody>
-          <a:bodyPr rtlCol="0" anchor="ctr"/>
-          <a:lstStyle/>
-          <a:p>
-            <a:pPr algn="ctr"/>
-          </a:p>
-        </p:txBody>
-      </p:sp>
-      <p:sp>
-        <p:nvSpPr>
-          <p:cNvPr id="12" name="Rectangle 11"/>
-          <p:cNvSpPr/>
-          <p:nvPr/>
-        </p:nvSpPr>
-        <p:spPr>
-          <a:xfrm>
-            <a:off x="457200" y="3694176"/>
-            <a:ext cx="128016" cy="1051560"/>
-          </a:xfrm>
-          <a:prstGeom prst="rect">
-            <a:avLst/>
-          </a:prstGeom>
-          <a:solidFill>
-            <a:srgbClr val="A02030"/>
-          </a:solidFill>
-          <a:ln>
-            <a:noFill/>
-          </a:ln>
-        </p:spPr>
-        <p:style>
-          <a:lnRef idx="1">
-            <a:schemeClr val="accent1"/>
-          </a:lnRef>
-          <a:fillRef idx="3">
-            <a:schemeClr val="accent1"/>
-          </a:fillRef>
-          <a:effectRef idx="2">
-            <a:schemeClr val="accent1"/>
-          </a:effectRef>
-          <a:fontRef idx="minor">
-            <a:schemeClr val="lt1"/>
-          </a:fontRef>
-        </p:style>
-        <p:txBody>
-          <a:bodyPr rtlCol="0" anchor="ctr"/>
-          <a:lstStyle/>
-          <a:p>
-            <a:pPr algn="ctr"/>
-          </a:p>
-        </p:txBody>
-      </p:sp>
-      <p:sp>
-        <p:nvSpPr>
-          <p:cNvPr id="13" name="TextBox 12"/>
-          <p:cNvSpPr txBox="1"/>
-          <p:nvPr/>
-        </p:nvSpPr>
-        <p:spPr>
-          <a:xfrm>
-            <a:off x="777240" y="3831336"/>
-            <a:ext cx="10774375" cy="822959"/>
-          </a:xfrm>
-          <a:prstGeom prst="rect">
-            <a:avLst/>
-          </a:prstGeom>
-          <a:noFill/>
-        </p:spPr>
-        <p:txBody>
-          <a:bodyPr wrap="square">
-            <a:spAutoFit/>
-          </a:bodyPr>
-          <a:lstStyle/>
-          <a:p>
-            <a:r>
-              <a:rPr sz="1200" b="1" i="0">
-                <a:solidFill>
-                  <a:srgbClr val="A02030"/>
-                </a:solidFill>
-                <a:latin typeface="Calibri"/>
-              </a:rPr>
-              <a:t>Atención</a:t>
-            </a:r>
-          </a:p>
-          <a:p>
-            <a:pPr>
-              <a:spcBef>
-                <a:spcPts val="400"/>
-              </a:spcBef>
-            </a:pPr>
-            <a:r>
-              <a:rPr sz="1400" b="0" i="0">
-                <a:solidFill>
-                  <a:srgbClr val="333333"/>
-                </a:solidFill>
-                <a:latin typeface="Calibri"/>
-              </a:rPr>
-              <a:t>Entrega del taller, si el docente lo asigna · en la fecha que indique el docente.</a:t>
-            </a:r>
-          </a:p>
-        </p:txBody>
-      </p:sp>
-      <p:sp>
-        <p:nvSpPr>
-          <p:cNvPr id="14" name="TextBox 13"/>
-          <p:cNvSpPr txBox="1"/>
-          <p:nvPr/>
-        </p:nvSpPr>
-        <p:spPr>
-          <a:xfrm>
-            <a:off x="11185855" y="6473952"/>
-            <a:ext cx="640080" cy="274320"/>
-          </a:xfrm>
-          <a:prstGeom prst="rect">
-            <a:avLst/>
-          </a:prstGeom>
-          <a:noFill/>
-        </p:spPr>
-        <p:txBody>
-          <a:bodyPr wrap="square">
-            <a:spAutoFit/>
-          </a:bodyPr>
-          <a:lstStyle/>
-          <a:p>
-            <a:pPr algn="r"/>
-            <a:r>
-              <a:rPr sz="1100" b="0" i="0">
-                <a:solidFill>
-                  <a:srgbClr val="666666"/>
-                </a:solidFill>
-                <a:latin typeface="Calibri"/>
-              </a:rPr>
-              <a:t>28</a:t>
-            </a:r>
-          </a:p>
-        </p:txBody>
-      </p:sp>
-    </p:spTree>
-  </p:cSld>
-  <p:clrMapOvr>
-    <a:masterClrMapping/>
-  </p:clrMapOvr>
-</p:sld>
-</file>
-
-<file path=ppt/slides/slide29.xml><?xml version="1.0" encoding="utf-8"?>
-<p:sld xmlns:a="http://schemas.openxmlformats.org/drawingml/2006/main" xmlns:p="http://schemas.openxmlformats.org/presentationml/2006/main" xmlns:r="http://schemas.openxmlformats.org/officeDocument/2006/relationships">
-  <p:cSld>
-    <p:bg>
-      <p:bgPr>
-        <a:solidFill>
-          <a:srgbClr val="FFFFFF"/>
-        </a:solidFill>
-        <a:effectLst/>
-      </p:bgPr>
-    </p:bg>
-    <p:spTree>
-      <p:nvGrpSpPr>
-        <p:cNvPr id="1" name=""/>
-        <p:cNvGrpSpPr/>
-        <p:nvPr/>
-      </p:nvGrpSpPr>
-      <p:grpSpPr/>
-      <p:sp>
-        <p:nvSpPr>
-          <p:cNvPr id="2" name="Rectangle 1"/>
-          <p:cNvSpPr/>
-          <p:nvPr/>
-        </p:nvSpPr>
-        <p:spPr>
-          <a:xfrm>
-            <a:off x="0" y="0"/>
             <a:ext cx="12191695" cy="164592"/>
           </a:xfrm>
           <a:prstGeom prst="rect">
@@ -12600,7 +10097,7 @@
                 </a:solidFill>
                 <a:latin typeface="Calibri"/>
               </a:rPr>
-              <a:t>Clase 11 · VetCare avanza</a:t>
+              <a:t>Clase 11 · Revisión de código cruzada</a:t>
             </a:r>
           </a:p>
         </p:txBody>
@@ -12639,7 +10136,7 @@
                 </a:solidFill>
                 <a:latin typeface="Calibri"/>
               </a:rPr>
-              <a:t>Cada estudiante recibe un informe externo con hallazgos priorizados y deja escrito su plan de corrección de VetCare antes de la integración final.</a:t>
+              <a:t>Leer el código de otro estudiante y devolver una crítica que sirva</a:t>
             </a:r>
           </a:p>
           <a:p>
@@ -12655,7 +10152,7 @@
                 </a:solidFill>
                 <a:latin typeface="Calibri"/>
               </a:rPr>
-              <a:t>Entregable: Informe de revisión de una página sobre el proyecto asignado (el de otro estudiante; si el docente autorizó equipos, el de otro equipo): checklist diligenciado con evidencia archivo:línea y cinco hallazgos priorizados con formato Evidencia + Impacto + Sugerencia, subido a la plataforma del curso.</a:t>
+              <a:t>Repasa las laminas de concepto y el codigo de la demo</a:t>
             </a:r>
           </a:p>
           <a:p>
@@ -12671,7 +10168,7 @@
                 </a:solidFill>
                 <a:latin typeface="Calibri"/>
               </a:rPr>
-              <a:t>Siguiente clase: continuamos el hilo del PI</a:t>
+              <a:t>Siguiente clase: continuamos el hilo del tema</a:t>
             </a:r>
           </a:p>
         </p:txBody>
@@ -13010,7 +10507,7 @@
                 </a:solidFill>
                 <a:latin typeface="Calibri"/>
               </a:rPr>
-              <a:t>Encuadre y repaso del avance</a:t>
+              <a:t>Encuadre y repaso de la clase anterior</a:t>
             </a:r>
           </a:p>
         </p:txBody>
@@ -13355,7 +10852,7 @@
                 </a:solidFill>
                 <a:latin typeface="Calibri"/>
               </a:rPr>
-              <a:t>Taller guiado = avance del PI</a:t>
+              <a:t>Practica (opcional, guia en la carpeta)</a:t>
             </a:r>
           </a:p>
         </p:txBody>
@@ -13470,7 +10967,7 @@
                 </a:solidFill>
                 <a:latin typeface="Calibri"/>
               </a:rPr>
-              <a:t>Criterios de exito y cierre</a:t>
+              <a:t>Repaso de conceptos y cierre</a:t>
             </a:r>
           </a:p>
         </p:txBody>
@@ -15449,4 +12946,324 @@
   </a:objectDefaults>
   <a:extraClrSchemeLst/>
 </a:theme>
+</file>
+
+<file path=ppt/theme/theme2.xml><?xml version="1.0" encoding="utf-8"?>
+<a:theme xmlns:a="http://schemas.openxmlformats.org/drawingml/2006/main" name="Office Theme">
+  <a:themeElements>
+    <a:clrScheme name="Office">
+      <a:dk1>
+        <a:sysClr val="windowText" lastClr="000000"/>
+      </a:dk1>
+      <a:lt1>
+        <a:sysClr val="window" lastClr="FFFFFF"/>
+      </a:lt1>
+      <a:dk2>
+        <a:srgbClr val="1F497D"/>
+      </a:dk2>
+      <a:lt2>
+        <a:srgbClr val="EEECE1"/>
+      </a:lt2>
+      <a:accent1>
+        <a:srgbClr val="4F81BD"/>
+      </a:accent1>
+      <a:accent2>
+        <a:srgbClr val="C0504D"/>
+      </a:accent2>
+      <a:accent3>
+        <a:srgbClr val="9BBB59"/>
+      </a:accent3>
+      <a:accent4>
+        <a:srgbClr val="8064A2"/>
+      </a:accent4>
+      <a:accent5>
+        <a:srgbClr val="4BACC6"/>
+      </a:accent5>
+      <a:accent6>
+        <a:srgbClr val="F79646"/>
+      </a:accent6>
+      <a:hlink>
+        <a:srgbClr val="0000FF"/>
+      </a:hlink>
+      <a:folHlink>
+        <a:srgbClr val="800080"/>
+      </a:folHlink>
+    </a:clrScheme>
+    <a:fontScheme name="Office">
+      <a:majorFont>
+        <a:latin typeface="Calibri"/>
+        <a:ea typeface=""/>
+        <a:cs typeface=""/>
+        <a:font script="Jpan" typeface="ＭＳ Ｐゴシック"/>
+        <a:font script="Hang" typeface="맑은 고딕"/>
+        <a:font script="Hans" typeface="宋体"/>
+        <a:font script="Hant" typeface="新細明體"/>
+        <a:font script="Arab" typeface="Times New Roman"/>
+        <a:font script="Hebr" typeface="Times New Roman"/>
+        <a:font script="Thai" typeface="Angsana New"/>
+        <a:font script="Ethi" typeface="Nyala"/>
+        <a:font script="Beng" typeface="Vrinda"/>
+        <a:font script="Gujr" typeface="Shruti"/>
+        <a:font script="Khmr" typeface="MoolBoran"/>
+        <a:font script="Knda" typeface="Tunga"/>
+        <a:font script="Guru" typeface="Raavi"/>
+        <a:font script="Cans" typeface="Euphemia"/>
+        <a:font script="Cher" typeface="Plantagenet Cherokee"/>
+        <a:font script="Yiii" typeface="Microsoft Yi Baiti"/>
+        <a:font script="Tibt" typeface="Microsoft Himalaya"/>
+        <a:font script="Thaa" typeface="MV Boli"/>
+        <a:font script="Deva" typeface="Mangal"/>
+        <a:font script="Telu" typeface="Gautami"/>
+        <a:font script="Taml" typeface="Latha"/>
+        <a:font script="Syrc" typeface="Estrangelo Edessa"/>
+        <a:font script="Orya" typeface="Kalinga"/>
+        <a:font script="Mlym" typeface="Kartika"/>
+        <a:font script="Laoo" typeface="DokChampa"/>
+        <a:font script="Sinh" typeface="Iskoola Pota"/>
+        <a:font script="Mong" typeface="Mongolian Baiti"/>
+        <a:font script="Viet" typeface="Times New Roman"/>
+        <a:font script="Uigh" typeface="Microsoft Uighur"/>
+        <a:font script="Geor" typeface="Sylfaen"/>
+      </a:majorFont>
+      <a:minorFont>
+        <a:latin typeface="Calibri"/>
+        <a:ea typeface=""/>
+        <a:cs typeface=""/>
+        <a:font script="Jpan" typeface="ＭＳ Ｐゴシック"/>
+        <a:font script="Hang" typeface="맑은 고딕"/>
+        <a:font script="Hans" typeface="宋体"/>
+        <a:font script="Hant" typeface="新細明體"/>
+        <a:font script="Arab" typeface="Arial"/>
+        <a:font script="Hebr" typeface="Arial"/>
+        <a:font script="Thai" typeface="Cordia New"/>
+        <a:font script="Ethi" typeface="Nyala"/>
+        <a:font script="Beng" typeface="Vrinda"/>
+        <a:font script="Gujr" typeface="Shruti"/>
+        <a:font script="Khmr" typeface="DaunPenh"/>
+        <a:font script="Knda" typeface="Tunga"/>
+        <a:font script="Guru" typeface="Raavi"/>
+        <a:font script="Cans" typeface="Euphemia"/>
+        <a:font script="Cher" typeface="Plantagenet Cherokee"/>
+        <a:font script="Yiii" typeface="Microsoft Yi Baiti"/>
+        <a:font script="Tibt" typeface="Microsoft Himalaya"/>
+        <a:font script="Thaa" typeface="MV Boli"/>
+        <a:font script="Deva" typeface="Mangal"/>
+        <a:font script="Telu" typeface="Gautami"/>
+        <a:font script="Taml" typeface="Latha"/>
+        <a:font script="Syrc" typeface="Estrangelo Edessa"/>
+        <a:font script="Orya" typeface="Kalinga"/>
+        <a:font script="Mlym" typeface="Kartika"/>
+        <a:font script="Laoo" typeface="DokChampa"/>
+        <a:font script="Sinh" typeface="Iskoola Pota"/>
+        <a:font script="Mong" typeface="Mongolian Baiti"/>
+        <a:font script="Viet" typeface="Arial"/>
+        <a:font script="Uigh" typeface="Microsoft Uighur"/>
+        <a:font script="Geor" typeface="Sylfaen"/>
+      </a:minorFont>
+    </a:fontScheme>
+    <a:fmtScheme name="Office">
+      <a:fillStyleLst>
+        <a:solidFill>
+          <a:schemeClr val="phClr"/>
+        </a:solidFill>
+        <a:gradFill rotWithShape="1">
+          <a:gsLst>
+            <a:gs pos="0">
+              <a:schemeClr val="phClr">
+                <a:tint val="50000"/>
+                <a:satMod val="300000"/>
+              </a:schemeClr>
+            </a:gs>
+            <a:gs pos="35000">
+              <a:schemeClr val="phClr">
+                <a:tint val="37000"/>
+                <a:satMod val="300000"/>
+              </a:schemeClr>
+            </a:gs>
+            <a:gs pos="100000">
+              <a:schemeClr val="phClr">
+                <a:tint val="15000"/>
+                <a:satMod val="350000"/>
+              </a:schemeClr>
+            </a:gs>
+          </a:gsLst>
+          <a:lin ang="16200000" scaled="1"/>
+        </a:gradFill>
+        <a:gradFill rotWithShape="1">
+          <a:gsLst>
+            <a:gs pos="0">
+              <a:schemeClr val="phClr">
+                <a:tint val="100000"/>
+                <a:shade val="100000"/>
+                <a:satMod val="130000"/>
+              </a:schemeClr>
+            </a:gs>
+            <a:gs pos="100000">
+              <a:schemeClr val="phClr">
+                <a:tint val="50000"/>
+                <a:shade val="100000"/>
+                <a:satMod val="350000"/>
+              </a:schemeClr>
+            </a:gs>
+          </a:gsLst>
+          <a:lin ang="16200000" scaled="0"/>
+        </a:gradFill>
+      </a:fillStyleLst>
+      <a:lnStyleLst>
+        <a:ln w="9525" cap="flat" cmpd="sng" algn="ctr">
+          <a:solidFill>
+            <a:schemeClr val="phClr">
+              <a:shade val="95000"/>
+              <a:satMod val="105000"/>
+            </a:schemeClr>
+          </a:solidFill>
+          <a:prstDash val="solid"/>
+        </a:ln>
+        <a:ln w="25400" cap="flat" cmpd="sng" algn="ctr">
+          <a:solidFill>
+            <a:schemeClr val="phClr"/>
+          </a:solidFill>
+          <a:prstDash val="solid"/>
+        </a:ln>
+        <a:ln w="38100" cap="flat" cmpd="sng" algn="ctr">
+          <a:solidFill>
+            <a:schemeClr val="phClr"/>
+          </a:solidFill>
+          <a:prstDash val="solid"/>
+        </a:ln>
+      </a:lnStyleLst>
+      <a:effectStyleLst>
+        <a:effectStyle>
+          <a:effectLst>
+            <a:outerShdw blurRad="40000" dist="20000" dir="5400000" rotWithShape="0">
+              <a:srgbClr val="000000">
+                <a:alpha val="38000"/>
+              </a:srgbClr>
+            </a:outerShdw>
+          </a:effectLst>
+        </a:effectStyle>
+        <a:effectStyle>
+          <a:effectLst>
+            <a:outerShdw blurRad="40000" dist="23000" dir="5400000" rotWithShape="0">
+              <a:srgbClr val="000000">
+                <a:alpha val="35000"/>
+              </a:srgbClr>
+            </a:outerShdw>
+          </a:effectLst>
+        </a:effectStyle>
+        <a:effectStyle>
+          <a:effectLst>
+            <a:outerShdw blurRad="40000" dist="23000" dir="5400000" rotWithShape="0">
+              <a:srgbClr val="000000">
+                <a:alpha val="35000"/>
+              </a:srgbClr>
+            </a:outerShdw>
+          </a:effectLst>
+          <a:scene3d>
+            <a:camera prst="orthographicFront">
+              <a:rot lat="0" lon="0" rev="0"/>
+            </a:camera>
+            <a:lightRig rig="threePt" dir="t">
+              <a:rot lat="0" lon="0" rev="1200000"/>
+            </a:lightRig>
+          </a:scene3d>
+          <a:sp3d>
+            <a:bevelT w="63500" h="25400"/>
+          </a:sp3d>
+        </a:effectStyle>
+      </a:effectStyleLst>
+      <a:bgFillStyleLst>
+        <a:solidFill>
+          <a:schemeClr val="phClr"/>
+        </a:solidFill>
+        <a:gradFill rotWithShape="1">
+          <a:gsLst>
+            <a:gs pos="0">
+              <a:schemeClr val="phClr">
+                <a:tint val="40000"/>
+                <a:satMod val="350000"/>
+              </a:schemeClr>
+            </a:gs>
+            <a:gs pos="40000">
+              <a:schemeClr val="phClr">
+                <a:tint val="45000"/>
+                <a:shade val="99000"/>
+                <a:satMod val="350000"/>
+              </a:schemeClr>
+            </a:gs>
+            <a:gs pos="100000">
+              <a:schemeClr val="phClr">
+                <a:shade val="20000"/>
+                <a:satMod val="255000"/>
+              </a:schemeClr>
+            </a:gs>
+          </a:gsLst>
+          <a:path path="circle">
+            <a:fillToRect l="50000" t="-80000" r="50000" b="180000"/>
+          </a:path>
+        </a:gradFill>
+        <a:gradFill rotWithShape="1">
+          <a:gsLst>
+            <a:gs pos="0">
+              <a:schemeClr val="phClr">
+                <a:tint val="80000"/>
+                <a:satMod val="300000"/>
+              </a:schemeClr>
+            </a:gs>
+            <a:gs pos="100000">
+              <a:schemeClr val="phClr">
+                <a:shade val="30000"/>
+                <a:satMod val="200000"/>
+              </a:schemeClr>
+            </a:gs>
+          </a:gsLst>
+          <a:path path="circle">
+            <a:fillToRect l="50000" t="50000" r="50000" b="50000"/>
+          </a:path>
+        </a:gradFill>
+      </a:bgFillStyleLst>
+    </a:fmtScheme>
+  </a:themeElements>
+  <a:objectDefaults>
+    <a:spDef>
+      <a:spPr/>
+      <a:bodyPr/>
+      <a:lstStyle/>
+      <a:style>
+        <a:lnRef idx="1">
+          <a:schemeClr val="accent1"/>
+        </a:lnRef>
+        <a:fillRef idx="3">
+          <a:schemeClr val="accent1"/>
+        </a:fillRef>
+        <a:effectRef idx="2">
+          <a:schemeClr val="accent1"/>
+        </a:effectRef>
+        <a:fontRef idx="minor">
+          <a:schemeClr val="lt1"/>
+        </a:fontRef>
+      </a:style>
+    </a:spDef>
+    <a:lnDef>
+      <a:spPr/>
+      <a:bodyPr/>
+      <a:lstStyle/>
+      <a:style>
+        <a:lnRef idx="2">
+          <a:schemeClr val="accent1"/>
+        </a:lnRef>
+        <a:fillRef idx="0">
+          <a:schemeClr val="accent1"/>
+        </a:fillRef>
+        <a:effectRef idx="1">
+          <a:schemeClr val="accent1"/>
+        </a:effectRef>
+        <a:fontRef idx="minor">
+          <a:schemeClr val="tx1"/>
+        </a:fontRef>
+      </a:style>
+    </a:lnDef>
+  </a:objectDefaults>
+  <a:extraClrSchemeLst/>
+</a:theme>
 </file>
--- a/Programacion II/Clases/Clase 11 - Revision de codigo cruzada/Presentacion.pptx
+++ b/Programacion II/Clases/Clase 11 - Revision de codigo cruzada/Presentacion.pptx
@@ -606,7 +606,7 @@
           <a:p/>
           <a:p>
             <a:r>
-              <a:t>Si un informe de revisión de VetCare tiene ocho comentarios de espacios y ninguno sobre el NullPointerException al buscar un ID inexistente, esa revisión no sirvió.</a:t>
+              <a:t>Si un informe de revisión del sistema de la clinica tiene ocho comentarios de espacios y ninguno sobre el NullPointerException al buscar un ID inexistente, esa revisión no sirvió.</a:t>
             </a:r>
           </a:p>
         </p:txBody>
@@ -4361,7 +4361,7 @@
                 </a:solidFill>
                 <a:latin typeface="Calibri"/>
               </a:rPr>
-              <a:t>–   Se construye directamente con los requisitos del PI de VetCare, y sus ítems son binarios y verificables: ¿existe al menos una clase del dominio con atributos privados y getters, o los datos andan sueltos en arreglos de String?</a:t>
+              <a:t>–   Se construye directamente con los requisitos del proyecto, y sus ítems son binarios y verificables: ¿existe al menos una clase del dominio con atributos privados y getters, o los datos andan sueltos en arreglos de String?</a:t>
             </a:r>
           </a:p>
           <a:p>
@@ -5181,7 +5181,7 @@
                 </a:solidFill>
                 <a:latin typeface="Calibri"/>
               </a:rPr>
-              <a:t>–   Que solo señala estilo e indentación; y la revisión que rediseña el proyecto ajeno, donde el revisor propone rehacer VetCare con su propia arquitectura en vez de señalar problemas concretos del que tiene enfrente.</a:t>
+              <a:t>–   Que solo señala estilo e indentación; y la revisión que rediseña el proyecto ajeno, donde el revisor propone rehacer el sistema de la clinica con su propia arquitectura en vez de señalar problemas concretos del que tiene enfrente.</a:t>
             </a:r>
           </a:p>
         </p:txBody>
@@ -5362,7 +5362,7 @@
                 </a:solidFill>
                 <a:latin typeface="Calibri"/>
               </a:rPr>
-              <a:t>VetCareParaRevisar.java — class VetCareParaRevisar</a:t>
+              <a:t>ClinicaParaRevisar.java — class ClinicaParaRevisar</a:t>
             </a:r>
           </a:p>
         </p:txBody>
@@ -5521,7 +5521,7 @@
                 </a:solidFill>
                 <a:latin typeface="Calibri"/>
               </a:rPr>
-              <a:t>public class VetCareParaRevisar {</a:t>
+              <a:t>public class ClinicaParaRevisar {</a:t>
             </a:r>
           </a:p>
           <a:p>
@@ -5750,7 +5750,7 @@
                 </a:solidFill>
                 <a:latin typeface="Calibri"/>
               </a:rPr>
-              <a:t>VetCareParaRevisar.java — main() (1/2)</a:t>
+              <a:t>ClinicaParaRevisar.java — main() (1/2)</a:t>
             </a:r>
           </a:p>
         </p:txBody>
@@ -5925,7 +5925,7 @@
                 </a:solidFill>
                 <a:latin typeface="Calibri"/>
               </a:rPr>
-              <a:t>        System.out.println("=== VetCare Huellitas (version para revisar) ===");</a:t>
+              <a:t>        System.out.println("=== Clinica (version para revisar) ===");</a:t>
             </a:r>
           </a:p>
           <a:p>
@@ -6417,7 +6417,7 @@
                 </a:solidFill>
                 <a:latin typeface="Calibri"/>
               </a:rPr>
-              <a:t>VetCareParaRevisar.java — main() (2/2)</a:t>
+              <a:t>ClinicaParaRevisar.java — main() (2/2)</a:t>
             </a:r>
           </a:p>
         </p:txBody>
@@ -6853,7 +6853,7 @@
                 </a:solidFill>
                 <a:latin typeface="Calibri"/>
               </a:rPr>
-              <a:t>VetCareParaRevisar.java — proceso()</a:t>
+              <a:t>ClinicaParaRevisar.java — proceso()</a:t>
             </a:r>
           </a:p>
         </p:txBody>
@@ -7481,7 +7481,7 @@
                 </a:solidFill>
                 <a:latin typeface="Calibri"/>
               </a:rPr>
-              <a:t>VetCareParaRevisar.java — buscarPorId()</a:t>
+              <a:t>ClinicaParaRevisar.java — buscarPorId()</a:t>
             </a:r>
           </a:p>
         </p:txBody>
@@ -7949,7 +7949,7 @@
                 </a:solidFill>
                 <a:latin typeface="Calibri"/>
               </a:rPr>
-              <a:t>VetCareParaRevisar.java — imprimirFicha()</a:t>
+              <a:t>ClinicaParaRevisar.java — imprimirFicha()</a:t>
             </a:r>
           </a:p>
         </p:txBody>
@@ -8597,7 +8597,7 @@
                 </a:solidFill>
                 <a:latin typeface="Calibri"/>
               </a:rPr>
-              <a:t>–   Todo con el mismo dominio: la clinica veterinaria Huellitas (VetCare).</a:t>
+              <a:t>–   Todo con el mismo dominio: una clinica veterinaria.</a:t>
             </a:r>
           </a:p>
         </p:txBody>
@@ -8778,7 +8778,7 @@
                 </a:solidFill>
                 <a:latin typeface="Calibri"/>
               </a:rPr>
-              <a:t>VetCareParaRevisar.java — buscarDeNuevo()</a:t>
+              <a:t>ClinicaParaRevisar.java — buscarDeNuevo()</a:t>
             </a:r>
           </a:p>
         </p:txBody>
@@ -9262,7 +9262,7 @@
                 </a:solidFill>
                 <a:latin typeface="Calibri"/>
               </a:rPr>
-              <a:t>Un método real de VetCare y sus seis hallazgos</a:t>
+              <a:t>Un método real del sistema de la clinica y sus seis hallazgos</a:t>
             </a:r>
           </a:p>
         </p:txBody>
@@ -9920,7 +9920,7 @@
                 </a:solidFill>
                 <a:latin typeface="Calibri"/>
               </a:rPr>
-              <a:t> El docente proyecta VetCareParaRevisar.java, lo ejecuta en vivo, aplica el checklist delante del grupo y reescribe dos comentarios mal formulados del tipo 'este código es un desastre' en retroalimentación accionable.</a:t>
+              <a:t> El docente proyecta ClinicaParaRevisar.java, lo ejecuta en vivo, aplica el checklist delante del grupo y reescribe dos comentarios mal formulados del tipo 'este código es un desastre' en retroalimentación accionable.</a:t>
             </a:r>
           </a:p>
           <a:p>
@@ -9936,7 +9936,7 @@
                 </a:solidFill>
                 <a:latin typeface="Calibri"/>
               </a:rPr>
-              <a:t>–   Mismo dominio VetCare — no otro ejemplo.</a:t>
+              <a:t>–   Mismo dominio de la clinica — no otro ejemplo.</a:t>
             </a:r>
           </a:p>
         </p:txBody>
@@ -10737,7 +10737,7 @@
                 </a:solidFill>
                 <a:latin typeface="Calibri"/>
               </a:rPr>
-              <a:t>Demo en vivo sobre VetCare</a:t>
+              <a:t>Demo en vivo sobre el tema</a:t>
             </a:r>
           </a:p>
         </p:txBody>
@@ -11304,7 +11304,7 @@
                 </a:solidFill>
                 <a:latin typeface="Calibri"/>
               </a:rPr>
-              <a:t>–   Encontrarlo el día de la sustentación, con la ventana de VetCare congelada y la clínica Huellitas sin poder mostrar el expediente de Firulais, cuesta la nota y la credibilidad.</a:t>
+              <a:t>–   Encontrarlo el día de la sustentación, con la ventana del sistema de la clinica congelada y la clínica sin poder mostrar el expediente de Firulais, cuesta la nota y la credibilidad.</a:t>
             </a:r>
           </a:p>
         </p:txBody>
@@ -11792,7 +11792,7 @@
                 </a:solidFill>
                 <a:latin typeface="Calibri"/>
               </a:rPr>
-              <a:t>–   Segunda capa: corrección y casos borde, que en VetCare son siempre los mismos y hay que buscarlos a propósito: edad negativa o con letras</a:t>
+              <a:t>–   Segunda capa: corrección y casos borde, que en el sistema de la clinica son siempre los mismos y hay que buscarlos a propósito: edad negativa o con letras</a:t>
             </a:r>
           </a:p>
           <a:p>

--- a/Programacion II/Clases/Clase 11 - Revision de codigo cruzada/Presentacion.pptx
+++ b/Programacion II/Clases/Clase 11 - Revision de codigo cruzada/Presentacion.pptx
@@ -826,94 +826,6 @@
           <a:p>
             <a:r>
               <a:t>Recibir la crítica también se practica, y es la mitad difícil. La reacción natural del autor es defenderse en caliente y explicar por qué lo hizo así; el protocolo de clase es otro: escuchar completo, pedir aclaración si el hallazgo no se entiende, y luego decidir con una de tres respuestas escritas: acepto y corrijo (con responsable y fecha), justifico por qué se queda como está, o difiero para después de la entrega. Todo eso queda en el plan de corrección y es lo que el docente revisa. Del lado del revisor también hay deberes: verificar antes de acusar, porque un hallazgo falso como 'esto no compila' cuando en realidad faltaba abrir el proyecto correcto quema la credibilidad de todo el informe. Hay tres antipatrones que van a aparecer y conviene nombrarlos de una vez: la revisión de sello, que aprueba en dos minutos sin haber ejecutado nada; la revisión de gusto personal, que solo señala estilo e indentación; y la revisión que rediseña el proyecto ajeno, donde el revisor propone rehacer el sistema de la clinica con su propia arquitectura en vez de señalar problemas concretos del que tiene enfrente.</a:t>
-            </a:r>
-          </a:p>
-        </p:txBody>
-      </p:sp>
-      <p:sp>
-        <p:nvSpPr>
-          <p:cNvPr id="4" name="Slide Number Placeholder 3"/>
-          <p:cNvSpPr>
-            <a:spLocks noGrp="1"/>
-          </p:cNvSpPr>
-          <p:nvPr>
-            <p:ph type="sldNum" idx="5" sz="quarter"/>
-          </p:nvPr>
-        </p:nvSpPr>
-        <p:spPr/>
-      </p:sp>
-    </p:spTree>
-  </p:cSld>
-  <p:clrMapOvr>
-    <a:masterClrMapping/>
-  </p:clrMapOvr>
-</p:notes>
-</file>
-
-<file path=ppt/notesSlides/notesSlide6.xml><?xml version="1.0" encoding="utf-8"?>
-<p:notes xmlns:a="http://schemas.openxmlformats.org/drawingml/2006/main" xmlns:p="http://schemas.openxmlformats.org/presentationml/2006/main" xmlns:r="http://schemas.openxmlformats.org/officeDocument/2006/relationships">
-  <p:cSld>
-    <p:spTree>
-      <p:nvGrpSpPr>
-        <p:cNvPr id="1" name=""/>
-        <p:cNvGrpSpPr/>
-        <p:nvPr/>
-      </p:nvGrpSpPr>
-      <p:grpSpPr>
-        <a:xfrm>
-          <a:off x="0" y="0"/>
-          <a:ext cx="0" cy="0"/>
-          <a:chOff x="0" y="0"/>
-          <a:chExt cx="0" cy="0"/>
-        </a:xfrm>
-      </p:grpSpPr>
-      <p:sp>
-        <p:nvSpPr>
-          <p:cNvPr id="2" name="Slide Image Placeholder 1"/>
-          <p:cNvSpPr>
-            <a:spLocks noGrp="1"/>
-          </p:cNvSpPr>
-          <p:nvPr>
-            <p:ph type="sldImg" idx="2"/>
-          </p:nvPr>
-        </p:nvSpPr>
-        <p:spPr/>
-      </p:sp>
-      <p:sp>
-        <p:nvSpPr>
-          <p:cNvPr id="3" name="Notes Placeholder 2"/>
-          <p:cNvSpPr>
-            <a:spLocks noGrp="1"/>
-          </p:cNvSpPr>
-          <p:nvPr>
-            <p:ph type="body" idx="3" sz="quarter"/>
-          </p:nvPr>
-        </p:nvSpPr>
-        <p:spPr/>
-        <p:txBody>
-          <a:bodyPr/>
-          <a:lstStyle/>
-          <a:p>
-            <a:r>
-              <a:t>TEXTO COMPLETO DE LA LÁMINA (se proyecta resumido):</a:t>
-            </a:r>
-          </a:p>
-          <a:p/>
-          <a:p>
-            <a:r>
-              <a:t>Herramienta: Visual Studio Code (Java)</a:t>
-            </a:r>
-          </a:p>
-          <a:p/>
-          <a:p>
-            <a:r>
-              <a:t>Demo: El docente proyecta ClinicaParaRevisar.java, lo ejecuta en vivo, aplica el checklist delante del grupo y reescribe dos comentarios mal formulados del tipo 'este código es un desastre' en retroalimentación accionable.</a:t>
-            </a:r>
-          </a:p>
-          <a:p/>
-          <a:p>
-            <a:r>
-              <a:t>Mismo dominio de la clinica — no otro ejemplo.</a:t>
             </a:r>
           </a:p>
         </p:txBody>
@@ -4444,118 +4356,14 @@
       </p:sp>
       <p:sp>
         <p:nvSpPr>
-          <p:cNvPr id="5" name="Rounded Rectangle 4"/>
-          <p:cNvSpPr/>
-          <p:nvPr/>
-        </p:nvSpPr>
-        <p:spPr>
-          <a:xfrm>
-            <a:off x="5797149" y="1573813"/>
-            <a:ext cx="6010497" cy="4057845"/>
-          </a:xfrm>
-          <a:prstGeom prst="roundRect">
-            <a:avLst>
-              <a:gd name="adj" fmla="val 4000"/>
-            </a:avLst>
-          </a:prstGeom>
-          <a:solidFill>
-            <a:srgbClr val="E8EEF4"/>
-          </a:solidFill>
-          <a:ln>
-            <a:noFill/>
-          </a:ln>
-        </p:spPr>
-        <p:style>
-          <a:lnRef idx="1">
-            <a:schemeClr val="accent1"/>
-          </a:lnRef>
-          <a:fillRef idx="3">
-            <a:schemeClr val="accent1"/>
-          </a:fillRef>
-          <a:effectRef idx="2">
-            <a:schemeClr val="accent1"/>
-          </a:effectRef>
-          <a:fontRef idx="minor">
-            <a:schemeClr val="lt1"/>
-          </a:fontRef>
-        </p:style>
-        <p:txBody>
-          <a:bodyPr rtlCol="0" anchor="ctr"/>
-          <a:lstStyle/>
-          <a:p>
-            <a:pPr algn="ctr"/>
-          </a:p>
-        </p:txBody>
-      </p:sp>
-      <p:pic>
-        <p:nvPicPr>
-          <p:cNvPr id="6" name="Picture 5" descr="checklist-clipboard-pen.jpg"/>
-          <p:cNvPicPr>
-            <a:picLocks noChangeAspect="1"/>
-          </p:cNvPicPr>
-          <p:nvPr/>
-        </p:nvPicPr>
-        <p:blipFill>
-          <a:blip r:embed="rId2"/>
-          <a:stretch>
-            <a:fillRect/>
-          </a:stretch>
-        </p:blipFill>
-        <p:spPr>
-          <a:xfrm>
-            <a:off x="5870301" y="1646965"/>
-            <a:ext cx="5864193" cy="3911541"/>
-          </a:xfrm>
-          <a:prstGeom prst="rect">
-            <a:avLst/>
-          </a:prstGeom>
-        </p:spPr>
-      </p:pic>
-      <p:sp>
-        <p:nvSpPr>
-          <p:cNvPr id="7" name="TextBox 6"/>
+          <p:cNvPr id="5" name="TextBox 4"/>
           <p:cNvSpPr txBox="1"/>
           <p:nvPr/>
         </p:nvSpPr>
         <p:spPr>
           <a:xfrm>
-            <a:off x="5870301" y="5961888"/>
-            <a:ext cx="5864193" cy="320040"/>
-          </a:xfrm>
-          <a:prstGeom prst="rect">
-            <a:avLst/>
-          </a:prstGeom>
-          <a:noFill/>
-        </p:spPr>
-        <p:txBody>
-          <a:bodyPr wrap="square">
-            <a:spAutoFit/>
-          </a:bodyPr>
-          <a:lstStyle/>
-          <a:p>
-            <a:pPr algn="ctr"/>
-            <a:r>
-              <a:rPr sz="1100" b="0" i="1">
-                <a:solidFill>
-                  <a:srgbClr val="666666"/>
-                </a:solidFill>
-                <a:latin typeface="Calibri"/>
-              </a:rPr>
-              <a:t>Foto: RDNE Stock project · Pexels</a:t>
-            </a:r>
-          </a:p>
-        </p:txBody>
-      </p:sp>
-      <p:sp>
-        <p:nvSpPr>
-          <p:cNvPr id="8" name="TextBox 7"/>
-          <p:cNvSpPr txBox="1"/>
-          <p:nvPr/>
-        </p:nvSpPr>
-        <p:spPr>
-          <a:xfrm>
-            <a:off x="457200" y="1353312"/>
-            <a:ext cx="5093061" cy="5047488"/>
+            <a:off x="457200" y="1170432"/>
+            <a:ext cx="11277295" cy="5230368"/>
           </a:xfrm>
           <a:prstGeom prst="rect">
             <a:avLst/>
@@ -4635,7 +4443,7 @@
       </p:sp>
       <p:sp>
         <p:nvSpPr>
-          <p:cNvPr id="9" name="TextBox 8"/>
+          <p:cNvPr id="6" name="TextBox 5"/>
           <p:cNvSpPr txBox="1"/>
           <p:nvPr/>
         </p:nvSpPr>
@@ -6391,118 +6199,14 @@
       </p:sp>
       <p:sp>
         <p:nvSpPr>
-          <p:cNvPr id="5" name="Rounded Rectangle 4"/>
-          <p:cNvSpPr/>
-          <p:nvPr/>
-        </p:nvSpPr>
-        <p:spPr>
-          <a:xfrm>
-            <a:off x="5797149" y="1573813"/>
-            <a:ext cx="6010497" cy="4057845"/>
-          </a:xfrm>
-          <a:prstGeom prst="roundRect">
-            <a:avLst>
-              <a:gd name="adj" fmla="val 4000"/>
-            </a:avLst>
-          </a:prstGeom>
-          <a:solidFill>
-            <a:srgbClr val="E8EEF4"/>
-          </a:solidFill>
-          <a:ln>
-            <a:noFill/>
-          </a:ln>
-        </p:spPr>
-        <p:style>
-          <a:lnRef idx="1">
-            <a:schemeClr val="accent1"/>
-          </a:lnRef>
-          <a:fillRef idx="3">
-            <a:schemeClr val="accent1"/>
-          </a:fillRef>
-          <a:effectRef idx="2">
-            <a:schemeClr val="accent1"/>
-          </a:effectRef>
-          <a:fontRef idx="minor">
-            <a:schemeClr val="lt1"/>
-          </a:fontRef>
-        </p:style>
-        <p:txBody>
-          <a:bodyPr rtlCol="0" anchor="ctr"/>
-          <a:lstStyle/>
-          <a:p>
-            <a:pPr algn="ctr"/>
-          </a:p>
-        </p:txBody>
-      </p:sp>
-      <p:pic>
-        <p:nvPicPr>
-          <p:cNvPr id="6" name="Picture 5" descr="team-meeting-discussion-office.jpg"/>
-          <p:cNvPicPr>
-            <a:picLocks noChangeAspect="1"/>
-          </p:cNvPicPr>
-          <p:nvPr/>
-        </p:nvPicPr>
-        <p:blipFill>
-          <a:blip r:embed="rId2"/>
-          <a:stretch>
-            <a:fillRect/>
-          </a:stretch>
-        </p:blipFill>
-        <p:spPr>
-          <a:xfrm>
-            <a:off x="5870301" y="1646965"/>
-            <a:ext cx="5864193" cy="3911541"/>
-          </a:xfrm>
-          <a:prstGeom prst="rect">
-            <a:avLst/>
-          </a:prstGeom>
-        </p:spPr>
-      </p:pic>
-      <p:sp>
-        <p:nvSpPr>
-          <p:cNvPr id="7" name="TextBox 6"/>
+          <p:cNvPr id="5" name="TextBox 4"/>
           <p:cNvSpPr txBox="1"/>
           <p:nvPr/>
         </p:nvSpPr>
         <p:spPr>
           <a:xfrm>
-            <a:off x="5870301" y="5961888"/>
-            <a:ext cx="5864193" cy="320040"/>
-          </a:xfrm>
-          <a:prstGeom prst="rect">
-            <a:avLst/>
-          </a:prstGeom>
-          <a:noFill/>
-        </p:spPr>
-        <p:txBody>
-          <a:bodyPr wrap="square">
-            <a:spAutoFit/>
-          </a:bodyPr>
-          <a:lstStyle/>
-          <a:p>
-            <a:pPr algn="ctr"/>
-            <a:r>
-              <a:rPr sz="1100" b="0" i="1">
-                <a:solidFill>
-                  <a:srgbClr val="666666"/>
-                </a:solidFill>
-                <a:latin typeface="Calibri"/>
-              </a:rPr>
-              <a:t>Foto: Gustavo Fring · Pexels</a:t>
-            </a:r>
-          </a:p>
-        </p:txBody>
-      </p:sp>
-      <p:sp>
-        <p:nvSpPr>
-          <p:cNvPr id="8" name="TextBox 7"/>
-          <p:cNvSpPr txBox="1"/>
-          <p:nvPr/>
-        </p:nvSpPr>
-        <p:spPr>
-          <a:xfrm>
-            <a:off x="457200" y="1353312"/>
-            <a:ext cx="5093061" cy="5047488"/>
+            <a:off x="457200" y="1170432"/>
+            <a:ext cx="11277295" cy="5230368"/>
           </a:xfrm>
           <a:prstGeom prst="rect">
             <a:avLst/>
@@ -6582,7 +6286,7 @@
       </p:sp>
       <p:sp>
         <p:nvSpPr>
-          <p:cNvPr id="9" name="TextBox 8"/>
+          <p:cNvPr id="6" name="TextBox 5"/>
           <p:cNvSpPr txBox="1"/>
           <p:nvPr/>
         </p:nvSpPr>
@@ -6763,118 +6467,14 @@
       </p:sp>
       <p:sp>
         <p:nvSpPr>
-          <p:cNvPr id="5" name="Rounded Rectangle 4"/>
-          <p:cNvSpPr/>
-          <p:nvPr/>
-        </p:nvSpPr>
-        <p:spPr>
-          <a:xfrm>
-            <a:off x="5797149" y="1573813"/>
-            <a:ext cx="6010497" cy="4057845"/>
-          </a:xfrm>
-          <a:prstGeom prst="roundRect">
-            <a:avLst>
-              <a:gd name="adj" fmla="val 4000"/>
-            </a:avLst>
-          </a:prstGeom>
-          <a:solidFill>
-            <a:srgbClr val="E8EEF4"/>
-          </a:solidFill>
-          <a:ln>
-            <a:noFill/>
-          </a:ln>
-        </p:spPr>
-        <p:style>
-          <a:lnRef idx="1">
-            <a:schemeClr val="accent1"/>
-          </a:lnRef>
-          <a:fillRef idx="3">
-            <a:schemeClr val="accent1"/>
-          </a:fillRef>
-          <a:effectRef idx="2">
-            <a:schemeClr val="accent1"/>
-          </a:effectRef>
-          <a:fontRef idx="minor">
-            <a:schemeClr val="lt1"/>
-          </a:fontRef>
-        </p:style>
-        <p:txBody>
-          <a:bodyPr rtlCol="0" anchor="ctr"/>
-          <a:lstStyle/>
-          <a:p>
-            <a:pPr algn="ctr"/>
-          </a:p>
-        </p:txBody>
-      </p:sp>
-      <p:pic>
-        <p:nvPicPr>
-          <p:cNvPr id="6" name="Picture 5" descr="laptop-code-live-demo.jpg"/>
-          <p:cNvPicPr>
-            <a:picLocks noChangeAspect="1"/>
-          </p:cNvPicPr>
-          <p:nvPr/>
-        </p:nvPicPr>
-        <p:blipFill>
-          <a:blip r:embed="rId2"/>
-          <a:stretch>
-            <a:fillRect/>
-          </a:stretch>
-        </p:blipFill>
-        <p:spPr>
-          <a:xfrm>
-            <a:off x="5870301" y="1646965"/>
-            <a:ext cx="5864193" cy="3911541"/>
-          </a:xfrm>
-          <a:prstGeom prst="rect">
-            <a:avLst/>
-          </a:prstGeom>
-        </p:spPr>
-      </p:pic>
-      <p:sp>
-        <p:nvSpPr>
-          <p:cNvPr id="7" name="TextBox 6"/>
+          <p:cNvPr id="5" name="TextBox 4"/>
           <p:cNvSpPr txBox="1"/>
           <p:nvPr/>
         </p:nvSpPr>
         <p:spPr>
           <a:xfrm>
-            <a:off x="5870301" y="5961888"/>
-            <a:ext cx="5864193" cy="320040"/>
-          </a:xfrm>
-          <a:prstGeom prst="rect">
-            <a:avLst/>
-          </a:prstGeom>
-          <a:noFill/>
-        </p:spPr>
-        <p:txBody>
-          <a:bodyPr wrap="square">
-            <a:spAutoFit/>
-          </a:bodyPr>
-          <a:lstStyle/>
-          <a:p>
-            <a:pPr algn="ctr"/>
-            <a:r>
-              <a:rPr sz="1100" b="0" i="1">
-                <a:solidFill>
-                  <a:srgbClr val="666666"/>
-                </a:solidFill>
-                <a:latin typeface="Calibri"/>
-              </a:rPr>
-              <a:t>Foto: olia danilevich · Pexels</a:t>
-            </a:r>
-          </a:p>
-        </p:txBody>
-      </p:sp>
-      <p:sp>
-        <p:nvSpPr>
-          <p:cNvPr id="8" name="TextBox 7"/>
-          <p:cNvSpPr txBox="1"/>
-          <p:nvPr/>
-        </p:nvSpPr>
-        <p:spPr>
-          <a:xfrm>
-            <a:off x="457200" y="1353312"/>
-            <a:ext cx="5093061" cy="5047488"/>
+            <a:off x="457200" y="1170432"/>
+            <a:ext cx="11277295" cy="5230368"/>
           </a:xfrm>
           <a:prstGeom prst="rect">
             <a:avLst/>
@@ -6944,6 +6544,15 @@
               </a:rPr>
               <a:t>Demo:</a:t>
             </a:r>
+            <a:r>
+              <a:rPr sz="2000" b="0" i="0">
+                <a:solidFill>
+                  <a:srgbClr val="333333"/>
+                </a:solidFill>
+                <a:latin typeface="Calibri"/>
+              </a:rPr>
+              <a:t> El docente proyecta ClinicaParaRevisar.java, lo ejecuta en vivo, aplica el checklist delante del grupo y reescribe dos comentarios mal formulados del tipo 'este código es un desastre' en retroalimentación accionable.</a:t>
+            </a:r>
           </a:p>
           <a:p>
             <a:pPr>
@@ -6965,7 +6574,7 @@
       </p:sp>
       <p:sp>
         <p:nvSpPr>
-          <p:cNvPr id="9" name="TextBox 8"/>
+          <p:cNvPr id="6" name="TextBox 5"/>
           <p:cNvSpPr txBox="1"/>
           <p:nvPr/>
         </p:nvSpPr>
@@ -7378,118 +6987,14 @@
       </p:sp>
       <p:sp>
         <p:nvSpPr>
-          <p:cNvPr id="5" name="Rounded Rectangle 4"/>
-          <p:cNvSpPr/>
-          <p:nvPr/>
-        </p:nvSpPr>
-        <p:spPr>
-          <a:xfrm>
-            <a:off x="5797149" y="1573813"/>
-            <a:ext cx="6010497" cy="4057845"/>
-          </a:xfrm>
-          <a:prstGeom prst="roundRect">
-            <a:avLst>
-              <a:gd name="adj" fmla="val 4000"/>
-            </a:avLst>
-          </a:prstGeom>
-          <a:solidFill>
-            <a:srgbClr val="E8EEF4"/>
-          </a:solidFill>
-          <a:ln>
-            <a:noFill/>
-          </a:ln>
-        </p:spPr>
-        <p:style>
-          <a:lnRef idx="1">
-            <a:schemeClr val="accent1"/>
-          </a:lnRef>
-          <a:fillRef idx="3">
-            <a:schemeClr val="accent1"/>
-          </a:fillRef>
-          <a:effectRef idx="2">
-            <a:schemeClr val="accent1"/>
-          </a:effectRef>
-          <a:fontRef idx="minor">
-            <a:schemeClr val="lt1"/>
-          </a:fontRef>
-        </p:style>
-        <p:txBody>
-          <a:bodyPr rtlCol="0" anchor="ctr"/>
-          <a:lstStyle/>
-          <a:p>
-            <a:pPr algn="ctr"/>
-          </a:p>
-        </p:txBody>
-      </p:sp>
-      <p:pic>
-        <p:nvPicPr>
-          <p:cNvPr id="6" name="Picture 5" descr="notebook-planning-desk-coffee.jpg"/>
-          <p:cNvPicPr>
-            <a:picLocks noChangeAspect="1"/>
-          </p:cNvPicPr>
-          <p:nvPr/>
-        </p:nvPicPr>
-        <p:blipFill>
-          <a:blip r:embed="rId2"/>
-          <a:stretch>
-            <a:fillRect/>
-          </a:stretch>
-        </p:blipFill>
-        <p:spPr>
-          <a:xfrm>
-            <a:off x="5870301" y="1646965"/>
-            <a:ext cx="5864193" cy="3911541"/>
-          </a:xfrm>
-          <a:prstGeom prst="rect">
-            <a:avLst/>
-          </a:prstGeom>
-        </p:spPr>
-      </p:pic>
-      <p:sp>
-        <p:nvSpPr>
-          <p:cNvPr id="7" name="TextBox 6"/>
+          <p:cNvPr id="5" name="TextBox 4"/>
           <p:cNvSpPr txBox="1"/>
           <p:nvPr/>
         </p:nvSpPr>
         <p:spPr>
           <a:xfrm>
-            <a:off x="5870301" y="5961888"/>
-            <a:ext cx="5864193" cy="320040"/>
-          </a:xfrm>
-          <a:prstGeom prst="rect">
-            <a:avLst/>
-          </a:prstGeom>
-          <a:noFill/>
-        </p:spPr>
-        <p:txBody>
-          <a:bodyPr wrap="square">
-            <a:spAutoFit/>
-          </a:bodyPr>
-          <a:lstStyle/>
-          <a:p>
-            <a:pPr algn="ctr"/>
-            <a:r>
-              <a:rPr sz="1100" b="0" i="1">
-                <a:solidFill>
-                  <a:srgbClr val="666666"/>
-                </a:solidFill>
-                <a:latin typeface="Calibri"/>
-              </a:rPr>
-              <a:t>Foto: Cup of  Couple · Pexels</a:t>
-            </a:r>
-          </a:p>
-        </p:txBody>
-      </p:sp>
-      <p:sp>
-        <p:nvSpPr>
-          <p:cNvPr id="8" name="TextBox 7"/>
-          <p:cNvSpPr txBox="1"/>
-          <p:nvPr/>
-        </p:nvSpPr>
-        <p:spPr>
-          <a:xfrm>
-            <a:off x="457200" y="1353312"/>
-            <a:ext cx="5093061" cy="5047488"/>
+            <a:off x="457200" y="1170432"/>
+            <a:ext cx="11277295" cy="5230368"/>
           </a:xfrm>
           <a:prstGeom prst="rect">
             <a:avLst/>
@@ -7614,7 +7119,7 @@
       </p:sp>
       <p:sp>
         <p:nvSpPr>
-          <p:cNvPr id="9" name="TextBox 8"/>
+          <p:cNvPr id="6" name="TextBox 5"/>
           <p:cNvSpPr txBox="1"/>
           <p:nvPr/>
         </p:nvSpPr>
@@ -8647,118 +8152,14 @@
       </p:sp>
       <p:sp>
         <p:nvSpPr>
-          <p:cNvPr id="5" name="Rounded Rectangle 4"/>
-          <p:cNvSpPr/>
-          <p:nvPr/>
-        </p:nvSpPr>
-        <p:spPr>
-          <a:xfrm>
-            <a:off x="5797149" y="1614363"/>
-            <a:ext cx="6010497" cy="3976745"/>
-          </a:xfrm>
-          <a:prstGeom prst="roundRect">
-            <a:avLst>
-              <a:gd name="adj" fmla="val 4000"/>
-            </a:avLst>
-          </a:prstGeom>
-          <a:solidFill>
-            <a:srgbClr val="E8EEF4"/>
-          </a:solidFill>
-          <a:ln>
-            <a:noFill/>
-          </a:ln>
-        </p:spPr>
-        <p:style>
-          <a:lnRef idx="1">
-            <a:schemeClr val="accent1"/>
-          </a:lnRef>
-          <a:fillRef idx="3">
-            <a:schemeClr val="accent1"/>
-          </a:fillRef>
-          <a:effectRef idx="2">
-            <a:schemeClr val="accent1"/>
-          </a:effectRef>
-          <a:fontRef idx="minor">
-            <a:schemeClr val="lt1"/>
-          </a:fontRef>
-        </p:style>
-        <p:txBody>
-          <a:bodyPr rtlCol="0" anchor="ctr"/>
-          <a:lstStyle/>
-          <a:p>
-            <a:pPr algn="ctr"/>
-          </a:p>
-        </p:txBody>
-      </p:sp>
-      <p:pic>
-        <p:nvPicPr>
-          <p:cNvPr id="6" name="Picture 5" descr="two-developers-reviewing-code-screen.jpg"/>
-          <p:cNvPicPr>
-            <a:picLocks noChangeAspect="1"/>
-          </p:cNvPicPr>
-          <p:nvPr/>
-        </p:nvPicPr>
-        <p:blipFill>
-          <a:blip r:embed="rId2"/>
-          <a:stretch>
-            <a:fillRect/>
-          </a:stretch>
-        </p:blipFill>
-        <p:spPr>
-          <a:xfrm>
-            <a:off x="5870301" y="1687515"/>
-            <a:ext cx="5864193" cy="3830441"/>
-          </a:xfrm>
-          <a:prstGeom prst="rect">
-            <a:avLst/>
-          </a:prstGeom>
-        </p:spPr>
-      </p:pic>
-      <p:sp>
-        <p:nvSpPr>
-          <p:cNvPr id="7" name="TextBox 6"/>
+          <p:cNvPr id="5" name="TextBox 4"/>
           <p:cNvSpPr txBox="1"/>
           <p:nvPr/>
         </p:nvSpPr>
         <p:spPr>
           <a:xfrm>
-            <a:off x="5870301" y="5961888"/>
-            <a:ext cx="5864193" cy="320040"/>
-          </a:xfrm>
-          <a:prstGeom prst="rect">
-            <a:avLst/>
-          </a:prstGeom>
-          <a:noFill/>
-        </p:spPr>
-        <p:txBody>
-          <a:bodyPr wrap="square">
-            <a:spAutoFit/>
-          </a:bodyPr>
-          <a:lstStyle/>
-          <a:p>
-            <a:pPr algn="ctr"/>
-            <a:r>
-              <a:rPr sz="1100" b="0" i="1">
-                <a:solidFill>
-                  <a:srgbClr val="666666"/>
-                </a:solidFill>
-                <a:latin typeface="Calibri"/>
-              </a:rPr>
-              <a:t>Foto: Jakub Zerdzicki · Pexels</a:t>
-            </a:r>
-          </a:p>
-        </p:txBody>
-      </p:sp>
-      <p:sp>
-        <p:nvSpPr>
-          <p:cNvPr id="8" name="TextBox 7"/>
-          <p:cNvSpPr txBox="1"/>
-          <p:nvPr/>
-        </p:nvSpPr>
-        <p:spPr>
-          <a:xfrm>
-            <a:off x="457200" y="1353312"/>
-            <a:ext cx="5093061" cy="5047488"/>
+            <a:off x="457200" y="1170432"/>
+            <a:ext cx="11277295" cy="5230368"/>
           </a:xfrm>
           <a:prstGeom prst="rect">
             <a:avLst/>
@@ -8838,7 +8239,7 @@
       </p:sp>
       <p:sp>
         <p:nvSpPr>
-          <p:cNvPr id="9" name="TextBox 8"/>
+          <p:cNvPr id="6" name="TextBox 5"/>
           <p:cNvSpPr txBox="1"/>
           <p:nvPr/>
         </p:nvSpPr>

--- a/Programacion II/Clases/Clase 11 - Revision de codigo cruzada/Presentacion.pptx
+++ b/Programacion II/Clases/Clase 11 - Revision de codigo cruzada/Presentacion.pptx
@@ -826,6 +826,94 @@
           <a:p>
             <a:r>
               <a:t>Recibir la crítica también se practica, y es la mitad difícil. La reacción natural del autor es defenderse en caliente y explicar por qué lo hizo así; el protocolo de clase es otro: escuchar completo, pedir aclaración si el hallazgo no se entiende, y luego decidir con una de tres respuestas escritas: acepto y corrijo (con responsable y fecha), justifico por qué se queda como está, o difiero para después de la entrega. Todo eso queda en el plan de corrección y es lo que el docente revisa. Del lado del revisor también hay deberes: verificar antes de acusar, porque un hallazgo falso como 'esto no compila' cuando en realidad faltaba abrir el proyecto correcto quema la credibilidad de todo el informe. Hay tres antipatrones que van a aparecer y conviene nombrarlos de una vez: la revisión de sello, que aprueba en dos minutos sin haber ejecutado nada; la revisión de gusto personal, que solo señala estilo e indentación; y la revisión que rediseña el proyecto ajeno, donde el revisor propone rehacer el sistema de la clinica con su propia arquitectura en vez de señalar problemas concretos del que tiene enfrente.</a:t>
+            </a:r>
+          </a:p>
+        </p:txBody>
+      </p:sp>
+      <p:sp>
+        <p:nvSpPr>
+          <p:cNvPr id="4" name="Slide Number Placeholder 3"/>
+          <p:cNvSpPr>
+            <a:spLocks noGrp="1"/>
+          </p:cNvSpPr>
+          <p:nvPr>
+            <p:ph type="sldNum" idx="5" sz="quarter"/>
+          </p:nvPr>
+        </p:nvSpPr>
+        <p:spPr/>
+      </p:sp>
+    </p:spTree>
+  </p:cSld>
+  <p:clrMapOvr>
+    <a:masterClrMapping/>
+  </p:clrMapOvr>
+</p:notes>
+</file>
+
+<file path=ppt/notesSlides/notesSlide6.xml><?xml version="1.0" encoding="utf-8"?>
+<p:notes xmlns:a="http://schemas.openxmlformats.org/drawingml/2006/main" xmlns:p="http://schemas.openxmlformats.org/presentationml/2006/main" xmlns:r="http://schemas.openxmlformats.org/officeDocument/2006/relationships">
+  <p:cSld>
+    <p:spTree>
+      <p:nvGrpSpPr>
+        <p:cNvPr id="1" name=""/>
+        <p:cNvGrpSpPr/>
+        <p:nvPr/>
+      </p:nvGrpSpPr>
+      <p:grpSpPr>
+        <a:xfrm>
+          <a:off x="0" y="0"/>
+          <a:ext cx="0" cy="0"/>
+          <a:chOff x="0" y="0"/>
+          <a:chExt cx="0" cy="0"/>
+        </a:xfrm>
+      </p:grpSpPr>
+      <p:sp>
+        <p:nvSpPr>
+          <p:cNvPr id="2" name="Slide Image Placeholder 1"/>
+          <p:cNvSpPr>
+            <a:spLocks noGrp="1"/>
+          </p:cNvSpPr>
+          <p:nvPr>
+            <p:ph type="sldImg" idx="2"/>
+          </p:nvPr>
+        </p:nvSpPr>
+        <p:spPr/>
+      </p:sp>
+      <p:sp>
+        <p:nvSpPr>
+          <p:cNvPr id="3" name="Notes Placeholder 2"/>
+          <p:cNvSpPr>
+            <a:spLocks noGrp="1"/>
+          </p:cNvSpPr>
+          <p:nvPr>
+            <p:ph type="body" idx="3" sz="quarter"/>
+          </p:nvPr>
+        </p:nvSpPr>
+        <p:spPr/>
+        <p:txBody>
+          <a:bodyPr/>
+          <a:lstStyle/>
+          <a:p>
+            <a:r>
+              <a:t>TEXTO COMPLETO DE LA LÁMINA (se proyecta resumido):</a:t>
+            </a:r>
+          </a:p>
+          <a:p/>
+          <a:p>
+            <a:r>
+              <a:t>Herramienta: Visual Studio Code (Java)</a:t>
+            </a:r>
+          </a:p>
+          <a:p/>
+          <a:p>
+            <a:r>
+              <a:t>Demo: El docente proyecta ClinicaParaRevisar.java, lo ejecuta en vivo, aplica el checklist delante del grupo y reescribe dos comentarios mal formulados del tipo 'este código es un desastre' en retroalimentación accionable.</a:t>
+            </a:r>
+          </a:p>
+          <a:p/>
+          <a:p>
+            <a:r>
+              <a:t>Mismo dominio de la clinica — no otro ejemplo.</a:t>
             </a:r>
           </a:p>
         </p:txBody>
@@ -4356,14 +4444,83 @@
       </p:sp>
       <p:sp>
         <p:nvSpPr>
-          <p:cNvPr id="5" name="TextBox 4"/>
+          <p:cNvPr id="5" name="Rounded Rectangle 4"/>
+          <p:cNvSpPr/>
+          <p:nvPr/>
+        </p:nvSpPr>
+        <p:spPr>
+          <a:xfrm>
+            <a:off x="5797149" y="1343926"/>
+            <a:ext cx="6010497" cy="4837658"/>
+          </a:xfrm>
+          <a:prstGeom prst="roundRect">
+            <a:avLst>
+              <a:gd name="adj" fmla="val 4000"/>
+            </a:avLst>
+          </a:prstGeom>
+          <a:solidFill>
+            <a:srgbClr val="E8EEF4"/>
+          </a:solidFill>
+          <a:ln>
+            <a:noFill/>
+          </a:ln>
+        </p:spPr>
+        <p:style>
+          <a:lnRef idx="1">
+            <a:schemeClr val="accent1"/>
+          </a:lnRef>
+          <a:fillRef idx="3">
+            <a:schemeClr val="accent1"/>
+          </a:fillRef>
+          <a:effectRef idx="2">
+            <a:schemeClr val="accent1"/>
+          </a:effectRef>
+          <a:fontRef idx="minor">
+            <a:schemeClr val="lt1"/>
+          </a:fontRef>
+        </p:style>
+        <p:txBody>
+          <a:bodyPr rtlCol="0" anchor="ctr"/>
+          <a:lstStyle/>
+          <a:p>
+            <a:pPr algn="ctr"/>
+          </a:p>
+        </p:txBody>
+      </p:sp>
+      <p:pic>
+        <p:nvPicPr>
+          <p:cNvPr id="6" name="Picture 5" descr="ilus-checklist-paso1.png"/>
+          <p:cNvPicPr>
+            <a:picLocks noChangeAspect="1"/>
+          </p:cNvPicPr>
+          <p:nvPr/>
+        </p:nvPicPr>
+        <p:blipFill>
+          <a:blip r:embed="rId2"/>
+          <a:stretch>
+            <a:fillRect/>
+          </a:stretch>
+        </p:blipFill>
+        <p:spPr>
+          <a:xfrm>
+            <a:off x="5870301" y="1417078"/>
+            <a:ext cx="5864193" cy="4691354"/>
+          </a:xfrm>
+          <a:prstGeom prst="rect">
+            <a:avLst/>
+          </a:prstGeom>
+        </p:spPr>
+      </p:pic>
+      <p:sp>
+        <p:nvSpPr>
+          <p:cNvPr id="7" name="TextBox 6"/>
           <p:cNvSpPr txBox="1"/>
           <p:nvPr/>
         </p:nvSpPr>
         <p:spPr>
           <a:xfrm>
-            <a:off x="457200" y="1170432"/>
-            <a:ext cx="11277295" cy="5230368"/>
+            <a:off x="457200" y="1353312"/>
+            <a:ext cx="5093061" cy="5047488"/>
           </a:xfrm>
           <a:prstGeom prst="rect">
             <a:avLst/>
@@ -4443,7 +4600,7 @@
       </p:sp>
       <p:sp>
         <p:nvSpPr>
-          <p:cNvPr id="6" name="TextBox 5"/>
+          <p:cNvPr id="8" name="TextBox 7"/>
           <p:cNvSpPr txBox="1"/>
           <p:nvPr/>
         </p:nvSpPr>
@@ -6199,14 +6356,83 @@
       </p:sp>
       <p:sp>
         <p:nvSpPr>
-          <p:cNvPr id="5" name="TextBox 4"/>
+          <p:cNvPr id="5" name="Rounded Rectangle 4"/>
+          <p:cNvSpPr/>
+          <p:nvPr/>
+        </p:nvSpPr>
+        <p:spPr>
+          <a:xfrm>
+            <a:off x="5797149" y="1343926"/>
+            <a:ext cx="6010497" cy="4837658"/>
+          </a:xfrm>
+          <a:prstGeom prst="roundRect">
+            <a:avLst>
+              <a:gd name="adj" fmla="val 4000"/>
+            </a:avLst>
+          </a:prstGeom>
+          <a:solidFill>
+            <a:srgbClr val="E8EEF4"/>
+          </a:solidFill>
+          <a:ln>
+            <a:noFill/>
+          </a:ln>
+        </p:spPr>
+        <p:style>
+          <a:lnRef idx="1">
+            <a:schemeClr val="accent1"/>
+          </a:lnRef>
+          <a:fillRef idx="3">
+            <a:schemeClr val="accent1"/>
+          </a:fillRef>
+          <a:effectRef idx="2">
+            <a:schemeClr val="accent1"/>
+          </a:effectRef>
+          <a:fontRef idx="minor">
+            <a:schemeClr val="lt1"/>
+          </a:fontRef>
+        </p:style>
+        <p:txBody>
+          <a:bodyPr rtlCol="0" anchor="ctr"/>
+          <a:lstStyle/>
+          <a:p>
+            <a:pPr algn="ctr"/>
+          </a:p>
+        </p:txBody>
+      </p:sp>
+      <p:pic>
+        <p:nvPicPr>
+          <p:cNvPr id="6" name="Picture 5" descr="ilus-recibir-paso1.png"/>
+          <p:cNvPicPr>
+            <a:picLocks noChangeAspect="1"/>
+          </p:cNvPicPr>
+          <p:nvPr/>
+        </p:nvPicPr>
+        <p:blipFill>
+          <a:blip r:embed="rId2"/>
+          <a:stretch>
+            <a:fillRect/>
+          </a:stretch>
+        </p:blipFill>
+        <p:spPr>
+          <a:xfrm>
+            <a:off x="5870301" y="1417078"/>
+            <a:ext cx="5864193" cy="4691354"/>
+          </a:xfrm>
+          <a:prstGeom prst="rect">
+            <a:avLst/>
+          </a:prstGeom>
+        </p:spPr>
+      </p:pic>
+      <p:sp>
+        <p:nvSpPr>
+          <p:cNvPr id="7" name="TextBox 6"/>
           <p:cNvSpPr txBox="1"/>
           <p:nvPr/>
         </p:nvSpPr>
         <p:spPr>
           <a:xfrm>
-            <a:off x="457200" y="1170432"/>
-            <a:ext cx="11277295" cy="5230368"/>
+            <a:off x="457200" y="1353312"/>
+            <a:ext cx="5093061" cy="5047488"/>
           </a:xfrm>
           <a:prstGeom prst="rect">
             <a:avLst/>
@@ -6286,7 +6512,7 @@
       </p:sp>
       <p:sp>
         <p:nvSpPr>
-          <p:cNvPr id="6" name="TextBox 5"/>
+          <p:cNvPr id="8" name="TextBox 7"/>
           <p:cNvSpPr txBox="1"/>
           <p:nvPr/>
         </p:nvSpPr>
@@ -6467,14 +6693,83 @@
       </p:sp>
       <p:sp>
         <p:nvSpPr>
-          <p:cNvPr id="5" name="TextBox 4"/>
+          <p:cNvPr id="5" name="Rounded Rectangle 4"/>
+          <p:cNvSpPr/>
+          <p:nvPr/>
+        </p:nvSpPr>
+        <p:spPr>
+          <a:xfrm>
+            <a:off x="5797149" y="1343926"/>
+            <a:ext cx="6010497" cy="4837658"/>
+          </a:xfrm>
+          <a:prstGeom prst="roundRect">
+            <a:avLst>
+              <a:gd name="adj" fmla="val 4000"/>
+            </a:avLst>
+          </a:prstGeom>
+          <a:solidFill>
+            <a:srgbClr val="E8EEF4"/>
+          </a:solidFill>
+          <a:ln>
+            <a:noFill/>
+          </a:ln>
+        </p:spPr>
+        <p:style>
+          <a:lnRef idx="1">
+            <a:schemeClr val="accent1"/>
+          </a:lnRef>
+          <a:fillRef idx="3">
+            <a:schemeClr val="accent1"/>
+          </a:fillRef>
+          <a:effectRef idx="2">
+            <a:schemeClr val="accent1"/>
+          </a:effectRef>
+          <a:fontRef idx="minor">
+            <a:schemeClr val="lt1"/>
+          </a:fontRef>
+        </p:style>
+        <p:txBody>
+          <a:bodyPr rtlCol="0" anchor="ctr"/>
+          <a:lstStyle/>
+          <a:p>
+            <a:pPr algn="ctr"/>
+          </a:p>
+        </p:txBody>
+      </p:sp>
+      <p:pic>
+        <p:nvPicPr>
+          <p:cNvPr id="6" name="Picture 5" descr="ilus-demo-paso1.png"/>
+          <p:cNvPicPr>
+            <a:picLocks noChangeAspect="1"/>
+          </p:cNvPicPr>
+          <p:nvPr/>
+        </p:nvPicPr>
+        <p:blipFill>
+          <a:blip r:embed="rId2"/>
+          <a:stretch>
+            <a:fillRect/>
+          </a:stretch>
+        </p:blipFill>
+        <p:spPr>
+          <a:xfrm>
+            <a:off x="5870301" y="1417078"/>
+            <a:ext cx="5864193" cy="4691354"/>
+          </a:xfrm>
+          <a:prstGeom prst="rect">
+            <a:avLst/>
+          </a:prstGeom>
+        </p:spPr>
+      </p:pic>
+      <p:sp>
+        <p:nvSpPr>
+          <p:cNvPr id="7" name="TextBox 6"/>
           <p:cNvSpPr txBox="1"/>
           <p:nvPr/>
         </p:nvSpPr>
         <p:spPr>
           <a:xfrm>
-            <a:off x="457200" y="1170432"/>
-            <a:ext cx="11277295" cy="5230368"/>
+            <a:off x="457200" y="1353312"/>
+            <a:ext cx="5093061" cy="5047488"/>
           </a:xfrm>
           <a:prstGeom prst="rect">
             <a:avLst/>
@@ -6551,7 +6846,7 @@
                 </a:solidFill>
                 <a:latin typeface="Calibri"/>
               </a:rPr>
-              <a:t> El docente proyecta ClinicaParaRevisar.java, lo ejecuta en vivo, aplica el checklist delante del grupo y reescribe dos comentarios mal formulados del tipo 'este código es un desastre' en retroalimentación accionable.</a:t>
+              <a:t> El docente proyecta ClinicaParaRevisar.java, lo ejecuta en vivo, aplica el checklist delante del grupo y reescribe dos comentarios mal…</a:t>
             </a:r>
           </a:p>
           <a:p>
@@ -6574,7 +6869,7 @@
       </p:sp>
       <p:sp>
         <p:nvSpPr>
-          <p:cNvPr id="6" name="TextBox 5"/>
+          <p:cNvPr id="8" name="TextBox 7"/>
           <p:cNvSpPr txBox="1"/>
           <p:nvPr/>
         </p:nvSpPr>
@@ -8152,14 +8447,83 @@
       </p:sp>
       <p:sp>
         <p:nvSpPr>
-          <p:cNvPr id="5" name="TextBox 4"/>
+          <p:cNvPr id="5" name="Rounded Rectangle 4"/>
+          <p:cNvSpPr/>
+          <p:nvPr/>
+        </p:nvSpPr>
+        <p:spPr>
+          <a:xfrm>
+            <a:off x="5797149" y="1343926"/>
+            <a:ext cx="6010497" cy="4837658"/>
+          </a:xfrm>
+          <a:prstGeom prst="roundRect">
+            <a:avLst>
+              <a:gd name="adj" fmla="val 4000"/>
+            </a:avLst>
+          </a:prstGeom>
+          <a:solidFill>
+            <a:srgbClr val="E8EEF4"/>
+          </a:solidFill>
+          <a:ln>
+            <a:noFill/>
+          </a:ln>
+        </p:spPr>
+        <p:style>
+          <a:lnRef idx="1">
+            <a:schemeClr val="accent1"/>
+          </a:lnRef>
+          <a:fillRef idx="3">
+            <a:schemeClr val="accent1"/>
+          </a:fillRef>
+          <a:effectRef idx="2">
+            <a:schemeClr val="accent1"/>
+          </a:effectRef>
+          <a:fontRef idx="minor">
+            <a:schemeClr val="lt1"/>
+          </a:fontRef>
+        </p:style>
+        <p:txBody>
+          <a:bodyPr rtlCol="0" anchor="ctr"/>
+          <a:lstStyle/>
+          <a:p>
+            <a:pPr algn="ctr"/>
+          </a:p>
+        </p:txBody>
+      </p:sp>
+      <p:pic>
+        <p:nvPicPr>
+          <p:cNvPr id="6" name="Picture 5" descr="ilus-que-es-revision-paso1.png"/>
+          <p:cNvPicPr>
+            <a:picLocks noChangeAspect="1"/>
+          </p:cNvPicPr>
+          <p:nvPr/>
+        </p:nvPicPr>
+        <p:blipFill>
+          <a:blip r:embed="rId2"/>
+          <a:stretch>
+            <a:fillRect/>
+          </a:stretch>
+        </p:blipFill>
+        <p:spPr>
+          <a:xfrm>
+            <a:off x="5870301" y="1417078"/>
+            <a:ext cx="5864193" cy="4691354"/>
+          </a:xfrm>
+          <a:prstGeom prst="rect">
+            <a:avLst/>
+          </a:prstGeom>
+        </p:spPr>
+      </p:pic>
+      <p:sp>
+        <p:nvSpPr>
+          <p:cNvPr id="7" name="TextBox 6"/>
           <p:cNvSpPr txBox="1"/>
           <p:nvPr/>
         </p:nvSpPr>
         <p:spPr>
           <a:xfrm>
-            <a:off x="457200" y="1170432"/>
-            <a:ext cx="11277295" cy="5230368"/>
+            <a:off x="457200" y="1353312"/>
+            <a:ext cx="5093061" cy="5047488"/>
           </a:xfrm>
           <a:prstGeom prst="rect">
             <a:avLst/>
@@ -8239,7 +8603,7 @@
       </p:sp>
       <p:sp>
         <p:nvSpPr>
-          <p:cNvPr id="6" name="TextBox 5"/>
+          <p:cNvPr id="8" name="TextBox 7"/>
           <p:cNvSpPr txBox="1"/>
           <p:nvPr/>
         </p:nvSpPr>

--- a/Programacion II/Clases/Clase 11 - Revision de codigo cruzada/Presentacion.pptx
+++ b/Programacion II/Clases/Clase 11 - Revision de codigo cruzada/Presentacion.pptx
@@ -603,7 +603,7 @@
           <a:p/>
           <a:p>
             <a:r>
-              <a:t>Demo: El docente proyecta ClinicaParaRevisar.java, lo ejecuta en vivo, aplica el checklist delante del grupo y reescribe dos comentarios mal formulados del tipo 'este código es un desastre' en retroalimentación accionable.</a:t>
+              <a:t>Demo: El docente proyecta ClinicaParaRevisar.java, lo ejecuta en vivo, aplica el checklist delante del grupo y reescribe dos comentarios mal formulados del tipo 'este código es un desastre' en retroalimentación útil.</a:t>
             </a:r>
           </a:p>
           <a:p/>
@@ -803,7 +803,7 @@
           <a:p/>
           <a:p>
             <a:r>
-              <a:t>Revisar no es leer de arriba a abajo a ver qué salta: se revisa por capas y en orden de importancia, porque el tiempo es finito y el detalle cosmético es el que más tienta. Primera capa: ¿el proyecto abre y hace lo que dice hacer? Se ejecuta antes de opinar. Segunda capa: corrección y casos borde, que en el sistema de la clinica son siempre los mismos y hay que buscarlos a propósito: edad negativa o con letras, campos vacíos, ID repetido, buscar un ID que no existe, cerrar sin haber registrado nada, archivo mascotas.csv inexistente o con una línea dañada. Tercera capa: diseño y responsabilidades, es decir si hay clases de verdad o solo arreglos de String, si los atributos son privados, y si la ventana está haciendo de repositorio escribiendo archivos por su cuenta. Cuarta capa: manejo de errores, con el catch vacío como sospechoso número uno. Quinta capa: legibilidad, o sea nombres, métodos largos y duplicación. Y solo al final, la sexta: formato e indentación, que es la que menos vale y la que todo el mundo comenta primero. Si un informe de revisión del sistema de la clinica tiene ocho comentarios de espacios y ninguno sobre el NullPointerException al buscar un ID inexistente, esa revisión no sirvió.</a:t>
+              <a:t>Revisar no es leer de arriba a abajo a ver qué salta: se revisa por capas y en orden de importancia, porque el tiempo es finito y el detalle de forma es el que más tienta. Primera capa: ¿el proyecto abre y hace lo que dice hacer? Se ejecuta antes de opinar. Segunda capa: corrección y casos borde, que en el sistema de la clinica son siempre los mismos y hay que buscarlos a propósito: edad negativa o con letras, campos vacíos, ID repetido, buscar un ID que no existe, cerrar sin haber registrado nada, archivo mascotas.csv inexistente o con una línea dañada. Tercera capa: diseño y responsabilidades, es decir si hay clases de verdad o solo arreglos de String, si los atributos son privados, y si la ventana está haciendo de repositorio escribiendo archivos por su cuenta. Cuarta capa: manejo de errores, con el catch vacío como sospechoso número uno. Quinta capa: legibilidad, o sea nombres, métodos largos y duplicación. Y solo al final, la sexta: formato e indentación, que es la que menos vale y la que todo el mundo comenta primero. Si un informe de revisión del sistema de la clinica tiene ocho comentarios de espacios y ninguno sobre el NullPointerException al buscar un ID inexistente, esa revisión no sirvió.</a:t>
             </a:r>
           </a:p>
         </p:txBody>
